--- a/Presentation 1 to 8.pptx
+++ b/Presentation 1 to 8.pptx
@@ -637,7 +637,7 @@
           <a:p>
             <a:fld id="{FD74747F-D400-4A90-89D9-3448D815F5DF}" type="datetimeFigureOut">
               <a:rPr lang="en-IN" smtClean="0"/>
-              <a:t>06-03-2026</a:t>
+              <a:t>20-03-2026</a:t>
             </a:fld>
             <a:endParaRPr lang="en-IN"/>
           </a:p>
@@ -933,7 +933,7 @@
           <a:p>
             <a:fld id="{FD74747F-D400-4A90-89D9-3448D815F5DF}" type="datetimeFigureOut">
               <a:rPr lang="en-IN" smtClean="0"/>
-              <a:t>06-03-2026</a:t>
+              <a:t>20-03-2026</a:t>
             </a:fld>
             <a:endParaRPr lang="en-IN"/>
           </a:p>
@@ -1181,7 +1181,7 @@
           <a:p>
             <a:fld id="{FD74747F-D400-4A90-89D9-3448D815F5DF}" type="datetimeFigureOut">
               <a:rPr lang="en-IN" smtClean="0"/>
-              <a:t>06-03-2026</a:t>
+              <a:t>20-03-2026</a:t>
             </a:fld>
             <a:endParaRPr lang="en-IN"/>
           </a:p>
@@ -1721,7 +1721,7 @@
           <a:p>
             <a:fld id="{FD74747F-D400-4A90-89D9-3448D815F5DF}" type="datetimeFigureOut">
               <a:rPr lang="en-IN" smtClean="0"/>
-              <a:t>06-03-2026</a:t>
+              <a:t>20-03-2026</a:t>
             </a:fld>
             <a:endParaRPr lang="en-IN"/>
           </a:p>
@@ -1969,7 +1969,7 @@
           <a:p>
             <a:fld id="{FD74747F-D400-4A90-89D9-3448D815F5DF}" type="datetimeFigureOut">
               <a:rPr lang="en-IN" smtClean="0"/>
-              <a:t>06-03-2026</a:t>
+              <a:t>20-03-2026</a:t>
             </a:fld>
             <a:endParaRPr lang="en-IN"/>
           </a:p>
@@ -2501,7 +2501,7 @@
           <a:p>
             <a:fld id="{FD74747F-D400-4A90-89D9-3448D815F5DF}" type="datetimeFigureOut">
               <a:rPr lang="en-IN" smtClean="0"/>
-              <a:t>06-03-2026</a:t>
+              <a:t>20-03-2026</a:t>
             </a:fld>
             <a:endParaRPr lang="en-IN"/>
           </a:p>
@@ -2798,7 +2798,7 @@
           <a:p>
             <a:fld id="{FD74747F-D400-4A90-89D9-3448D815F5DF}" type="datetimeFigureOut">
               <a:rPr lang="en-IN" smtClean="0"/>
-              <a:t>06-03-2026</a:t>
+              <a:t>20-03-2026</a:t>
             </a:fld>
             <a:endParaRPr lang="en-IN"/>
           </a:p>
@@ -2972,7 +2972,7 @@
           <a:p>
             <a:fld id="{FD74747F-D400-4A90-89D9-3448D815F5DF}" type="datetimeFigureOut">
               <a:rPr lang="en-IN" smtClean="0"/>
-              <a:t>06-03-2026</a:t>
+              <a:t>20-03-2026</a:t>
             </a:fld>
             <a:endParaRPr lang="en-IN"/>
           </a:p>
@@ -3152,7 +3152,7 @@
           <a:p>
             <a:fld id="{FD74747F-D400-4A90-89D9-3448D815F5DF}" type="datetimeFigureOut">
               <a:rPr lang="en-IN" smtClean="0"/>
-              <a:t>06-03-2026</a:t>
+              <a:t>20-03-2026</a:t>
             </a:fld>
             <a:endParaRPr lang="en-IN"/>
           </a:p>
@@ -3322,7 +3322,7 @@
           <a:p>
             <a:fld id="{FD74747F-D400-4A90-89D9-3448D815F5DF}" type="datetimeFigureOut">
               <a:rPr lang="en-IN" smtClean="0"/>
-              <a:t>06-03-2026</a:t>
+              <a:t>20-03-2026</a:t>
             </a:fld>
             <a:endParaRPr lang="en-IN"/>
           </a:p>
@@ -3573,7 +3573,7 @@
           <a:p>
             <a:fld id="{FD74747F-D400-4A90-89D9-3448D815F5DF}" type="datetimeFigureOut">
               <a:rPr lang="en-IN" smtClean="0"/>
-              <a:t>06-03-2026</a:t>
+              <a:t>20-03-2026</a:t>
             </a:fld>
             <a:endParaRPr lang="en-IN"/>
           </a:p>
@@ -3870,7 +3870,7 @@
           <a:p>
             <a:fld id="{FD74747F-D400-4A90-89D9-3448D815F5DF}" type="datetimeFigureOut">
               <a:rPr lang="en-IN" smtClean="0"/>
-              <a:t>06-03-2026</a:t>
+              <a:t>20-03-2026</a:t>
             </a:fld>
             <a:endParaRPr lang="en-IN"/>
           </a:p>
@@ -4312,7 +4312,7 @@
           <a:p>
             <a:fld id="{FD74747F-D400-4A90-89D9-3448D815F5DF}" type="datetimeFigureOut">
               <a:rPr lang="en-IN" smtClean="0"/>
-              <a:t>06-03-2026</a:t>
+              <a:t>20-03-2026</a:t>
             </a:fld>
             <a:endParaRPr lang="en-IN"/>
           </a:p>
@@ -4430,7 +4430,7 @@
           <a:p>
             <a:fld id="{FD74747F-D400-4A90-89D9-3448D815F5DF}" type="datetimeFigureOut">
               <a:rPr lang="en-IN" smtClean="0"/>
-              <a:t>06-03-2026</a:t>
+              <a:t>20-03-2026</a:t>
             </a:fld>
             <a:endParaRPr lang="en-IN"/>
           </a:p>
@@ -4525,7 +4525,7 @@
           <a:p>
             <a:fld id="{FD74747F-D400-4A90-89D9-3448D815F5DF}" type="datetimeFigureOut">
               <a:rPr lang="en-IN" smtClean="0"/>
-              <a:t>06-03-2026</a:t>
+              <a:t>20-03-2026</a:t>
             </a:fld>
             <a:endParaRPr lang="en-IN"/>
           </a:p>
@@ -4808,7 +4808,7 @@
           <a:p>
             <a:fld id="{FD74747F-D400-4A90-89D9-3448D815F5DF}" type="datetimeFigureOut">
               <a:rPr lang="en-IN" smtClean="0"/>
-              <a:t>06-03-2026</a:t>
+              <a:t>20-03-2026</a:t>
             </a:fld>
             <a:endParaRPr lang="en-IN"/>
           </a:p>
@@ -5099,7 +5099,7 @@
           <a:p>
             <a:fld id="{FD74747F-D400-4A90-89D9-3448D815F5DF}" type="datetimeFigureOut">
               <a:rPr lang="en-IN" smtClean="0"/>
-              <a:t>06-03-2026</a:t>
+              <a:t>20-03-2026</a:t>
             </a:fld>
             <a:endParaRPr lang="en-IN"/>
           </a:p>
@@ -5629,7 +5629,7 @@
           <a:p>
             <a:fld id="{FD74747F-D400-4A90-89D9-3448D815F5DF}" type="datetimeFigureOut">
               <a:rPr lang="en-IN" smtClean="0"/>
-              <a:t>06-03-2026</a:t>
+              <a:t>20-03-2026</a:t>
             </a:fld>
             <a:endParaRPr lang="en-IN"/>
           </a:p>
@@ -9455,14 +9455,14 @@
       </p:grpSpPr>
       <p:sp>
         <p:nvSpPr>
-          <p:cNvPr id="2" name="TextBox 1"/>
+          <p:cNvPr id="4" name="TextBox 3"/>
           <p:cNvSpPr txBox="1"/>
           <p:nvPr/>
         </p:nvSpPr>
         <p:spPr>
           <a:xfrm>
-            <a:off x="2716696" y="1298713"/>
-            <a:ext cx="8388626" cy="5262979"/>
+            <a:off x="2014330" y="357809"/>
+            <a:ext cx="2464904" cy="400110"/>
           </a:xfrm>
           <a:prstGeom prst="rect">
             <a:avLst/>
@@ -9475,171 +9475,14 @@
           </a:bodyPr>
           <a:lstStyle/>
           <a:p>
-            <a:pPr marL="342900" indent="-342900">
-              <a:buFont typeface="Arial" panose="020B0604020202020204" pitchFamily="34" charset="0"/>
-              <a:buChar char="•"/>
-            </a:pPr>
-            <a:r>
-              <a:rPr lang="en-US" sz="2400" dirty="0" smtClean="0">
-                <a:latin typeface="Times New Roman" panose="02020603050405020304" pitchFamily="18" charset="0"/>
-                <a:cs typeface="Times New Roman" panose="02020603050405020304" pitchFamily="18" charset="0"/>
-              </a:rPr>
-              <a:t>To measure classification performance, we use different evaluation metrics.</a:t>
-            </a:r>
-          </a:p>
-          <a:p>
-            <a:pPr marL="342900" indent="-342900">
-              <a:buFont typeface="Arial" panose="020B0604020202020204" pitchFamily="34" charset="0"/>
-              <a:buChar char="•"/>
-            </a:pPr>
-            <a:r>
-              <a:rPr lang="en-US" sz="2400" dirty="0" smtClean="0">
-                <a:latin typeface="Times New Roman" panose="02020603050405020304" pitchFamily="18" charset="0"/>
-                <a:cs typeface="Times New Roman" panose="02020603050405020304" pitchFamily="18" charset="0"/>
-              </a:rPr>
-              <a:t>The </a:t>
-            </a:r>
-            <a:r>
-              <a:rPr lang="en-US" sz="2400" b="1" dirty="0" smtClean="0">
-                <a:latin typeface="Times New Roman" panose="02020603050405020304" pitchFamily="18" charset="0"/>
-                <a:cs typeface="Times New Roman" panose="02020603050405020304" pitchFamily="18" charset="0"/>
-              </a:rPr>
-              <a:t>Confusion Matrix</a:t>
-            </a:r>
-            <a:r>
-              <a:rPr lang="en-US" sz="2400" dirty="0" smtClean="0">
-                <a:latin typeface="Times New Roman" panose="02020603050405020304" pitchFamily="18" charset="0"/>
-                <a:cs typeface="Times New Roman" panose="02020603050405020304" pitchFamily="18" charset="0"/>
-              </a:rPr>
-              <a:t> shows:</a:t>
-            </a:r>
-          </a:p>
-          <a:p>
-            <a:r>
-              <a:rPr lang="en-US" sz="2400" dirty="0" smtClean="0">
-                <a:latin typeface="Times New Roman" panose="02020603050405020304" pitchFamily="18" charset="0"/>
-                <a:cs typeface="Times New Roman" panose="02020603050405020304" pitchFamily="18" charset="0"/>
-              </a:rPr>
-              <a:t>True Positive (TP)</a:t>
-            </a:r>
-          </a:p>
-          <a:p>
-            <a:r>
-              <a:rPr lang="en-US" sz="2400" dirty="0" smtClean="0">
-                <a:latin typeface="Times New Roman" panose="02020603050405020304" pitchFamily="18" charset="0"/>
-                <a:cs typeface="Times New Roman" panose="02020603050405020304" pitchFamily="18" charset="0"/>
-              </a:rPr>
-              <a:t>True Negative (TN)</a:t>
-            </a:r>
-          </a:p>
-          <a:p>
-            <a:r>
-              <a:rPr lang="en-US" sz="2400" dirty="0" smtClean="0">
-                <a:latin typeface="Times New Roman" panose="02020603050405020304" pitchFamily="18" charset="0"/>
-                <a:cs typeface="Times New Roman" panose="02020603050405020304" pitchFamily="18" charset="0"/>
-              </a:rPr>
-              <a:t>False Positive (FP)</a:t>
-            </a:r>
-          </a:p>
-          <a:p>
-            <a:r>
-              <a:rPr lang="en-US" sz="2400" dirty="0" smtClean="0">
-                <a:latin typeface="Times New Roman" panose="02020603050405020304" pitchFamily="18" charset="0"/>
-                <a:cs typeface="Times New Roman" panose="02020603050405020304" pitchFamily="18" charset="0"/>
-              </a:rPr>
-              <a:t>False Negative (FN)</a:t>
-            </a:r>
-          </a:p>
-          <a:p>
-            <a:pPr marL="342900" indent="-342900">
-              <a:buFont typeface="Arial" panose="020B0604020202020204" pitchFamily="34" charset="0"/>
-              <a:buChar char="•"/>
-            </a:pPr>
-            <a:r>
-              <a:rPr lang="en-US" sz="2400" dirty="0" smtClean="0">
-                <a:latin typeface="Times New Roman" panose="02020603050405020304" pitchFamily="18" charset="0"/>
-                <a:cs typeface="Times New Roman" panose="02020603050405020304" pitchFamily="18" charset="0"/>
-              </a:rPr>
-              <a:t>Key metrics include:</a:t>
-            </a:r>
-          </a:p>
-          <a:p>
-            <a:r>
-              <a:rPr lang="en-US" sz="2400" b="1" dirty="0" smtClean="0">
-                <a:latin typeface="Times New Roman" panose="02020603050405020304" pitchFamily="18" charset="0"/>
-                <a:cs typeface="Times New Roman" panose="02020603050405020304" pitchFamily="18" charset="0"/>
-              </a:rPr>
-              <a:t>Accuracy</a:t>
-            </a:r>
-            <a:r>
-              <a:rPr lang="en-US" sz="2400" dirty="0" smtClean="0">
-                <a:latin typeface="Times New Roman" panose="02020603050405020304" pitchFamily="18" charset="0"/>
-                <a:cs typeface="Times New Roman" panose="02020603050405020304" pitchFamily="18" charset="0"/>
-              </a:rPr>
-              <a:t> – Overall correct predictions</a:t>
-            </a:r>
-          </a:p>
-          <a:p>
-            <a:r>
-              <a:rPr lang="en-US" sz="2400" b="1" dirty="0" smtClean="0">
-                <a:latin typeface="Times New Roman" panose="02020603050405020304" pitchFamily="18" charset="0"/>
-                <a:cs typeface="Times New Roman" panose="02020603050405020304" pitchFamily="18" charset="0"/>
-              </a:rPr>
-              <a:t>Precision</a:t>
-            </a:r>
-            <a:r>
-              <a:rPr lang="en-US" sz="2400" dirty="0" smtClean="0">
-                <a:latin typeface="Times New Roman" panose="02020603050405020304" pitchFamily="18" charset="0"/>
-                <a:cs typeface="Times New Roman" panose="02020603050405020304" pitchFamily="18" charset="0"/>
-              </a:rPr>
-              <a:t> – How many predicted positives are actually correct</a:t>
-            </a:r>
-          </a:p>
-          <a:p>
-            <a:r>
-              <a:rPr lang="en-US" sz="2400" b="1" dirty="0" smtClean="0">
-                <a:latin typeface="Times New Roman" panose="02020603050405020304" pitchFamily="18" charset="0"/>
-                <a:cs typeface="Times New Roman" panose="02020603050405020304" pitchFamily="18" charset="0"/>
-              </a:rPr>
-              <a:t>Recall</a:t>
-            </a:r>
-            <a:r>
-              <a:rPr lang="en-US" sz="2400" dirty="0" smtClean="0">
-                <a:latin typeface="Times New Roman" panose="02020603050405020304" pitchFamily="18" charset="0"/>
-                <a:cs typeface="Times New Roman" panose="02020603050405020304" pitchFamily="18" charset="0"/>
-              </a:rPr>
-              <a:t> – How many actual positives are correctly identified</a:t>
-            </a:r>
-          </a:p>
-          <a:p>
-            <a:r>
-              <a:rPr lang="en-US" sz="2400" b="1" dirty="0" smtClean="0">
-                <a:latin typeface="Times New Roman" panose="02020603050405020304" pitchFamily="18" charset="0"/>
-                <a:cs typeface="Times New Roman" panose="02020603050405020304" pitchFamily="18" charset="0"/>
-              </a:rPr>
-              <a:t>F1-Score</a:t>
-            </a:r>
-            <a:r>
-              <a:rPr lang="en-US" sz="2400" dirty="0" smtClean="0">
-                <a:latin typeface="Times New Roman" panose="02020603050405020304" pitchFamily="18" charset="0"/>
-                <a:cs typeface="Times New Roman" panose="02020603050405020304" pitchFamily="18" charset="0"/>
-              </a:rPr>
-              <a:t> – Balance between Precision and Recall</a:t>
-            </a:r>
-          </a:p>
-          <a:p>
-            <a:pPr marL="342900" indent="-342900">
-              <a:buFont typeface="Arial" panose="020B0604020202020204" pitchFamily="34" charset="0"/>
-              <a:buChar char="•"/>
-            </a:pPr>
-            <a:r>
-              <a:rPr lang="en-US" sz="2400" dirty="0" smtClean="0">
-                <a:latin typeface="Times New Roman" panose="02020603050405020304" pitchFamily="18" charset="0"/>
-                <a:cs typeface="Times New Roman" panose="02020603050405020304" pitchFamily="18" charset="0"/>
-              </a:rPr>
-              <a:t>These metrics help us understand whether the model is reliable and well-balanced.</a:t>
-            </a:r>
-            <a:endParaRPr lang="en-US" sz="2400" dirty="0">
+            <a:r>
+              <a:rPr lang="en-IN" sz="2000" b="1" dirty="0" smtClean="0">
+                <a:latin typeface="Times New Roman" panose="02020603050405020304" pitchFamily="18" charset="0"/>
+                <a:cs typeface="Times New Roman" panose="02020603050405020304" pitchFamily="18" charset="0"/>
+              </a:rPr>
+              <a:t>Week 9</a:t>
+            </a:r>
+            <a:endParaRPr lang="en-IN" sz="2000" b="1" dirty="0">
               <a:latin typeface="Times New Roman" panose="02020603050405020304" pitchFamily="18" charset="0"/>
               <a:cs typeface="Times New Roman" panose="02020603050405020304" pitchFamily="18" charset="0"/>
             </a:endParaRPr>
@@ -9648,14 +9491,14 @@
       </p:sp>
       <p:sp>
         <p:nvSpPr>
-          <p:cNvPr id="3" name="TextBox 2"/>
+          <p:cNvPr id="5" name="TextBox 4"/>
           <p:cNvSpPr txBox="1"/>
           <p:nvPr/>
         </p:nvSpPr>
         <p:spPr>
-          <a:xfrm>
-            <a:off x="3631096" y="463826"/>
-            <a:ext cx="6400800" cy="954107"/>
+          <a:xfrm rot="10800000" flipH="1" flipV="1">
+            <a:off x="2014330" y="1398103"/>
+            <a:ext cx="6832160" cy="369332"/>
           </a:xfrm>
           <a:prstGeom prst="rect">
             <a:avLst/>
@@ -9669,18 +9512,10 @@
           <a:lstStyle/>
           <a:p>
             <a:r>
-              <a:rPr lang="en-US" sz="2800" b="1" dirty="0">
-                <a:latin typeface="Times New Roman" panose="02020603050405020304" pitchFamily="18" charset="0"/>
-                <a:cs typeface="Times New Roman" panose="02020603050405020304" pitchFamily="18" charset="0"/>
-              </a:rPr>
-              <a:t>Classification Evaluation Metrics</a:t>
-            </a:r>
-          </a:p>
-          <a:p>
-            <a:endParaRPr lang="en-IN" sz="2800" dirty="0">
-              <a:latin typeface="Times New Roman" panose="02020603050405020304" pitchFamily="18" charset="0"/>
-              <a:cs typeface="Times New Roman" panose="02020603050405020304" pitchFamily="18" charset="0"/>
-            </a:endParaRPr>
+              <a:rPr lang="en-IN" dirty="0" smtClean="0"/>
+              <a:t>f</a:t>
+            </a:r>
+            <a:endParaRPr lang="en-IN" dirty="0"/>
           </a:p>
         </p:txBody>
       </p:sp>

--- a/Presentation 1 to 8.pptx
+++ b/Presentation 1 to 8.pptx
@@ -5,30 +5,37 @@
     <p:sldMasterId id="2147483714" r:id="rId1"/>
   </p:sldMasterIdLst>
   <p:sldIdLst>
-    <p:sldId id="258" r:id="rId2"/>
-    <p:sldId id="259" r:id="rId3"/>
-    <p:sldId id="260" r:id="rId4"/>
-    <p:sldId id="261" r:id="rId5"/>
-    <p:sldId id="262" r:id="rId6"/>
-    <p:sldId id="263" r:id="rId7"/>
-    <p:sldId id="264" r:id="rId8"/>
-    <p:sldId id="265" r:id="rId9"/>
-    <p:sldId id="266" r:id="rId10"/>
-    <p:sldId id="267" r:id="rId11"/>
-    <p:sldId id="268" r:id="rId12"/>
-    <p:sldId id="269" r:id="rId13"/>
-    <p:sldId id="270" r:id="rId14"/>
-    <p:sldId id="271" r:id="rId15"/>
-    <p:sldId id="272" r:id="rId16"/>
-    <p:sldId id="273" r:id="rId17"/>
-    <p:sldId id="274" r:id="rId18"/>
-    <p:sldId id="275" r:id="rId19"/>
-    <p:sldId id="276" r:id="rId20"/>
-    <p:sldId id="277" r:id="rId21"/>
-    <p:sldId id="278" r:id="rId22"/>
-    <p:sldId id="279" r:id="rId23"/>
-    <p:sldId id="280" r:id="rId24"/>
-    <p:sldId id="281" r:id="rId25"/>
+    <p:sldId id="259" r:id="rId2"/>
+    <p:sldId id="260" r:id="rId3"/>
+    <p:sldId id="261" r:id="rId4"/>
+    <p:sldId id="263" r:id="rId5"/>
+    <p:sldId id="264" r:id="rId6"/>
+    <p:sldId id="265" r:id="rId7"/>
+    <p:sldId id="266" r:id="rId8"/>
+    <p:sldId id="267" r:id="rId9"/>
+    <p:sldId id="268" r:id="rId10"/>
+    <p:sldId id="269" r:id="rId11"/>
+    <p:sldId id="270" r:id="rId12"/>
+    <p:sldId id="271" r:id="rId13"/>
+    <p:sldId id="272" r:id="rId14"/>
+    <p:sldId id="273" r:id="rId15"/>
+    <p:sldId id="274" r:id="rId16"/>
+    <p:sldId id="275" r:id="rId17"/>
+    <p:sldId id="276" r:id="rId18"/>
+    <p:sldId id="277" r:id="rId19"/>
+    <p:sldId id="278" r:id="rId20"/>
+    <p:sldId id="279" r:id="rId21"/>
+    <p:sldId id="280" r:id="rId22"/>
+    <p:sldId id="281" r:id="rId23"/>
+    <p:sldId id="282" r:id="rId24"/>
+    <p:sldId id="283" r:id="rId25"/>
+    <p:sldId id="284" r:id="rId26"/>
+    <p:sldId id="285" r:id="rId27"/>
+    <p:sldId id="286" r:id="rId28"/>
+    <p:sldId id="287" r:id="rId29"/>
+    <p:sldId id="288" r:id="rId30"/>
+    <p:sldId id="289" r:id="rId31"/>
+    <p:sldId id="290" r:id="rId32"/>
   </p:sldIdLst>
   <p:sldSz cx="12192000" cy="6858000"/>
   <p:notesSz cx="6858000" cy="9144000"/>
@@ -637,7 +644,7 @@
           <a:p>
             <a:fld id="{FD74747F-D400-4A90-89D9-3448D815F5DF}" type="datetimeFigureOut">
               <a:rPr lang="en-IN" smtClean="0"/>
-              <a:t>20-03-2026</a:t>
+              <a:t>07-04-2026</a:t>
             </a:fld>
             <a:endParaRPr lang="en-IN"/>
           </a:p>
@@ -933,7 +940,7 @@
           <a:p>
             <a:fld id="{FD74747F-D400-4A90-89D9-3448D815F5DF}" type="datetimeFigureOut">
               <a:rPr lang="en-IN" smtClean="0"/>
-              <a:t>20-03-2026</a:t>
+              <a:t>07-04-2026</a:t>
             </a:fld>
             <a:endParaRPr lang="en-IN"/>
           </a:p>
@@ -1181,7 +1188,7 @@
           <a:p>
             <a:fld id="{FD74747F-D400-4A90-89D9-3448D815F5DF}" type="datetimeFigureOut">
               <a:rPr lang="en-IN" smtClean="0"/>
-              <a:t>20-03-2026</a:t>
+              <a:t>07-04-2026</a:t>
             </a:fld>
             <a:endParaRPr lang="en-IN"/>
           </a:p>
@@ -1721,7 +1728,7 @@
           <a:p>
             <a:fld id="{FD74747F-D400-4A90-89D9-3448D815F5DF}" type="datetimeFigureOut">
               <a:rPr lang="en-IN" smtClean="0"/>
-              <a:t>20-03-2026</a:t>
+              <a:t>07-04-2026</a:t>
             </a:fld>
             <a:endParaRPr lang="en-IN"/>
           </a:p>
@@ -1969,7 +1976,7 @@
           <a:p>
             <a:fld id="{FD74747F-D400-4A90-89D9-3448D815F5DF}" type="datetimeFigureOut">
               <a:rPr lang="en-IN" smtClean="0"/>
-              <a:t>20-03-2026</a:t>
+              <a:t>07-04-2026</a:t>
             </a:fld>
             <a:endParaRPr lang="en-IN"/>
           </a:p>
@@ -2501,7 +2508,7 @@
           <a:p>
             <a:fld id="{FD74747F-D400-4A90-89D9-3448D815F5DF}" type="datetimeFigureOut">
               <a:rPr lang="en-IN" smtClean="0"/>
-              <a:t>20-03-2026</a:t>
+              <a:t>07-04-2026</a:t>
             </a:fld>
             <a:endParaRPr lang="en-IN"/>
           </a:p>
@@ -2798,7 +2805,7 @@
           <a:p>
             <a:fld id="{FD74747F-D400-4A90-89D9-3448D815F5DF}" type="datetimeFigureOut">
               <a:rPr lang="en-IN" smtClean="0"/>
-              <a:t>20-03-2026</a:t>
+              <a:t>07-04-2026</a:t>
             </a:fld>
             <a:endParaRPr lang="en-IN"/>
           </a:p>
@@ -2972,7 +2979,7 @@
           <a:p>
             <a:fld id="{FD74747F-D400-4A90-89D9-3448D815F5DF}" type="datetimeFigureOut">
               <a:rPr lang="en-IN" smtClean="0"/>
-              <a:t>20-03-2026</a:t>
+              <a:t>07-04-2026</a:t>
             </a:fld>
             <a:endParaRPr lang="en-IN"/>
           </a:p>
@@ -3152,7 +3159,7 @@
           <a:p>
             <a:fld id="{FD74747F-D400-4A90-89D9-3448D815F5DF}" type="datetimeFigureOut">
               <a:rPr lang="en-IN" smtClean="0"/>
-              <a:t>20-03-2026</a:t>
+              <a:t>07-04-2026</a:t>
             </a:fld>
             <a:endParaRPr lang="en-IN"/>
           </a:p>
@@ -3322,7 +3329,7 @@
           <a:p>
             <a:fld id="{FD74747F-D400-4A90-89D9-3448D815F5DF}" type="datetimeFigureOut">
               <a:rPr lang="en-IN" smtClean="0"/>
-              <a:t>20-03-2026</a:t>
+              <a:t>07-04-2026</a:t>
             </a:fld>
             <a:endParaRPr lang="en-IN"/>
           </a:p>
@@ -3573,7 +3580,7 @@
           <a:p>
             <a:fld id="{FD74747F-D400-4A90-89D9-3448D815F5DF}" type="datetimeFigureOut">
               <a:rPr lang="en-IN" smtClean="0"/>
-              <a:t>20-03-2026</a:t>
+              <a:t>07-04-2026</a:t>
             </a:fld>
             <a:endParaRPr lang="en-IN"/>
           </a:p>
@@ -3870,7 +3877,7 @@
           <a:p>
             <a:fld id="{FD74747F-D400-4A90-89D9-3448D815F5DF}" type="datetimeFigureOut">
               <a:rPr lang="en-IN" smtClean="0"/>
-              <a:t>20-03-2026</a:t>
+              <a:t>07-04-2026</a:t>
             </a:fld>
             <a:endParaRPr lang="en-IN"/>
           </a:p>
@@ -4312,7 +4319,7 @@
           <a:p>
             <a:fld id="{FD74747F-D400-4A90-89D9-3448D815F5DF}" type="datetimeFigureOut">
               <a:rPr lang="en-IN" smtClean="0"/>
-              <a:t>20-03-2026</a:t>
+              <a:t>07-04-2026</a:t>
             </a:fld>
             <a:endParaRPr lang="en-IN"/>
           </a:p>
@@ -4430,7 +4437,7 @@
           <a:p>
             <a:fld id="{FD74747F-D400-4A90-89D9-3448D815F5DF}" type="datetimeFigureOut">
               <a:rPr lang="en-IN" smtClean="0"/>
-              <a:t>20-03-2026</a:t>
+              <a:t>07-04-2026</a:t>
             </a:fld>
             <a:endParaRPr lang="en-IN"/>
           </a:p>
@@ -4525,7 +4532,7 @@
           <a:p>
             <a:fld id="{FD74747F-D400-4A90-89D9-3448D815F5DF}" type="datetimeFigureOut">
               <a:rPr lang="en-IN" smtClean="0"/>
-              <a:t>20-03-2026</a:t>
+              <a:t>07-04-2026</a:t>
             </a:fld>
             <a:endParaRPr lang="en-IN"/>
           </a:p>
@@ -4808,7 +4815,7 @@
           <a:p>
             <a:fld id="{FD74747F-D400-4A90-89D9-3448D815F5DF}" type="datetimeFigureOut">
               <a:rPr lang="en-IN" smtClean="0"/>
-              <a:t>20-03-2026</a:t>
+              <a:t>07-04-2026</a:t>
             </a:fld>
             <a:endParaRPr lang="en-IN"/>
           </a:p>
@@ -5099,7 +5106,7 @@
           <a:p>
             <a:fld id="{FD74747F-D400-4A90-89D9-3448D815F5DF}" type="datetimeFigureOut">
               <a:rPr lang="en-IN" smtClean="0"/>
-              <a:t>20-03-2026</a:t>
+              <a:t>07-04-2026</a:t>
             </a:fld>
             <a:endParaRPr lang="en-IN"/>
           </a:p>
@@ -5629,7 +5636,7 @@
           <a:p>
             <a:fld id="{FD74747F-D400-4A90-89D9-3448D815F5DF}" type="datetimeFigureOut">
               <a:rPr lang="en-IN" smtClean="0"/>
-              <a:t>20-03-2026</a:t>
+              <a:t>07-04-2026</a:t>
             </a:fld>
             <a:endParaRPr lang="en-IN"/>
           </a:p>
@@ -6168,8 +6175,8 @@
         </p:nvSpPr>
         <p:spPr>
           <a:xfrm>
-            <a:off x="2955235" y="2279373"/>
-            <a:ext cx="8123582" cy="3785652"/>
+            <a:off x="2176521" y="3180323"/>
+            <a:ext cx="7747577" cy="1938992"/>
           </a:xfrm>
           <a:prstGeom prst="rect">
             <a:avLst/>
@@ -6182,106 +6189,115 @@
           </a:bodyPr>
           <a:lstStyle/>
           <a:p>
-            <a:pPr marL="342900" indent="-342900" algn="just">
-              <a:buFont typeface="Arial" panose="020B0604020202020204" pitchFamily="34" charset="0"/>
-              <a:buChar char="•"/>
-            </a:pPr>
-            <a:r>
-              <a:rPr lang="en-US" sz="2400" dirty="0" smtClean="0">
-                <a:latin typeface="Times New Roman" panose="02020603050405020304" pitchFamily="18" charset="0"/>
-                <a:cs typeface="Times New Roman" panose="02020603050405020304" pitchFamily="18" charset="0"/>
-              </a:rPr>
-              <a:t>Version Control is a system that helps track and manage changes in source code over time.</a:t>
-            </a:r>
-          </a:p>
-          <a:p>
-            <a:pPr marL="342900" indent="-342900" algn="just">
-              <a:buFont typeface="Arial" panose="020B0604020202020204" pitchFamily="34" charset="0"/>
-              <a:buChar char="•"/>
-            </a:pPr>
-            <a:r>
-              <a:rPr lang="en-US" sz="2400" dirty="0" smtClean="0">
-                <a:latin typeface="Times New Roman" panose="02020603050405020304" pitchFamily="18" charset="0"/>
-                <a:cs typeface="Times New Roman" panose="02020603050405020304" pitchFamily="18" charset="0"/>
-              </a:rPr>
-              <a:t>I learned how </a:t>
-            </a:r>
-            <a:r>
-              <a:rPr lang="en-US" sz="2400" b="1" dirty="0" err="1" smtClean="0">
-                <a:latin typeface="Times New Roman" panose="02020603050405020304" pitchFamily="18" charset="0"/>
-                <a:cs typeface="Times New Roman" panose="02020603050405020304" pitchFamily="18" charset="0"/>
-              </a:rPr>
-              <a:t>Git</a:t>
-            </a:r>
-            <a:r>
-              <a:rPr lang="en-US" sz="2400" dirty="0" smtClean="0">
-                <a:latin typeface="Times New Roman" panose="02020603050405020304" pitchFamily="18" charset="0"/>
-                <a:cs typeface="Times New Roman" panose="02020603050405020304" pitchFamily="18" charset="0"/>
-              </a:rPr>
-              <a:t> maintains project history through commits and branches, allowing safe experimentation and rollback.</a:t>
-            </a:r>
-          </a:p>
-          <a:p>
-            <a:pPr marL="342900" indent="-342900" algn="just">
-              <a:buFont typeface="Arial" panose="020B0604020202020204" pitchFamily="34" charset="0"/>
-              <a:buChar char="•"/>
-            </a:pPr>
-            <a:r>
-              <a:rPr lang="en-US" sz="2400" dirty="0" smtClean="0">
-                <a:latin typeface="Times New Roman" panose="02020603050405020304" pitchFamily="18" charset="0"/>
-                <a:cs typeface="Times New Roman" panose="02020603050405020304" pitchFamily="18" charset="0"/>
-              </a:rPr>
-              <a:t>Using </a:t>
-            </a:r>
-            <a:r>
-              <a:rPr lang="en-US" sz="2400" b="1" dirty="0" smtClean="0">
-                <a:latin typeface="Times New Roman" panose="02020603050405020304" pitchFamily="18" charset="0"/>
-                <a:cs typeface="Times New Roman" panose="02020603050405020304" pitchFamily="18" charset="0"/>
-              </a:rPr>
-              <a:t>GitHub</a:t>
-            </a:r>
-            <a:r>
-              <a:rPr lang="en-US" sz="2400" dirty="0" smtClean="0">
-                <a:latin typeface="Times New Roman" panose="02020603050405020304" pitchFamily="18" charset="0"/>
-                <a:cs typeface="Times New Roman" panose="02020603050405020304" pitchFamily="18" charset="0"/>
-              </a:rPr>
-              <a:t>, I understood how repositories are created, managed, and shared for collaboration.</a:t>
-            </a:r>
-          </a:p>
-          <a:p>
-            <a:pPr marL="342900" indent="-342900" algn="just">
-              <a:buFont typeface="Arial" panose="020B0604020202020204" pitchFamily="34" charset="0"/>
-              <a:buChar char="•"/>
-            </a:pPr>
-            <a:r>
-              <a:rPr lang="en-US" sz="2400" dirty="0" smtClean="0">
-                <a:latin typeface="Times New Roman" panose="02020603050405020304" pitchFamily="18" charset="0"/>
-                <a:cs typeface="Times New Roman" panose="02020603050405020304" pitchFamily="18" charset="0"/>
-              </a:rPr>
-              <a:t>I also explored </a:t>
-            </a:r>
-            <a:r>
-              <a:rPr lang="en-US" sz="2400" b="1" dirty="0" smtClean="0">
-                <a:latin typeface="Times New Roman" panose="02020603050405020304" pitchFamily="18" charset="0"/>
-                <a:cs typeface="Times New Roman" panose="02020603050405020304" pitchFamily="18" charset="0"/>
-              </a:rPr>
-              <a:t>Docker</a:t>
-            </a:r>
-            <a:r>
-              <a:rPr lang="en-US" sz="2400" dirty="0" smtClean="0">
-                <a:latin typeface="Times New Roman" panose="02020603050405020304" pitchFamily="18" charset="0"/>
-                <a:cs typeface="Times New Roman" panose="02020603050405020304" pitchFamily="18" charset="0"/>
-              </a:rPr>
-              <a:t>, which helps run applications in isolated containers, ensuring consistency across different environments.</a:t>
-            </a:r>
-          </a:p>
-          <a:p>
             <a:pPr algn="just"/>
-            <a:endParaRPr lang="en-IN" sz="2400" dirty="0">
+            <a:r>
+              <a:rPr lang="en-IN" sz="2000" b="1" dirty="0">
+                <a:latin typeface="Times New Roman" panose="02020603050405020304" pitchFamily="18" charset="0"/>
+                <a:cs typeface="Times New Roman" panose="02020603050405020304" pitchFamily="18" charset="0"/>
+              </a:rPr>
+              <a:t>Introduction to Python </a:t>
+            </a:r>
+            <a:r>
+              <a:rPr lang="en-IN" sz="2000" b="1" dirty="0" smtClean="0">
+                <a:latin typeface="Times New Roman" panose="02020603050405020304" pitchFamily="18" charset="0"/>
+                <a:cs typeface="Times New Roman" panose="02020603050405020304" pitchFamily="18" charset="0"/>
+              </a:rPr>
+              <a:t>Basics</a:t>
+            </a:r>
+          </a:p>
+          <a:p>
+            <a:pPr algn="just"/>
+            <a:endParaRPr lang="en-IN" sz="2000" b="1" dirty="0">
               <a:latin typeface="Times New Roman" panose="02020603050405020304" pitchFamily="18" charset="0"/>
               <a:cs typeface="Times New Roman" panose="02020603050405020304" pitchFamily="18" charset="0"/>
             </a:endParaRPr>
           </a:p>
+          <a:p>
+            <a:pPr algn="just"/>
+            <a:r>
+              <a:rPr lang="en-IN" sz="2000" dirty="0" smtClean="0">
+                <a:latin typeface="Times New Roman" panose="02020603050405020304" pitchFamily="18" charset="0"/>
+                <a:cs typeface="Times New Roman" panose="02020603050405020304" pitchFamily="18" charset="0"/>
+              </a:rPr>
+              <a:t>- Learned </a:t>
+            </a:r>
+            <a:r>
+              <a:rPr lang="en-IN" sz="2000" b="1" dirty="0">
+                <a:latin typeface="Times New Roman" panose="02020603050405020304" pitchFamily="18" charset="0"/>
+                <a:cs typeface="Times New Roman" panose="02020603050405020304" pitchFamily="18" charset="0"/>
+              </a:rPr>
+              <a:t>variables &amp; data types</a:t>
+            </a:r>
+            <a:r>
+              <a:rPr lang="en-IN" sz="2000" dirty="0">
+                <a:latin typeface="Times New Roman" panose="02020603050405020304" pitchFamily="18" charset="0"/>
+                <a:cs typeface="Times New Roman" panose="02020603050405020304" pitchFamily="18" charset="0"/>
+              </a:rPr>
+              <a:t> → store values like numbers, </a:t>
+            </a:r>
+            <a:r>
+              <a:rPr lang="en-IN" sz="2000" dirty="0" smtClean="0">
+                <a:latin typeface="Times New Roman" panose="02020603050405020304" pitchFamily="18" charset="0"/>
+                <a:cs typeface="Times New Roman" panose="02020603050405020304" pitchFamily="18" charset="0"/>
+              </a:rPr>
+              <a:t>                             text</a:t>
+            </a:r>
+            <a:r>
+              <a:rPr lang="en-IN" sz="2000" dirty="0">
+                <a:latin typeface="Times New Roman" panose="02020603050405020304" pitchFamily="18" charset="0"/>
+                <a:cs typeface="Times New Roman" panose="02020603050405020304" pitchFamily="18" charset="0"/>
+              </a:rPr>
+              <a:t>, true/false. </a:t>
+            </a:r>
+          </a:p>
+          <a:p>
+            <a:pPr algn="just"/>
+            <a:r>
+              <a:rPr lang="en-IN" sz="2000" dirty="0" smtClean="0">
+                <a:latin typeface="Times New Roman" panose="02020603050405020304" pitchFamily="18" charset="0"/>
+                <a:cs typeface="Times New Roman" panose="02020603050405020304" pitchFamily="18" charset="0"/>
+              </a:rPr>
+              <a:t>- Used </a:t>
+            </a:r>
+            <a:r>
+              <a:rPr lang="en-IN" sz="2000" b="1" dirty="0">
+                <a:latin typeface="Times New Roman" panose="02020603050405020304" pitchFamily="18" charset="0"/>
+                <a:cs typeface="Times New Roman" panose="02020603050405020304" pitchFamily="18" charset="0"/>
+              </a:rPr>
+              <a:t>operators</a:t>
+            </a:r>
+            <a:r>
+              <a:rPr lang="en-IN" sz="2000" dirty="0">
+                <a:latin typeface="Times New Roman" panose="02020603050405020304" pitchFamily="18" charset="0"/>
+                <a:cs typeface="Times New Roman" panose="02020603050405020304" pitchFamily="18" charset="0"/>
+              </a:rPr>
+              <a:t> (+, -, *, /) → perform calculations. </a:t>
+            </a:r>
+          </a:p>
+          <a:p>
+            <a:pPr algn="just"/>
+            <a:r>
+              <a:rPr lang="en-IN" sz="2000" dirty="0" smtClean="0">
+                <a:latin typeface="Times New Roman" panose="02020603050405020304" pitchFamily="18" charset="0"/>
+                <a:cs typeface="Times New Roman" panose="02020603050405020304" pitchFamily="18" charset="0"/>
+              </a:rPr>
+              <a:t>- Understood </a:t>
+            </a:r>
+            <a:r>
+              <a:rPr lang="en-IN" sz="2000" b="1" dirty="0">
+                <a:latin typeface="Times New Roman" panose="02020603050405020304" pitchFamily="18" charset="0"/>
+                <a:cs typeface="Times New Roman" panose="02020603050405020304" pitchFamily="18" charset="0"/>
+              </a:rPr>
+              <a:t>if-else statements</a:t>
+            </a:r>
+            <a:r>
+              <a:rPr lang="en-IN" sz="2000" dirty="0">
+                <a:latin typeface="Times New Roman" panose="02020603050405020304" pitchFamily="18" charset="0"/>
+                <a:cs typeface="Times New Roman" panose="02020603050405020304" pitchFamily="18" charset="0"/>
+              </a:rPr>
+              <a:t> → used for decision making in programs.</a:t>
+            </a:r>
+          </a:p>
         </p:txBody>
       </p:sp>
       <p:sp>
@@ -6292,8 +6308,54 @@
         </p:nvSpPr>
         <p:spPr>
           <a:xfrm>
-            <a:off x="4114800" y="1325266"/>
-            <a:ext cx="5804452" cy="954107"/>
+            <a:off x="2295495" y="1613913"/>
+            <a:ext cx="3910578" cy="523220"/>
+          </a:xfrm>
+          <a:prstGeom prst="rect">
+            <a:avLst/>
+          </a:prstGeom>
+          <a:noFill/>
+          <a:ln>
+            <a:noFill/>
+          </a:ln>
+        </p:spPr>
+        <p:txBody>
+          <a:bodyPr wrap="square" rtlCol="0">
+            <a:spAutoFit/>
+          </a:bodyPr>
+          <a:lstStyle/>
+          <a:p>
+            <a:r>
+              <a:rPr lang="en-US" sz="2800" b="1" dirty="0">
+                <a:latin typeface="Times New Roman" panose="02020603050405020304" pitchFamily="18" charset="0"/>
+                <a:cs typeface="Times New Roman" panose="02020603050405020304" pitchFamily="18" charset="0"/>
+              </a:rPr>
+              <a:t>Python </a:t>
+            </a:r>
+            <a:r>
+              <a:rPr lang="en-US" sz="2800" b="1" dirty="0" smtClean="0">
+                <a:latin typeface="Times New Roman" panose="02020603050405020304" pitchFamily="18" charset="0"/>
+                <a:cs typeface="Times New Roman" panose="02020603050405020304" pitchFamily="18" charset="0"/>
+              </a:rPr>
+              <a:t>Fundamentals</a:t>
+            </a:r>
+            <a:endParaRPr lang="en-US" sz="2800" b="1" dirty="0">
+              <a:latin typeface="Times New Roman" panose="02020603050405020304" pitchFamily="18" charset="0"/>
+              <a:cs typeface="Times New Roman" panose="02020603050405020304" pitchFamily="18" charset="0"/>
+            </a:endParaRPr>
+          </a:p>
+        </p:txBody>
+      </p:sp>
+      <p:sp>
+        <p:nvSpPr>
+          <p:cNvPr id="4" name="TextBox 3"/>
+          <p:cNvSpPr txBox="1"/>
+          <p:nvPr/>
+        </p:nvSpPr>
+        <p:spPr>
+          <a:xfrm>
+            <a:off x="2852382" y="491319"/>
+            <a:ext cx="1398402" cy="400110"/>
           </a:xfrm>
           <a:prstGeom prst="rect">
             <a:avLst/>
@@ -6307,53 +6369,15 @@
           <a:lstStyle/>
           <a:p>
             <a:r>
-              <a:rPr lang="en-US" sz="2800" b="1" dirty="0">
-                <a:latin typeface="Times New Roman" panose="02020603050405020304" pitchFamily="18" charset="0"/>
-                <a:cs typeface="Times New Roman" panose="02020603050405020304" pitchFamily="18" charset="0"/>
-              </a:rPr>
-              <a:t>Development &amp; Version Control</a:t>
-            </a:r>
-          </a:p>
-          <a:p>
-            <a:endParaRPr lang="en-IN" sz="2800" dirty="0">
-              <a:latin typeface="Times New Roman" panose="02020603050405020304" pitchFamily="18" charset="0"/>
-              <a:cs typeface="Times New Roman" panose="02020603050405020304" pitchFamily="18" charset="0"/>
-            </a:endParaRPr>
-          </a:p>
-        </p:txBody>
-      </p:sp>
-      <p:sp>
-        <p:nvSpPr>
-          <p:cNvPr id="4" name="TextBox 3"/>
-          <p:cNvSpPr txBox="1"/>
-          <p:nvPr/>
-        </p:nvSpPr>
-        <p:spPr>
-          <a:xfrm>
-            <a:off x="3260035" y="344557"/>
-            <a:ext cx="2663687" cy="400110"/>
-          </a:xfrm>
-          <a:prstGeom prst="rect">
-            <a:avLst/>
-          </a:prstGeom>
-          <a:noFill/>
-        </p:spPr>
-        <p:txBody>
-          <a:bodyPr wrap="square" rtlCol="0">
-            <a:spAutoFit/>
-          </a:bodyPr>
-          <a:lstStyle/>
-          <a:p>
-            <a:r>
-              <a:rPr lang="en-IN" sz="2000" b="1" dirty="0" smtClean="0">
-                <a:latin typeface="Times New Roman" panose="02020603050405020304" pitchFamily="18" charset="0"/>
-                <a:cs typeface="Times New Roman" panose="02020603050405020304" pitchFamily="18" charset="0"/>
+              <a:rPr lang="en-US" sz="2000" b="1" dirty="0" smtClean="0">
+                <a:latin typeface="Arial" panose="020B0604020202020204" pitchFamily="34" charset="0"/>
+                <a:cs typeface="Arial" panose="020B0604020202020204" pitchFamily="34" charset="0"/>
               </a:rPr>
               <a:t>Week 1</a:t>
             </a:r>
             <a:endParaRPr lang="en-IN" sz="2000" b="1" dirty="0">
-              <a:latin typeface="Times New Roman" panose="02020603050405020304" pitchFamily="18" charset="0"/>
-              <a:cs typeface="Times New Roman" panose="02020603050405020304" pitchFamily="18" charset="0"/>
+              <a:latin typeface="Arial" panose="020B0604020202020204" pitchFamily="34" charset="0"/>
+              <a:cs typeface="Arial" panose="020B0604020202020204" pitchFamily="34" charset="0"/>
             </a:endParaRPr>
           </a:p>
         </p:txBody>
@@ -6361,13 +6385,20 @@
     </p:spTree>
     <p:extLst>
       <p:ext uri="{BB962C8B-B14F-4D97-AF65-F5344CB8AC3E}">
-        <p14:creationId xmlns:p14="http://schemas.microsoft.com/office/powerpoint/2010/main" val="3293646534"/>
+        <p14:creationId xmlns:p14="http://schemas.microsoft.com/office/powerpoint/2010/main" val="1901416507"/>
       </p:ext>
     </p:extLst>
   </p:cSld>
   <p:clrMapOvr>
     <a:masterClrMapping/>
   </p:clrMapOvr>
+  <p:timing>
+    <p:tnLst>
+      <p:par>
+        <p:cTn id="1" dur="indefinite" restart="never" nodeType="tmRoot"/>
+      </p:par>
+    </p:tnLst>
+  </p:timing>
 </p:sld>
 </file>
 
@@ -6396,8 +6427,8 @@
         </p:nvSpPr>
         <p:spPr>
           <a:xfrm>
-            <a:off x="2822714" y="2319130"/>
-            <a:ext cx="8097078" cy="3785652"/>
+            <a:off x="2769705" y="2663687"/>
+            <a:ext cx="7169425" cy="3416320"/>
           </a:xfrm>
           <a:prstGeom prst="rect">
             <a:avLst/>
@@ -6419,7 +6450,21 @@
                 <a:latin typeface="Times New Roman" panose="02020603050405020304" pitchFamily="18" charset="0"/>
                 <a:cs typeface="Times New Roman" panose="02020603050405020304" pitchFamily="18" charset="0"/>
               </a:rPr>
-              <a:t>In Week 4, I started learning about Python libraries used for data analysis.</a:t>
+              <a:t>During this week, I applied </a:t>
+            </a:r>
+            <a:r>
+              <a:rPr lang="en-US" sz="2400" dirty="0" err="1" smtClean="0">
+                <a:latin typeface="Times New Roman" panose="02020603050405020304" pitchFamily="18" charset="0"/>
+                <a:cs typeface="Times New Roman" panose="02020603050405020304" pitchFamily="18" charset="0"/>
+              </a:rPr>
+              <a:t>NumPy</a:t>
+            </a:r>
+            <a:r>
+              <a:rPr lang="en-US" sz="2400" dirty="0" smtClean="0">
+                <a:latin typeface="Times New Roman" panose="02020603050405020304" pitchFamily="18" charset="0"/>
+                <a:cs typeface="Times New Roman" panose="02020603050405020304" pitchFamily="18" charset="0"/>
+              </a:rPr>
+              <a:t> and Pandas on different datasets.</a:t>
             </a:r>
           </a:p>
           <a:p>
@@ -6428,18 +6473,11 @@
               <a:buChar char="•"/>
             </a:pPr>
             <a:r>
-              <a:rPr lang="en-US" sz="2400" dirty="0" err="1" smtClean="0">
-                <a:latin typeface="Times New Roman" panose="02020603050405020304" pitchFamily="18" charset="0"/>
-                <a:cs typeface="Times New Roman" panose="02020603050405020304" pitchFamily="18" charset="0"/>
-              </a:rPr>
-              <a:t>NumPy</a:t>
-            </a:r>
-            <a:r>
               <a:rPr lang="en-US" sz="2400" dirty="0" smtClean="0">
                 <a:latin typeface="Times New Roman" panose="02020603050405020304" pitchFamily="18" charset="0"/>
                 <a:cs typeface="Times New Roman" panose="02020603050405020304" pitchFamily="18" charset="0"/>
               </a:rPr>
-              <a:t> is a library used for numerical computing. It works with arrays, which are faster and more efficient than normal Python lists.</a:t>
+              <a:t>I practiced filtering, sorting, and selecting specific data.</a:t>
             </a:r>
           </a:p>
           <a:p>
@@ -6452,21 +6490,7 @@
                 <a:latin typeface="Times New Roman" panose="02020603050405020304" pitchFamily="18" charset="0"/>
                 <a:cs typeface="Times New Roman" panose="02020603050405020304" pitchFamily="18" charset="0"/>
               </a:rPr>
-              <a:t>I learned how to create </a:t>
-            </a:r>
-            <a:r>
-              <a:rPr lang="en-US" sz="2400" dirty="0" err="1" smtClean="0">
-                <a:latin typeface="Times New Roman" panose="02020603050405020304" pitchFamily="18" charset="0"/>
-                <a:cs typeface="Times New Roman" panose="02020603050405020304" pitchFamily="18" charset="0"/>
-              </a:rPr>
-              <a:t>NumPy</a:t>
-            </a:r>
-            <a:r>
-              <a:rPr lang="en-US" sz="2400" dirty="0" smtClean="0">
-                <a:latin typeface="Times New Roman" panose="02020603050405020304" pitchFamily="18" charset="0"/>
-                <a:cs typeface="Times New Roman" panose="02020603050405020304" pitchFamily="18" charset="0"/>
-              </a:rPr>
-              <a:t> arrays and perform operations like indexing and slicing.</a:t>
+              <a:t>I also learned how to analyze and summarize data using built-in functions.</a:t>
             </a:r>
           </a:p>
           <a:p>
@@ -6479,27 +6503,7 @@
                 <a:latin typeface="Times New Roman" panose="02020603050405020304" pitchFamily="18" charset="0"/>
                 <a:cs typeface="Times New Roman" panose="02020603050405020304" pitchFamily="18" charset="0"/>
               </a:rPr>
-              <a:t>I also practiced basic mathematical operations on arrays.</a:t>
-            </a:r>
-          </a:p>
-          <a:p>
-            <a:pPr marL="342900" indent="-342900" algn="just">
-              <a:buFont typeface="Arial" panose="020B0604020202020204" pitchFamily="34" charset="0"/>
-              <a:buChar char="•"/>
-            </a:pPr>
-            <a:r>
-              <a:rPr lang="en-US" sz="2400" dirty="0" err="1" smtClean="0">
-                <a:latin typeface="Times New Roman" panose="02020603050405020304" pitchFamily="18" charset="0"/>
-                <a:cs typeface="Times New Roman" panose="02020603050405020304" pitchFamily="18" charset="0"/>
-              </a:rPr>
-              <a:t>NumPy</a:t>
-            </a:r>
-            <a:r>
-              <a:rPr lang="en-US" sz="2400" dirty="0" smtClean="0">
-                <a:latin typeface="Times New Roman" panose="02020603050405020304" pitchFamily="18" charset="0"/>
-                <a:cs typeface="Times New Roman" panose="02020603050405020304" pitchFamily="18" charset="0"/>
-              </a:rPr>
-              <a:t> helps in handling large amounts of numerical data efficiently.</a:t>
+              <a:t>This improved my data handling skills and strengthened my understanding of data analysis concepts.</a:t>
             </a:r>
             <a:endParaRPr lang="en-US" sz="2400" dirty="0">
               <a:latin typeface="Times New Roman" panose="02020603050405020304" pitchFamily="18" charset="0"/>
@@ -6516,8 +6520,8 @@
         </p:nvSpPr>
         <p:spPr>
           <a:xfrm>
-            <a:off x="4876800" y="954156"/>
-            <a:ext cx="4704522" cy="523220"/>
+            <a:off x="4306956" y="1166192"/>
+            <a:ext cx="5234608" cy="523220"/>
           </a:xfrm>
           <a:prstGeom prst="rect">
             <a:avLst/>
@@ -6535,14 +6539,14 @@
                 <a:latin typeface="Times New Roman" panose="02020603050405020304" pitchFamily="18" charset="0"/>
                 <a:cs typeface="Times New Roman" panose="02020603050405020304" pitchFamily="18" charset="0"/>
               </a:rPr>
-              <a:t>Introduction to </a:t>
-            </a:r>
-            <a:r>
-              <a:rPr lang="en-US" sz="2800" b="1" dirty="0" err="1" smtClean="0">
-                <a:latin typeface="Times New Roman" panose="02020603050405020304" pitchFamily="18" charset="0"/>
-                <a:cs typeface="Times New Roman" panose="02020603050405020304" pitchFamily="18" charset="0"/>
-              </a:rPr>
-              <a:t>NumPy</a:t>
+              <a:t>Data Handling &amp; </a:t>
+            </a:r>
+            <a:r>
+              <a:rPr lang="en-US" sz="2800" b="1" dirty="0" smtClean="0">
+                <a:latin typeface="Times New Roman" panose="02020603050405020304" pitchFamily="18" charset="0"/>
+                <a:cs typeface="Times New Roman" panose="02020603050405020304" pitchFamily="18" charset="0"/>
+              </a:rPr>
+              <a:t>Practice</a:t>
             </a:r>
             <a:endParaRPr lang="en-US" sz="2800" b="1" dirty="0">
               <a:latin typeface="Times New Roman" panose="02020603050405020304" pitchFamily="18" charset="0"/>
@@ -6551,46 +6555,10 @@
           </a:p>
         </p:txBody>
       </p:sp>
-      <p:sp>
-        <p:nvSpPr>
-          <p:cNvPr id="4" name="TextBox 3"/>
-          <p:cNvSpPr txBox="1"/>
-          <p:nvPr/>
-        </p:nvSpPr>
-        <p:spPr>
-          <a:xfrm>
-            <a:off x="2570922" y="331304"/>
-            <a:ext cx="2305878" cy="400110"/>
-          </a:xfrm>
-          <a:prstGeom prst="rect">
-            <a:avLst/>
-          </a:prstGeom>
-          <a:noFill/>
-        </p:spPr>
-        <p:txBody>
-          <a:bodyPr wrap="square" rtlCol="0">
-            <a:spAutoFit/>
-          </a:bodyPr>
-          <a:lstStyle/>
-          <a:p>
-            <a:r>
-              <a:rPr lang="en-IN" sz="2000" b="1" dirty="0" smtClean="0">
-                <a:latin typeface="Times New Roman" panose="02020603050405020304" pitchFamily="18" charset="0"/>
-                <a:cs typeface="Times New Roman" panose="02020603050405020304" pitchFamily="18" charset="0"/>
-              </a:rPr>
-              <a:t>Week 4</a:t>
-            </a:r>
-            <a:endParaRPr lang="en-IN" sz="2000" b="1" dirty="0">
-              <a:latin typeface="Times New Roman" panose="02020603050405020304" pitchFamily="18" charset="0"/>
-              <a:cs typeface="Times New Roman" panose="02020603050405020304" pitchFamily="18" charset="0"/>
-            </a:endParaRPr>
-          </a:p>
-        </p:txBody>
-      </p:sp>
     </p:spTree>
     <p:extLst>
       <p:ext uri="{BB962C8B-B14F-4D97-AF65-F5344CB8AC3E}">
-        <p14:creationId xmlns:p14="http://schemas.microsoft.com/office/powerpoint/2010/main" val="402732994"/>
+        <p14:creationId xmlns:p14="http://schemas.microsoft.com/office/powerpoint/2010/main" val="1365838625"/>
       </p:ext>
     </p:extLst>
   </p:cSld>
@@ -6625,8 +6593,8 @@
         </p:nvSpPr>
         <p:spPr>
           <a:xfrm>
-            <a:off x="2782958" y="2623930"/>
-            <a:ext cx="7924800" cy="3046988"/>
+            <a:off x="3034748" y="2332382"/>
+            <a:ext cx="6957391" cy="3785652"/>
           </a:xfrm>
           <a:prstGeom prst="rect">
             <a:avLst/>
@@ -6648,7 +6616,7 @@
                 <a:latin typeface="Times New Roman" panose="02020603050405020304" pitchFamily="18" charset="0"/>
                 <a:cs typeface="Times New Roman" panose="02020603050405020304" pitchFamily="18" charset="0"/>
               </a:rPr>
-              <a:t>I learned about Pandas, a powerful library used for data analysis and data manipulation.</a:t>
+              <a:t>In Week 5, I started learning about data visualization.</a:t>
             </a:r>
           </a:p>
           <a:p>
@@ -6661,21 +6629,7 @@
                 <a:latin typeface="Times New Roman" panose="02020603050405020304" pitchFamily="18" charset="0"/>
                 <a:cs typeface="Times New Roman" panose="02020603050405020304" pitchFamily="18" charset="0"/>
               </a:rPr>
-              <a:t>Pandas provides a structure called </a:t>
-            </a:r>
-            <a:r>
-              <a:rPr lang="en-US" sz="2400" b="1" dirty="0" err="1" smtClean="0">
-                <a:latin typeface="Times New Roman" panose="02020603050405020304" pitchFamily="18" charset="0"/>
-                <a:cs typeface="Times New Roman" panose="02020603050405020304" pitchFamily="18" charset="0"/>
-              </a:rPr>
-              <a:t>DataFrame</a:t>
-            </a:r>
-            <a:r>
-              <a:rPr lang="en-US" sz="2400" dirty="0" smtClean="0">
-                <a:latin typeface="Times New Roman" panose="02020603050405020304" pitchFamily="18" charset="0"/>
-                <a:cs typeface="Times New Roman" panose="02020603050405020304" pitchFamily="18" charset="0"/>
-              </a:rPr>
-              <a:t>, which looks like a table with rows and columns.</a:t>
+              <a:t>Data visualization helps in representing data in graphical form, which makes it easier to understand patterns and trends.</a:t>
             </a:r>
           </a:p>
           <a:p>
@@ -6688,7 +6642,21 @@
                 <a:latin typeface="Times New Roman" panose="02020603050405020304" pitchFamily="18" charset="0"/>
                 <a:cs typeface="Times New Roman" panose="02020603050405020304" pitchFamily="18" charset="0"/>
               </a:rPr>
-              <a:t>I practiced loading datasets, checking missing values, cleaning data, and organizing information.</a:t>
+              <a:t>I learned to use the </a:t>
+            </a:r>
+            <a:r>
+              <a:rPr lang="en-US" sz="2400" b="1" dirty="0" err="1" smtClean="0">
+                <a:latin typeface="Times New Roman" panose="02020603050405020304" pitchFamily="18" charset="0"/>
+                <a:cs typeface="Times New Roman" panose="02020603050405020304" pitchFamily="18" charset="0"/>
+              </a:rPr>
+              <a:t>Matplotlib</a:t>
+            </a:r>
+            <a:r>
+              <a:rPr lang="en-US" sz="2400" dirty="0" smtClean="0">
+                <a:latin typeface="Times New Roman" panose="02020603050405020304" pitchFamily="18" charset="0"/>
+                <a:cs typeface="Times New Roman" panose="02020603050405020304" pitchFamily="18" charset="0"/>
+              </a:rPr>
+              <a:t> library to create basic graphs such as line plots and bar charts.</a:t>
             </a:r>
           </a:p>
           <a:p>
@@ -6701,7 +6669,7 @@
                 <a:latin typeface="Times New Roman" panose="02020603050405020304" pitchFamily="18" charset="0"/>
                 <a:cs typeface="Times New Roman" panose="02020603050405020304" pitchFamily="18" charset="0"/>
               </a:rPr>
-              <a:t>This helped me understand how real-world data is prepared before analysis.</a:t>
+              <a:t>This helped me understand how visual representation makes data analysis clearer and more meaningful.</a:t>
             </a:r>
             <a:endParaRPr lang="en-US" sz="2400" dirty="0">
               <a:latin typeface="Times New Roman" panose="02020603050405020304" pitchFamily="18" charset="0"/>
@@ -6718,8 +6686,8 @@
         </p:nvSpPr>
         <p:spPr>
           <a:xfrm>
-            <a:off x="3187149" y="1245704"/>
-            <a:ext cx="7116418" cy="523220"/>
+            <a:off x="2597425" y="1391479"/>
+            <a:ext cx="8878957" cy="523220"/>
           </a:xfrm>
           <a:prstGeom prst="rect">
             <a:avLst/>
@@ -6737,14 +6705,14 @@
                 <a:latin typeface="Times New Roman" panose="02020603050405020304" pitchFamily="18" charset="0"/>
                 <a:cs typeface="Times New Roman" panose="02020603050405020304" pitchFamily="18" charset="0"/>
               </a:rPr>
-              <a:t>Introduction to Pandas &amp; Data </a:t>
-            </a:r>
-            <a:r>
-              <a:rPr lang="en-US" sz="2800" b="1" dirty="0" smtClean="0">
-                <a:latin typeface="Times New Roman" panose="02020603050405020304" pitchFamily="18" charset="0"/>
-                <a:cs typeface="Times New Roman" panose="02020603050405020304" pitchFamily="18" charset="0"/>
-              </a:rPr>
-              <a:t>Processing</a:t>
+              <a:t>Introduction to Data Visualization with </a:t>
+            </a:r>
+            <a:r>
+              <a:rPr lang="en-US" sz="2800" b="1" dirty="0" err="1" smtClean="0">
+                <a:latin typeface="Times New Roman" panose="02020603050405020304" pitchFamily="18" charset="0"/>
+                <a:cs typeface="Times New Roman" panose="02020603050405020304" pitchFamily="18" charset="0"/>
+              </a:rPr>
+              <a:t>Matplotlib</a:t>
             </a:r>
             <a:endParaRPr lang="en-US" sz="2800" b="1" dirty="0">
               <a:latin typeface="Times New Roman" panose="02020603050405020304" pitchFamily="18" charset="0"/>
@@ -6753,10 +6721,46 @@
           </a:p>
         </p:txBody>
       </p:sp>
+      <p:sp>
+        <p:nvSpPr>
+          <p:cNvPr id="4" name="TextBox 3"/>
+          <p:cNvSpPr txBox="1"/>
+          <p:nvPr/>
+        </p:nvSpPr>
+        <p:spPr>
+          <a:xfrm>
+            <a:off x="2597425" y="477078"/>
+            <a:ext cx="2504661" cy="400110"/>
+          </a:xfrm>
+          <a:prstGeom prst="rect">
+            <a:avLst/>
+          </a:prstGeom>
+          <a:noFill/>
+        </p:spPr>
+        <p:txBody>
+          <a:bodyPr wrap="square" rtlCol="0">
+            <a:spAutoFit/>
+          </a:bodyPr>
+          <a:lstStyle/>
+          <a:p>
+            <a:r>
+              <a:rPr lang="en-IN" sz="2000" b="1" dirty="0" smtClean="0">
+                <a:latin typeface="Times New Roman" panose="02020603050405020304" pitchFamily="18" charset="0"/>
+                <a:cs typeface="Times New Roman" panose="02020603050405020304" pitchFamily="18" charset="0"/>
+              </a:rPr>
+              <a:t>Week 5</a:t>
+            </a:r>
+            <a:endParaRPr lang="en-IN" sz="2000" b="1" dirty="0">
+              <a:latin typeface="Times New Roman" panose="02020603050405020304" pitchFamily="18" charset="0"/>
+              <a:cs typeface="Times New Roman" panose="02020603050405020304" pitchFamily="18" charset="0"/>
+            </a:endParaRPr>
+          </a:p>
+        </p:txBody>
+      </p:sp>
     </p:spTree>
     <p:extLst>
       <p:ext uri="{BB962C8B-B14F-4D97-AF65-F5344CB8AC3E}">
-        <p14:creationId xmlns:p14="http://schemas.microsoft.com/office/powerpoint/2010/main" val="4117302404"/>
+        <p14:creationId xmlns:p14="http://schemas.microsoft.com/office/powerpoint/2010/main" val="1165038301"/>
       </p:ext>
     </p:extLst>
   </p:cSld>
@@ -6791,8 +6795,8 @@
         </p:nvSpPr>
         <p:spPr>
           <a:xfrm>
-            <a:off x="2769705" y="2663687"/>
-            <a:ext cx="7169425" cy="3416320"/>
+            <a:off x="3127512" y="2332382"/>
+            <a:ext cx="7089913" cy="3416320"/>
           </a:xfrm>
           <a:prstGeom prst="rect">
             <a:avLst/>
@@ -6814,21 +6818,35 @@
                 <a:latin typeface="Times New Roman" panose="02020603050405020304" pitchFamily="18" charset="0"/>
                 <a:cs typeface="Times New Roman" panose="02020603050405020304" pitchFamily="18" charset="0"/>
               </a:rPr>
-              <a:t>During this week, I applied </a:t>
+              <a:t>I also learned about </a:t>
+            </a:r>
+            <a:r>
+              <a:rPr lang="en-US" sz="2400" b="1" dirty="0" err="1" smtClean="0">
+                <a:latin typeface="Times New Roman" panose="02020603050405020304" pitchFamily="18" charset="0"/>
+                <a:cs typeface="Times New Roman" panose="02020603050405020304" pitchFamily="18" charset="0"/>
+              </a:rPr>
+              <a:t>Seaborn</a:t>
+            </a:r>
+            <a:r>
+              <a:rPr lang="en-US" sz="2400" dirty="0" smtClean="0">
+                <a:latin typeface="Times New Roman" panose="02020603050405020304" pitchFamily="18" charset="0"/>
+                <a:cs typeface="Times New Roman" panose="02020603050405020304" pitchFamily="18" charset="0"/>
+              </a:rPr>
+              <a:t>, which is an advanced data visualization library built on top of </a:t>
             </a:r>
             <a:r>
               <a:rPr lang="en-US" sz="2400" dirty="0" err="1" smtClean="0">
                 <a:latin typeface="Times New Roman" panose="02020603050405020304" pitchFamily="18" charset="0"/>
                 <a:cs typeface="Times New Roman" panose="02020603050405020304" pitchFamily="18" charset="0"/>
               </a:rPr>
-              <a:t>NumPy</a:t>
+              <a:t>Matplotlib</a:t>
             </a:r>
             <a:r>
               <a:rPr lang="en-US" sz="2400" dirty="0" smtClean="0">
                 <a:latin typeface="Times New Roman" panose="02020603050405020304" pitchFamily="18" charset="0"/>
                 <a:cs typeface="Times New Roman" panose="02020603050405020304" pitchFamily="18" charset="0"/>
               </a:rPr>
-              <a:t> and Pandas on different datasets.</a:t>
+              <a:t>.</a:t>
             </a:r>
           </a:p>
           <a:p>
@@ -6837,11 +6855,18 @@
               <a:buChar char="•"/>
             </a:pPr>
             <a:r>
+              <a:rPr lang="en-US" sz="2400" dirty="0" err="1" smtClean="0">
+                <a:latin typeface="Times New Roman" panose="02020603050405020304" pitchFamily="18" charset="0"/>
+                <a:cs typeface="Times New Roman" panose="02020603050405020304" pitchFamily="18" charset="0"/>
+              </a:rPr>
+              <a:t>Seaborn</a:t>
+            </a:r>
+            <a:r>
               <a:rPr lang="en-US" sz="2400" dirty="0" smtClean="0">
                 <a:latin typeface="Times New Roman" panose="02020603050405020304" pitchFamily="18" charset="0"/>
                 <a:cs typeface="Times New Roman" panose="02020603050405020304" pitchFamily="18" charset="0"/>
               </a:rPr>
-              <a:t>I practiced filtering, sorting, and selecting specific data.</a:t>
+              <a:t> provides more attractive and informative statistical graphs.</a:t>
             </a:r>
           </a:p>
           <a:p>
@@ -6854,7 +6879,7 @@
                 <a:latin typeface="Times New Roman" panose="02020603050405020304" pitchFamily="18" charset="0"/>
                 <a:cs typeface="Times New Roman" panose="02020603050405020304" pitchFamily="18" charset="0"/>
               </a:rPr>
-              <a:t>I also learned how to analyze and summarize data using built-in functions.</a:t>
+              <a:t>I practiced creating histograms, pie charts, and other visual plots to better understand data distribution and relationships.</a:t>
             </a:r>
           </a:p>
           <a:p>
@@ -6867,7 +6892,7 @@
                 <a:latin typeface="Times New Roman" panose="02020603050405020304" pitchFamily="18" charset="0"/>
                 <a:cs typeface="Times New Roman" panose="02020603050405020304" pitchFamily="18" charset="0"/>
               </a:rPr>
-              <a:t>This improved my data handling skills and strengthened my understanding of data analysis concepts.</a:t>
+              <a:t>This improved my ability to present data in a professional way.</a:t>
             </a:r>
             <a:endParaRPr lang="en-US" sz="2400" dirty="0">
               <a:latin typeface="Times New Roman" panose="02020603050405020304" pitchFamily="18" charset="0"/>
@@ -6884,8 +6909,8 @@
         </p:nvSpPr>
         <p:spPr>
           <a:xfrm>
-            <a:off x="4306956" y="1166192"/>
-            <a:ext cx="5234608" cy="523220"/>
+            <a:off x="3372676" y="1007164"/>
+            <a:ext cx="6599583" cy="523220"/>
           </a:xfrm>
           <a:prstGeom prst="rect">
             <a:avLst/>
@@ -6903,14 +6928,14 @@
                 <a:latin typeface="Times New Roman" panose="02020603050405020304" pitchFamily="18" charset="0"/>
                 <a:cs typeface="Times New Roman" panose="02020603050405020304" pitchFamily="18" charset="0"/>
               </a:rPr>
-              <a:t>Data Handling &amp; </a:t>
-            </a:r>
-            <a:r>
-              <a:rPr lang="en-US" sz="2800" b="1" dirty="0" smtClean="0">
-                <a:latin typeface="Times New Roman" panose="02020603050405020304" pitchFamily="18" charset="0"/>
-                <a:cs typeface="Times New Roman" panose="02020603050405020304" pitchFamily="18" charset="0"/>
-              </a:rPr>
-              <a:t>Practice</a:t>
+              <a:t>Advanced Visualization using </a:t>
+            </a:r>
+            <a:r>
+              <a:rPr lang="en-US" sz="2800" b="1" dirty="0" err="1" smtClean="0">
+                <a:latin typeface="Times New Roman" panose="02020603050405020304" pitchFamily="18" charset="0"/>
+                <a:cs typeface="Times New Roman" panose="02020603050405020304" pitchFamily="18" charset="0"/>
+              </a:rPr>
+              <a:t>Seaborn</a:t>
             </a:r>
             <a:endParaRPr lang="en-US" sz="2800" b="1" dirty="0">
               <a:latin typeface="Times New Roman" panose="02020603050405020304" pitchFamily="18" charset="0"/>
@@ -6922,7 +6947,7 @@
     </p:spTree>
     <p:extLst>
       <p:ext uri="{BB962C8B-B14F-4D97-AF65-F5344CB8AC3E}">
-        <p14:creationId xmlns:p14="http://schemas.microsoft.com/office/powerpoint/2010/main" val="1365838625"/>
+        <p14:creationId xmlns:p14="http://schemas.microsoft.com/office/powerpoint/2010/main" val="1145920764"/>
       </p:ext>
     </p:extLst>
   </p:cSld>
@@ -6957,8 +6982,8 @@
         </p:nvSpPr>
         <p:spPr>
           <a:xfrm>
-            <a:off x="3034748" y="2332382"/>
-            <a:ext cx="6957391" cy="3785652"/>
+            <a:off x="3094383" y="2955234"/>
+            <a:ext cx="6977269" cy="3046988"/>
           </a:xfrm>
           <a:prstGeom prst="rect">
             <a:avLst/>
@@ -6980,7 +7005,7 @@
                 <a:latin typeface="Times New Roman" panose="02020603050405020304" pitchFamily="18" charset="0"/>
                 <a:cs typeface="Times New Roman" panose="02020603050405020304" pitchFamily="18" charset="0"/>
               </a:rPr>
-              <a:t>In Week 5, I started learning about data visualization.</a:t>
+              <a:t>During this week, I applied visualization techniques to real datasets.</a:t>
             </a:r>
           </a:p>
           <a:p>
@@ -6993,7 +7018,7 @@
                 <a:latin typeface="Times New Roman" panose="02020603050405020304" pitchFamily="18" charset="0"/>
                 <a:cs typeface="Times New Roman" panose="02020603050405020304" pitchFamily="18" charset="0"/>
               </a:rPr>
-              <a:t>Data visualization helps in representing data in graphical form, which makes it easier to understand patterns and trends.</a:t>
+              <a:t>I learned how to choose the correct type of graph based on the data.</a:t>
             </a:r>
           </a:p>
           <a:p>
@@ -7006,21 +7031,7 @@
                 <a:latin typeface="Times New Roman" panose="02020603050405020304" pitchFamily="18" charset="0"/>
                 <a:cs typeface="Times New Roman" panose="02020603050405020304" pitchFamily="18" charset="0"/>
               </a:rPr>
-              <a:t>I learned to use the </a:t>
-            </a:r>
-            <a:r>
-              <a:rPr lang="en-US" sz="2400" b="1" dirty="0" err="1" smtClean="0">
-                <a:latin typeface="Times New Roman" panose="02020603050405020304" pitchFamily="18" charset="0"/>
-                <a:cs typeface="Times New Roman" panose="02020603050405020304" pitchFamily="18" charset="0"/>
-              </a:rPr>
-              <a:t>Matplotlib</a:t>
-            </a:r>
-            <a:r>
-              <a:rPr lang="en-US" sz="2400" dirty="0" smtClean="0">
-                <a:latin typeface="Times New Roman" panose="02020603050405020304" pitchFamily="18" charset="0"/>
-                <a:cs typeface="Times New Roman" panose="02020603050405020304" pitchFamily="18" charset="0"/>
-              </a:rPr>
-              <a:t> library to create basic graphs such as line plots and bar charts.</a:t>
+              <a:t>I analyzed patterns, trends, and comparisons using different charts.</a:t>
             </a:r>
           </a:p>
           <a:p>
@@ -7033,7 +7044,7 @@
                 <a:latin typeface="Times New Roman" panose="02020603050405020304" pitchFamily="18" charset="0"/>
                 <a:cs typeface="Times New Roman" panose="02020603050405020304" pitchFamily="18" charset="0"/>
               </a:rPr>
-              <a:t>This helped me understand how visual representation makes data analysis clearer and more meaningful.</a:t>
+              <a:t>This experience improved my analytical thinking and presentation skills.</a:t>
             </a:r>
             <a:endParaRPr lang="en-US" sz="2400" dirty="0">
               <a:latin typeface="Times New Roman" panose="02020603050405020304" pitchFamily="18" charset="0"/>
@@ -7050,8 +7061,8 @@
         </p:nvSpPr>
         <p:spPr>
           <a:xfrm>
-            <a:off x="2597425" y="1391479"/>
-            <a:ext cx="8878957" cy="523220"/>
+            <a:off x="3710608" y="1470993"/>
+            <a:ext cx="6361044" cy="523220"/>
           </a:xfrm>
           <a:prstGeom prst="rect">
             <a:avLst/>
@@ -7069,14 +7080,14 @@
                 <a:latin typeface="Times New Roman" panose="02020603050405020304" pitchFamily="18" charset="0"/>
                 <a:cs typeface="Times New Roman" panose="02020603050405020304" pitchFamily="18" charset="0"/>
               </a:rPr>
-              <a:t>Introduction to Data Visualization with </a:t>
-            </a:r>
-            <a:r>
-              <a:rPr lang="en-US" sz="2800" b="1" dirty="0" err="1" smtClean="0">
-                <a:latin typeface="Times New Roman" panose="02020603050405020304" pitchFamily="18" charset="0"/>
-                <a:cs typeface="Times New Roman" panose="02020603050405020304" pitchFamily="18" charset="0"/>
-              </a:rPr>
-              <a:t>Matplotlib</a:t>
+              <a:t>Applying Visualization on </a:t>
+            </a:r>
+            <a:r>
+              <a:rPr lang="en-US" sz="2800" b="1" dirty="0" smtClean="0">
+                <a:latin typeface="Times New Roman" panose="02020603050405020304" pitchFamily="18" charset="0"/>
+                <a:cs typeface="Times New Roman" panose="02020603050405020304" pitchFamily="18" charset="0"/>
+              </a:rPr>
+              <a:t>Datasets</a:t>
             </a:r>
             <a:endParaRPr lang="en-US" sz="2800" b="1" dirty="0">
               <a:latin typeface="Times New Roman" panose="02020603050405020304" pitchFamily="18" charset="0"/>
@@ -7085,46 +7096,10 @@
           </a:p>
         </p:txBody>
       </p:sp>
-      <p:sp>
-        <p:nvSpPr>
-          <p:cNvPr id="4" name="TextBox 3"/>
-          <p:cNvSpPr txBox="1"/>
-          <p:nvPr/>
-        </p:nvSpPr>
-        <p:spPr>
-          <a:xfrm>
-            <a:off x="2597425" y="477078"/>
-            <a:ext cx="2504661" cy="400110"/>
-          </a:xfrm>
-          <a:prstGeom prst="rect">
-            <a:avLst/>
-          </a:prstGeom>
-          <a:noFill/>
-        </p:spPr>
-        <p:txBody>
-          <a:bodyPr wrap="square" rtlCol="0">
-            <a:spAutoFit/>
-          </a:bodyPr>
-          <a:lstStyle/>
-          <a:p>
-            <a:r>
-              <a:rPr lang="en-IN" sz="2000" b="1" dirty="0" smtClean="0">
-                <a:latin typeface="Times New Roman" panose="02020603050405020304" pitchFamily="18" charset="0"/>
-                <a:cs typeface="Times New Roman" panose="02020603050405020304" pitchFamily="18" charset="0"/>
-              </a:rPr>
-              <a:t>Week 5</a:t>
-            </a:r>
-            <a:endParaRPr lang="en-IN" sz="2000" b="1" dirty="0">
-              <a:latin typeface="Times New Roman" panose="02020603050405020304" pitchFamily="18" charset="0"/>
-              <a:cs typeface="Times New Roman" panose="02020603050405020304" pitchFamily="18" charset="0"/>
-            </a:endParaRPr>
-          </a:p>
-        </p:txBody>
-      </p:sp>
     </p:spTree>
     <p:extLst>
       <p:ext uri="{BB962C8B-B14F-4D97-AF65-F5344CB8AC3E}">
-        <p14:creationId xmlns:p14="http://schemas.microsoft.com/office/powerpoint/2010/main" val="1165038301"/>
+        <p14:creationId xmlns:p14="http://schemas.microsoft.com/office/powerpoint/2010/main" val="2382341673"/>
       </p:ext>
     </p:extLst>
   </p:cSld>
@@ -7159,8 +7134,8 @@
         </p:nvSpPr>
         <p:spPr>
           <a:xfrm>
-            <a:off x="3127512" y="2332382"/>
-            <a:ext cx="7089913" cy="3416320"/>
+            <a:off x="3101009" y="2464905"/>
+            <a:ext cx="7394713" cy="3416320"/>
           </a:xfrm>
           <a:prstGeom prst="rect">
             <a:avLst/>
@@ -7182,35 +7157,7 @@
                 <a:latin typeface="Times New Roman" panose="02020603050405020304" pitchFamily="18" charset="0"/>
                 <a:cs typeface="Times New Roman" panose="02020603050405020304" pitchFamily="18" charset="0"/>
               </a:rPr>
-              <a:t>I also learned about </a:t>
-            </a:r>
-            <a:r>
-              <a:rPr lang="en-US" sz="2400" b="1" dirty="0" err="1" smtClean="0">
-                <a:latin typeface="Times New Roman" panose="02020603050405020304" pitchFamily="18" charset="0"/>
-                <a:cs typeface="Times New Roman" panose="02020603050405020304" pitchFamily="18" charset="0"/>
-              </a:rPr>
-              <a:t>Seaborn</a:t>
-            </a:r>
-            <a:r>
-              <a:rPr lang="en-US" sz="2400" dirty="0" smtClean="0">
-                <a:latin typeface="Times New Roman" panose="02020603050405020304" pitchFamily="18" charset="0"/>
-                <a:cs typeface="Times New Roman" panose="02020603050405020304" pitchFamily="18" charset="0"/>
-              </a:rPr>
-              <a:t>, which is an advanced data visualization library built on top of </a:t>
-            </a:r>
-            <a:r>
-              <a:rPr lang="en-US" sz="2400" dirty="0" err="1" smtClean="0">
-                <a:latin typeface="Times New Roman" panose="02020603050405020304" pitchFamily="18" charset="0"/>
-                <a:cs typeface="Times New Roman" panose="02020603050405020304" pitchFamily="18" charset="0"/>
-              </a:rPr>
-              <a:t>Matplotlib</a:t>
-            </a:r>
-            <a:r>
-              <a:rPr lang="en-US" sz="2400" dirty="0" smtClean="0">
-                <a:latin typeface="Times New Roman" panose="02020603050405020304" pitchFamily="18" charset="0"/>
-                <a:cs typeface="Times New Roman" panose="02020603050405020304" pitchFamily="18" charset="0"/>
-              </a:rPr>
-              <a:t>.</a:t>
+              <a:t>In Week 6, I was introduced to the basics of Machine Learning.</a:t>
             </a:r>
           </a:p>
           <a:p>
@@ -7219,18 +7166,11 @@
               <a:buChar char="•"/>
             </a:pPr>
             <a:r>
-              <a:rPr lang="en-US" sz="2400" dirty="0" err="1" smtClean="0">
-                <a:latin typeface="Times New Roman" panose="02020603050405020304" pitchFamily="18" charset="0"/>
-                <a:cs typeface="Times New Roman" panose="02020603050405020304" pitchFamily="18" charset="0"/>
-              </a:rPr>
-              <a:t>Seaborn</a:t>
-            </a:r>
-            <a:r>
               <a:rPr lang="en-US" sz="2400" dirty="0" smtClean="0">
                 <a:latin typeface="Times New Roman" panose="02020603050405020304" pitchFamily="18" charset="0"/>
                 <a:cs typeface="Times New Roman" panose="02020603050405020304" pitchFamily="18" charset="0"/>
               </a:rPr>
-              <a:t> provides more attractive and informative statistical graphs.</a:t>
+              <a:t>Machine Learning is a part of Artificial Intelligence where systems learn from data and make predictions or decisions without being explicitly programmed.</a:t>
             </a:r>
           </a:p>
           <a:p>
@@ -7243,7 +7183,7 @@
                 <a:latin typeface="Times New Roman" panose="02020603050405020304" pitchFamily="18" charset="0"/>
                 <a:cs typeface="Times New Roman" panose="02020603050405020304" pitchFamily="18" charset="0"/>
               </a:rPr>
-              <a:t>I practiced creating histograms, pie charts, and other visual plots to better understand data distribution and relationships.</a:t>
+              <a:t>I understood the difference between AI and ML, where AI is a broader concept and ML is a subset of AI.</a:t>
             </a:r>
           </a:p>
           <a:p>
@@ -7256,7 +7196,7 @@
                 <a:latin typeface="Times New Roman" panose="02020603050405020304" pitchFamily="18" charset="0"/>
                 <a:cs typeface="Times New Roman" panose="02020603050405020304" pitchFamily="18" charset="0"/>
               </a:rPr>
-              <a:t>This improved my ability to present data in a professional way.</a:t>
+              <a:t>This week helped me understand how machines learn from data.</a:t>
             </a:r>
             <a:endParaRPr lang="en-US" sz="2400" dirty="0">
               <a:latin typeface="Times New Roman" panose="02020603050405020304" pitchFamily="18" charset="0"/>
@@ -7273,8 +7213,8 @@
         </p:nvSpPr>
         <p:spPr>
           <a:xfrm>
-            <a:off x="3372676" y="1007164"/>
-            <a:ext cx="6599583" cy="523220"/>
+            <a:off x="3856382" y="1470991"/>
+            <a:ext cx="6639340" cy="523220"/>
           </a:xfrm>
           <a:prstGeom prst="rect">
             <a:avLst/>
@@ -7292,14 +7232,14 @@
                 <a:latin typeface="Times New Roman" panose="02020603050405020304" pitchFamily="18" charset="0"/>
                 <a:cs typeface="Times New Roman" panose="02020603050405020304" pitchFamily="18" charset="0"/>
               </a:rPr>
-              <a:t>Advanced Visualization using </a:t>
-            </a:r>
-            <a:r>
-              <a:rPr lang="en-US" sz="2800" b="1" dirty="0" err="1" smtClean="0">
-                <a:latin typeface="Times New Roman" panose="02020603050405020304" pitchFamily="18" charset="0"/>
-                <a:cs typeface="Times New Roman" panose="02020603050405020304" pitchFamily="18" charset="0"/>
-              </a:rPr>
-              <a:t>Seaborn</a:t>
+              <a:t>Introduction to Machine </a:t>
+            </a:r>
+            <a:r>
+              <a:rPr lang="en-US" sz="2800" b="1" dirty="0" smtClean="0">
+                <a:latin typeface="Times New Roman" panose="02020603050405020304" pitchFamily="18" charset="0"/>
+                <a:cs typeface="Times New Roman" panose="02020603050405020304" pitchFamily="18" charset="0"/>
+              </a:rPr>
+              <a:t>Learning</a:t>
             </a:r>
             <a:endParaRPr lang="en-US" sz="2800" b="1" dirty="0">
               <a:latin typeface="Times New Roman" panose="02020603050405020304" pitchFamily="18" charset="0"/>
@@ -7308,10 +7248,82 @@
           </a:p>
         </p:txBody>
       </p:sp>
+      <p:sp>
+        <p:nvSpPr>
+          <p:cNvPr id="4" name="TextBox 3"/>
+          <p:cNvSpPr txBox="1"/>
+          <p:nvPr/>
+        </p:nvSpPr>
+        <p:spPr>
+          <a:xfrm>
+            <a:off x="3101009" y="384313"/>
+            <a:ext cx="1643269" cy="400110"/>
+          </a:xfrm>
+          <a:prstGeom prst="rect">
+            <a:avLst/>
+          </a:prstGeom>
+          <a:noFill/>
+        </p:spPr>
+        <p:txBody>
+          <a:bodyPr wrap="square" rtlCol="0">
+            <a:spAutoFit/>
+          </a:bodyPr>
+          <a:lstStyle/>
+          <a:p>
+            <a:r>
+              <a:rPr lang="en-IN" sz="2000" b="1" dirty="0" smtClean="0">
+                <a:latin typeface="Times New Roman" panose="02020603050405020304" pitchFamily="18" charset="0"/>
+                <a:cs typeface="Times New Roman" panose="02020603050405020304" pitchFamily="18" charset="0"/>
+              </a:rPr>
+              <a:t>Week 6</a:t>
+            </a:r>
+            <a:endParaRPr lang="en-IN" sz="2000" b="1" dirty="0">
+              <a:latin typeface="Times New Roman" panose="02020603050405020304" pitchFamily="18" charset="0"/>
+              <a:cs typeface="Times New Roman" panose="02020603050405020304" pitchFamily="18" charset="0"/>
+            </a:endParaRPr>
+          </a:p>
+        </p:txBody>
+      </p:sp>
+      <p:sp>
+        <p:nvSpPr>
+          <p:cNvPr id="5" name="TextBox 4"/>
+          <p:cNvSpPr txBox="1"/>
+          <p:nvPr/>
+        </p:nvSpPr>
+        <p:spPr>
+          <a:xfrm>
+            <a:off x="8507896" y="384313"/>
+            <a:ext cx="2451652" cy="369332"/>
+          </a:xfrm>
+          <a:prstGeom prst="rect">
+            <a:avLst/>
+          </a:prstGeom>
+          <a:noFill/>
+        </p:spPr>
+        <p:txBody>
+          <a:bodyPr wrap="square" rtlCol="0">
+            <a:spAutoFit/>
+          </a:bodyPr>
+          <a:lstStyle/>
+          <a:p>
+            <a:r>
+              <a:rPr lang="en-US" b="1" dirty="0" smtClean="0">
+                <a:latin typeface="Times New Roman" panose="02020603050405020304" pitchFamily="18" charset="0"/>
+                <a:cs typeface="Times New Roman" panose="02020603050405020304" pitchFamily="18" charset="0"/>
+              </a:rPr>
+              <a:t>Month 2 </a:t>
+            </a:r>
+            <a:endParaRPr lang="en-IN" b="1" dirty="0">
+              <a:latin typeface="Times New Roman" panose="02020603050405020304" pitchFamily="18" charset="0"/>
+              <a:cs typeface="Times New Roman" panose="02020603050405020304" pitchFamily="18" charset="0"/>
+            </a:endParaRPr>
+          </a:p>
+        </p:txBody>
+      </p:sp>
     </p:spTree>
     <p:extLst>
       <p:ext uri="{BB962C8B-B14F-4D97-AF65-F5344CB8AC3E}">
-        <p14:creationId xmlns:p14="http://schemas.microsoft.com/office/powerpoint/2010/main" val="1145920764"/>
+        <p14:creationId xmlns:p14="http://schemas.microsoft.com/office/powerpoint/2010/main" val="1293794935"/>
       </p:ext>
     </p:extLst>
   </p:cSld>
@@ -7346,8 +7358,8 @@
         </p:nvSpPr>
         <p:spPr>
           <a:xfrm>
-            <a:off x="3094383" y="2955234"/>
-            <a:ext cx="6977269" cy="3046988"/>
+            <a:off x="3306417" y="2266122"/>
+            <a:ext cx="7593495" cy="4154984"/>
           </a:xfrm>
           <a:prstGeom prst="rect">
             <a:avLst/>
@@ -7360,55 +7372,93 @@
           </a:bodyPr>
           <a:lstStyle/>
           <a:p>
-            <a:pPr marL="342900" indent="-342900" algn="just">
+            <a:r>
+              <a:rPr lang="en-US" sz="2400" dirty="0" smtClean="0">
+                <a:latin typeface="Times New Roman" panose="02020603050405020304" pitchFamily="18" charset="0"/>
+                <a:cs typeface="Times New Roman" panose="02020603050405020304" pitchFamily="18" charset="0"/>
+              </a:rPr>
+              <a:t>I learned about the three main types of Machine Learning:</a:t>
+            </a:r>
+          </a:p>
+          <a:p>
+            <a:endParaRPr lang="en-US" sz="2400" dirty="0" smtClean="0">
+              <a:latin typeface="Times New Roman" panose="02020603050405020304" pitchFamily="18" charset="0"/>
+              <a:cs typeface="Times New Roman" panose="02020603050405020304" pitchFamily="18" charset="0"/>
+            </a:endParaRPr>
+          </a:p>
+          <a:p>
+            <a:pPr marL="342900" indent="-342900">
               <a:buFont typeface="Arial" panose="020B0604020202020204" pitchFamily="34" charset="0"/>
               <a:buChar char="•"/>
             </a:pPr>
             <a:r>
+              <a:rPr lang="en-US" sz="2400" b="1" dirty="0" smtClean="0">
+                <a:latin typeface="Times New Roman" panose="02020603050405020304" pitchFamily="18" charset="0"/>
+                <a:cs typeface="Times New Roman" panose="02020603050405020304" pitchFamily="18" charset="0"/>
+              </a:rPr>
+              <a:t>Supervised Learning</a:t>
+            </a:r>
+            <a:r>
               <a:rPr lang="en-US" sz="2400" dirty="0" smtClean="0">
                 <a:latin typeface="Times New Roman" panose="02020603050405020304" pitchFamily="18" charset="0"/>
                 <a:cs typeface="Times New Roman" panose="02020603050405020304" pitchFamily="18" charset="0"/>
               </a:rPr>
-              <a:t>During this week, I applied visualization techniques to real datasets.</a:t>
-            </a:r>
-          </a:p>
-          <a:p>
-            <a:pPr marL="342900" indent="-342900" algn="just">
+              <a:t> – The model is trained using labeled data (input and correct output).</a:t>
+            </a:r>
+          </a:p>
+          <a:p>
+            <a:pPr marL="342900" indent="-342900">
               <a:buFont typeface="Arial" panose="020B0604020202020204" pitchFamily="34" charset="0"/>
               <a:buChar char="•"/>
             </a:pPr>
             <a:r>
+              <a:rPr lang="en-US" sz="2400" b="1" dirty="0" smtClean="0">
+                <a:latin typeface="Times New Roman" panose="02020603050405020304" pitchFamily="18" charset="0"/>
+                <a:cs typeface="Times New Roman" panose="02020603050405020304" pitchFamily="18" charset="0"/>
+              </a:rPr>
+              <a:t>Unsupervised Learning</a:t>
+            </a:r>
+            <a:r>
               <a:rPr lang="en-US" sz="2400" dirty="0" smtClean="0">
                 <a:latin typeface="Times New Roman" panose="02020603050405020304" pitchFamily="18" charset="0"/>
                 <a:cs typeface="Times New Roman" panose="02020603050405020304" pitchFamily="18" charset="0"/>
               </a:rPr>
-              <a:t>I learned how to choose the correct type of graph based on the data.</a:t>
-            </a:r>
-          </a:p>
-          <a:p>
-            <a:pPr marL="342900" indent="-342900" algn="just">
+              <a:t> – The model finds patterns in unlabeled data.</a:t>
+            </a:r>
+          </a:p>
+          <a:p>
+            <a:pPr marL="342900" indent="-342900">
               <a:buFont typeface="Arial" panose="020B0604020202020204" pitchFamily="34" charset="0"/>
               <a:buChar char="•"/>
             </a:pPr>
             <a:r>
+              <a:rPr lang="en-US" sz="2400" b="1" dirty="0" smtClean="0">
+                <a:latin typeface="Times New Roman" panose="02020603050405020304" pitchFamily="18" charset="0"/>
+                <a:cs typeface="Times New Roman" panose="02020603050405020304" pitchFamily="18" charset="0"/>
+              </a:rPr>
+              <a:t>Reinforcement Learning</a:t>
+            </a:r>
+            <a:r>
               <a:rPr lang="en-US" sz="2400" dirty="0" smtClean="0">
                 <a:latin typeface="Times New Roman" panose="02020603050405020304" pitchFamily="18" charset="0"/>
                 <a:cs typeface="Times New Roman" panose="02020603050405020304" pitchFamily="18" charset="0"/>
               </a:rPr>
-              <a:t>I analyzed patterns, trends, and comparisons using different charts.</a:t>
-            </a:r>
-          </a:p>
-          <a:p>
-            <a:pPr marL="342900" indent="-342900" algn="just">
-              <a:buFont typeface="Arial" panose="020B0604020202020204" pitchFamily="34" charset="0"/>
-              <a:buChar char="•"/>
-            </a:pPr>
+              <a:t> – The model learns through rewards and penalties.</a:t>
+            </a:r>
+          </a:p>
+          <a:p>
+            <a:endParaRPr lang="en-US" sz="2400" dirty="0" smtClean="0">
+              <a:latin typeface="Times New Roman" panose="02020603050405020304" pitchFamily="18" charset="0"/>
+              <a:cs typeface="Times New Roman" panose="02020603050405020304" pitchFamily="18" charset="0"/>
+            </a:endParaRPr>
+          </a:p>
+          <a:p>
             <a:r>
               <a:rPr lang="en-US" sz="2400" dirty="0" smtClean="0">
                 <a:latin typeface="Times New Roman" panose="02020603050405020304" pitchFamily="18" charset="0"/>
                 <a:cs typeface="Times New Roman" panose="02020603050405020304" pitchFamily="18" charset="0"/>
               </a:rPr>
-              <a:t>This experience improved my analytical thinking and presentation skills.</a:t>
+              <a:t>Understanding these types helped me identify where each method is used in real-world applications.</a:t>
             </a:r>
             <a:endParaRPr lang="en-US" sz="2400" dirty="0">
               <a:latin typeface="Times New Roman" panose="02020603050405020304" pitchFamily="18" charset="0"/>
@@ -7425,8 +7475,8 @@
         </p:nvSpPr>
         <p:spPr>
           <a:xfrm>
-            <a:off x="3710608" y="1470993"/>
-            <a:ext cx="6361044" cy="523220"/>
+            <a:off x="4002155" y="914401"/>
+            <a:ext cx="6202018" cy="523220"/>
           </a:xfrm>
           <a:prstGeom prst="rect">
             <a:avLst/>
@@ -7444,14 +7494,14 @@
                 <a:latin typeface="Times New Roman" panose="02020603050405020304" pitchFamily="18" charset="0"/>
                 <a:cs typeface="Times New Roman" panose="02020603050405020304" pitchFamily="18" charset="0"/>
               </a:rPr>
-              <a:t>Applying Visualization on </a:t>
+              <a:t>Types of Machine </a:t>
             </a:r>
             <a:r>
               <a:rPr lang="en-US" sz="2800" b="1" dirty="0" smtClean="0">
                 <a:latin typeface="Times New Roman" panose="02020603050405020304" pitchFamily="18" charset="0"/>
                 <a:cs typeface="Times New Roman" panose="02020603050405020304" pitchFamily="18" charset="0"/>
               </a:rPr>
-              <a:t>Datasets</a:t>
+              <a:t>Learning</a:t>
             </a:r>
             <a:endParaRPr lang="en-US" sz="2800" b="1" dirty="0">
               <a:latin typeface="Times New Roman" panose="02020603050405020304" pitchFamily="18" charset="0"/>
@@ -7463,7 +7513,7 @@
     </p:spTree>
     <p:extLst>
       <p:ext uri="{BB962C8B-B14F-4D97-AF65-F5344CB8AC3E}">
-        <p14:creationId xmlns:p14="http://schemas.microsoft.com/office/powerpoint/2010/main" val="2382341673"/>
+        <p14:creationId xmlns:p14="http://schemas.microsoft.com/office/powerpoint/2010/main" val="1745540862"/>
       </p:ext>
     </p:extLst>
   </p:cSld>
@@ -7498,8 +7548,8 @@
         </p:nvSpPr>
         <p:spPr>
           <a:xfrm>
-            <a:off x="3101009" y="2464905"/>
-            <a:ext cx="7394713" cy="3416320"/>
+            <a:off x="2955235" y="2146852"/>
+            <a:ext cx="6798365" cy="4154984"/>
           </a:xfrm>
           <a:prstGeom prst="rect">
             <a:avLst/>
@@ -7513,15 +7563,15 @@
           <a:lstStyle/>
           <a:p>
             <a:pPr marL="342900" indent="-342900" algn="just">
-              <a:buFont typeface="Arial" panose="020B0604020202020204" pitchFamily="34" charset="0"/>
-              <a:buChar char="•"/>
+              <a:buFont typeface="Times New Roman" panose="02020603050405020304" pitchFamily="18" charset="0"/>
+              <a:buChar char="‾"/>
             </a:pPr>
             <a:r>
               <a:rPr lang="en-US" sz="2400" dirty="0" smtClean="0">
                 <a:latin typeface="Times New Roman" panose="02020603050405020304" pitchFamily="18" charset="0"/>
                 <a:cs typeface="Times New Roman" panose="02020603050405020304" pitchFamily="18" charset="0"/>
               </a:rPr>
-              <a:t>In Week 6, I was introduced to the basics of Machine Learning.</a:t>
+              <a:t>I studied the basic steps involved in building a Machine Learning model:</a:t>
             </a:r>
           </a:p>
           <a:p>
@@ -7534,7 +7584,7 @@
                 <a:latin typeface="Times New Roman" panose="02020603050405020304" pitchFamily="18" charset="0"/>
                 <a:cs typeface="Times New Roman" panose="02020603050405020304" pitchFamily="18" charset="0"/>
               </a:rPr>
-              <a:t>Machine Learning is a part of Artificial Intelligence where systems learn from data and make predictions or decisions without being explicitly programmed.</a:t>
+              <a:t>Data Collection</a:t>
             </a:r>
           </a:p>
           <a:p>
@@ -7547,7 +7597,7 @@
                 <a:latin typeface="Times New Roman" panose="02020603050405020304" pitchFamily="18" charset="0"/>
                 <a:cs typeface="Times New Roman" panose="02020603050405020304" pitchFamily="18" charset="0"/>
               </a:rPr>
-              <a:t>I understood the difference between AI and ML, where AI is a broader concept and ML is a subset of AI.</a:t>
+              <a:t>Data Preprocessing</a:t>
             </a:r>
           </a:p>
           <a:p>
@@ -7560,7 +7610,59 @@
                 <a:latin typeface="Times New Roman" panose="02020603050405020304" pitchFamily="18" charset="0"/>
                 <a:cs typeface="Times New Roman" panose="02020603050405020304" pitchFamily="18" charset="0"/>
               </a:rPr>
-              <a:t>This week helped me understand how machines learn from data.</a:t>
+              <a:t>Model Training</a:t>
+            </a:r>
+          </a:p>
+          <a:p>
+            <a:pPr marL="342900" indent="-342900" algn="just">
+              <a:buFont typeface="Arial" panose="020B0604020202020204" pitchFamily="34" charset="0"/>
+              <a:buChar char="•"/>
+            </a:pPr>
+            <a:r>
+              <a:rPr lang="en-US" sz="2400" dirty="0" smtClean="0">
+                <a:latin typeface="Times New Roman" panose="02020603050405020304" pitchFamily="18" charset="0"/>
+                <a:cs typeface="Times New Roman" panose="02020603050405020304" pitchFamily="18" charset="0"/>
+              </a:rPr>
+              <a:t>Model Evaluation</a:t>
+            </a:r>
+          </a:p>
+          <a:p>
+            <a:pPr marL="342900" indent="-342900" algn="just">
+              <a:buFont typeface="Arial" panose="020B0604020202020204" pitchFamily="34" charset="0"/>
+              <a:buChar char="•"/>
+            </a:pPr>
+            <a:r>
+              <a:rPr lang="en-US" sz="2400" dirty="0" smtClean="0">
+                <a:latin typeface="Times New Roman" panose="02020603050405020304" pitchFamily="18" charset="0"/>
+                <a:cs typeface="Times New Roman" panose="02020603050405020304" pitchFamily="18" charset="0"/>
+              </a:rPr>
+              <a:t>Prediction</a:t>
+            </a:r>
+          </a:p>
+          <a:p>
+            <a:pPr marL="342900" indent="-342900" algn="just">
+              <a:buFont typeface="Times New Roman" panose="02020603050405020304" pitchFamily="18" charset="0"/>
+              <a:buChar char="‾"/>
+            </a:pPr>
+            <a:r>
+              <a:rPr lang="en-US" sz="2400" dirty="0" smtClean="0">
+                <a:latin typeface="Times New Roman" panose="02020603050405020304" pitchFamily="18" charset="0"/>
+                <a:cs typeface="Times New Roman" panose="02020603050405020304" pitchFamily="18" charset="0"/>
+              </a:rPr>
+              <a:t>Following this workflow ensures that the model is accurate and reliable.</a:t>
+            </a:r>
+          </a:p>
+          <a:p>
+            <a:pPr marL="342900" indent="-342900" algn="just">
+              <a:buFont typeface="Times New Roman" panose="02020603050405020304" pitchFamily="18" charset="0"/>
+              <a:buChar char="‾"/>
+            </a:pPr>
+            <a:r>
+              <a:rPr lang="en-US" sz="2400" dirty="0" smtClean="0">
+                <a:latin typeface="Times New Roman" panose="02020603050405020304" pitchFamily="18" charset="0"/>
+                <a:cs typeface="Times New Roman" panose="02020603050405020304" pitchFamily="18" charset="0"/>
+              </a:rPr>
+              <a:t>This week built a strong foundation for advanced ML concepts.</a:t>
             </a:r>
             <a:endParaRPr lang="en-US" sz="2400" dirty="0">
               <a:latin typeface="Times New Roman" panose="02020603050405020304" pitchFamily="18" charset="0"/>
@@ -7577,8 +7679,8 @@
         </p:nvSpPr>
         <p:spPr>
           <a:xfrm>
-            <a:off x="3856382" y="1470991"/>
-            <a:ext cx="6639340" cy="523220"/>
+            <a:off x="3511826" y="874644"/>
+            <a:ext cx="5685182" cy="523220"/>
           </a:xfrm>
           <a:prstGeom prst="rect">
             <a:avLst/>
@@ -7596,14 +7698,14 @@
                 <a:latin typeface="Times New Roman" panose="02020603050405020304" pitchFamily="18" charset="0"/>
                 <a:cs typeface="Times New Roman" panose="02020603050405020304" pitchFamily="18" charset="0"/>
               </a:rPr>
-              <a:t>Introduction to Machine </a:t>
+              <a:t>Machine Learning </a:t>
             </a:r>
             <a:r>
               <a:rPr lang="en-US" sz="2800" b="1" dirty="0" smtClean="0">
                 <a:latin typeface="Times New Roman" panose="02020603050405020304" pitchFamily="18" charset="0"/>
                 <a:cs typeface="Times New Roman" panose="02020603050405020304" pitchFamily="18" charset="0"/>
               </a:rPr>
-              <a:t>Learning</a:t>
+              <a:t>Workflow</a:t>
             </a:r>
             <a:endParaRPr lang="en-US" sz="2800" b="1" dirty="0">
               <a:latin typeface="Times New Roman" panose="02020603050405020304" pitchFamily="18" charset="0"/>
@@ -7612,46 +7714,10 @@
           </a:p>
         </p:txBody>
       </p:sp>
-      <p:sp>
-        <p:nvSpPr>
-          <p:cNvPr id="4" name="TextBox 3"/>
-          <p:cNvSpPr txBox="1"/>
-          <p:nvPr/>
-        </p:nvSpPr>
-        <p:spPr>
-          <a:xfrm>
-            <a:off x="3101009" y="384313"/>
-            <a:ext cx="1643269" cy="400110"/>
-          </a:xfrm>
-          <a:prstGeom prst="rect">
-            <a:avLst/>
-          </a:prstGeom>
-          <a:noFill/>
-        </p:spPr>
-        <p:txBody>
-          <a:bodyPr wrap="square" rtlCol="0">
-            <a:spAutoFit/>
-          </a:bodyPr>
-          <a:lstStyle/>
-          <a:p>
-            <a:r>
-              <a:rPr lang="en-IN" sz="2000" b="1" dirty="0" smtClean="0">
-                <a:latin typeface="Times New Roman" panose="02020603050405020304" pitchFamily="18" charset="0"/>
-                <a:cs typeface="Times New Roman" panose="02020603050405020304" pitchFamily="18" charset="0"/>
-              </a:rPr>
-              <a:t>Week 6</a:t>
-            </a:r>
-            <a:endParaRPr lang="en-IN" sz="2000" b="1" dirty="0">
-              <a:latin typeface="Times New Roman" panose="02020603050405020304" pitchFamily="18" charset="0"/>
-              <a:cs typeface="Times New Roman" panose="02020603050405020304" pitchFamily="18" charset="0"/>
-            </a:endParaRPr>
-          </a:p>
-        </p:txBody>
-      </p:sp>
     </p:spTree>
     <p:extLst>
       <p:ext uri="{BB962C8B-B14F-4D97-AF65-F5344CB8AC3E}">
-        <p14:creationId xmlns:p14="http://schemas.microsoft.com/office/powerpoint/2010/main" val="1293794935"/>
+        <p14:creationId xmlns:p14="http://schemas.microsoft.com/office/powerpoint/2010/main" val="498124957"/>
       </p:ext>
     </p:extLst>
   </p:cSld>
@@ -7686,8 +7752,8 @@
         </p:nvSpPr>
         <p:spPr>
           <a:xfrm>
-            <a:off x="3306417" y="2266122"/>
-            <a:ext cx="7593495" cy="4154984"/>
+            <a:off x="2729948" y="1643269"/>
+            <a:ext cx="7964556" cy="4893647"/>
           </a:xfrm>
           <a:prstGeom prst="rect">
             <a:avLst/>
@@ -7700,62 +7766,47 @@
           </a:bodyPr>
           <a:lstStyle/>
           <a:p>
-            <a:r>
-              <a:rPr lang="en-US" sz="2400" dirty="0" smtClean="0">
-                <a:latin typeface="Times New Roman" panose="02020603050405020304" pitchFamily="18" charset="0"/>
-                <a:cs typeface="Times New Roman" panose="02020603050405020304" pitchFamily="18" charset="0"/>
-              </a:rPr>
-              <a:t>I learned about the three main types of Machine Learning:</a:t>
-            </a:r>
-          </a:p>
-          <a:p>
-            <a:endParaRPr lang="en-US" sz="2400" dirty="0" smtClean="0">
-              <a:latin typeface="Times New Roman" panose="02020603050405020304" pitchFamily="18" charset="0"/>
-              <a:cs typeface="Times New Roman" panose="02020603050405020304" pitchFamily="18" charset="0"/>
-            </a:endParaRPr>
-          </a:p>
-          <a:p>
-            <a:pPr marL="342900" indent="-342900">
+            <a:pPr marL="342900" indent="-342900" algn="just">
               <a:buFont typeface="Arial" panose="020B0604020202020204" pitchFamily="34" charset="0"/>
               <a:buChar char="•"/>
             </a:pPr>
             <a:r>
+              <a:rPr lang="en-US" sz="2400" dirty="0" smtClean="0">
+                <a:latin typeface="Times New Roman" panose="02020603050405020304" pitchFamily="18" charset="0"/>
+                <a:cs typeface="Times New Roman" panose="02020603050405020304" pitchFamily="18" charset="0"/>
+              </a:rPr>
+              <a:t>In Machine Learning, data cannot be used directly. The first step is </a:t>
+            </a:r>
+            <a:r>
               <a:rPr lang="en-US" sz="2400" b="1" dirty="0" smtClean="0">
                 <a:latin typeface="Times New Roman" panose="02020603050405020304" pitchFamily="18" charset="0"/>
                 <a:cs typeface="Times New Roman" panose="02020603050405020304" pitchFamily="18" charset="0"/>
               </a:rPr>
-              <a:t>Supervised Learning</a:t>
+              <a:t>Data Preprocessing</a:t>
             </a:r>
             <a:r>
               <a:rPr lang="en-US" sz="2400" dirty="0" smtClean="0">
                 <a:latin typeface="Times New Roman" panose="02020603050405020304" pitchFamily="18" charset="0"/>
                 <a:cs typeface="Times New Roman" panose="02020603050405020304" pitchFamily="18" charset="0"/>
               </a:rPr>
-              <a:t> – The model is trained using labeled data (input and correct output).</a:t>
-            </a:r>
-          </a:p>
-          <a:p>
-            <a:pPr marL="342900" indent="-342900">
+              <a:t>.</a:t>
+            </a:r>
+          </a:p>
+          <a:p>
+            <a:pPr marL="342900" indent="-342900" algn="just">
               <a:buFont typeface="Arial" panose="020B0604020202020204" pitchFamily="34" charset="0"/>
               <a:buChar char="•"/>
             </a:pPr>
             <a:r>
-              <a:rPr lang="en-US" sz="2400" b="1" dirty="0" smtClean="0">
-                <a:latin typeface="Times New Roman" panose="02020603050405020304" pitchFamily="18" charset="0"/>
-                <a:cs typeface="Times New Roman" panose="02020603050405020304" pitchFamily="18" charset="0"/>
-              </a:rPr>
-              <a:t>Unsupervised Learning</a:t>
-            </a:r>
-            <a:r>
               <a:rPr lang="en-US" sz="2400" dirty="0" smtClean="0">
                 <a:latin typeface="Times New Roman" panose="02020603050405020304" pitchFamily="18" charset="0"/>
                 <a:cs typeface="Times New Roman" panose="02020603050405020304" pitchFamily="18" charset="0"/>
               </a:rPr>
-              <a:t> – The model finds patterns in unlabeled data.</a:t>
-            </a:r>
-          </a:p>
-          <a:p>
-            <a:pPr marL="342900" indent="-342900">
+              <a:t>Feature Scaling helps bring large and small values into the same range.</a:t>
+            </a:r>
+          </a:p>
+          <a:p>
+            <a:pPr marL="342900" indent="-342900" algn="just">
               <a:buFont typeface="Arial" panose="020B0604020202020204" pitchFamily="34" charset="0"/>
               <a:buChar char="•"/>
             </a:pPr>
@@ -7764,29 +7815,100 @@
                 <a:latin typeface="Times New Roman" panose="02020603050405020304" pitchFamily="18" charset="0"/>
                 <a:cs typeface="Times New Roman" panose="02020603050405020304" pitchFamily="18" charset="0"/>
               </a:rPr>
-              <a:t>Reinforcement Learning</a:t>
+              <a:t>Normalization</a:t>
             </a:r>
             <a:r>
               <a:rPr lang="en-US" sz="2400" dirty="0" smtClean="0">
                 <a:latin typeface="Times New Roman" panose="02020603050405020304" pitchFamily="18" charset="0"/>
                 <a:cs typeface="Times New Roman" panose="02020603050405020304" pitchFamily="18" charset="0"/>
               </a:rPr>
-              <a:t> – The model learns through rewards and penalties.</a:t>
-            </a:r>
-          </a:p>
-          <a:p>
-            <a:endParaRPr lang="en-US" sz="2400" dirty="0" smtClean="0">
-              <a:latin typeface="Times New Roman" panose="02020603050405020304" pitchFamily="18" charset="0"/>
-              <a:cs typeface="Times New Roman" panose="02020603050405020304" pitchFamily="18" charset="0"/>
-            </a:endParaRPr>
-          </a:p>
-          <a:p>
+              <a:t> converts data into a range between 0 and 1.</a:t>
+            </a:r>
+          </a:p>
+          <a:p>
+            <a:pPr marL="342900" indent="-342900" algn="just">
+              <a:buFont typeface="Arial" panose="020B0604020202020204" pitchFamily="34" charset="0"/>
+              <a:buChar char="•"/>
+            </a:pPr>
+            <a:r>
+              <a:rPr lang="en-US" sz="2400" b="1" dirty="0" smtClean="0">
+                <a:latin typeface="Times New Roman" panose="02020603050405020304" pitchFamily="18" charset="0"/>
+                <a:cs typeface="Times New Roman" panose="02020603050405020304" pitchFamily="18" charset="0"/>
+              </a:rPr>
+              <a:t>Standardization</a:t>
+            </a:r>
             <a:r>
               <a:rPr lang="en-US" sz="2400" dirty="0" smtClean="0">
                 <a:latin typeface="Times New Roman" panose="02020603050405020304" pitchFamily="18" charset="0"/>
                 <a:cs typeface="Times New Roman" panose="02020603050405020304" pitchFamily="18" charset="0"/>
               </a:rPr>
-              <a:t>Understanding these types helped me identify where each method is used in real-world applications.</a:t>
+              <a:t> converts data so that the mean becomes 0 and the standard deviation becomes 1.</a:t>
+            </a:r>
+          </a:p>
+          <a:p>
+            <a:pPr marL="342900" indent="-342900" algn="just">
+              <a:buFont typeface="Arial" panose="020B0604020202020204" pitchFamily="34" charset="0"/>
+              <a:buChar char="•"/>
+            </a:pPr>
+            <a:r>
+              <a:rPr lang="en-US" sz="2400" dirty="0" smtClean="0">
+                <a:latin typeface="Times New Roman" panose="02020603050405020304" pitchFamily="18" charset="0"/>
+                <a:cs typeface="Times New Roman" panose="02020603050405020304" pitchFamily="18" charset="0"/>
+              </a:rPr>
+              <a:t>Feature Encoding is used to convert categorical data into numerical form.</a:t>
+            </a:r>
+          </a:p>
+          <a:p>
+            <a:pPr marL="342900" indent="-342900" algn="just">
+              <a:buFont typeface="Arial" panose="020B0604020202020204" pitchFamily="34" charset="0"/>
+              <a:buChar char="•"/>
+            </a:pPr>
+            <a:r>
+              <a:rPr lang="en-US" sz="2400" b="1" dirty="0" smtClean="0">
+                <a:latin typeface="Times New Roman" panose="02020603050405020304" pitchFamily="18" charset="0"/>
+                <a:cs typeface="Times New Roman" panose="02020603050405020304" pitchFamily="18" charset="0"/>
+              </a:rPr>
+              <a:t>Label Encoding</a:t>
+            </a:r>
+            <a:r>
+              <a:rPr lang="en-US" sz="2400" dirty="0" smtClean="0">
+                <a:latin typeface="Times New Roman" panose="02020603050405020304" pitchFamily="18" charset="0"/>
+                <a:cs typeface="Times New Roman" panose="02020603050405020304" pitchFamily="18" charset="0"/>
+              </a:rPr>
+              <a:t> assigns a unique number to each category.</a:t>
+            </a:r>
+          </a:p>
+          <a:p>
+            <a:pPr marL="342900" indent="-342900" algn="just">
+              <a:buFont typeface="Arial" panose="020B0604020202020204" pitchFamily="34" charset="0"/>
+              <a:buChar char="•"/>
+            </a:pPr>
+            <a:r>
+              <a:rPr lang="en-US" sz="2400" b="1" dirty="0" smtClean="0">
+                <a:latin typeface="Times New Roman" panose="02020603050405020304" pitchFamily="18" charset="0"/>
+                <a:cs typeface="Times New Roman" panose="02020603050405020304" pitchFamily="18" charset="0"/>
+              </a:rPr>
+              <a:t>One Hot Encoding</a:t>
+            </a:r>
+            <a:r>
+              <a:rPr lang="en-US" sz="2400" dirty="0" smtClean="0">
+                <a:latin typeface="Times New Roman" panose="02020603050405020304" pitchFamily="18" charset="0"/>
+                <a:cs typeface="Times New Roman" panose="02020603050405020304" pitchFamily="18" charset="0"/>
+              </a:rPr>
+              <a:t> creates separate binary columns for each category.</a:t>
+            </a:r>
+          </a:p>
+          <a:p>
+            <a:pPr marL="342900" indent="-342900" algn="just">
+              <a:buFont typeface="Arial" panose="020B0604020202020204" pitchFamily="34" charset="0"/>
+              <a:buChar char="•"/>
+            </a:pPr>
+            <a:r>
+              <a:rPr lang="en-US" sz="2400" dirty="0" smtClean="0">
+                <a:latin typeface="Times New Roman" panose="02020603050405020304" pitchFamily="18" charset="0"/>
+                <a:cs typeface="Times New Roman" panose="02020603050405020304" pitchFamily="18" charset="0"/>
+              </a:rPr>
+              <a:t>Preprocessing makes the model faster and more accurate.</a:t>
             </a:r>
             <a:endParaRPr lang="en-US" sz="2400" dirty="0">
               <a:latin typeface="Times New Roman" panose="02020603050405020304" pitchFamily="18" charset="0"/>
@@ -7803,8 +7925,8 @@
         </p:nvSpPr>
         <p:spPr>
           <a:xfrm>
-            <a:off x="4002155" y="914401"/>
-            <a:ext cx="6202018" cy="523220"/>
+            <a:off x="3776870" y="821635"/>
+            <a:ext cx="5353878" cy="523220"/>
           </a:xfrm>
           <a:prstGeom prst="rect">
             <a:avLst/>
@@ -7822,14 +7944,14 @@
                 <a:latin typeface="Times New Roman" panose="02020603050405020304" pitchFamily="18" charset="0"/>
                 <a:cs typeface="Times New Roman" panose="02020603050405020304" pitchFamily="18" charset="0"/>
               </a:rPr>
-              <a:t>Types of Machine </a:t>
+              <a:t>Data Preprocessing </a:t>
             </a:r>
             <a:r>
               <a:rPr lang="en-US" sz="2800" b="1" dirty="0" smtClean="0">
                 <a:latin typeface="Times New Roman" panose="02020603050405020304" pitchFamily="18" charset="0"/>
                 <a:cs typeface="Times New Roman" panose="02020603050405020304" pitchFamily="18" charset="0"/>
               </a:rPr>
-              <a:t>Learning</a:t>
+              <a:t>Techniques</a:t>
             </a:r>
             <a:endParaRPr lang="en-US" sz="2800" b="1" dirty="0">
               <a:latin typeface="Times New Roman" panose="02020603050405020304" pitchFamily="18" charset="0"/>
@@ -7838,10 +7960,46 @@
           </a:p>
         </p:txBody>
       </p:sp>
+      <p:sp>
+        <p:nvSpPr>
+          <p:cNvPr id="4" name="TextBox 3"/>
+          <p:cNvSpPr txBox="1"/>
+          <p:nvPr/>
+        </p:nvSpPr>
+        <p:spPr>
+          <a:xfrm>
+            <a:off x="2531165" y="92765"/>
+            <a:ext cx="2491409" cy="400110"/>
+          </a:xfrm>
+          <a:prstGeom prst="rect">
+            <a:avLst/>
+          </a:prstGeom>
+          <a:noFill/>
+        </p:spPr>
+        <p:txBody>
+          <a:bodyPr wrap="square" rtlCol="0">
+            <a:spAutoFit/>
+          </a:bodyPr>
+          <a:lstStyle/>
+          <a:p>
+            <a:r>
+              <a:rPr lang="en-IN" sz="2000" b="1" dirty="0" smtClean="0">
+                <a:latin typeface="Times New Roman" panose="02020603050405020304" pitchFamily="18" charset="0"/>
+                <a:cs typeface="Times New Roman" panose="02020603050405020304" pitchFamily="18" charset="0"/>
+              </a:rPr>
+              <a:t>Week 7 </a:t>
+            </a:r>
+            <a:endParaRPr lang="en-IN" sz="2000" b="1" dirty="0">
+              <a:latin typeface="Times New Roman" panose="02020603050405020304" pitchFamily="18" charset="0"/>
+              <a:cs typeface="Times New Roman" panose="02020603050405020304" pitchFamily="18" charset="0"/>
+            </a:endParaRPr>
+          </a:p>
+        </p:txBody>
+      </p:sp>
     </p:spTree>
     <p:extLst>
       <p:ext uri="{BB962C8B-B14F-4D97-AF65-F5344CB8AC3E}">
-        <p14:creationId xmlns:p14="http://schemas.microsoft.com/office/powerpoint/2010/main" val="1745540862"/>
+        <p14:creationId xmlns:p14="http://schemas.microsoft.com/office/powerpoint/2010/main" val="1245714852"/>
       </p:ext>
     </p:extLst>
   </p:cSld>
@@ -7876,8 +8034,8 @@
         </p:nvSpPr>
         <p:spPr>
           <a:xfrm>
-            <a:off x="2955235" y="2146852"/>
-            <a:ext cx="6798365" cy="4154984"/>
+            <a:off x="2902226" y="2438399"/>
+            <a:ext cx="7235687" cy="3785652"/>
           </a:xfrm>
           <a:prstGeom prst="rect">
             <a:avLst/>
@@ -7891,15 +8049,15 @@
           <a:lstStyle/>
           <a:p>
             <a:pPr marL="342900" indent="-342900" algn="just">
-              <a:buFont typeface="Times New Roman" panose="02020603050405020304" pitchFamily="18" charset="0"/>
-              <a:buChar char="‾"/>
+              <a:buFont typeface="Arial" panose="020B0604020202020204" pitchFamily="34" charset="0"/>
+              <a:buChar char="•"/>
             </a:pPr>
             <a:r>
               <a:rPr lang="en-US" sz="2400" dirty="0" smtClean="0">
                 <a:latin typeface="Times New Roman" panose="02020603050405020304" pitchFamily="18" charset="0"/>
                 <a:cs typeface="Times New Roman" panose="02020603050405020304" pitchFamily="18" charset="0"/>
               </a:rPr>
-              <a:t>I studied the basic steps involved in building a Machine Learning model:</a:t>
+              <a:t>Regression is used to predict continuous values, such as house prices.</a:t>
             </a:r>
           </a:p>
           <a:p>
@@ -7908,11 +8066,18 @@
               <a:buChar char="•"/>
             </a:pPr>
             <a:r>
+              <a:rPr lang="en-US" sz="2400" b="1" dirty="0" smtClean="0">
+                <a:latin typeface="Times New Roman" panose="02020603050405020304" pitchFamily="18" charset="0"/>
+                <a:cs typeface="Times New Roman" panose="02020603050405020304" pitchFamily="18" charset="0"/>
+              </a:rPr>
+              <a:t>Linear Regression</a:t>
+            </a:r>
+            <a:r>
               <a:rPr lang="en-US" sz="2400" dirty="0" smtClean="0">
                 <a:latin typeface="Times New Roman" panose="02020603050405020304" pitchFamily="18" charset="0"/>
                 <a:cs typeface="Times New Roman" panose="02020603050405020304" pitchFamily="18" charset="0"/>
               </a:rPr>
-              <a:t>Data Collection</a:t>
+              <a:t> finds a straight-line relationship between independent and dependent variables.</a:t>
             </a:r>
           </a:p>
           <a:p>
@@ -7921,11 +8086,18 @@
               <a:buChar char="•"/>
             </a:pPr>
             <a:r>
+              <a:rPr lang="en-US" sz="2400" b="1" dirty="0" smtClean="0">
+                <a:latin typeface="Times New Roman" panose="02020603050405020304" pitchFamily="18" charset="0"/>
+                <a:cs typeface="Times New Roman" panose="02020603050405020304" pitchFamily="18" charset="0"/>
+              </a:rPr>
+              <a:t>Multiple Linear Regression</a:t>
+            </a:r>
+            <a:r>
               <a:rPr lang="en-US" sz="2400" dirty="0" smtClean="0">
                 <a:latin typeface="Times New Roman" panose="02020603050405020304" pitchFamily="18" charset="0"/>
                 <a:cs typeface="Times New Roman" panose="02020603050405020304" pitchFamily="18" charset="0"/>
               </a:rPr>
-              <a:t>Data Preprocessing</a:t>
+              <a:t> uses more than one independent variable for prediction.</a:t>
             </a:r>
           </a:p>
           <a:p>
@@ -7934,11 +8106,18 @@
               <a:buChar char="•"/>
             </a:pPr>
             <a:r>
+              <a:rPr lang="en-US" sz="2400" b="1" dirty="0" smtClean="0">
+                <a:latin typeface="Times New Roman" panose="02020603050405020304" pitchFamily="18" charset="0"/>
+                <a:cs typeface="Times New Roman" panose="02020603050405020304" pitchFamily="18" charset="0"/>
+              </a:rPr>
+              <a:t>Polynomial Regression</a:t>
+            </a:r>
+            <a:r>
               <a:rPr lang="en-US" sz="2400" dirty="0" smtClean="0">
                 <a:latin typeface="Times New Roman" panose="02020603050405020304" pitchFamily="18" charset="0"/>
                 <a:cs typeface="Times New Roman" panose="02020603050405020304" pitchFamily="18" charset="0"/>
               </a:rPr>
-              <a:t>Model Training</a:t>
+              <a:t> captures non-linear (curved) relationships.</a:t>
             </a:r>
           </a:p>
           <a:p>
@@ -7951,46 +8130,7 @@
                 <a:latin typeface="Times New Roman" panose="02020603050405020304" pitchFamily="18" charset="0"/>
                 <a:cs typeface="Times New Roman" panose="02020603050405020304" pitchFamily="18" charset="0"/>
               </a:rPr>
-              <a:t>Model Evaluation</a:t>
-            </a:r>
-          </a:p>
-          <a:p>
-            <a:pPr marL="342900" indent="-342900" algn="just">
-              <a:buFont typeface="Arial" panose="020B0604020202020204" pitchFamily="34" charset="0"/>
-              <a:buChar char="•"/>
-            </a:pPr>
-            <a:r>
-              <a:rPr lang="en-US" sz="2400" dirty="0" smtClean="0">
-                <a:latin typeface="Times New Roman" panose="02020603050405020304" pitchFamily="18" charset="0"/>
-                <a:cs typeface="Times New Roman" panose="02020603050405020304" pitchFamily="18" charset="0"/>
-              </a:rPr>
-              <a:t>Prediction</a:t>
-            </a:r>
-          </a:p>
-          <a:p>
-            <a:pPr marL="342900" indent="-342900" algn="just">
-              <a:buFont typeface="Times New Roman" panose="02020603050405020304" pitchFamily="18" charset="0"/>
-              <a:buChar char="‾"/>
-            </a:pPr>
-            <a:r>
-              <a:rPr lang="en-US" sz="2400" dirty="0" smtClean="0">
-                <a:latin typeface="Times New Roman" panose="02020603050405020304" pitchFamily="18" charset="0"/>
-                <a:cs typeface="Times New Roman" panose="02020603050405020304" pitchFamily="18" charset="0"/>
-              </a:rPr>
-              <a:t>Following this workflow ensures that the model is accurate and reliable.</a:t>
-            </a:r>
-          </a:p>
-          <a:p>
-            <a:pPr marL="342900" indent="-342900" algn="just">
-              <a:buFont typeface="Times New Roman" panose="02020603050405020304" pitchFamily="18" charset="0"/>
-              <a:buChar char="‾"/>
-            </a:pPr>
-            <a:r>
-              <a:rPr lang="en-US" sz="2400" dirty="0" smtClean="0">
-                <a:latin typeface="Times New Roman" panose="02020603050405020304" pitchFamily="18" charset="0"/>
-                <a:cs typeface="Times New Roman" panose="02020603050405020304" pitchFamily="18" charset="0"/>
-              </a:rPr>
-              <a:t>This week built a strong foundation for advanced ML concepts.</a:t>
+              <a:t>The main goal of regression is to find the best-fit line that minimizes prediction error.</a:t>
             </a:r>
             <a:endParaRPr lang="en-US" sz="2400" dirty="0">
               <a:latin typeface="Times New Roman" panose="02020603050405020304" pitchFamily="18" charset="0"/>
@@ -8007,8 +8147,8 @@
         </p:nvSpPr>
         <p:spPr>
           <a:xfrm>
-            <a:off x="3511826" y="874644"/>
-            <a:ext cx="5685182" cy="523220"/>
+            <a:off x="4359964" y="1073426"/>
+            <a:ext cx="4320209" cy="523220"/>
           </a:xfrm>
           <a:prstGeom prst="rect">
             <a:avLst/>
@@ -8026,14 +8166,14 @@
                 <a:latin typeface="Times New Roman" panose="02020603050405020304" pitchFamily="18" charset="0"/>
                 <a:cs typeface="Times New Roman" panose="02020603050405020304" pitchFamily="18" charset="0"/>
               </a:rPr>
-              <a:t>Machine Learning </a:t>
+              <a:t>Regression </a:t>
             </a:r>
             <a:r>
               <a:rPr lang="en-US" sz="2800" b="1" dirty="0" smtClean="0">
                 <a:latin typeface="Times New Roman" panose="02020603050405020304" pitchFamily="18" charset="0"/>
                 <a:cs typeface="Times New Roman" panose="02020603050405020304" pitchFamily="18" charset="0"/>
               </a:rPr>
-              <a:t>Workflow</a:t>
+              <a:t>Concepts</a:t>
             </a:r>
             <a:endParaRPr lang="en-US" sz="2800" b="1" dirty="0">
               <a:latin typeface="Times New Roman" panose="02020603050405020304" pitchFamily="18" charset="0"/>
@@ -8045,7 +8185,7 @@
     </p:spTree>
     <p:extLst>
       <p:ext uri="{BB962C8B-B14F-4D97-AF65-F5344CB8AC3E}">
-        <p14:creationId xmlns:p14="http://schemas.microsoft.com/office/powerpoint/2010/main" val="498124957"/>
+        <p14:creationId xmlns:p14="http://schemas.microsoft.com/office/powerpoint/2010/main" val="2299453001"/>
       </p:ext>
     </p:extLst>
   </p:cSld>
@@ -8080,8 +8220,8 @@
         </p:nvSpPr>
         <p:spPr>
           <a:xfrm>
-            <a:off x="2729948" y="1643269"/>
-            <a:ext cx="7964556" cy="4893647"/>
+            <a:off x="2716696" y="1298713"/>
+            <a:ext cx="8242852" cy="5262979"/>
           </a:xfrm>
           <a:prstGeom prst="rect">
             <a:avLst/>
@@ -8103,21 +8243,7 @@
                 <a:latin typeface="Times New Roman" panose="02020603050405020304" pitchFamily="18" charset="0"/>
                 <a:cs typeface="Times New Roman" panose="02020603050405020304" pitchFamily="18" charset="0"/>
               </a:rPr>
-              <a:t>In Machine Learning, data cannot be used directly. The first step is </a:t>
-            </a:r>
-            <a:r>
-              <a:rPr lang="en-US" sz="2400" b="1" dirty="0" smtClean="0">
-                <a:latin typeface="Times New Roman" panose="02020603050405020304" pitchFamily="18" charset="0"/>
-                <a:cs typeface="Times New Roman" panose="02020603050405020304" pitchFamily="18" charset="0"/>
-              </a:rPr>
-              <a:t>Data Preprocessing</a:t>
-            </a:r>
-            <a:r>
-              <a:rPr lang="en-US" sz="2400" dirty="0" smtClean="0">
-                <a:latin typeface="Times New Roman" panose="02020603050405020304" pitchFamily="18" charset="0"/>
-                <a:cs typeface="Times New Roman" panose="02020603050405020304" pitchFamily="18" charset="0"/>
-              </a:rPr>
-              <a:t>.</a:t>
+              <a:t>After building a model, it is important to measure its performance.</a:t>
             </a:r>
           </a:p>
           <a:p>
@@ -8130,8 +8256,95 @@
                 <a:latin typeface="Times New Roman" panose="02020603050405020304" pitchFamily="18" charset="0"/>
                 <a:cs typeface="Times New Roman" panose="02020603050405020304" pitchFamily="18" charset="0"/>
               </a:rPr>
-              <a:t>Feature Scaling helps bring large and small values into the same range.</a:t>
-            </a:r>
+              <a:t>For regression, we use:</a:t>
+            </a:r>
+          </a:p>
+          <a:p>
+            <a:pPr marL="457200" indent="-457200" algn="just">
+              <a:buFont typeface="+mj-lt"/>
+              <a:buAutoNum type="arabicPeriod"/>
+            </a:pPr>
+            <a:r>
+              <a:rPr lang="en-US" sz="2400" b="1" dirty="0" smtClean="0">
+                <a:latin typeface="Times New Roman" panose="02020603050405020304" pitchFamily="18" charset="0"/>
+                <a:cs typeface="Times New Roman" panose="02020603050405020304" pitchFamily="18" charset="0"/>
+              </a:rPr>
+              <a:t>MAE (Mean Absolute Error)</a:t>
+            </a:r>
+            <a:r>
+              <a:rPr lang="en-US" sz="2400" dirty="0" smtClean="0">
+                <a:latin typeface="Times New Roman" panose="02020603050405020304" pitchFamily="18" charset="0"/>
+                <a:cs typeface="Times New Roman" panose="02020603050405020304" pitchFamily="18" charset="0"/>
+              </a:rPr>
+              <a:t> – average prediction error</a:t>
+            </a:r>
+          </a:p>
+          <a:p>
+            <a:pPr marL="457200" indent="-457200" algn="just">
+              <a:buFont typeface="+mj-lt"/>
+              <a:buAutoNum type="arabicPeriod"/>
+            </a:pPr>
+            <a:r>
+              <a:rPr lang="en-US" sz="2400" b="1" dirty="0" smtClean="0">
+                <a:latin typeface="Times New Roman" panose="02020603050405020304" pitchFamily="18" charset="0"/>
+                <a:cs typeface="Times New Roman" panose="02020603050405020304" pitchFamily="18" charset="0"/>
+              </a:rPr>
+              <a:t>MSE (Mean Squared Error)</a:t>
+            </a:r>
+            <a:r>
+              <a:rPr lang="en-US" sz="2400" dirty="0" smtClean="0">
+                <a:latin typeface="Times New Roman" panose="02020603050405020304" pitchFamily="18" charset="0"/>
+                <a:cs typeface="Times New Roman" panose="02020603050405020304" pitchFamily="18" charset="0"/>
+              </a:rPr>
+              <a:t> – squared error</a:t>
+            </a:r>
+          </a:p>
+          <a:p>
+            <a:pPr marL="457200" indent="-457200" algn="just">
+              <a:buFont typeface="+mj-lt"/>
+              <a:buAutoNum type="arabicPeriod"/>
+            </a:pPr>
+            <a:r>
+              <a:rPr lang="en-US" sz="2400" b="1" dirty="0" smtClean="0">
+                <a:latin typeface="Times New Roman" panose="02020603050405020304" pitchFamily="18" charset="0"/>
+                <a:cs typeface="Times New Roman" panose="02020603050405020304" pitchFamily="18" charset="0"/>
+              </a:rPr>
+              <a:t>RMSE</a:t>
+            </a:r>
+            <a:r>
+              <a:rPr lang="en-US" sz="2400" dirty="0" smtClean="0">
+                <a:latin typeface="Times New Roman" panose="02020603050405020304" pitchFamily="18" charset="0"/>
+                <a:cs typeface="Times New Roman" panose="02020603050405020304" pitchFamily="18" charset="0"/>
+              </a:rPr>
+              <a:t> – square root of MSE</a:t>
+            </a:r>
+          </a:p>
+          <a:p>
+            <a:pPr marL="457200" indent="-457200" algn="just">
+              <a:buFont typeface="+mj-lt"/>
+              <a:buAutoNum type="arabicPeriod"/>
+            </a:pPr>
+            <a:r>
+              <a:rPr lang="en-US" sz="2400" b="1" dirty="0" smtClean="0">
+                <a:latin typeface="Times New Roman" panose="02020603050405020304" pitchFamily="18" charset="0"/>
+                <a:cs typeface="Times New Roman" panose="02020603050405020304" pitchFamily="18" charset="0"/>
+              </a:rPr>
+              <a:t>R² Score</a:t>
+            </a:r>
+            <a:r>
+              <a:rPr lang="en-US" sz="2400" dirty="0" smtClean="0">
+                <a:latin typeface="Times New Roman" panose="02020603050405020304" pitchFamily="18" charset="0"/>
+                <a:cs typeface="Times New Roman" panose="02020603050405020304" pitchFamily="18" charset="0"/>
+              </a:rPr>
+              <a:t> – shows how much variance the model explains</a:t>
+            </a:r>
+          </a:p>
+          <a:p>
+            <a:pPr algn="just"/>
+            <a:endParaRPr lang="en-US" sz="2400" dirty="0" smtClean="0">
+              <a:latin typeface="Times New Roman" panose="02020603050405020304" pitchFamily="18" charset="0"/>
+              <a:cs typeface="Times New Roman" panose="02020603050405020304" pitchFamily="18" charset="0"/>
+            </a:endParaRPr>
           </a:p>
           <a:p>
             <a:pPr marL="342900" indent="-342900" algn="just">
@@ -8139,18 +8352,51 @@
               <a:buChar char="•"/>
             </a:pPr>
             <a:r>
+              <a:rPr lang="en-US" sz="2400" dirty="0" smtClean="0">
+                <a:latin typeface="Times New Roman" panose="02020603050405020304" pitchFamily="18" charset="0"/>
+                <a:cs typeface="Times New Roman" panose="02020603050405020304" pitchFamily="18" charset="0"/>
+              </a:rPr>
+              <a:t>For validation:</a:t>
+            </a:r>
+          </a:p>
+          <a:p>
+            <a:pPr marL="457200" indent="-457200" algn="just">
+              <a:buFont typeface="+mj-lt"/>
+              <a:buAutoNum type="arabicPeriod"/>
+            </a:pPr>
+            <a:r>
               <a:rPr lang="en-US" sz="2400" b="1" dirty="0" smtClean="0">
                 <a:latin typeface="Times New Roman" panose="02020603050405020304" pitchFamily="18" charset="0"/>
                 <a:cs typeface="Times New Roman" panose="02020603050405020304" pitchFamily="18" charset="0"/>
               </a:rPr>
-              <a:t>Normalization</a:t>
+              <a:t>Train-Test Split</a:t>
             </a:r>
             <a:r>
               <a:rPr lang="en-US" sz="2400" dirty="0" smtClean="0">
                 <a:latin typeface="Times New Roman" panose="02020603050405020304" pitchFamily="18" charset="0"/>
                 <a:cs typeface="Times New Roman" panose="02020603050405020304" pitchFamily="18" charset="0"/>
               </a:rPr>
-              <a:t> converts data into a range between 0 and 1.</a:t>
+              <a:t> divides data into training and testing sets</a:t>
+            </a:r>
+          </a:p>
+          <a:p>
+            <a:pPr marL="457200" indent="-457200" algn="just">
+              <a:buFont typeface="+mj-lt"/>
+              <a:buAutoNum type="arabicPeriod"/>
+            </a:pPr>
+            <a:r>
+              <a:rPr lang="en-US" sz="2400" b="1" dirty="0" smtClean="0">
+                <a:latin typeface="Times New Roman" panose="02020603050405020304" pitchFamily="18" charset="0"/>
+                <a:cs typeface="Times New Roman" panose="02020603050405020304" pitchFamily="18" charset="0"/>
+              </a:rPr>
+              <a:t>Cross Validation (Holdout Method)</a:t>
+            </a:r>
+            <a:r>
+              <a:rPr lang="en-US" sz="2400" dirty="0" smtClean="0">
+                <a:latin typeface="Times New Roman" panose="02020603050405020304" pitchFamily="18" charset="0"/>
+                <a:cs typeface="Times New Roman" panose="02020603050405020304" pitchFamily="18" charset="0"/>
+              </a:rPr>
+              <a:t> checks how well the model generalizes to new data</a:t>
             </a:r>
           </a:p>
           <a:p>
@@ -8159,84 +8405,11 @@
               <a:buChar char="•"/>
             </a:pPr>
             <a:r>
-              <a:rPr lang="en-US" sz="2400" b="1" dirty="0" smtClean="0">
-                <a:latin typeface="Times New Roman" panose="02020603050405020304" pitchFamily="18" charset="0"/>
-                <a:cs typeface="Times New Roman" panose="02020603050405020304" pitchFamily="18" charset="0"/>
-              </a:rPr>
-              <a:t>Standardization</a:t>
-            </a:r>
-            <a:r>
               <a:rPr lang="en-US" sz="2400" dirty="0" smtClean="0">
                 <a:latin typeface="Times New Roman" panose="02020603050405020304" pitchFamily="18" charset="0"/>
                 <a:cs typeface="Times New Roman" panose="02020603050405020304" pitchFamily="18" charset="0"/>
               </a:rPr>
-              <a:t> converts data so that the mean becomes 0 and the standard deviation becomes 1.</a:t>
-            </a:r>
-          </a:p>
-          <a:p>
-            <a:pPr marL="342900" indent="-342900" algn="just">
-              <a:buFont typeface="Arial" panose="020B0604020202020204" pitchFamily="34" charset="0"/>
-              <a:buChar char="•"/>
-            </a:pPr>
-            <a:r>
-              <a:rPr lang="en-US" sz="2400" dirty="0" smtClean="0">
-                <a:latin typeface="Times New Roman" panose="02020603050405020304" pitchFamily="18" charset="0"/>
-                <a:cs typeface="Times New Roman" panose="02020603050405020304" pitchFamily="18" charset="0"/>
-              </a:rPr>
-              <a:t>Feature Encoding is used to convert categorical data into numerical form.</a:t>
-            </a:r>
-          </a:p>
-          <a:p>
-            <a:pPr marL="342900" indent="-342900" algn="just">
-              <a:buFont typeface="Arial" panose="020B0604020202020204" pitchFamily="34" charset="0"/>
-              <a:buChar char="•"/>
-            </a:pPr>
-            <a:r>
-              <a:rPr lang="en-US" sz="2400" b="1" dirty="0" smtClean="0">
-                <a:latin typeface="Times New Roman" panose="02020603050405020304" pitchFamily="18" charset="0"/>
-                <a:cs typeface="Times New Roman" panose="02020603050405020304" pitchFamily="18" charset="0"/>
-              </a:rPr>
-              <a:t>Label Encoding</a:t>
-            </a:r>
-            <a:r>
-              <a:rPr lang="en-US" sz="2400" dirty="0" smtClean="0">
-                <a:latin typeface="Times New Roman" panose="02020603050405020304" pitchFamily="18" charset="0"/>
-                <a:cs typeface="Times New Roman" panose="02020603050405020304" pitchFamily="18" charset="0"/>
-              </a:rPr>
-              <a:t> assigns a unique number to each category.</a:t>
-            </a:r>
-          </a:p>
-          <a:p>
-            <a:pPr marL="342900" indent="-342900" algn="just">
-              <a:buFont typeface="Arial" panose="020B0604020202020204" pitchFamily="34" charset="0"/>
-              <a:buChar char="•"/>
-            </a:pPr>
-            <a:r>
-              <a:rPr lang="en-US" sz="2400" b="1" dirty="0" smtClean="0">
-                <a:latin typeface="Times New Roman" panose="02020603050405020304" pitchFamily="18" charset="0"/>
-                <a:cs typeface="Times New Roman" panose="02020603050405020304" pitchFamily="18" charset="0"/>
-              </a:rPr>
-              <a:t>One Hot Encoding</a:t>
-            </a:r>
-            <a:r>
-              <a:rPr lang="en-US" sz="2400" dirty="0" smtClean="0">
-                <a:latin typeface="Times New Roman" panose="02020603050405020304" pitchFamily="18" charset="0"/>
-                <a:cs typeface="Times New Roman" panose="02020603050405020304" pitchFamily="18" charset="0"/>
-              </a:rPr>
-              <a:t> creates separate binary columns for each category.</a:t>
-            </a:r>
-          </a:p>
-          <a:p>
-            <a:pPr marL="342900" indent="-342900" algn="just">
-              <a:buFont typeface="Arial" panose="020B0604020202020204" pitchFamily="34" charset="0"/>
-              <a:buChar char="•"/>
-            </a:pPr>
-            <a:r>
-              <a:rPr lang="en-US" sz="2400" dirty="0" smtClean="0">
-                <a:latin typeface="Times New Roman" panose="02020603050405020304" pitchFamily="18" charset="0"/>
-                <a:cs typeface="Times New Roman" panose="02020603050405020304" pitchFamily="18" charset="0"/>
-              </a:rPr>
-              <a:t>Preprocessing makes the model faster and more accurate.</a:t>
+              <a:t>Evaluation helps us understand whether the model is overfitting or performing properly.</a:t>
             </a:r>
             <a:endParaRPr lang="en-US" sz="2400" dirty="0">
               <a:latin typeface="Times New Roman" panose="02020603050405020304" pitchFamily="18" charset="0"/>
@@ -8253,8 +8426,8 @@
         </p:nvSpPr>
         <p:spPr>
           <a:xfrm>
-            <a:off x="3776870" y="821635"/>
-            <a:ext cx="5353878" cy="523220"/>
+            <a:off x="3776870" y="410818"/>
+            <a:ext cx="5512904" cy="523220"/>
           </a:xfrm>
           <a:prstGeom prst="rect">
             <a:avLst/>
@@ -8272,14 +8445,14 @@
                 <a:latin typeface="Times New Roman" panose="02020603050405020304" pitchFamily="18" charset="0"/>
                 <a:cs typeface="Times New Roman" panose="02020603050405020304" pitchFamily="18" charset="0"/>
               </a:rPr>
-              <a:t>Data Preprocessing </a:t>
+              <a:t>Model Evaluation &amp; </a:t>
             </a:r>
             <a:r>
               <a:rPr lang="en-US" sz="2800" b="1" dirty="0" smtClean="0">
                 <a:latin typeface="Times New Roman" panose="02020603050405020304" pitchFamily="18" charset="0"/>
                 <a:cs typeface="Times New Roman" panose="02020603050405020304" pitchFamily="18" charset="0"/>
               </a:rPr>
-              <a:t>Techniques</a:t>
+              <a:t>Validation</a:t>
             </a:r>
             <a:endParaRPr lang="en-US" sz="2800" b="1" dirty="0">
               <a:latin typeface="Times New Roman" panose="02020603050405020304" pitchFamily="18" charset="0"/>
@@ -8288,46 +8461,10 @@
           </a:p>
         </p:txBody>
       </p:sp>
-      <p:sp>
-        <p:nvSpPr>
-          <p:cNvPr id="4" name="TextBox 3"/>
-          <p:cNvSpPr txBox="1"/>
-          <p:nvPr/>
-        </p:nvSpPr>
-        <p:spPr>
-          <a:xfrm>
-            <a:off x="2531165" y="92765"/>
-            <a:ext cx="2491409" cy="400110"/>
-          </a:xfrm>
-          <a:prstGeom prst="rect">
-            <a:avLst/>
-          </a:prstGeom>
-          <a:noFill/>
-        </p:spPr>
-        <p:txBody>
-          <a:bodyPr wrap="square" rtlCol="0">
-            <a:spAutoFit/>
-          </a:bodyPr>
-          <a:lstStyle/>
-          <a:p>
-            <a:r>
-              <a:rPr lang="en-IN" sz="2000" b="1" dirty="0" smtClean="0">
-                <a:latin typeface="Times New Roman" panose="02020603050405020304" pitchFamily="18" charset="0"/>
-                <a:cs typeface="Times New Roman" panose="02020603050405020304" pitchFamily="18" charset="0"/>
-              </a:rPr>
-              <a:t>Week 7 </a:t>
-            </a:r>
-            <a:endParaRPr lang="en-IN" sz="2000" b="1" dirty="0">
-              <a:latin typeface="Times New Roman" panose="02020603050405020304" pitchFamily="18" charset="0"/>
-              <a:cs typeface="Times New Roman" panose="02020603050405020304" pitchFamily="18" charset="0"/>
-            </a:endParaRPr>
-          </a:p>
-        </p:txBody>
-      </p:sp>
     </p:spTree>
     <p:extLst>
       <p:ext uri="{BB962C8B-B14F-4D97-AF65-F5344CB8AC3E}">
-        <p14:creationId xmlns:p14="http://schemas.microsoft.com/office/powerpoint/2010/main" val="1245714852"/>
+        <p14:creationId xmlns:p14="http://schemas.microsoft.com/office/powerpoint/2010/main" val="2945989200"/>
       </p:ext>
     </p:extLst>
   </p:cSld>
@@ -8356,131 +8493,478 @@
       </p:grpSpPr>
       <p:sp>
         <p:nvSpPr>
-          <p:cNvPr id="2" name="TextBox 1"/>
-          <p:cNvSpPr txBox="1"/>
+          <p:cNvPr id="4" name="Rectangle 1"/>
+          <p:cNvSpPr>
+            <a:spLocks noChangeArrowheads="1"/>
+          </p:cNvSpPr>
           <p:nvPr/>
         </p:nvSpPr>
-        <p:spPr>
+        <p:spPr bwMode="auto">
           <a:xfrm>
-            <a:off x="2597426" y="2332382"/>
-            <a:ext cx="7951304" cy="3046988"/>
+            <a:off x="3389991" y="1489653"/>
+            <a:ext cx="6769802" cy="3323987"/>
           </a:xfrm>
           <a:prstGeom prst="rect">
             <a:avLst/>
           </a:prstGeom>
           <a:noFill/>
+          <a:ln>
+            <a:noFill/>
+          </a:ln>
+          <a:effectLst/>
+          <a:extLst>
+            <a:ext uri="{909E8E84-426E-40DD-AFC4-6F175D3DCCD1}">
+              <a14:hiddenFill xmlns:a14="http://schemas.microsoft.com/office/drawing/2010/main">
+                <a:solidFill>
+                  <a:schemeClr val="accent1"/>
+                </a:solidFill>
+              </a14:hiddenFill>
+            </a:ext>
+            <a:ext uri="{91240B29-F687-4F45-9708-019B960494DF}">
+              <a14:hiddenLine xmlns:a14="http://schemas.microsoft.com/office/drawing/2010/main" w="9525">
+                <a:solidFill>
+                  <a:schemeClr val="tx1"/>
+                </a:solidFill>
+                <a:miter lim="800000"/>
+                <a:headEnd/>
+                <a:tailEnd/>
+              </a14:hiddenLine>
+            </a:ext>
+            <a:ext uri="{AF507438-7753-43E0-B8FC-AC1667EBCBE1}">
+              <a14:hiddenEffects xmlns:a14="http://schemas.microsoft.com/office/drawing/2010/main">
+                <a:effectLst>
+                  <a:outerShdw dist="35921" dir="2700000" algn="ctr" rotWithShape="0">
+                    <a:schemeClr val="bg2"/>
+                  </a:outerShdw>
+                </a:effectLst>
+              </a14:hiddenEffects>
+            </a:ext>
+          </a:extLst>
         </p:spPr>
         <p:txBody>
-          <a:bodyPr wrap="square" rtlCol="0">
+          <a:bodyPr vert="horz" wrap="none" lIns="91440" tIns="45720" rIns="91440" bIns="45720" numCol="1" anchor="ctr" anchorCtr="0" compatLnSpc="1">
+            <a:prstTxWarp prst="textNoShape">
+              <a:avLst/>
+            </a:prstTxWarp>
             <a:spAutoFit/>
           </a:bodyPr>
           <a:lstStyle/>
           <a:p>
-            <a:pPr marL="342900" indent="-342900" algn="just">
+            <a:pPr marL="0" marR="0" lvl="0" indent="0" algn="just" defTabSz="914400" rtl="0" eaLnBrk="0" fontAlgn="base" latinLnBrk="0" hangingPunct="0">
+              <a:lnSpc>
+                <a:spcPct val="100000"/>
+              </a:lnSpc>
+              <a:spcBef>
+                <a:spcPct val="0"/>
+              </a:spcBef>
+              <a:spcAft>
+                <a:spcPct val="0"/>
+              </a:spcAft>
+              <a:buClrTx/>
+              <a:buSzTx/>
+              <a:buFontTx/>
+              <a:buNone/>
+              <a:tabLst/>
+            </a:pPr>
+            <a:endParaRPr kumimoji="0" lang="en-US" altLang="en-US" sz="2000" b="0" i="0" u="none" strike="noStrike" cap="none" normalizeH="0" baseline="0" dirty="0" smtClean="0">
+              <a:ln>
+                <a:noFill/>
+              </a:ln>
+              <a:solidFill>
+                <a:schemeClr val="tx1"/>
+              </a:solidFill>
+              <a:effectLst/>
+              <a:latin typeface="Times New Roman" panose="02020603050405020304" pitchFamily="18" charset="0"/>
+              <a:cs typeface="Times New Roman" panose="02020603050405020304" pitchFamily="18" charset="0"/>
+            </a:endParaRPr>
+          </a:p>
+          <a:p>
+            <a:pPr marL="342900" marR="0" lvl="0" indent="-342900" algn="just" defTabSz="914400" rtl="0" eaLnBrk="0" fontAlgn="base" latinLnBrk="0" hangingPunct="0">
+              <a:lnSpc>
+                <a:spcPct val="100000"/>
+              </a:lnSpc>
+              <a:spcBef>
+                <a:spcPct val="0"/>
+              </a:spcBef>
+              <a:spcAft>
+                <a:spcPct val="0"/>
+              </a:spcAft>
+              <a:buClrTx/>
+              <a:buSzTx/>
+              <a:buFont typeface="Arial" panose="020B0604020202020204" pitchFamily="34" charset="0"/>
+              <a:buChar char="•"/>
+              <a:tabLst/>
+            </a:pPr>
+            <a:r>
+              <a:rPr lang="en-US" altLang="en-US" sz="2000" b="1" dirty="0">
+                <a:latin typeface="Times New Roman" panose="02020603050405020304" pitchFamily="18" charset="0"/>
+                <a:cs typeface="Times New Roman" panose="02020603050405020304" pitchFamily="18" charset="0"/>
+              </a:rPr>
+              <a:t>L</a:t>
+            </a:r>
+            <a:r>
+              <a:rPr kumimoji="0" lang="en-US" altLang="en-US" sz="2000" b="1" i="0" u="none" strike="noStrike" cap="none" normalizeH="0" baseline="0" dirty="0" smtClean="0">
+                <a:ln>
+                  <a:noFill/>
+                </a:ln>
+                <a:solidFill>
+                  <a:schemeClr val="tx1"/>
+                </a:solidFill>
+                <a:effectLst/>
+                <a:latin typeface="Times New Roman" panose="02020603050405020304" pitchFamily="18" charset="0"/>
+                <a:cs typeface="Times New Roman" panose="02020603050405020304" pitchFamily="18" charset="0"/>
+              </a:rPr>
+              <a:t>oops (for, while)</a:t>
+            </a:r>
+            <a:r>
+              <a:rPr kumimoji="0" lang="en-US" altLang="en-US" sz="2000" b="0" i="0" u="none" strike="noStrike" cap="none" normalizeH="0" baseline="0" dirty="0" smtClean="0">
+                <a:ln>
+                  <a:noFill/>
+                </a:ln>
+                <a:solidFill>
+                  <a:schemeClr val="tx1"/>
+                </a:solidFill>
+                <a:effectLst/>
+                <a:latin typeface="Times New Roman" panose="02020603050405020304" pitchFamily="18" charset="0"/>
+                <a:cs typeface="Times New Roman" panose="02020603050405020304" pitchFamily="18" charset="0"/>
+              </a:rPr>
+              <a:t> :</a:t>
+            </a:r>
+          </a:p>
+          <a:p>
+            <a:pPr marL="0" marR="0" lvl="0" indent="0" algn="just" defTabSz="914400" rtl="0" eaLnBrk="0" fontAlgn="base" latinLnBrk="0" hangingPunct="0">
+              <a:lnSpc>
+                <a:spcPct val="100000"/>
+              </a:lnSpc>
+              <a:spcBef>
+                <a:spcPct val="0"/>
+              </a:spcBef>
+              <a:spcAft>
+                <a:spcPct val="0"/>
+              </a:spcAft>
+              <a:buClrTx/>
+              <a:buSzTx/>
+              <a:tabLst/>
+            </a:pPr>
+            <a:r>
+              <a:rPr kumimoji="0" lang="en-US" altLang="en-US" sz="2000" b="0" i="0" u="none" strike="noStrike" cap="none" normalizeH="0" baseline="0" dirty="0" smtClean="0">
+                <a:ln>
+                  <a:noFill/>
+                </a:ln>
+                <a:solidFill>
+                  <a:schemeClr val="tx1"/>
+                </a:solidFill>
+                <a:effectLst/>
+                <a:latin typeface="Times New Roman" panose="02020603050405020304" pitchFamily="18" charset="0"/>
+                <a:cs typeface="Times New Roman" panose="02020603050405020304" pitchFamily="18" charset="0"/>
+              </a:rPr>
+              <a:t>repeat tasks multiple times automatically</a:t>
+            </a:r>
+          </a:p>
+          <a:p>
+            <a:pPr lvl="0" algn="just" eaLnBrk="0" fontAlgn="base" hangingPunct="0">
+              <a:spcBef>
+                <a:spcPct val="0"/>
+              </a:spcBef>
+              <a:spcAft>
+                <a:spcPct val="0"/>
+              </a:spcAft>
+            </a:pPr>
+            <a:endParaRPr lang="en-US" altLang="en-US" sz="2000" dirty="0" smtClean="0">
+              <a:latin typeface="Times New Roman" panose="02020603050405020304" pitchFamily="18" charset="0"/>
+              <a:cs typeface="Times New Roman" panose="02020603050405020304" pitchFamily="18" charset="0"/>
+            </a:endParaRPr>
+          </a:p>
+          <a:p>
+            <a:pPr marL="342900" lvl="0" indent="-342900" algn="just" eaLnBrk="0" fontAlgn="base" hangingPunct="0">
+              <a:spcBef>
+                <a:spcPct val="0"/>
+              </a:spcBef>
+              <a:spcAft>
+                <a:spcPct val="0"/>
+              </a:spcAft>
               <a:buFont typeface="Arial" panose="020B0604020202020204" pitchFamily="34" charset="0"/>
               <a:buChar char="•"/>
             </a:pPr>
             <a:r>
-              <a:rPr lang="en-US" sz="2400" dirty="0" smtClean="0">
-                <a:latin typeface="Times New Roman" panose="02020603050405020304" pitchFamily="18" charset="0"/>
-                <a:cs typeface="Times New Roman" panose="02020603050405020304" pitchFamily="18" charset="0"/>
-              </a:rPr>
-              <a:t>In this week, I built a strong foundation in Python programming.</a:t>
-            </a:r>
-          </a:p>
-          <a:p>
-            <a:pPr marL="342900" indent="-342900" algn="just">
-              <a:buFont typeface="Arial" panose="020B0604020202020204" pitchFamily="34" charset="0"/>
-              <a:buChar char="•"/>
-            </a:pPr>
-            <a:r>
-              <a:rPr lang="en-US" sz="2400" dirty="0" smtClean="0">
-                <a:latin typeface="Times New Roman" panose="02020603050405020304" pitchFamily="18" charset="0"/>
-                <a:cs typeface="Times New Roman" panose="02020603050405020304" pitchFamily="18" charset="0"/>
-              </a:rPr>
-              <a:t>I learned about variables, data types, operators, conditional statements (if-else), and loops (for, while).</a:t>
-            </a:r>
-          </a:p>
-          <a:p>
-            <a:pPr marL="342900" indent="-342900" algn="just">
-              <a:buFont typeface="Arial" panose="020B0604020202020204" pitchFamily="34" charset="0"/>
-              <a:buChar char="•"/>
-            </a:pPr>
-            <a:r>
-              <a:rPr lang="en-US" sz="2400" dirty="0" smtClean="0">
-                <a:latin typeface="Times New Roman" panose="02020603050405020304" pitchFamily="18" charset="0"/>
-                <a:cs typeface="Times New Roman" panose="02020603050405020304" pitchFamily="18" charset="0"/>
-              </a:rPr>
-              <a:t>I also practiced working with data structures such as lists, tuples, dictionaries, and sets.</a:t>
-            </a:r>
-          </a:p>
-          <a:p>
-            <a:pPr marL="342900" indent="-342900" algn="just">
-              <a:buFont typeface="Arial" panose="020B0604020202020204" pitchFamily="34" charset="0"/>
-              <a:buChar char="•"/>
-            </a:pPr>
-            <a:r>
-              <a:rPr lang="en-US" sz="2400" dirty="0" smtClean="0">
-                <a:latin typeface="Times New Roman" panose="02020603050405020304" pitchFamily="18" charset="0"/>
-                <a:cs typeface="Times New Roman" panose="02020603050405020304" pitchFamily="18" charset="0"/>
-              </a:rPr>
-              <a:t>These core concepts helped me understand how to structure logic and solve programming problems efficiently.</a:t>
-            </a:r>
-            <a:endParaRPr lang="en-US" sz="2400" dirty="0">
+              <a:rPr kumimoji="0" lang="en-US" altLang="en-US" sz="2000" b="1" i="0" u="none" strike="noStrike" cap="none" normalizeH="0" dirty="0" err="1" smtClean="0">
+                <a:ln>
+                  <a:noFill/>
+                </a:ln>
+                <a:solidFill>
+                  <a:schemeClr val="tx1"/>
+                </a:solidFill>
+                <a:effectLst/>
+                <a:latin typeface="Times New Roman" panose="02020603050405020304" pitchFamily="18" charset="0"/>
+                <a:cs typeface="Times New Roman" panose="02020603050405020304" pitchFamily="18" charset="0"/>
+              </a:rPr>
+              <a:t>DataStructure</a:t>
+            </a:r>
+            <a:r>
+              <a:rPr kumimoji="0" lang="en-US" altLang="en-US" sz="2000" b="1" i="0" u="none" strike="noStrike" cap="none" normalizeH="0" dirty="0" smtClean="0">
+                <a:ln>
+                  <a:noFill/>
+                </a:ln>
+                <a:solidFill>
+                  <a:schemeClr val="tx1"/>
+                </a:solidFill>
+                <a:effectLst/>
+                <a:latin typeface="Times New Roman" panose="02020603050405020304" pitchFamily="18" charset="0"/>
+                <a:cs typeface="Times New Roman" panose="02020603050405020304" pitchFamily="18" charset="0"/>
+              </a:rPr>
+              <a:t>:</a:t>
+            </a:r>
+            <a:endParaRPr kumimoji="0" lang="en-US" altLang="en-US" sz="2000" b="0" i="0" u="none" strike="noStrike" cap="none" normalizeH="0" baseline="0" dirty="0" smtClean="0">
+              <a:ln>
+                <a:noFill/>
+              </a:ln>
+              <a:solidFill>
+                <a:schemeClr val="tx1"/>
+              </a:solidFill>
+              <a:effectLst/>
               <a:latin typeface="Times New Roman" panose="02020603050405020304" pitchFamily="18" charset="0"/>
               <a:cs typeface="Times New Roman" panose="02020603050405020304" pitchFamily="18" charset="0"/>
             </a:endParaRPr>
           </a:p>
-        </p:txBody>
-      </p:sp>
-      <p:sp>
-        <p:nvSpPr>
-          <p:cNvPr id="3" name="TextBox 2"/>
-          <p:cNvSpPr txBox="1"/>
-          <p:nvPr/>
-        </p:nvSpPr>
-        <p:spPr>
-          <a:xfrm>
-            <a:off x="4359965" y="821635"/>
-            <a:ext cx="6188765" cy="954107"/>
-          </a:xfrm>
-          <a:prstGeom prst="rect">
-            <a:avLst/>
-          </a:prstGeom>
-          <a:noFill/>
-        </p:spPr>
-        <p:txBody>
-          <a:bodyPr wrap="square" rtlCol="0">
-            <a:spAutoFit/>
-          </a:bodyPr>
-          <a:lstStyle/>
-          <a:p>
-            <a:r>
-              <a:rPr lang="en-US" sz="2800" b="1" dirty="0">
-                <a:latin typeface="Times New Roman" panose="02020603050405020304" pitchFamily="18" charset="0"/>
-                <a:cs typeface="Times New Roman" panose="02020603050405020304" pitchFamily="18" charset="0"/>
-              </a:rPr>
-              <a:t>Python Fundamentals</a:t>
-            </a:r>
-          </a:p>
-          <a:p>
-            <a:endParaRPr lang="en-IN" sz="2800" dirty="0">
-              <a:latin typeface="Times New Roman" panose="02020603050405020304" pitchFamily="18" charset="0"/>
-              <a:cs typeface="Times New Roman" panose="02020603050405020304" pitchFamily="18" charset="0"/>
-            </a:endParaRPr>
+          <a:p>
+            <a:pPr lvl="0" algn="just" eaLnBrk="0" fontAlgn="base" hangingPunct="0">
+              <a:lnSpc>
+                <a:spcPct val="150000"/>
+              </a:lnSpc>
+              <a:spcBef>
+                <a:spcPct val="0"/>
+              </a:spcBef>
+              <a:spcAft>
+                <a:spcPct val="0"/>
+              </a:spcAft>
+            </a:pPr>
+            <a:r>
+              <a:rPr lang="en-US" sz="2000" dirty="0">
+                <a:latin typeface="Times New Roman" panose="02020603050405020304" pitchFamily="18" charset="0"/>
+                <a:cs typeface="Times New Roman" panose="02020603050405020304" pitchFamily="18" charset="0"/>
+              </a:rPr>
+              <a:t>Data structures help in </a:t>
+            </a:r>
+            <a:r>
+              <a:rPr lang="en-US" sz="2000" b="1" dirty="0">
+                <a:latin typeface="Times New Roman" panose="02020603050405020304" pitchFamily="18" charset="0"/>
+                <a:cs typeface="Times New Roman" panose="02020603050405020304" pitchFamily="18" charset="0"/>
+              </a:rPr>
+              <a:t>storing and managing data </a:t>
+            </a:r>
+            <a:r>
+              <a:rPr lang="en-US" sz="2000" b="1" dirty="0" smtClean="0">
+                <a:latin typeface="Times New Roman" panose="02020603050405020304" pitchFamily="18" charset="0"/>
+                <a:cs typeface="Times New Roman" panose="02020603050405020304" pitchFamily="18" charset="0"/>
+              </a:rPr>
+              <a:t>efficiently</a:t>
+            </a:r>
+            <a:r>
+              <a:rPr kumimoji="0" lang="en-US" altLang="en-US" sz="2000" b="0" i="0" u="none" strike="noStrike" cap="none" normalizeH="0" baseline="0" dirty="0" smtClean="0">
+                <a:ln>
+                  <a:noFill/>
+                </a:ln>
+                <a:solidFill>
+                  <a:schemeClr val="tx1"/>
+                </a:solidFill>
+                <a:effectLst/>
+                <a:latin typeface="Times New Roman" panose="02020603050405020304" pitchFamily="18" charset="0"/>
+                <a:cs typeface="Times New Roman" panose="02020603050405020304" pitchFamily="18" charset="0"/>
+              </a:rPr>
+              <a:t>. </a:t>
+            </a:r>
+          </a:p>
+          <a:p>
+            <a:pPr marL="0" marR="0" lvl="0" indent="0" algn="just" defTabSz="914400" rtl="0" eaLnBrk="0" fontAlgn="base" latinLnBrk="0" hangingPunct="0">
+              <a:spcBef>
+                <a:spcPct val="0"/>
+              </a:spcBef>
+              <a:spcAft>
+                <a:spcPct val="0"/>
+              </a:spcAft>
+              <a:buClrTx/>
+              <a:buSzTx/>
+              <a:buFontTx/>
+              <a:buChar char="•"/>
+              <a:tabLst/>
+            </a:pPr>
+            <a:r>
+              <a:rPr kumimoji="0" lang="en-US" altLang="en-US" sz="2000" b="1" i="0" u="none" strike="noStrike" cap="none" normalizeH="0" baseline="0" dirty="0" smtClean="0">
+                <a:ln>
+                  <a:noFill/>
+                </a:ln>
+                <a:solidFill>
+                  <a:schemeClr val="tx1"/>
+                </a:solidFill>
+                <a:effectLst/>
+                <a:latin typeface="Times New Roman" panose="02020603050405020304" pitchFamily="18" charset="0"/>
+                <a:cs typeface="Times New Roman" panose="02020603050405020304" pitchFamily="18" charset="0"/>
+              </a:rPr>
+              <a:t>List</a:t>
+            </a:r>
+            <a:r>
+              <a:rPr kumimoji="0" lang="en-US" altLang="en-US" sz="2000" b="0" i="0" u="none" strike="noStrike" cap="none" normalizeH="0" baseline="0" dirty="0" smtClean="0">
+                <a:ln>
+                  <a:noFill/>
+                </a:ln>
+                <a:solidFill>
+                  <a:schemeClr val="tx1"/>
+                </a:solidFill>
+                <a:effectLst/>
+                <a:latin typeface="Times New Roman" panose="02020603050405020304" pitchFamily="18" charset="0"/>
+                <a:cs typeface="Times New Roman" panose="02020603050405020304" pitchFamily="18" charset="0"/>
+              </a:rPr>
+              <a:t> → stores multiple values in one variable. </a:t>
+            </a:r>
+          </a:p>
+          <a:p>
+            <a:pPr marL="0" marR="0" lvl="0" indent="0" algn="just" defTabSz="914400" rtl="0" eaLnBrk="0" fontAlgn="base" latinLnBrk="0" hangingPunct="0">
+              <a:spcBef>
+                <a:spcPct val="0"/>
+              </a:spcBef>
+              <a:spcAft>
+                <a:spcPct val="0"/>
+              </a:spcAft>
+              <a:buClrTx/>
+              <a:buSzTx/>
+              <a:buFontTx/>
+              <a:buChar char="•"/>
+              <a:tabLst/>
+            </a:pPr>
+            <a:r>
+              <a:rPr kumimoji="0" lang="en-US" altLang="en-US" sz="2000" b="1" i="0" u="none" strike="noStrike" cap="none" normalizeH="0" baseline="0" dirty="0" smtClean="0">
+                <a:ln>
+                  <a:noFill/>
+                </a:ln>
+                <a:solidFill>
+                  <a:schemeClr val="tx1"/>
+                </a:solidFill>
+                <a:effectLst/>
+                <a:latin typeface="Times New Roman" panose="02020603050405020304" pitchFamily="18" charset="0"/>
+                <a:cs typeface="Times New Roman" panose="02020603050405020304" pitchFamily="18" charset="0"/>
+              </a:rPr>
+              <a:t>Tuple</a:t>
+            </a:r>
+            <a:r>
+              <a:rPr kumimoji="0" lang="en-US" altLang="en-US" sz="2000" b="0" i="0" u="none" strike="noStrike" cap="none" normalizeH="0" baseline="0" dirty="0" smtClean="0">
+                <a:ln>
+                  <a:noFill/>
+                </a:ln>
+                <a:solidFill>
+                  <a:schemeClr val="tx1"/>
+                </a:solidFill>
+                <a:effectLst/>
+                <a:latin typeface="Times New Roman" panose="02020603050405020304" pitchFamily="18" charset="0"/>
+                <a:cs typeface="Times New Roman" panose="02020603050405020304" pitchFamily="18" charset="0"/>
+              </a:rPr>
+              <a:t> → similar to list but values cannot be changed. </a:t>
+            </a:r>
+          </a:p>
+          <a:p>
+            <a:pPr marL="0" marR="0" lvl="0" indent="0" algn="just" defTabSz="914400" rtl="0" eaLnBrk="0" fontAlgn="base" latinLnBrk="0" hangingPunct="0">
+              <a:spcBef>
+                <a:spcPct val="0"/>
+              </a:spcBef>
+              <a:spcAft>
+                <a:spcPct val="0"/>
+              </a:spcAft>
+              <a:buClrTx/>
+              <a:buSzTx/>
+              <a:buFontTx/>
+              <a:buChar char="•"/>
+              <a:tabLst/>
+            </a:pPr>
+            <a:r>
+              <a:rPr kumimoji="0" lang="en-US" altLang="en-US" sz="2000" b="1" i="0" u="none" strike="noStrike" cap="none" normalizeH="0" baseline="0" dirty="0" smtClean="0">
+                <a:ln>
+                  <a:noFill/>
+                </a:ln>
+                <a:solidFill>
+                  <a:schemeClr val="tx1"/>
+                </a:solidFill>
+                <a:effectLst/>
+                <a:latin typeface="Times New Roman" panose="02020603050405020304" pitchFamily="18" charset="0"/>
+                <a:cs typeface="Times New Roman" panose="02020603050405020304" pitchFamily="18" charset="0"/>
+              </a:rPr>
+              <a:t>Dictionary</a:t>
+            </a:r>
+            <a:r>
+              <a:rPr kumimoji="0" lang="en-US" altLang="en-US" sz="2000" b="0" i="0" u="none" strike="noStrike" cap="none" normalizeH="0" baseline="0" dirty="0" smtClean="0">
+                <a:ln>
+                  <a:noFill/>
+                </a:ln>
+                <a:solidFill>
+                  <a:schemeClr val="tx1"/>
+                </a:solidFill>
+                <a:effectLst/>
+                <a:latin typeface="Times New Roman" panose="02020603050405020304" pitchFamily="18" charset="0"/>
+                <a:cs typeface="Times New Roman" panose="02020603050405020304" pitchFamily="18" charset="0"/>
+              </a:rPr>
+              <a:t> → stores data in key-value pairs. </a:t>
+            </a:r>
+          </a:p>
+          <a:p>
+            <a:pPr marL="0" marR="0" lvl="0" indent="0" algn="just" defTabSz="914400" rtl="0" eaLnBrk="0" fontAlgn="base" latinLnBrk="0" hangingPunct="0">
+              <a:spcBef>
+                <a:spcPct val="0"/>
+              </a:spcBef>
+              <a:spcAft>
+                <a:spcPct val="0"/>
+              </a:spcAft>
+              <a:buClrTx/>
+              <a:buSzTx/>
+              <a:buFontTx/>
+              <a:buChar char="•"/>
+              <a:tabLst/>
+            </a:pPr>
+            <a:r>
+              <a:rPr kumimoji="0" lang="en-US" altLang="en-US" sz="2000" b="1" i="0" u="none" strike="noStrike" cap="none" normalizeH="0" baseline="0" dirty="0" smtClean="0">
+                <a:ln>
+                  <a:noFill/>
+                </a:ln>
+                <a:solidFill>
+                  <a:schemeClr val="tx1"/>
+                </a:solidFill>
+                <a:effectLst/>
+                <a:latin typeface="Times New Roman" panose="02020603050405020304" pitchFamily="18" charset="0"/>
+                <a:cs typeface="Times New Roman" panose="02020603050405020304" pitchFamily="18" charset="0"/>
+              </a:rPr>
+              <a:t>Set</a:t>
+            </a:r>
+            <a:r>
+              <a:rPr kumimoji="0" lang="en-US" altLang="en-US" sz="2000" b="0" i="0" u="none" strike="noStrike" cap="none" normalizeH="0" baseline="0" dirty="0" smtClean="0">
+                <a:ln>
+                  <a:noFill/>
+                </a:ln>
+                <a:solidFill>
+                  <a:schemeClr val="tx1"/>
+                </a:solidFill>
+                <a:effectLst/>
+                <a:latin typeface="Times New Roman" panose="02020603050405020304" pitchFamily="18" charset="0"/>
+                <a:cs typeface="Times New Roman" panose="02020603050405020304" pitchFamily="18" charset="0"/>
+              </a:rPr>
+              <a:t> → stores unique values only (no duplicates). </a:t>
+            </a:r>
           </a:p>
         </p:txBody>
       </p:sp>
     </p:spTree>
     <p:extLst>
       <p:ext uri="{BB962C8B-B14F-4D97-AF65-F5344CB8AC3E}">
-        <p14:creationId xmlns:p14="http://schemas.microsoft.com/office/powerpoint/2010/main" val="1901416507"/>
+        <p14:creationId xmlns:p14="http://schemas.microsoft.com/office/powerpoint/2010/main" val="1133960368"/>
       </p:ext>
     </p:extLst>
   </p:cSld>
   <p:clrMapOvr>
     <a:masterClrMapping/>
   </p:clrMapOvr>
+  <p:timing>
+    <p:tnLst>
+      <p:par>
+        <p:cTn id="1" dur="indefinite" restart="never" nodeType="tmRoot"/>
+      </p:par>
+    </p:tnLst>
+  </p:timing>
 </p:sld>
 </file>
 
@@ -8509,8 +8993,8 @@
         </p:nvSpPr>
         <p:spPr>
           <a:xfrm>
-            <a:off x="2902226" y="2438399"/>
-            <a:ext cx="7235687" cy="3785652"/>
+            <a:off x="2749826" y="1868556"/>
+            <a:ext cx="7792278" cy="4524315"/>
           </a:xfrm>
           <a:prstGeom prst="rect">
             <a:avLst/>
@@ -8532,7 +9016,7 @@
                 <a:latin typeface="Times New Roman" panose="02020603050405020304" pitchFamily="18" charset="0"/>
                 <a:cs typeface="Times New Roman" panose="02020603050405020304" pitchFamily="18" charset="0"/>
               </a:rPr>
-              <a:t>Regression is used to predict continuous values, such as house prices.</a:t>
+              <a:t>In Machine Learning, model performance depends on how well it generalizes to new data.</a:t>
             </a:r>
           </a:p>
           <a:p>
@@ -8545,14 +9029,14 @@
                 <a:latin typeface="Times New Roman" panose="02020603050405020304" pitchFamily="18" charset="0"/>
                 <a:cs typeface="Times New Roman" panose="02020603050405020304" pitchFamily="18" charset="0"/>
               </a:rPr>
-              <a:t>Linear Regression</a:t>
+              <a:t>Overfitting</a:t>
             </a:r>
             <a:r>
               <a:rPr lang="en-US" sz="2400" dirty="0" smtClean="0">
                 <a:latin typeface="Times New Roman" panose="02020603050405020304" pitchFamily="18" charset="0"/>
                 <a:cs typeface="Times New Roman" panose="02020603050405020304" pitchFamily="18" charset="0"/>
               </a:rPr>
-              <a:t> finds a straight-line relationship between independent and dependent variables.</a:t>
+              <a:t> occurs when a model performs very well on training data but poorly on unseen data. It captures noise instead of the actual pattern.</a:t>
             </a:r>
           </a:p>
           <a:p>
@@ -8561,18 +9045,18 @@
               <a:buChar char="•"/>
             </a:pPr>
             <a:r>
-              <a:rPr lang="en-US" sz="2400" b="1" dirty="0" smtClean="0">
-                <a:latin typeface="Times New Roman" panose="02020603050405020304" pitchFamily="18" charset="0"/>
-                <a:cs typeface="Times New Roman" panose="02020603050405020304" pitchFamily="18" charset="0"/>
-              </a:rPr>
-              <a:t>Multiple Linear Regression</a:t>
+              <a:rPr lang="en-US" sz="2400" b="1" dirty="0" err="1" smtClean="0">
+                <a:latin typeface="Times New Roman" panose="02020603050405020304" pitchFamily="18" charset="0"/>
+                <a:cs typeface="Times New Roman" panose="02020603050405020304" pitchFamily="18" charset="0"/>
+              </a:rPr>
+              <a:t>Underfitting</a:t>
             </a:r>
             <a:r>
               <a:rPr lang="en-US" sz="2400" dirty="0" smtClean="0">
                 <a:latin typeface="Times New Roman" panose="02020603050405020304" pitchFamily="18" charset="0"/>
                 <a:cs typeface="Times New Roman" panose="02020603050405020304" pitchFamily="18" charset="0"/>
               </a:rPr>
-              <a:t> uses more than one independent variable for prediction.</a:t>
+              <a:t> happens when a model is too simple and fails to capture the underlying relationship in the data.</a:t>
             </a:r>
           </a:p>
           <a:p>
@@ -8581,18 +9065,25 @@
               <a:buChar char="•"/>
             </a:pPr>
             <a:r>
+              <a:rPr lang="en-US" sz="2400" dirty="0" smtClean="0">
+                <a:latin typeface="Times New Roman" panose="02020603050405020304" pitchFamily="18" charset="0"/>
+                <a:cs typeface="Times New Roman" panose="02020603050405020304" pitchFamily="18" charset="0"/>
+              </a:rPr>
+              <a:t>To solve overfitting, we use </a:t>
+            </a:r>
+            <a:r>
               <a:rPr lang="en-US" sz="2400" b="1" dirty="0" smtClean="0">
                 <a:latin typeface="Times New Roman" panose="02020603050405020304" pitchFamily="18" charset="0"/>
                 <a:cs typeface="Times New Roman" panose="02020603050405020304" pitchFamily="18" charset="0"/>
               </a:rPr>
-              <a:t>Polynomial Regression</a:t>
+              <a:t>Regularization techniques</a:t>
             </a:r>
             <a:r>
               <a:rPr lang="en-US" sz="2400" dirty="0" smtClean="0">
                 <a:latin typeface="Times New Roman" panose="02020603050405020304" pitchFamily="18" charset="0"/>
                 <a:cs typeface="Times New Roman" panose="02020603050405020304" pitchFamily="18" charset="0"/>
               </a:rPr>
-              <a:t> captures non-linear (curved) relationships.</a:t>
+              <a:t>:</a:t>
             </a:r>
           </a:p>
           <a:p>
@@ -8601,11 +9092,48 @@
               <a:buChar char="•"/>
             </a:pPr>
             <a:r>
+              <a:rPr lang="en-US" sz="2400" b="1" dirty="0" smtClean="0">
+                <a:latin typeface="Times New Roman" panose="02020603050405020304" pitchFamily="18" charset="0"/>
+                <a:cs typeface="Times New Roman" panose="02020603050405020304" pitchFamily="18" charset="0"/>
+              </a:rPr>
+              <a:t>Ridge Regression (L2)</a:t>
+            </a:r>
+            <a:r>
               <a:rPr lang="en-US" sz="2400" dirty="0" smtClean="0">
                 <a:latin typeface="Times New Roman" panose="02020603050405020304" pitchFamily="18" charset="0"/>
                 <a:cs typeface="Times New Roman" panose="02020603050405020304" pitchFamily="18" charset="0"/>
               </a:rPr>
-              <a:t>The main goal of regression is to find the best-fit line that minimizes prediction error.</a:t>
+              <a:t> reduces large coefficients.</a:t>
+            </a:r>
+          </a:p>
+          <a:p>
+            <a:pPr marL="342900" indent="-342900" algn="just">
+              <a:buFont typeface="Arial" panose="020B0604020202020204" pitchFamily="34" charset="0"/>
+              <a:buChar char="•"/>
+            </a:pPr>
+            <a:r>
+              <a:rPr lang="en-US" sz="2400" b="1" dirty="0" smtClean="0">
+                <a:latin typeface="Times New Roman" panose="02020603050405020304" pitchFamily="18" charset="0"/>
+                <a:cs typeface="Times New Roman" panose="02020603050405020304" pitchFamily="18" charset="0"/>
+              </a:rPr>
+              <a:t>Lasso Regression (L1)</a:t>
+            </a:r>
+            <a:r>
+              <a:rPr lang="en-US" sz="2400" dirty="0" smtClean="0">
+                <a:latin typeface="Times New Roman" panose="02020603050405020304" pitchFamily="18" charset="0"/>
+                <a:cs typeface="Times New Roman" panose="02020603050405020304" pitchFamily="18" charset="0"/>
+              </a:rPr>
+              <a:t> can shrink some coefficients to zero, helping in feature selection.</a:t>
+            </a:r>
+          </a:p>
+          <a:p>
+            <a:pPr algn="just"/>
+            <a:r>
+              <a:rPr lang="en-US" sz="2400" dirty="0" smtClean="0">
+                <a:latin typeface="Times New Roman" panose="02020603050405020304" pitchFamily="18" charset="0"/>
+                <a:cs typeface="Times New Roman" panose="02020603050405020304" pitchFamily="18" charset="0"/>
+              </a:rPr>
+              <a:t>These techniques improve model generalization.</a:t>
             </a:r>
             <a:endParaRPr lang="en-US" sz="2400" dirty="0">
               <a:latin typeface="Times New Roman" panose="02020603050405020304" pitchFamily="18" charset="0"/>
@@ -8622,8 +9150,8 @@
         </p:nvSpPr>
         <p:spPr>
           <a:xfrm>
-            <a:off x="4359964" y="1073426"/>
-            <a:ext cx="4320209" cy="523220"/>
+            <a:off x="3154017" y="901148"/>
+            <a:ext cx="6983896" cy="523220"/>
           </a:xfrm>
           <a:prstGeom prst="rect">
             <a:avLst/>
@@ -8641,14 +9169,28 @@
                 <a:latin typeface="Times New Roman" panose="02020603050405020304" pitchFamily="18" charset="0"/>
                 <a:cs typeface="Times New Roman" panose="02020603050405020304" pitchFamily="18" charset="0"/>
               </a:rPr>
-              <a:t>Regression </a:t>
+              <a:t>Overfitting, </a:t>
+            </a:r>
+            <a:r>
+              <a:rPr lang="en-US" sz="2800" b="1" dirty="0" err="1">
+                <a:latin typeface="Times New Roman" panose="02020603050405020304" pitchFamily="18" charset="0"/>
+                <a:cs typeface="Times New Roman" panose="02020603050405020304" pitchFamily="18" charset="0"/>
+              </a:rPr>
+              <a:t>Underfitting</a:t>
+            </a:r>
+            <a:r>
+              <a:rPr lang="en-US" sz="2800" b="1" dirty="0">
+                <a:latin typeface="Times New Roman" panose="02020603050405020304" pitchFamily="18" charset="0"/>
+                <a:cs typeface="Times New Roman" panose="02020603050405020304" pitchFamily="18" charset="0"/>
+              </a:rPr>
+              <a:t> &amp; </a:t>
             </a:r>
             <a:r>
               <a:rPr lang="en-US" sz="2800" b="1" dirty="0" smtClean="0">
                 <a:latin typeface="Times New Roman" panose="02020603050405020304" pitchFamily="18" charset="0"/>
                 <a:cs typeface="Times New Roman" panose="02020603050405020304" pitchFamily="18" charset="0"/>
               </a:rPr>
-              <a:t>Concepts</a:t>
+              <a:t>Regularization</a:t>
             </a:r>
             <a:endParaRPr lang="en-US" sz="2800" b="1" dirty="0">
               <a:latin typeface="Times New Roman" panose="02020603050405020304" pitchFamily="18" charset="0"/>
@@ -8657,10 +9199,46 @@
           </a:p>
         </p:txBody>
       </p:sp>
+      <p:sp>
+        <p:nvSpPr>
+          <p:cNvPr id="4" name="TextBox 3"/>
+          <p:cNvSpPr txBox="1"/>
+          <p:nvPr/>
+        </p:nvSpPr>
+        <p:spPr>
+          <a:xfrm>
+            <a:off x="3048000" y="212035"/>
+            <a:ext cx="2464904" cy="400110"/>
+          </a:xfrm>
+          <a:prstGeom prst="rect">
+            <a:avLst/>
+          </a:prstGeom>
+          <a:noFill/>
+        </p:spPr>
+        <p:txBody>
+          <a:bodyPr wrap="square" rtlCol="0">
+            <a:spAutoFit/>
+          </a:bodyPr>
+          <a:lstStyle/>
+          <a:p>
+            <a:r>
+              <a:rPr lang="en-IN" sz="2000" b="1" dirty="0" smtClean="0">
+                <a:latin typeface="Times New Roman" panose="02020603050405020304" pitchFamily="18" charset="0"/>
+                <a:cs typeface="Times New Roman" panose="02020603050405020304" pitchFamily="18" charset="0"/>
+              </a:rPr>
+              <a:t>Week 8 </a:t>
+            </a:r>
+            <a:endParaRPr lang="en-IN" sz="2000" b="1" dirty="0">
+              <a:latin typeface="Times New Roman" panose="02020603050405020304" pitchFamily="18" charset="0"/>
+              <a:cs typeface="Times New Roman" panose="02020603050405020304" pitchFamily="18" charset="0"/>
+            </a:endParaRPr>
+          </a:p>
+        </p:txBody>
+      </p:sp>
     </p:spTree>
     <p:extLst>
       <p:ext uri="{BB962C8B-B14F-4D97-AF65-F5344CB8AC3E}">
-        <p14:creationId xmlns:p14="http://schemas.microsoft.com/office/powerpoint/2010/main" val="2299453001"/>
+        <p14:creationId xmlns:p14="http://schemas.microsoft.com/office/powerpoint/2010/main" val="2061226794"/>
       </p:ext>
     </p:extLst>
   </p:cSld>
@@ -8695,8 +9273,8 @@
         </p:nvSpPr>
         <p:spPr>
           <a:xfrm>
-            <a:off x="2716696" y="1298713"/>
-            <a:ext cx="8242852" cy="5262979"/>
+            <a:off x="2941983" y="2027581"/>
+            <a:ext cx="7951304" cy="4524315"/>
           </a:xfrm>
           <a:prstGeom prst="rect">
             <a:avLst/>
@@ -8718,7 +9296,21 @@
                 <a:latin typeface="Times New Roman" panose="02020603050405020304" pitchFamily="18" charset="0"/>
                 <a:cs typeface="Times New Roman" panose="02020603050405020304" pitchFamily="18" charset="0"/>
               </a:rPr>
-              <a:t>After building a model, it is important to measure its performance.</a:t>
+              <a:t>Classification is a supervised learning technique used to predict </a:t>
+            </a:r>
+            <a:r>
+              <a:rPr lang="en-US" sz="2400" b="1" dirty="0" smtClean="0">
+                <a:latin typeface="Times New Roman" panose="02020603050405020304" pitchFamily="18" charset="0"/>
+                <a:cs typeface="Times New Roman" panose="02020603050405020304" pitchFamily="18" charset="0"/>
+              </a:rPr>
+              <a:t>categorical outcomes</a:t>
+            </a:r>
+            <a:r>
+              <a:rPr lang="en-US" sz="2400" dirty="0" smtClean="0">
+                <a:latin typeface="Times New Roman" panose="02020603050405020304" pitchFamily="18" charset="0"/>
+                <a:cs typeface="Times New Roman" panose="02020603050405020304" pitchFamily="18" charset="0"/>
+              </a:rPr>
+              <a:t> such as Yes/No, Pass/Fail, Spam/Not Spam.</a:t>
             </a:r>
           </a:p>
           <a:p>
@@ -8731,95 +9323,22 @@
                 <a:latin typeface="Times New Roman" panose="02020603050405020304" pitchFamily="18" charset="0"/>
                 <a:cs typeface="Times New Roman" panose="02020603050405020304" pitchFamily="18" charset="0"/>
               </a:rPr>
-              <a:t>For regression, we use:</a:t>
-            </a:r>
-          </a:p>
-          <a:p>
-            <a:pPr marL="457200" indent="-457200" algn="just">
-              <a:buFont typeface="+mj-lt"/>
-              <a:buAutoNum type="arabicPeriod"/>
-            </a:pPr>
+              <a:t>One of the most important classification algorithms is </a:t>
+            </a:r>
             <a:r>
               <a:rPr lang="en-US" sz="2400" b="1" dirty="0" smtClean="0">
                 <a:latin typeface="Times New Roman" panose="02020603050405020304" pitchFamily="18" charset="0"/>
                 <a:cs typeface="Times New Roman" panose="02020603050405020304" pitchFamily="18" charset="0"/>
               </a:rPr>
-              <a:t>MAE (Mean Absolute Error)</a:t>
+              <a:t>Logistic Regression</a:t>
             </a:r>
             <a:r>
               <a:rPr lang="en-US" sz="2400" dirty="0" smtClean="0">
                 <a:latin typeface="Times New Roman" panose="02020603050405020304" pitchFamily="18" charset="0"/>
                 <a:cs typeface="Times New Roman" panose="02020603050405020304" pitchFamily="18" charset="0"/>
               </a:rPr>
-              <a:t> – average prediction error</a:t>
-            </a:r>
-          </a:p>
-          <a:p>
-            <a:pPr marL="457200" indent="-457200" algn="just">
-              <a:buFont typeface="+mj-lt"/>
-              <a:buAutoNum type="arabicPeriod"/>
-            </a:pPr>
-            <a:r>
-              <a:rPr lang="en-US" sz="2400" b="1" dirty="0" smtClean="0">
-                <a:latin typeface="Times New Roman" panose="02020603050405020304" pitchFamily="18" charset="0"/>
-                <a:cs typeface="Times New Roman" panose="02020603050405020304" pitchFamily="18" charset="0"/>
-              </a:rPr>
-              <a:t>MSE (Mean Squared Error)</a:t>
-            </a:r>
-            <a:r>
-              <a:rPr lang="en-US" sz="2400" dirty="0" smtClean="0">
-                <a:latin typeface="Times New Roman" panose="02020603050405020304" pitchFamily="18" charset="0"/>
-                <a:cs typeface="Times New Roman" panose="02020603050405020304" pitchFamily="18" charset="0"/>
-              </a:rPr>
-              <a:t> – squared error</a:t>
-            </a:r>
-          </a:p>
-          <a:p>
-            <a:pPr marL="457200" indent="-457200" algn="just">
-              <a:buFont typeface="+mj-lt"/>
-              <a:buAutoNum type="arabicPeriod"/>
-            </a:pPr>
-            <a:r>
-              <a:rPr lang="en-US" sz="2400" b="1" dirty="0" smtClean="0">
-                <a:latin typeface="Times New Roman" panose="02020603050405020304" pitchFamily="18" charset="0"/>
-                <a:cs typeface="Times New Roman" panose="02020603050405020304" pitchFamily="18" charset="0"/>
-              </a:rPr>
-              <a:t>RMSE</a:t>
-            </a:r>
-            <a:r>
-              <a:rPr lang="en-US" sz="2400" dirty="0" smtClean="0">
-                <a:latin typeface="Times New Roman" panose="02020603050405020304" pitchFamily="18" charset="0"/>
-                <a:cs typeface="Times New Roman" panose="02020603050405020304" pitchFamily="18" charset="0"/>
-              </a:rPr>
-              <a:t> – square root of MSE</a:t>
-            </a:r>
-          </a:p>
-          <a:p>
-            <a:pPr marL="457200" indent="-457200" algn="just">
-              <a:buFont typeface="+mj-lt"/>
-              <a:buAutoNum type="arabicPeriod"/>
-            </a:pPr>
-            <a:r>
-              <a:rPr lang="en-US" sz="2400" b="1" dirty="0" smtClean="0">
-                <a:latin typeface="Times New Roman" panose="02020603050405020304" pitchFamily="18" charset="0"/>
-                <a:cs typeface="Times New Roman" panose="02020603050405020304" pitchFamily="18" charset="0"/>
-              </a:rPr>
-              <a:t>R² Score</a:t>
-            </a:r>
-            <a:r>
-              <a:rPr lang="en-US" sz="2400" dirty="0" smtClean="0">
-                <a:latin typeface="Times New Roman" panose="02020603050405020304" pitchFamily="18" charset="0"/>
-                <a:cs typeface="Times New Roman" panose="02020603050405020304" pitchFamily="18" charset="0"/>
-              </a:rPr>
-              <a:t> – shows how much variance the model explains</a:t>
-            </a:r>
-          </a:p>
-          <a:p>
-            <a:pPr algn="just"/>
-            <a:endParaRPr lang="en-US" sz="2400" dirty="0" smtClean="0">
-              <a:latin typeface="Times New Roman" panose="02020603050405020304" pitchFamily="18" charset="0"/>
-              <a:cs typeface="Times New Roman" panose="02020603050405020304" pitchFamily="18" charset="0"/>
-            </a:endParaRPr>
+              <a:t>.</a:t>
+            </a:r>
           </a:p>
           <a:p>
             <a:pPr marL="342900" indent="-342900" algn="just">
@@ -8831,47 +9350,21 @@
                 <a:latin typeface="Times New Roman" panose="02020603050405020304" pitchFamily="18" charset="0"/>
                 <a:cs typeface="Times New Roman" panose="02020603050405020304" pitchFamily="18" charset="0"/>
               </a:rPr>
-              <a:t>For validation:</a:t>
-            </a:r>
-          </a:p>
-          <a:p>
-            <a:pPr marL="457200" indent="-457200" algn="just">
-              <a:buFont typeface="+mj-lt"/>
-              <a:buAutoNum type="arabicPeriod"/>
-            </a:pPr>
+              <a:t>Unlike Linear Regression, Logistic Regression uses a </a:t>
+            </a:r>
             <a:r>
               <a:rPr lang="en-US" sz="2400" b="1" dirty="0" smtClean="0">
                 <a:latin typeface="Times New Roman" panose="02020603050405020304" pitchFamily="18" charset="0"/>
                 <a:cs typeface="Times New Roman" panose="02020603050405020304" pitchFamily="18" charset="0"/>
               </a:rPr>
-              <a:t>Train-Test Split</a:t>
+              <a:t>sigmoid function</a:t>
             </a:r>
             <a:r>
               <a:rPr lang="en-US" sz="2400" dirty="0" smtClean="0">
                 <a:latin typeface="Times New Roman" panose="02020603050405020304" pitchFamily="18" charset="0"/>
                 <a:cs typeface="Times New Roman" panose="02020603050405020304" pitchFamily="18" charset="0"/>
               </a:rPr>
-              <a:t> divides data into training and testing sets</a:t>
-            </a:r>
-          </a:p>
-          <a:p>
-            <a:pPr marL="457200" indent="-457200" algn="just">
-              <a:buFont typeface="+mj-lt"/>
-              <a:buAutoNum type="arabicPeriod"/>
-            </a:pPr>
-            <a:r>
-              <a:rPr lang="en-US" sz="2400" b="1" dirty="0" smtClean="0">
-                <a:latin typeface="Times New Roman" panose="02020603050405020304" pitchFamily="18" charset="0"/>
-                <a:cs typeface="Times New Roman" panose="02020603050405020304" pitchFamily="18" charset="0"/>
-              </a:rPr>
-              <a:t>Cross Validation (Holdout Method)</a:t>
-            </a:r>
-            <a:r>
-              <a:rPr lang="en-US" sz="2400" dirty="0" smtClean="0">
-                <a:latin typeface="Times New Roman" panose="02020603050405020304" pitchFamily="18" charset="0"/>
-                <a:cs typeface="Times New Roman" panose="02020603050405020304" pitchFamily="18" charset="0"/>
-              </a:rPr>
-              <a:t> checks how well the model generalizes to new data</a:t>
+              <a:t> to convert output into probability values between 0 and 1.</a:t>
             </a:r>
           </a:p>
           <a:p>
@@ -8884,7 +9377,20 @@
                 <a:latin typeface="Times New Roman" panose="02020603050405020304" pitchFamily="18" charset="0"/>
                 <a:cs typeface="Times New Roman" panose="02020603050405020304" pitchFamily="18" charset="0"/>
               </a:rPr>
-              <a:t>Evaluation helps us understand whether the model is overfitting or performing properly.</a:t>
+              <a:t>Based on a threshold (usually 0.5), the model assigns a class label.</a:t>
+            </a:r>
+          </a:p>
+          <a:p>
+            <a:pPr marL="342900" indent="-342900" algn="just">
+              <a:buFont typeface="Arial" panose="020B0604020202020204" pitchFamily="34" charset="0"/>
+              <a:buChar char="•"/>
+            </a:pPr>
+            <a:r>
+              <a:rPr lang="en-US" sz="2400" dirty="0" smtClean="0">
+                <a:latin typeface="Times New Roman" panose="02020603050405020304" pitchFamily="18" charset="0"/>
+                <a:cs typeface="Times New Roman" panose="02020603050405020304" pitchFamily="18" charset="0"/>
+              </a:rPr>
+              <a:t>It is widely used because it is simple, efficient, and interpretable.</a:t>
             </a:r>
             <a:endParaRPr lang="en-US" sz="2400" dirty="0">
               <a:latin typeface="Times New Roman" panose="02020603050405020304" pitchFamily="18" charset="0"/>
@@ -8901,8 +9407,8 @@
         </p:nvSpPr>
         <p:spPr>
           <a:xfrm>
-            <a:off x="3776870" y="410818"/>
-            <a:ext cx="5512904" cy="523220"/>
+            <a:off x="2941983" y="914399"/>
+            <a:ext cx="8375374" cy="523220"/>
           </a:xfrm>
           <a:prstGeom prst="rect">
             <a:avLst/>
@@ -8920,14 +9426,14 @@
                 <a:latin typeface="Times New Roman" panose="02020603050405020304" pitchFamily="18" charset="0"/>
                 <a:cs typeface="Times New Roman" panose="02020603050405020304" pitchFamily="18" charset="0"/>
               </a:rPr>
-              <a:t>Model Evaluation &amp; </a:t>
+              <a:t>Introduction to Classification &amp; Logistic </a:t>
             </a:r>
             <a:r>
               <a:rPr lang="en-US" sz="2800" b="1" dirty="0" smtClean="0">
                 <a:latin typeface="Times New Roman" panose="02020603050405020304" pitchFamily="18" charset="0"/>
                 <a:cs typeface="Times New Roman" panose="02020603050405020304" pitchFamily="18" charset="0"/>
               </a:rPr>
-              <a:t>Validation</a:t>
+              <a:t>Regression</a:t>
             </a:r>
             <a:endParaRPr lang="en-US" sz="2800" b="1" dirty="0">
               <a:latin typeface="Times New Roman" panose="02020603050405020304" pitchFamily="18" charset="0"/>
@@ -8939,7 +9445,7 @@
     </p:spTree>
     <p:extLst>
       <p:ext uri="{BB962C8B-B14F-4D97-AF65-F5344CB8AC3E}">
-        <p14:creationId xmlns:p14="http://schemas.microsoft.com/office/powerpoint/2010/main" val="2945989200"/>
+        <p14:creationId xmlns:p14="http://schemas.microsoft.com/office/powerpoint/2010/main" val="3294322666"/>
       </p:ext>
     </p:extLst>
   </p:cSld>
@@ -8968,227 +9474,13 @@
       </p:grpSpPr>
       <p:sp>
         <p:nvSpPr>
-          <p:cNvPr id="2" name="TextBox 1"/>
-          <p:cNvSpPr txBox="1"/>
-          <p:nvPr/>
-        </p:nvSpPr>
-        <p:spPr>
-          <a:xfrm>
-            <a:off x="2749826" y="1868556"/>
-            <a:ext cx="7792278" cy="4524315"/>
-          </a:xfrm>
-          <a:prstGeom prst="rect">
-            <a:avLst/>
-          </a:prstGeom>
-          <a:noFill/>
-        </p:spPr>
-        <p:txBody>
-          <a:bodyPr wrap="square" rtlCol="0">
-            <a:spAutoFit/>
-          </a:bodyPr>
-          <a:lstStyle/>
-          <a:p>
-            <a:pPr marL="342900" indent="-342900" algn="just">
-              <a:buFont typeface="Arial" panose="020B0604020202020204" pitchFamily="34" charset="0"/>
-              <a:buChar char="•"/>
-            </a:pPr>
-            <a:r>
-              <a:rPr lang="en-US" sz="2400" dirty="0" smtClean="0">
-                <a:latin typeface="Times New Roman" panose="02020603050405020304" pitchFamily="18" charset="0"/>
-                <a:cs typeface="Times New Roman" panose="02020603050405020304" pitchFamily="18" charset="0"/>
-              </a:rPr>
-              <a:t>In Machine Learning, model performance depends on how well it generalizes to new data.</a:t>
-            </a:r>
-          </a:p>
-          <a:p>
-            <a:pPr marL="342900" indent="-342900" algn="just">
-              <a:buFont typeface="Arial" panose="020B0604020202020204" pitchFamily="34" charset="0"/>
-              <a:buChar char="•"/>
-            </a:pPr>
-            <a:r>
-              <a:rPr lang="en-US" sz="2400" b="1" dirty="0" smtClean="0">
-                <a:latin typeface="Times New Roman" panose="02020603050405020304" pitchFamily="18" charset="0"/>
-                <a:cs typeface="Times New Roman" panose="02020603050405020304" pitchFamily="18" charset="0"/>
-              </a:rPr>
-              <a:t>Overfitting</a:t>
-            </a:r>
-            <a:r>
-              <a:rPr lang="en-US" sz="2400" dirty="0" smtClean="0">
-                <a:latin typeface="Times New Roman" panose="02020603050405020304" pitchFamily="18" charset="0"/>
-                <a:cs typeface="Times New Roman" panose="02020603050405020304" pitchFamily="18" charset="0"/>
-              </a:rPr>
-              <a:t> occurs when a model performs very well on training data but poorly on unseen data. It captures noise instead of the actual pattern.</a:t>
-            </a:r>
-          </a:p>
-          <a:p>
-            <a:pPr marL="342900" indent="-342900" algn="just">
-              <a:buFont typeface="Arial" panose="020B0604020202020204" pitchFamily="34" charset="0"/>
-              <a:buChar char="•"/>
-            </a:pPr>
-            <a:r>
-              <a:rPr lang="en-US" sz="2400" b="1" dirty="0" err="1" smtClean="0">
-                <a:latin typeface="Times New Roman" panose="02020603050405020304" pitchFamily="18" charset="0"/>
-                <a:cs typeface="Times New Roman" panose="02020603050405020304" pitchFamily="18" charset="0"/>
-              </a:rPr>
-              <a:t>Underfitting</a:t>
-            </a:r>
-            <a:r>
-              <a:rPr lang="en-US" sz="2400" dirty="0" smtClean="0">
-                <a:latin typeface="Times New Roman" panose="02020603050405020304" pitchFamily="18" charset="0"/>
-                <a:cs typeface="Times New Roman" panose="02020603050405020304" pitchFamily="18" charset="0"/>
-              </a:rPr>
-              <a:t> happens when a model is too simple and fails to capture the underlying relationship in the data.</a:t>
-            </a:r>
-          </a:p>
-          <a:p>
-            <a:pPr marL="342900" indent="-342900" algn="just">
-              <a:buFont typeface="Arial" panose="020B0604020202020204" pitchFamily="34" charset="0"/>
-              <a:buChar char="•"/>
-            </a:pPr>
-            <a:r>
-              <a:rPr lang="en-US" sz="2400" dirty="0" smtClean="0">
-                <a:latin typeface="Times New Roman" panose="02020603050405020304" pitchFamily="18" charset="0"/>
-                <a:cs typeface="Times New Roman" panose="02020603050405020304" pitchFamily="18" charset="0"/>
-              </a:rPr>
-              <a:t>To solve overfitting, we use </a:t>
-            </a:r>
-            <a:r>
-              <a:rPr lang="en-US" sz="2400" b="1" dirty="0" smtClean="0">
-                <a:latin typeface="Times New Roman" panose="02020603050405020304" pitchFamily="18" charset="0"/>
-                <a:cs typeface="Times New Roman" panose="02020603050405020304" pitchFamily="18" charset="0"/>
-              </a:rPr>
-              <a:t>Regularization techniques</a:t>
-            </a:r>
-            <a:r>
-              <a:rPr lang="en-US" sz="2400" dirty="0" smtClean="0">
-                <a:latin typeface="Times New Roman" panose="02020603050405020304" pitchFamily="18" charset="0"/>
-                <a:cs typeface="Times New Roman" panose="02020603050405020304" pitchFamily="18" charset="0"/>
-              </a:rPr>
-              <a:t>:</a:t>
-            </a:r>
-          </a:p>
-          <a:p>
-            <a:pPr marL="342900" indent="-342900" algn="just">
-              <a:buFont typeface="Arial" panose="020B0604020202020204" pitchFamily="34" charset="0"/>
-              <a:buChar char="•"/>
-            </a:pPr>
-            <a:r>
-              <a:rPr lang="en-US" sz="2400" b="1" dirty="0" smtClean="0">
-                <a:latin typeface="Times New Roman" panose="02020603050405020304" pitchFamily="18" charset="0"/>
-                <a:cs typeface="Times New Roman" panose="02020603050405020304" pitchFamily="18" charset="0"/>
-              </a:rPr>
-              <a:t>Ridge Regression (L2)</a:t>
-            </a:r>
-            <a:r>
-              <a:rPr lang="en-US" sz="2400" dirty="0" smtClean="0">
-                <a:latin typeface="Times New Roman" panose="02020603050405020304" pitchFamily="18" charset="0"/>
-                <a:cs typeface="Times New Roman" panose="02020603050405020304" pitchFamily="18" charset="0"/>
-              </a:rPr>
-              <a:t> reduces large coefficients.</a:t>
-            </a:r>
-          </a:p>
-          <a:p>
-            <a:pPr marL="342900" indent="-342900" algn="just">
-              <a:buFont typeface="Arial" panose="020B0604020202020204" pitchFamily="34" charset="0"/>
-              <a:buChar char="•"/>
-            </a:pPr>
-            <a:r>
-              <a:rPr lang="en-US" sz="2400" b="1" dirty="0" smtClean="0">
-                <a:latin typeface="Times New Roman" panose="02020603050405020304" pitchFamily="18" charset="0"/>
-                <a:cs typeface="Times New Roman" panose="02020603050405020304" pitchFamily="18" charset="0"/>
-              </a:rPr>
-              <a:t>Lasso Regression (L1)</a:t>
-            </a:r>
-            <a:r>
-              <a:rPr lang="en-US" sz="2400" dirty="0" smtClean="0">
-                <a:latin typeface="Times New Roman" panose="02020603050405020304" pitchFamily="18" charset="0"/>
-                <a:cs typeface="Times New Roman" panose="02020603050405020304" pitchFamily="18" charset="0"/>
-              </a:rPr>
-              <a:t> can shrink some coefficients to zero, helping in feature selection.</a:t>
-            </a:r>
-          </a:p>
-          <a:p>
-            <a:pPr algn="just"/>
-            <a:r>
-              <a:rPr lang="en-US" sz="2400" dirty="0" smtClean="0">
-                <a:latin typeface="Times New Roman" panose="02020603050405020304" pitchFamily="18" charset="0"/>
-                <a:cs typeface="Times New Roman" panose="02020603050405020304" pitchFamily="18" charset="0"/>
-              </a:rPr>
-              <a:t>These techniques improve model generalization.</a:t>
-            </a:r>
-            <a:endParaRPr lang="en-US" sz="2400" dirty="0">
-              <a:latin typeface="Times New Roman" panose="02020603050405020304" pitchFamily="18" charset="0"/>
-              <a:cs typeface="Times New Roman" panose="02020603050405020304" pitchFamily="18" charset="0"/>
-            </a:endParaRPr>
-          </a:p>
-        </p:txBody>
-      </p:sp>
-      <p:sp>
-        <p:nvSpPr>
-          <p:cNvPr id="3" name="TextBox 2"/>
-          <p:cNvSpPr txBox="1"/>
-          <p:nvPr/>
-        </p:nvSpPr>
-        <p:spPr>
-          <a:xfrm>
-            <a:off x="3154017" y="901148"/>
-            <a:ext cx="6983896" cy="523220"/>
-          </a:xfrm>
-          <a:prstGeom prst="rect">
-            <a:avLst/>
-          </a:prstGeom>
-          <a:noFill/>
-        </p:spPr>
-        <p:txBody>
-          <a:bodyPr wrap="square" rtlCol="0">
-            <a:spAutoFit/>
-          </a:bodyPr>
-          <a:lstStyle/>
-          <a:p>
-            <a:r>
-              <a:rPr lang="en-US" sz="2800" b="1" dirty="0">
-                <a:latin typeface="Times New Roman" panose="02020603050405020304" pitchFamily="18" charset="0"/>
-                <a:cs typeface="Times New Roman" panose="02020603050405020304" pitchFamily="18" charset="0"/>
-              </a:rPr>
-              <a:t>Overfitting, </a:t>
-            </a:r>
-            <a:r>
-              <a:rPr lang="en-US" sz="2800" b="1" dirty="0" err="1">
-                <a:latin typeface="Times New Roman" panose="02020603050405020304" pitchFamily="18" charset="0"/>
-                <a:cs typeface="Times New Roman" panose="02020603050405020304" pitchFamily="18" charset="0"/>
-              </a:rPr>
-              <a:t>Underfitting</a:t>
-            </a:r>
-            <a:r>
-              <a:rPr lang="en-US" sz="2800" b="1" dirty="0">
-                <a:latin typeface="Times New Roman" panose="02020603050405020304" pitchFamily="18" charset="0"/>
-                <a:cs typeface="Times New Roman" panose="02020603050405020304" pitchFamily="18" charset="0"/>
-              </a:rPr>
-              <a:t> &amp; </a:t>
-            </a:r>
-            <a:r>
-              <a:rPr lang="en-US" sz="2800" b="1" dirty="0" smtClean="0">
-                <a:latin typeface="Times New Roman" panose="02020603050405020304" pitchFamily="18" charset="0"/>
-                <a:cs typeface="Times New Roman" panose="02020603050405020304" pitchFamily="18" charset="0"/>
-              </a:rPr>
-              <a:t>Regularization</a:t>
-            </a:r>
-            <a:endParaRPr lang="en-US" sz="2800" b="1" dirty="0">
-              <a:latin typeface="Times New Roman" panose="02020603050405020304" pitchFamily="18" charset="0"/>
-              <a:cs typeface="Times New Roman" panose="02020603050405020304" pitchFamily="18" charset="0"/>
-            </a:endParaRPr>
-          </a:p>
-        </p:txBody>
-      </p:sp>
-      <p:sp>
-        <p:nvSpPr>
           <p:cNvPr id="4" name="TextBox 3"/>
           <p:cNvSpPr txBox="1"/>
           <p:nvPr/>
         </p:nvSpPr>
         <p:spPr>
           <a:xfrm>
-            <a:off x="3048000" y="212035"/>
+            <a:off x="3008242" y="437322"/>
             <a:ext cx="2464904" cy="400110"/>
           </a:xfrm>
           <a:prstGeom prst="rect">
@@ -9207,7 +9499,7 @@
                 <a:latin typeface="Times New Roman" panose="02020603050405020304" pitchFamily="18" charset="0"/>
                 <a:cs typeface="Times New Roman" panose="02020603050405020304" pitchFamily="18" charset="0"/>
               </a:rPr>
-              <a:t>Week 8 </a:t>
+              <a:t>Week 9</a:t>
             </a:r>
             <a:endParaRPr lang="en-IN" sz="2000" b="1" dirty="0">
               <a:latin typeface="Times New Roman" panose="02020603050405020304" pitchFamily="18" charset="0"/>
@@ -9216,10 +9508,626 @@
           </a:p>
         </p:txBody>
       </p:sp>
+      <p:sp>
+        <p:nvSpPr>
+          <p:cNvPr id="2" name="Rectangle 1"/>
+          <p:cNvSpPr>
+            <a:spLocks noChangeArrowheads="1"/>
+          </p:cNvSpPr>
+          <p:nvPr/>
+        </p:nvSpPr>
+        <p:spPr bwMode="auto">
+          <a:xfrm>
+            <a:off x="2014330" y="1793908"/>
+            <a:ext cx="7814960" cy="2031325"/>
+          </a:xfrm>
+          <a:prstGeom prst="rect">
+            <a:avLst/>
+          </a:prstGeom>
+          <a:noFill/>
+          <a:ln>
+            <a:noFill/>
+          </a:ln>
+          <a:effectLst/>
+          <a:extLst>
+            <a:ext uri="{909E8E84-426E-40DD-AFC4-6F175D3DCCD1}">
+              <a14:hiddenFill xmlns:a14="http://schemas.microsoft.com/office/drawing/2010/main">
+                <a:solidFill>
+                  <a:schemeClr val="accent1"/>
+                </a:solidFill>
+              </a14:hiddenFill>
+            </a:ext>
+            <a:ext uri="{91240B29-F687-4F45-9708-019B960494DF}">
+              <a14:hiddenLine xmlns:a14="http://schemas.microsoft.com/office/drawing/2010/main" w="9525">
+                <a:solidFill>
+                  <a:schemeClr val="tx1"/>
+                </a:solidFill>
+                <a:miter lim="800000"/>
+                <a:headEnd/>
+                <a:tailEnd/>
+              </a14:hiddenLine>
+            </a:ext>
+            <a:ext uri="{AF507438-7753-43E0-B8FC-AC1667EBCBE1}">
+              <a14:hiddenEffects xmlns:a14="http://schemas.microsoft.com/office/drawing/2010/main">
+                <a:effectLst>
+                  <a:outerShdw dist="35921" dir="2700000" algn="ctr" rotWithShape="0">
+                    <a:schemeClr val="bg2"/>
+                  </a:outerShdw>
+                </a:effectLst>
+              </a14:hiddenEffects>
+            </a:ext>
+          </a:extLst>
+        </p:spPr>
+        <p:txBody>
+          <a:bodyPr vert="horz" wrap="none" lIns="91440" tIns="45720" rIns="91440" bIns="45720" numCol="1" anchor="ctr" anchorCtr="0" compatLnSpc="1">
+            <a:prstTxWarp prst="textNoShape">
+              <a:avLst/>
+            </a:prstTxWarp>
+            <a:spAutoFit/>
+          </a:bodyPr>
+          <a:lstStyle/>
+          <a:p>
+            <a:pPr marL="0" marR="0" lvl="0" indent="0" algn="l" defTabSz="914400" rtl="0" eaLnBrk="0" fontAlgn="base" latinLnBrk="0" hangingPunct="0">
+              <a:lnSpc>
+                <a:spcPct val="100000"/>
+              </a:lnSpc>
+              <a:spcBef>
+                <a:spcPct val="0"/>
+              </a:spcBef>
+              <a:spcAft>
+                <a:spcPct val="0"/>
+              </a:spcAft>
+              <a:buClrTx/>
+              <a:buSzTx/>
+              <a:buFontTx/>
+              <a:buNone/>
+              <a:tabLst/>
+            </a:pPr>
+            <a:r>
+              <a:rPr kumimoji="0" lang="en-US" altLang="en-US" b="1" i="0" u="none" strike="noStrike" cap="none" normalizeH="0" baseline="0" dirty="0" smtClean="0">
+                <a:ln>
+                  <a:noFill/>
+                </a:ln>
+                <a:solidFill>
+                  <a:schemeClr val="tx1"/>
+                </a:solidFill>
+                <a:effectLst/>
+                <a:latin typeface="Times New Roman" panose="02020603050405020304" pitchFamily="18" charset="0"/>
+                <a:cs typeface="Times New Roman" panose="02020603050405020304" pitchFamily="18" charset="0"/>
+              </a:rPr>
+              <a:t>Regression Concepts</a:t>
+            </a:r>
+            <a:r>
+              <a:rPr kumimoji="0" lang="en-US" altLang="en-US" b="1" i="0" u="none" strike="noStrike" cap="none" normalizeH="0" dirty="0" smtClean="0">
+                <a:ln>
+                  <a:noFill/>
+                </a:ln>
+                <a:solidFill>
+                  <a:schemeClr val="tx1"/>
+                </a:solidFill>
+                <a:effectLst/>
+                <a:latin typeface="Times New Roman" panose="02020603050405020304" pitchFamily="18" charset="0"/>
+                <a:cs typeface="Times New Roman" panose="02020603050405020304" pitchFamily="18" charset="0"/>
+              </a:rPr>
+              <a:t> : </a:t>
+            </a:r>
+            <a:endParaRPr kumimoji="0" lang="en-US" altLang="en-US" b="1" i="0" u="none" strike="noStrike" cap="none" normalizeH="0" baseline="0" dirty="0" smtClean="0">
+              <a:ln>
+                <a:noFill/>
+              </a:ln>
+              <a:solidFill>
+                <a:schemeClr val="tx1"/>
+              </a:solidFill>
+              <a:effectLst/>
+              <a:latin typeface="Times New Roman" panose="02020603050405020304" pitchFamily="18" charset="0"/>
+              <a:cs typeface="Times New Roman" panose="02020603050405020304" pitchFamily="18" charset="0"/>
+            </a:endParaRPr>
+          </a:p>
+          <a:p>
+            <a:pPr marL="0" marR="0" lvl="0" indent="0" algn="l" defTabSz="914400" rtl="0" eaLnBrk="0" fontAlgn="base" latinLnBrk="0" hangingPunct="0">
+              <a:lnSpc>
+                <a:spcPct val="100000"/>
+              </a:lnSpc>
+              <a:spcBef>
+                <a:spcPct val="0"/>
+              </a:spcBef>
+              <a:spcAft>
+                <a:spcPct val="0"/>
+              </a:spcAft>
+              <a:buClrTx/>
+              <a:buSzTx/>
+              <a:buFontTx/>
+              <a:buChar char="•"/>
+              <a:tabLst/>
+            </a:pPr>
+            <a:r>
+              <a:rPr kumimoji="0" lang="en-US" altLang="en-US" b="1" i="0" u="none" strike="noStrike" cap="none" normalizeH="0" baseline="0" dirty="0" smtClean="0">
+                <a:ln>
+                  <a:noFill/>
+                </a:ln>
+                <a:solidFill>
+                  <a:schemeClr val="tx1"/>
+                </a:solidFill>
+                <a:effectLst/>
+                <a:latin typeface="Times New Roman" panose="02020603050405020304" pitchFamily="18" charset="0"/>
+                <a:cs typeface="Times New Roman" panose="02020603050405020304" pitchFamily="18" charset="0"/>
+              </a:rPr>
+              <a:t>Polynomial Regression:</a:t>
+            </a:r>
+            <a:r>
+              <a:rPr kumimoji="0" lang="en-US" altLang="en-US" b="0" i="0" u="none" strike="noStrike" cap="none" normalizeH="0" baseline="0" dirty="0" smtClean="0">
+                <a:ln>
+                  <a:noFill/>
+                </a:ln>
+                <a:solidFill>
+                  <a:schemeClr val="tx1"/>
+                </a:solidFill>
+                <a:effectLst/>
+                <a:latin typeface="Times New Roman" panose="02020603050405020304" pitchFamily="18" charset="0"/>
+                <a:cs typeface="Times New Roman" panose="02020603050405020304" pitchFamily="18" charset="0"/>
+              </a:rPr>
+              <a:t/>
+            </a:r>
+            <a:br>
+              <a:rPr kumimoji="0" lang="en-US" altLang="en-US" b="0" i="0" u="none" strike="noStrike" cap="none" normalizeH="0" baseline="0" dirty="0" smtClean="0">
+                <a:ln>
+                  <a:noFill/>
+                </a:ln>
+                <a:solidFill>
+                  <a:schemeClr val="tx1"/>
+                </a:solidFill>
+                <a:effectLst/>
+                <a:latin typeface="Times New Roman" panose="02020603050405020304" pitchFamily="18" charset="0"/>
+                <a:cs typeface="Times New Roman" panose="02020603050405020304" pitchFamily="18" charset="0"/>
+              </a:rPr>
+            </a:br>
+            <a:r>
+              <a:rPr kumimoji="0" lang="en-US" altLang="en-US" b="0" i="0" u="none" strike="noStrike" cap="none" normalizeH="0" baseline="0" dirty="0" smtClean="0">
+                <a:ln>
+                  <a:noFill/>
+                </a:ln>
+                <a:solidFill>
+                  <a:schemeClr val="tx1"/>
+                </a:solidFill>
+                <a:effectLst/>
+                <a:latin typeface="Times New Roman" panose="02020603050405020304" pitchFamily="18" charset="0"/>
+                <a:cs typeface="Times New Roman" panose="02020603050405020304" pitchFamily="18" charset="0"/>
+              </a:rPr>
+              <a:t>It models more complex relationships than linear regression by using curve fitting.</a:t>
+            </a:r>
+          </a:p>
+          <a:p>
+            <a:pPr marL="0" marR="0" lvl="0" indent="0" algn="l" defTabSz="914400" rtl="0" eaLnBrk="0" fontAlgn="base" latinLnBrk="0" hangingPunct="0">
+              <a:lnSpc>
+                <a:spcPct val="100000"/>
+              </a:lnSpc>
+              <a:spcBef>
+                <a:spcPct val="0"/>
+              </a:spcBef>
+              <a:spcAft>
+                <a:spcPct val="0"/>
+              </a:spcAft>
+              <a:buClrTx/>
+              <a:buSzTx/>
+              <a:tabLst/>
+            </a:pPr>
+            <a:endParaRPr kumimoji="0" lang="en-US" altLang="en-US" b="0" i="0" u="none" strike="noStrike" cap="none" normalizeH="0" baseline="0" dirty="0" smtClean="0">
+              <a:ln>
+                <a:noFill/>
+              </a:ln>
+              <a:solidFill>
+                <a:schemeClr val="tx1"/>
+              </a:solidFill>
+              <a:effectLst/>
+              <a:latin typeface="Times New Roman" panose="02020603050405020304" pitchFamily="18" charset="0"/>
+              <a:cs typeface="Times New Roman" panose="02020603050405020304" pitchFamily="18" charset="0"/>
+            </a:endParaRPr>
+          </a:p>
+          <a:p>
+            <a:pPr marL="0" marR="0" lvl="0" indent="0" algn="l" defTabSz="914400" rtl="0" eaLnBrk="0" fontAlgn="base" latinLnBrk="0" hangingPunct="0">
+              <a:lnSpc>
+                <a:spcPct val="100000"/>
+              </a:lnSpc>
+              <a:spcBef>
+                <a:spcPct val="0"/>
+              </a:spcBef>
+              <a:spcAft>
+                <a:spcPct val="0"/>
+              </a:spcAft>
+              <a:buClrTx/>
+              <a:buSzTx/>
+              <a:buFontTx/>
+              <a:buChar char="•"/>
+              <a:tabLst/>
+            </a:pPr>
+            <a:r>
+              <a:rPr kumimoji="0" lang="en-US" altLang="en-US" b="1" i="0" u="none" strike="noStrike" cap="none" normalizeH="0" baseline="0" dirty="0" smtClean="0">
+                <a:ln>
+                  <a:noFill/>
+                </a:ln>
+                <a:solidFill>
+                  <a:schemeClr val="tx1"/>
+                </a:solidFill>
+                <a:effectLst/>
+                <a:latin typeface="Times New Roman" panose="02020603050405020304" pitchFamily="18" charset="0"/>
+                <a:cs typeface="Times New Roman" panose="02020603050405020304" pitchFamily="18" charset="0"/>
+              </a:rPr>
+              <a:t>Regularization Techniques:</a:t>
+            </a:r>
+            <a:r>
+              <a:rPr kumimoji="0" lang="en-US" altLang="en-US" b="0" i="0" u="none" strike="noStrike" cap="none" normalizeH="0" baseline="0" dirty="0" smtClean="0">
+                <a:ln>
+                  <a:noFill/>
+                </a:ln>
+                <a:solidFill>
+                  <a:schemeClr val="tx1"/>
+                </a:solidFill>
+                <a:effectLst/>
+                <a:latin typeface="Times New Roman" panose="02020603050405020304" pitchFamily="18" charset="0"/>
+                <a:cs typeface="Times New Roman" panose="02020603050405020304" pitchFamily="18" charset="0"/>
+              </a:rPr>
+              <a:t/>
+            </a:r>
+            <a:br>
+              <a:rPr kumimoji="0" lang="en-US" altLang="en-US" b="0" i="0" u="none" strike="noStrike" cap="none" normalizeH="0" baseline="0" dirty="0" smtClean="0">
+                <a:ln>
+                  <a:noFill/>
+                </a:ln>
+                <a:solidFill>
+                  <a:schemeClr val="tx1"/>
+                </a:solidFill>
+                <a:effectLst/>
+                <a:latin typeface="Times New Roman" panose="02020603050405020304" pitchFamily="18" charset="0"/>
+                <a:cs typeface="Times New Roman" panose="02020603050405020304" pitchFamily="18" charset="0"/>
+              </a:rPr>
+            </a:br>
+            <a:r>
+              <a:rPr kumimoji="0" lang="en-US" altLang="en-US" b="0" i="0" u="none" strike="noStrike" cap="none" normalizeH="0" baseline="0" dirty="0" smtClean="0">
+                <a:ln>
+                  <a:noFill/>
+                </a:ln>
+                <a:solidFill>
+                  <a:schemeClr val="tx1"/>
+                </a:solidFill>
+                <a:effectLst/>
+                <a:latin typeface="Times New Roman" panose="02020603050405020304" pitchFamily="18" charset="0"/>
+                <a:cs typeface="Times New Roman" panose="02020603050405020304" pitchFamily="18" charset="0"/>
+              </a:rPr>
+              <a:t>These techniques help control the model and reduce overfitting. </a:t>
+            </a:r>
+          </a:p>
+          <a:p>
+            <a:pPr marL="0" marR="0" lvl="0" indent="0" algn="l" defTabSz="914400" rtl="0" eaLnBrk="0" fontAlgn="base" latinLnBrk="0" hangingPunct="0">
+              <a:lnSpc>
+                <a:spcPct val="100000"/>
+              </a:lnSpc>
+              <a:spcBef>
+                <a:spcPct val="0"/>
+              </a:spcBef>
+              <a:spcAft>
+                <a:spcPct val="0"/>
+              </a:spcAft>
+              <a:buClrTx/>
+              <a:buSzTx/>
+              <a:buFontTx/>
+              <a:buNone/>
+              <a:tabLst/>
+            </a:pPr>
+            <a:endParaRPr kumimoji="0" lang="en-US" altLang="en-US" b="0" i="0" u="none" strike="noStrike" cap="none" normalizeH="0" baseline="0" dirty="0" smtClean="0">
+              <a:ln>
+                <a:noFill/>
+              </a:ln>
+              <a:solidFill>
+                <a:schemeClr val="tx1"/>
+              </a:solidFill>
+              <a:effectLst/>
+              <a:latin typeface="Times New Roman" panose="02020603050405020304" pitchFamily="18" charset="0"/>
+              <a:cs typeface="Times New Roman" panose="02020603050405020304" pitchFamily="18" charset="0"/>
+            </a:endParaRPr>
+          </a:p>
+        </p:txBody>
+      </p:sp>
+      <p:sp>
+        <p:nvSpPr>
+          <p:cNvPr id="6" name="Rectangle 3"/>
+          <p:cNvSpPr>
+            <a:spLocks noChangeArrowheads="1"/>
+          </p:cNvSpPr>
+          <p:nvPr/>
+        </p:nvSpPr>
+        <p:spPr bwMode="auto">
+          <a:xfrm>
+            <a:off x="2014330" y="3825234"/>
+            <a:ext cx="6919523" cy="2031325"/>
+          </a:xfrm>
+          <a:prstGeom prst="rect">
+            <a:avLst/>
+          </a:prstGeom>
+          <a:noFill/>
+          <a:ln>
+            <a:noFill/>
+          </a:ln>
+          <a:effectLst/>
+          <a:extLst>
+            <a:ext uri="{909E8E84-426E-40DD-AFC4-6F175D3DCCD1}">
+              <a14:hiddenFill xmlns:a14="http://schemas.microsoft.com/office/drawing/2010/main">
+                <a:solidFill>
+                  <a:schemeClr val="accent1"/>
+                </a:solidFill>
+              </a14:hiddenFill>
+            </a:ext>
+            <a:ext uri="{91240B29-F687-4F45-9708-019B960494DF}">
+              <a14:hiddenLine xmlns:a14="http://schemas.microsoft.com/office/drawing/2010/main" w="9525">
+                <a:solidFill>
+                  <a:schemeClr val="tx1"/>
+                </a:solidFill>
+                <a:miter lim="800000"/>
+                <a:headEnd/>
+                <a:tailEnd/>
+              </a14:hiddenLine>
+            </a:ext>
+            <a:ext uri="{AF507438-7753-43E0-B8FC-AC1667EBCBE1}">
+              <a14:hiddenEffects xmlns:a14="http://schemas.microsoft.com/office/drawing/2010/main">
+                <a:effectLst>
+                  <a:outerShdw dist="35921" dir="2700000" algn="ctr" rotWithShape="0">
+                    <a:schemeClr val="bg2"/>
+                  </a:outerShdw>
+                </a:effectLst>
+              </a14:hiddenEffects>
+            </a:ext>
+          </a:extLst>
+        </p:spPr>
+        <p:txBody>
+          <a:bodyPr vert="horz" wrap="none" lIns="91440" tIns="45720" rIns="91440" bIns="45720" numCol="1" anchor="ctr" anchorCtr="0" compatLnSpc="1">
+            <a:prstTxWarp prst="textNoShape">
+              <a:avLst/>
+            </a:prstTxWarp>
+            <a:spAutoFit/>
+          </a:bodyPr>
+          <a:lstStyle/>
+          <a:p>
+            <a:pPr marL="0" marR="0" lvl="0" indent="0" algn="l" defTabSz="914400" rtl="0" eaLnBrk="0" fontAlgn="base" latinLnBrk="0" hangingPunct="0">
+              <a:lnSpc>
+                <a:spcPct val="100000"/>
+              </a:lnSpc>
+              <a:spcBef>
+                <a:spcPct val="0"/>
+              </a:spcBef>
+              <a:spcAft>
+                <a:spcPct val="0"/>
+              </a:spcAft>
+              <a:buClrTx/>
+              <a:buSzTx/>
+              <a:buFontTx/>
+              <a:buNone/>
+              <a:tabLst/>
+            </a:pPr>
+            <a:r>
+              <a:rPr kumimoji="0" lang="en-US" altLang="en-US" b="1" i="0" u="none" strike="noStrike" cap="none" normalizeH="0" baseline="0" dirty="0" smtClean="0">
+                <a:ln>
+                  <a:noFill/>
+                </a:ln>
+                <a:solidFill>
+                  <a:schemeClr val="tx1"/>
+                </a:solidFill>
+                <a:effectLst/>
+                <a:latin typeface="Times New Roman" panose="02020603050405020304" pitchFamily="18" charset="0"/>
+                <a:cs typeface="Times New Roman" panose="02020603050405020304" pitchFamily="18" charset="0"/>
+              </a:rPr>
+              <a:t>Classification Concepts:</a:t>
+            </a:r>
+          </a:p>
+          <a:p>
+            <a:pPr marL="0" marR="0" lvl="0" indent="0" algn="l" defTabSz="914400" rtl="0" eaLnBrk="0" fontAlgn="base" latinLnBrk="0" hangingPunct="0">
+              <a:lnSpc>
+                <a:spcPct val="100000"/>
+              </a:lnSpc>
+              <a:spcBef>
+                <a:spcPct val="0"/>
+              </a:spcBef>
+              <a:spcAft>
+                <a:spcPct val="0"/>
+              </a:spcAft>
+              <a:buClrTx/>
+              <a:buSzTx/>
+              <a:buFontTx/>
+              <a:buChar char="•"/>
+              <a:tabLst/>
+            </a:pPr>
+            <a:r>
+              <a:rPr kumimoji="0" lang="en-US" altLang="en-US" b="1" i="0" u="none" strike="noStrike" cap="none" normalizeH="0" baseline="0" dirty="0" smtClean="0">
+                <a:ln>
+                  <a:noFill/>
+                </a:ln>
+                <a:solidFill>
+                  <a:schemeClr val="tx1"/>
+                </a:solidFill>
+                <a:effectLst/>
+                <a:latin typeface="Times New Roman" panose="02020603050405020304" pitchFamily="18" charset="0"/>
+                <a:cs typeface="Times New Roman" panose="02020603050405020304" pitchFamily="18" charset="0"/>
+              </a:rPr>
+              <a:t>Classification Concepts:</a:t>
+            </a:r>
+            <a:r>
+              <a:rPr kumimoji="0" lang="en-US" altLang="en-US" b="0" i="0" u="none" strike="noStrike" cap="none" normalizeH="0" baseline="0" dirty="0" smtClean="0">
+                <a:ln>
+                  <a:noFill/>
+                </a:ln>
+                <a:solidFill>
+                  <a:schemeClr val="tx1"/>
+                </a:solidFill>
+                <a:effectLst/>
+                <a:latin typeface="Times New Roman" panose="02020603050405020304" pitchFamily="18" charset="0"/>
+                <a:cs typeface="Times New Roman" panose="02020603050405020304" pitchFamily="18" charset="0"/>
+              </a:rPr>
+              <a:t/>
+            </a:r>
+            <a:br>
+              <a:rPr kumimoji="0" lang="en-US" altLang="en-US" b="0" i="0" u="none" strike="noStrike" cap="none" normalizeH="0" baseline="0" dirty="0" smtClean="0">
+                <a:ln>
+                  <a:noFill/>
+                </a:ln>
+                <a:solidFill>
+                  <a:schemeClr val="tx1"/>
+                </a:solidFill>
+                <a:effectLst/>
+                <a:latin typeface="Times New Roman" panose="02020603050405020304" pitchFamily="18" charset="0"/>
+                <a:cs typeface="Times New Roman" panose="02020603050405020304" pitchFamily="18" charset="0"/>
+              </a:rPr>
+            </a:br>
+            <a:r>
+              <a:rPr kumimoji="0" lang="en-US" altLang="en-US" b="0" i="0" u="none" strike="noStrike" cap="none" normalizeH="0" baseline="0" dirty="0" smtClean="0">
+                <a:ln>
+                  <a:noFill/>
+                </a:ln>
+                <a:solidFill>
+                  <a:schemeClr val="tx1"/>
+                </a:solidFill>
+                <a:effectLst/>
+                <a:latin typeface="Times New Roman" panose="02020603050405020304" pitchFamily="18" charset="0"/>
+                <a:cs typeface="Times New Roman" panose="02020603050405020304" pitchFamily="18" charset="0"/>
+              </a:rPr>
+              <a:t>It involves dividing data into different categories (e.g., spam / not spam).</a:t>
+            </a:r>
+          </a:p>
+          <a:p>
+            <a:pPr marL="0" marR="0" lvl="0" indent="0" algn="l" defTabSz="914400" rtl="0" eaLnBrk="0" fontAlgn="base" latinLnBrk="0" hangingPunct="0">
+              <a:lnSpc>
+                <a:spcPct val="100000"/>
+              </a:lnSpc>
+              <a:spcBef>
+                <a:spcPct val="0"/>
+              </a:spcBef>
+              <a:spcAft>
+                <a:spcPct val="0"/>
+              </a:spcAft>
+              <a:buClrTx/>
+              <a:buSzTx/>
+              <a:tabLst/>
+            </a:pPr>
+            <a:r>
+              <a:rPr kumimoji="0" lang="en-US" altLang="en-US" b="0" i="0" u="none" strike="noStrike" cap="none" normalizeH="0" baseline="0" dirty="0" smtClean="0">
+                <a:ln>
+                  <a:noFill/>
+                </a:ln>
+                <a:solidFill>
+                  <a:schemeClr val="tx1"/>
+                </a:solidFill>
+                <a:effectLst/>
+                <a:latin typeface="Times New Roman" panose="02020603050405020304" pitchFamily="18" charset="0"/>
+                <a:cs typeface="Times New Roman" panose="02020603050405020304" pitchFamily="18" charset="0"/>
+              </a:rPr>
+              <a:t> </a:t>
+            </a:r>
+          </a:p>
+          <a:p>
+            <a:pPr marL="0" marR="0" lvl="0" indent="0" algn="l" defTabSz="914400" rtl="0" eaLnBrk="0" fontAlgn="base" latinLnBrk="0" hangingPunct="0">
+              <a:lnSpc>
+                <a:spcPct val="100000"/>
+              </a:lnSpc>
+              <a:spcBef>
+                <a:spcPct val="0"/>
+              </a:spcBef>
+              <a:spcAft>
+                <a:spcPct val="0"/>
+              </a:spcAft>
+              <a:buClrTx/>
+              <a:buSzTx/>
+              <a:buFontTx/>
+              <a:buChar char="•"/>
+              <a:tabLst/>
+            </a:pPr>
+            <a:r>
+              <a:rPr kumimoji="0" lang="en-US" altLang="en-US" b="1" i="0" u="none" strike="noStrike" cap="none" normalizeH="0" baseline="0" dirty="0" smtClean="0">
+                <a:ln>
+                  <a:noFill/>
+                </a:ln>
+                <a:solidFill>
+                  <a:schemeClr val="tx1"/>
+                </a:solidFill>
+                <a:effectLst/>
+                <a:latin typeface="Times New Roman" panose="02020603050405020304" pitchFamily="18" charset="0"/>
+                <a:cs typeface="Times New Roman" panose="02020603050405020304" pitchFamily="18" charset="0"/>
+              </a:rPr>
+              <a:t>Logistic Regression:</a:t>
+            </a:r>
+            <a:r>
+              <a:rPr kumimoji="0" lang="en-US" altLang="en-US" b="0" i="0" u="none" strike="noStrike" cap="none" normalizeH="0" baseline="0" dirty="0" smtClean="0">
+                <a:ln>
+                  <a:noFill/>
+                </a:ln>
+                <a:solidFill>
+                  <a:schemeClr val="tx1"/>
+                </a:solidFill>
+                <a:effectLst/>
+                <a:latin typeface="Times New Roman" panose="02020603050405020304" pitchFamily="18" charset="0"/>
+                <a:cs typeface="Times New Roman" panose="02020603050405020304" pitchFamily="18" charset="0"/>
+              </a:rPr>
+              <a:t/>
+            </a:r>
+            <a:br>
+              <a:rPr kumimoji="0" lang="en-US" altLang="en-US" b="0" i="0" u="none" strike="noStrike" cap="none" normalizeH="0" baseline="0" dirty="0" smtClean="0">
+                <a:ln>
+                  <a:noFill/>
+                </a:ln>
+                <a:solidFill>
+                  <a:schemeClr val="tx1"/>
+                </a:solidFill>
+                <a:effectLst/>
+                <a:latin typeface="Times New Roman" panose="02020603050405020304" pitchFamily="18" charset="0"/>
+                <a:cs typeface="Times New Roman" panose="02020603050405020304" pitchFamily="18" charset="0"/>
+              </a:rPr>
+            </a:br>
+            <a:r>
+              <a:rPr kumimoji="0" lang="en-US" altLang="en-US" b="0" i="0" u="none" strike="noStrike" cap="none" normalizeH="0" baseline="0" dirty="0" smtClean="0">
+                <a:ln>
+                  <a:noFill/>
+                </a:ln>
+                <a:solidFill>
+                  <a:schemeClr val="tx1"/>
+                </a:solidFill>
+                <a:effectLst/>
+                <a:latin typeface="Times New Roman" panose="02020603050405020304" pitchFamily="18" charset="0"/>
+                <a:cs typeface="Times New Roman" panose="02020603050405020304" pitchFamily="18" charset="0"/>
+              </a:rPr>
+              <a:t>It is used for classification and provides probability-based outputs.</a:t>
+            </a:r>
+          </a:p>
+          <a:p>
+            <a:pPr marL="0" marR="0" lvl="0" indent="0" algn="l" defTabSz="914400" rtl="0" eaLnBrk="0" fontAlgn="base" latinLnBrk="0" hangingPunct="0">
+              <a:lnSpc>
+                <a:spcPct val="100000"/>
+              </a:lnSpc>
+              <a:spcBef>
+                <a:spcPct val="0"/>
+              </a:spcBef>
+              <a:spcAft>
+                <a:spcPct val="0"/>
+              </a:spcAft>
+              <a:buClrTx/>
+              <a:buSzTx/>
+              <a:buFontTx/>
+              <a:buNone/>
+              <a:tabLst/>
+            </a:pPr>
+            <a:endParaRPr kumimoji="0" lang="en-US" altLang="en-US" b="0" i="0" u="none" strike="noStrike" cap="none" normalizeH="0" baseline="0" dirty="0" smtClean="0">
+              <a:ln>
+                <a:noFill/>
+              </a:ln>
+              <a:solidFill>
+                <a:schemeClr val="tx1"/>
+              </a:solidFill>
+              <a:effectLst/>
+              <a:latin typeface="Times New Roman" panose="02020603050405020304" pitchFamily="18" charset="0"/>
+              <a:cs typeface="Times New Roman" panose="02020603050405020304" pitchFamily="18" charset="0"/>
+            </a:endParaRPr>
+          </a:p>
+        </p:txBody>
+      </p:sp>
     </p:spTree>
     <p:extLst>
       <p:ext uri="{BB962C8B-B14F-4D97-AF65-F5344CB8AC3E}">
-        <p14:creationId xmlns:p14="http://schemas.microsoft.com/office/powerpoint/2010/main" val="2061226794"/>
+        <p14:creationId xmlns:p14="http://schemas.microsoft.com/office/powerpoint/2010/main" val="3642497713"/>
       </p:ext>
     </p:extLst>
   </p:cSld>
@@ -9248,14 +10156,14 @@
       </p:grpSpPr>
       <p:sp>
         <p:nvSpPr>
-          <p:cNvPr id="2" name="TextBox 1"/>
+          <p:cNvPr id="4" name="TextBox 3"/>
           <p:cNvSpPr txBox="1"/>
           <p:nvPr/>
         </p:nvSpPr>
         <p:spPr>
           <a:xfrm>
-            <a:off x="2941983" y="2027581"/>
-            <a:ext cx="7951304" cy="4524315"/>
+            <a:off x="3008242" y="437322"/>
+            <a:ext cx="2464904" cy="400110"/>
           </a:xfrm>
           <a:prstGeom prst="rect">
             <a:avLst/>
@@ -9268,112 +10176,21 @@
           </a:bodyPr>
           <a:lstStyle/>
           <a:p>
-            <a:pPr marL="342900" indent="-342900" algn="just">
-              <a:buFont typeface="Arial" panose="020B0604020202020204" pitchFamily="34" charset="0"/>
-              <a:buChar char="•"/>
-            </a:pPr>
-            <a:r>
-              <a:rPr lang="en-US" sz="2400" dirty="0" smtClean="0">
-                <a:latin typeface="Times New Roman" panose="02020603050405020304" pitchFamily="18" charset="0"/>
-                <a:cs typeface="Times New Roman" panose="02020603050405020304" pitchFamily="18" charset="0"/>
-              </a:rPr>
-              <a:t>Classification is a supervised learning technique used to predict </a:t>
-            </a:r>
-            <a:r>
-              <a:rPr lang="en-US" sz="2400" b="1" dirty="0" smtClean="0">
-                <a:latin typeface="Times New Roman" panose="02020603050405020304" pitchFamily="18" charset="0"/>
-                <a:cs typeface="Times New Roman" panose="02020603050405020304" pitchFamily="18" charset="0"/>
-              </a:rPr>
-              <a:t>categorical outcomes</a:t>
-            </a:r>
-            <a:r>
-              <a:rPr lang="en-US" sz="2400" dirty="0" smtClean="0">
-                <a:latin typeface="Times New Roman" panose="02020603050405020304" pitchFamily="18" charset="0"/>
-                <a:cs typeface="Times New Roman" panose="02020603050405020304" pitchFamily="18" charset="0"/>
-              </a:rPr>
-              <a:t> such as Yes/No, Pass/Fail, Spam/Not Spam.</a:t>
-            </a:r>
-          </a:p>
-          <a:p>
-            <a:pPr marL="342900" indent="-342900" algn="just">
-              <a:buFont typeface="Arial" panose="020B0604020202020204" pitchFamily="34" charset="0"/>
-              <a:buChar char="•"/>
-            </a:pPr>
-            <a:r>
-              <a:rPr lang="en-US" sz="2400" dirty="0" smtClean="0">
-                <a:latin typeface="Times New Roman" panose="02020603050405020304" pitchFamily="18" charset="0"/>
-                <a:cs typeface="Times New Roman" panose="02020603050405020304" pitchFamily="18" charset="0"/>
-              </a:rPr>
-              <a:t>One of the most important classification algorithms is </a:t>
-            </a:r>
-            <a:r>
-              <a:rPr lang="en-US" sz="2400" b="1" dirty="0" smtClean="0">
-                <a:latin typeface="Times New Roman" panose="02020603050405020304" pitchFamily="18" charset="0"/>
-                <a:cs typeface="Times New Roman" panose="02020603050405020304" pitchFamily="18" charset="0"/>
-              </a:rPr>
-              <a:t>Logistic Regression</a:t>
-            </a:r>
-            <a:r>
-              <a:rPr lang="en-US" sz="2400" dirty="0" smtClean="0">
-                <a:latin typeface="Times New Roman" panose="02020603050405020304" pitchFamily="18" charset="0"/>
-                <a:cs typeface="Times New Roman" panose="02020603050405020304" pitchFamily="18" charset="0"/>
-              </a:rPr>
-              <a:t>.</a:t>
-            </a:r>
-          </a:p>
-          <a:p>
-            <a:pPr marL="342900" indent="-342900" algn="just">
-              <a:buFont typeface="Arial" panose="020B0604020202020204" pitchFamily="34" charset="0"/>
-              <a:buChar char="•"/>
-            </a:pPr>
-            <a:r>
-              <a:rPr lang="en-US" sz="2400" dirty="0" smtClean="0">
-                <a:latin typeface="Times New Roman" panose="02020603050405020304" pitchFamily="18" charset="0"/>
-                <a:cs typeface="Times New Roman" panose="02020603050405020304" pitchFamily="18" charset="0"/>
-              </a:rPr>
-              <a:t>Unlike Linear Regression, Logistic Regression uses a </a:t>
-            </a:r>
-            <a:r>
-              <a:rPr lang="en-US" sz="2400" b="1" dirty="0" smtClean="0">
-                <a:latin typeface="Times New Roman" panose="02020603050405020304" pitchFamily="18" charset="0"/>
-                <a:cs typeface="Times New Roman" panose="02020603050405020304" pitchFamily="18" charset="0"/>
-              </a:rPr>
-              <a:t>sigmoid function</a:t>
-            </a:r>
-            <a:r>
-              <a:rPr lang="en-US" sz="2400" dirty="0" smtClean="0">
-                <a:latin typeface="Times New Roman" panose="02020603050405020304" pitchFamily="18" charset="0"/>
-                <a:cs typeface="Times New Roman" panose="02020603050405020304" pitchFamily="18" charset="0"/>
-              </a:rPr>
-              <a:t> to convert output into probability values between 0 and 1.</a:t>
-            </a:r>
-          </a:p>
-          <a:p>
-            <a:pPr marL="342900" indent="-342900" algn="just">
-              <a:buFont typeface="Arial" panose="020B0604020202020204" pitchFamily="34" charset="0"/>
-              <a:buChar char="•"/>
-            </a:pPr>
-            <a:r>
-              <a:rPr lang="en-US" sz="2400" dirty="0" smtClean="0">
-                <a:latin typeface="Times New Roman" panose="02020603050405020304" pitchFamily="18" charset="0"/>
-                <a:cs typeface="Times New Roman" panose="02020603050405020304" pitchFamily="18" charset="0"/>
-              </a:rPr>
-              <a:t>Based on a threshold (usually 0.5), the model assigns a class label.</a:t>
-            </a:r>
-          </a:p>
-          <a:p>
-            <a:pPr marL="342900" indent="-342900" algn="just">
-              <a:buFont typeface="Arial" panose="020B0604020202020204" pitchFamily="34" charset="0"/>
-              <a:buChar char="•"/>
-            </a:pPr>
-            <a:r>
-              <a:rPr lang="en-US" sz="2400" dirty="0" smtClean="0">
-                <a:latin typeface="Times New Roman" panose="02020603050405020304" pitchFamily="18" charset="0"/>
-                <a:cs typeface="Times New Roman" panose="02020603050405020304" pitchFamily="18" charset="0"/>
-              </a:rPr>
-              <a:t>It is widely used because it is simple, efficient, and interpretable.</a:t>
-            </a:r>
-            <a:endParaRPr lang="en-US" sz="2400" dirty="0">
+            <a:r>
+              <a:rPr lang="en-IN" sz="2000" b="1" dirty="0" smtClean="0">
+                <a:latin typeface="Times New Roman" panose="02020603050405020304" pitchFamily="18" charset="0"/>
+                <a:cs typeface="Times New Roman" panose="02020603050405020304" pitchFamily="18" charset="0"/>
+              </a:rPr>
+              <a:t>Week </a:t>
+            </a:r>
+            <a:r>
+              <a:rPr lang="en-IN" sz="2000" b="1" dirty="0" smtClean="0">
+                <a:latin typeface="Times New Roman" panose="02020603050405020304" pitchFamily="18" charset="0"/>
+                <a:cs typeface="Times New Roman" panose="02020603050405020304" pitchFamily="18" charset="0"/>
+              </a:rPr>
+              <a:t>10</a:t>
+            </a:r>
+            <a:endParaRPr lang="en-IN" sz="2000" b="1" dirty="0">
               <a:latin typeface="Times New Roman" panose="02020603050405020304" pitchFamily="18" charset="0"/>
               <a:cs typeface="Times New Roman" panose="02020603050405020304" pitchFamily="18" charset="0"/>
             </a:endParaRPr>
@@ -9382,14 +10199,147 @@
       </p:sp>
       <p:sp>
         <p:nvSpPr>
+          <p:cNvPr id="2" name="Rectangle 1"/>
+          <p:cNvSpPr>
+            <a:spLocks noChangeArrowheads="1"/>
+          </p:cNvSpPr>
+          <p:nvPr/>
+        </p:nvSpPr>
+        <p:spPr bwMode="auto">
+          <a:xfrm>
+            <a:off x="2279373" y="1631500"/>
+            <a:ext cx="7301948" cy="3416320"/>
+          </a:xfrm>
+          <a:prstGeom prst="rect">
+            <a:avLst/>
+          </a:prstGeom>
+          <a:noFill/>
+          <a:ln>
+            <a:noFill/>
+          </a:ln>
+          <a:effectLst/>
+          <a:extLst>
+            <a:ext uri="{909E8E84-426E-40DD-AFC4-6F175D3DCCD1}">
+              <a14:hiddenFill xmlns:a14="http://schemas.microsoft.com/office/drawing/2010/main">
+                <a:solidFill>
+                  <a:schemeClr val="accent1"/>
+                </a:solidFill>
+              </a14:hiddenFill>
+            </a:ext>
+            <a:ext uri="{91240B29-F687-4F45-9708-019B960494DF}">
+              <a14:hiddenLine xmlns:a14="http://schemas.microsoft.com/office/drawing/2010/main" w="9525">
+                <a:solidFill>
+                  <a:schemeClr val="tx1"/>
+                </a:solidFill>
+                <a:miter lim="800000"/>
+                <a:headEnd/>
+                <a:tailEnd/>
+              </a14:hiddenLine>
+            </a:ext>
+            <a:ext uri="{AF507438-7753-43E0-B8FC-AC1667EBCBE1}">
+              <a14:hiddenEffects xmlns:a14="http://schemas.microsoft.com/office/drawing/2010/main">
+                <a:effectLst>
+                  <a:outerShdw dist="35921" dir="2700000" algn="ctr" rotWithShape="0">
+                    <a:schemeClr val="bg2"/>
+                  </a:outerShdw>
+                </a:effectLst>
+              </a14:hiddenEffects>
+            </a:ext>
+          </a:extLst>
+        </p:spPr>
+        <p:txBody>
+          <a:bodyPr vert="horz" wrap="square" lIns="91440" tIns="45720" rIns="91440" bIns="45720" numCol="1" anchor="ctr" anchorCtr="0" compatLnSpc="1">
+            <a:prstTxWarp prst="textNoShape">
+              <a:avLst/>
+            </a:prstTxWarp>
+            <a:spAutoFit/>
+          </a:bodyPr>
+          <a:lstStyle/>
+          <a:p>
+            <a:r>
+              <a:rPr lang="en-US" b="1" dirty="0"/>
+              <a:t>Data Preprocessing &amp; Regression</a:t>
+            </a:r>
+          </a:p>
+          <a:p>
+            <a:r>
+              <a:rPr lang="en-US" b="1" dirty="0"/>
+              <a:t>Feature Scaling &amp; Encoding Techniques</a:t>
+            </a:r>
+            <a:r>
+              <a:rPr lang="en-US" dirty="0"/>
+              <a:t> –</a:t>
+            </a:r>
+            <a:br>
+              <a:rPr lang="en-US" dirty="0"/>
+            </a:br>
+            <a:r>
+              <a:rPr lang="en-US" dirty="0"/>
+              <a:t>Used to prepare data by normalizing numerical values (feature scaling) and converting categorical data into numerical form using encoding techniques like </a:t>
+            </a:r>
+            <a:r>
+              <a:rPr lang="en-US" b="1" dirty="0"/>
+              <a:t>Label Encoding</a:t>
+            </a:r>
+            <a:r>
+              <a:rPr lang="en-US" dirty="0"/>
+              <a:t> and </a:t>
+            </a:r>
+            <a:r>
+              <a:rPr lang="en-US" b="1" dirty="0"/>
+              <a:t>One-Hot Encoding</a:t>
+            </a:r>
+            <a:r>
+              <a:rPr lang="en-US" dirty="0"/>
+              <a:t>, which helps improve model performance. </a:t>
+            </a:r>
+          </a:p>
+          <a:p>
+            <a:r>
+              <a:rPr lang="en-US" b="1" dirty="0"/>
+              <a:t>Linear &amp; Multiple Regression</a:t>
+            </a:r>
+            <a:r>
+              <a:rPr lang="en-US" dirty="0"/>
+              <a:t> –</a:t>
+            </a:r>
+            <a:br>
+              <a:rPr lang="en-US" dirty="0"/>
+            </a:br>
+            <a:r>
+              <a:rPr lang="en-US" dirty="0"/>
+              <a:t>Used to predict output values based on one (linear) or more (multiple) input variables, helping to understand relationships between variables. </a:t>
+            </a:r>
+          </a:p>
+          <a:p>
+            <a:r>
+              <a:rPr lang="en-US" b="1" dirty="0"/>
+              <a:t>Polynomial Regression</a:t>
+            </a:r>
+            <a:r>
+              <a:rPr lang="en-US" dirty="0"/>
+              <a:t> –</a:t>
+            </a:r>
+            <a:br>
+              <a:rPr lang="en-US" dirty="0"/>
+            </a:br>
+            <a:r>
+              <a:rPr lang="en-US" dirty="0"/>
+              <a:t>Used to model complex relationships by fitting a curved line instead of a straight line, which improves prediction accuracy when data is non-linear.</a:t>
+            </a:r>
+          </a:p>
+        </p:txBody>
+      </p:sp>
+      <p:sp>
+        <p:nvSpPr>
           <p:cNvPr id="3" name="TextBox 2"/>
           <p:cNvSpPr txBox="1"/>
           <p:nvPr/>
         </p:nvSpPr>
         <p:spPr>
           <a:xfrm>
-            <a:off x="2941983" y="914399"/>
-            <a:ext cx="8375374" cy="523220"/>
+            <a:off x="8971722" y="569843"/>
+            <a:ext cx="2054087" cy="369332"/>
           </a:xfrm>
           <a:prstGeom prst="rect">
             <a:avLst/>
@@ -9403,20 +10353,13 @@
           <a:lstStyle/>
           <a:p>
             <a:r>
-              <a:rPr lang="en-US" sz="2800" b="1" dirty="0">
-                <a:latin typeface="Times New Roman" panose="02020603050405020304" pitchFamily="18" charset="0"/>
-                <a:cs typeface="Times New Roman" panose="02020603050405020304" pitchFamily="18" charset="0"/>
-              </a:rPr>
-              <a:t>Introduction to Classification &amp; Logistic </a:t>
-            </a:r>
-            <a:r>
-              <a:rPr lang="en-US" sz="2800" b="1" dirty="0" smtClean="0">
-                <a:latin typeface="Times New Roman" panose="02020603050405020304" pitchFamily="18" charset="0"/>
-                <a:cs typeface="Times New Roman" panose="02020603050405020304" pitchFamily="18" charset="0"/>
-              </a:rPr>
-              <a:t>Regression</a:t>
-            </a:r>
-            <a:endParaRPr lang="en-US" sz="2800" b="1" dirty="0">
+              <a:rPr lang="en-US" b="1" dirty="0" smtClean="0">
+                <a:latin typeface="Times New Roman" panose="02020603050405020304" pitchFamily="18" charset="0"/>
+                <a:cs typeface="Times New Roman" panose="02020603050405020304" pitchFamily="18" charset="0"/>
+              </a:rPr>
+              <a:t>Month 3</a:t>
+            </a:r>
+            <a:endParaRPr lang="en-IN" b="1" dirty="0">
               <a:latin typeface="Times New Roman" panose="02020603050405020304" pitchFamily="18" charset="0"/>
               <a:cs typeface="Times New Roman" panose="02020603050405020304" pitchFamily="18" charset="0"/>
             </a:endParaRPr>
@@ -9426,7 +10369,7 @@
     </p:spTree>
     <p:extLst>
       <p:ext uri="{BB962C8B-B14F-4D97-AF65-F5344CB8AC3E}">
-        <p14:creationId xmlns:p14="http://schemas.microsoft.com/office/powerpoint/2010/main" val="3294322666"/>
+        <p14:creationId xmlns:p14="http://schemas.microsoft.com/office/powerpoint/2010/main" val="2239751391"/>
       </p:ext>
     </p:extLst>
   </p:cSld>
@@ -9455,13 +10398,135 @@
       </p:grpSpPr>
       <p:sp>
         <p:nvSpPr>
+          <p:cNvPr id="3" name="TextBox 2"/>
+          <p:cNvSpPr txBox="1"/>
+          <p:nvPr/>
+        </p:nvSpPr>
+        <p:spPr>
+          <a:xfrm>
+            <a:off x="2531166" y="2027583"/>
+            <a:ext cx="6811617" cy="3693319"/>
+          </a:xfrm>
+          <a:prstGeom prst="rect">
+            <a:avLst/>
+          </a:prstGeom>
+          <a:noFill/>
+        </p:spPr>
+        <p:txBody>
+          <a:bodyPr wrap="square" rtlCol="0">
+            <a:spAutoFit/>
+          </a:bodyPr>
+          <a:lstStyle/>
+          <a:p>
+            <a:r>
+              <a:rPr lang="en-US" b="1" dirty="0"/>
+              <a:t>Model Improvement &amp; Classification</a:t>
+            </a:r>
+          </a:p>
+          <a:p>
+            <a:r>
+              <a:rPr lang="en-US" b="1" dirty="0"/>
+              <a:t>Regularization &amp; Cross-Validation</a:t>
+            </a:r>
+            <a:r>
+              <a:rPr lang="en-US" dirty="0"/>
+              <a:t> –</a:t>
+            </a:r>
+            <a:br>
+              <a:rPr lang="en-US" dirty="0"/>
+            </a:br>
+            <a:r>
+              <a:rPr lang="en-US" dirty="0"/>
+              <a:t>Techniques used to improve model performance by reducing overfitting. Regularization controls model complexity, while cross-validation ensures the model performs well on unseen data. </a:t>
+            </a:r>
+          </a:p>
+          <a:p>
+            <a:r>
+              <a:rPr lang="en-US" b="1" dirty="0"/>
+              <a:t>Overfitting &amp; </a:t>
+            </a:r>
+            <a:r>
+              <a:rPr lang="en-US" b="1" dirty="0" err="1"/>
+              <a:t>Underfitting</a:t>
+            </a:r>
+            <a:r>
+              <a:rPr lang="en-US" dirty="0"/>
+              <a:t> –</a:t>
+            </a:r>
+            <a:br>
+              <a:rPr lang="en-US" dirty="0"/>
+            </a:br>
+            <a:r>
+              <a:rPr lang="en-US" dirty="0"/>
+              <a:t>Overfitting occurs when a model learns too much from training data and fails on new data, while </a:t>
+            </a:r>
+            <a:r>
+              <a:rPr lang="en-US" dirty="0" err="1"/>
+              <a:t>underfitting</a:t>
+            </a:r>
+            <a:r>
+              <a:rPr lang="en-US" dirty="0"/>
+              <a:t> happens when the model is too simple to capture important patterns. </a:t>
+            </a:r>
+          </a:p>
+          <a:p>
+            <a:r>
+              <a:rPr lang="en-US" b="1" dirty="0"/>
+              <a:t>Logistic Regression &amp; Evaluation Methods</a:t>
+            </a:r>
+            <a:r>
+              <a:rPr lang="en-US" dirty="0"/>
+              <a:t> –</a:t>
+            </a:r>
+            <a:br>
+              <a:rPr lang="en-US" dirty="0"/>
+            </a:br>
+            <a:r>
+              <a:rPr lang="en-US" dirty="0"/>
+              <a:t>Logistic regression is used for classification problems and provides probability-based outputs. Evaluation methods like accuracy and confusion matrix help measure model performance.</a:t>
+            </a:r>
+          </a:p>
+        </p:txBody>
+      </p:sp>
+    </p:spTree>
+    <p:extLst>
+      <p:ext uri="{BB962C8B-B14F-4D97-AF65-F5344CB8AC3E}">
+        <p14:creationId xmlns:p14="http://schemas.microsoft.com/office/powerpoint/2010/main" val="1914888419"/>
+      </p:ext>
+    </p:extLst>
+  </p:cSld>
+  <p:clrMapOvr>
+    <a:masterClrMapping/>
+  </p:clrMapOvr>
+</p:sld>
+</file>
+
+<file path=ppt/slides/slide25.xml><?xml version="1.0" encoding="utf-8"?>
+<p:sld xmlns:a="http://schemas.openxmlformats.org/drawingml/2006/main" xmlns:r="http://schemas.openxmlformats.org/officeDocument/2006/relationships" xmlns:p="http://schemas.openxmlformats.org/presentationml/2006/main">
+  <p:cSld>
+    <p:spTree>
+      <p:nvGrpSpPr>
+        <p:cNvPr id="1" name=""/>
+        <p:cNvGrpSpPr/>
+        <p:nvPr/>
+      </p:nvGrpSpPr>
+      <p:grpSpPr>
+        <a:xfrm>
+          <a:off x="0" y="0"/>
+          <a:ext cx="0" cy="0"/>
+          <a:chOff x="0" y="0"/>
+          <a:chExt cx="0" cy="0"/>
+        </a:xfrm>
+      </p:grpSpPr>
+      <p:sp>
+        <p:nvSpPr>
           <p:cNvPr id="4" name="TextBox 3"/>
           <p:cNvSpPr txBox="1"/>
           <p:nvPr/>
         </p:nvSpPr>
         <p:spPr>
           <a:xfrm>
-            <a:off x="2014330" y="357809"/>
+            <a:off x="3008242" y="437322"/>
             <a:ext cx="2464904" cy="400110"/>
           </a:xfrm>
           <a:prstGeom prst="rect">
@@ -9480,7 +10545,14 @@
                 <a:latin typeface="Times New Roman" panose="02020603050405020304" pitchFamily="18" charset="0"/>
                 <a:cs typeface="Times New Roman" panose="02020603050405020304" pitchFamily="18" charset="0"/>
               </a:rPr>
-              <a:t>Week 9</a:t>
+              <a:t>Week </a:t>
+            </a:r>
+            <a:r>
+              <a:rPr lang="en-IN" sz="2000" b="1" dirty="0" smtClean="0">
+                <a:latin typeface="Times New Roman" panose="02020603050405020304" pitchFamily="18" charset="0"/>
+                <a:cs typeface="Times New Roman" panose="02020603050405020304" pitchFamily="18" charset="0"/>
+              </a:rPr>
+              <a:t>11</a:t>
             </a:r>
             <a:endParaRPr lang="en-IN" sz="2000" b="1" dirty="0">
               <a:latin typeface="Times New Roman" panose="02020603050405020304" pitchFamily="18" charset="0"/>
@@ -9491,14 +10563,14 @@
       </p:sp>
       <p:sp>
         <p:nvSpPr>
-          <p:cNvPr id="5" name="TextBox 4"/>
+          <p:cNvPr id="3" name="TextBox 2"/>
           <p:cNvSpPr txBox="1"/>
           <p:nvPr/>
         </p:nvSpPr>
         <p:spPr>
-          <a:xfrm rot="10800000" flipH="1" flipV="1">
-            <a:off x="2014330" y="1398103"/>
-            <a:ext cx="6832160" cy="369332"/>
+          <a:xfrm>
+            <a:off x="2703443" y="1828800"/>
+            <a:ext cx="7354956" cy="3139321"/>
           </a:xfrm>
           <a:prstGeom prst="rect">
             <a:avLst/>
@@ -9512,9 +10584,62 @@
           <a:lstStyle/>
           <a:p>
             <a:r>
-              <a:rPr lang="en-IN" dirty="0" smtClean="0"/>
-              <a:t>f</a:t>
-            </a:r>
+              <a:rPr lang="en-US" b="1" dirty="0"/>
+              <a:t>Decision Tree Basics &amp; Splitting</a:t>
+            </a:r>
+          </a:p>
+          <a:p>
+            <a:r>
+              <a:rPr lang="en-US" b="1" dirty="0"/>
+              <a:t>Decision Tree Concept</a:t>
+            </a:r>
+            <a:r>
+              <a:rPr lang="en-US" dirty="0"/>
+              <a:t> –</a:t>
+            </a:r>
+            <a:br>
+              <a:rPr lang="en-US" dirty="0"/>
+            </a:br>
+            <a:r>
+              <a:rPr lang="en-US" dirty="0"/>
+              <a:t>A tree-based model used for classification and prediction, where data is split into branches based on conditions. </a:t>
+            </a:r>
+          </a:p>
+          <a:p>
+            <a:r>
+              <a:rPr lang="en-US" b="1" dirty="0"/>
+              <a:t>Entropy in Decision Tree</a:t>
+            </a:r>
+            <a:r>
+              <a:rPr lang="en-US" dirty="0"/>
+              <a:t> –</a:t>
+            </a:r>
+            <a:br>
+              <a:rPr lang="en-US" dirty="0"/>
+            </a:br>
+            <a:r>
+              <a:rPr lang="en-US" dirty="0"/>
+              <a:t>Measures impurity or randomness in data, helping to select the best feature for splitting. </a:t>
+            </a:r>
+          </a:p>
+          <a:p>
+            <a:r>
+              <a:rPr lang="en-US" b="1" dirty="0"/>
+              <a:t>Gini Index</a:t>
+            </a:r>
+            <a:r>
+              <a:rPr lang="en-US" dirty="0"/>
+              <a:t> –</a:t>
+            </a:r>
+            <a:br>
+              <a:rPr lang="en-US" dirty="0"/>
+            </a:br>
+            <a:r>
+              <a:rPr lang="en-US" dirty="0"/>
+              <a:t>Another impurity measure used to evaluate how well data is split into different classes.</a:t>
+            </a:r>
+          </a:p>
+          <a:p>
             <a:endParaRPr lang="en-IN" dirty="0"/>
           </a:p>
         </p:txBody>
@@ -9522,7 +10647,627 @@
     </p:spTree>
     <p:extLst>
       <p:ext uri="{BB962C8B-B14F-4D97-AF65-F5344CB8AC3E}">
-        <p14:creationId xmlns:p14="http://schemas.microsoft.com/office/powerpoint/2010/main" val="3642497713"/>
+        <p14:creationId xmlns:p14="http://schemas.microsoft.com/office/powerpoint/2010/main" val="304162928"/>
+      </p:ext>
+    </p:extLst>
+  </p:cSld>
+  <p:clrMapOvr>
+    <a:masterClrMapping/>
+  </p:clrMapOvr>
+</p:sld>
+</file>
+
+<file path=ppt/slides/slide26.xml><?xml version="1.0" encoding="utf-8"?>
+<p:sld xmlns:a="http://schemas.openxmlformats.org/drawingml/2006/main" xmlns:r="http://schemas.openxmlformats.org/officeDocument/2006/relationships" xmlns:p="http://schemas.openxmlformats.org/presentationml/2006/main">
+  <p:cSld>
+    <p:spTree>
+      <p:nvGrpSpPr>
+        <p:cNvPr id="1" name=""/>
+        <p:cNvGrpSpPr/>
+        <p:nvPr/>
+      </p:nvGrpSpPr>
+      <p:grpSpPr>
+        <a:xfrm>
+          <a:off x="0" y="0"/>
+          <a:ext cx="0" cy="0"/>
+          <a:chOff x="0" y="0"/>
+          <a:chExt cx="0" cy="0"/>
+        </a:xfrm>
+      </p:grpSpPr>
+      <p:sp>
+        <p:nvSpPr>
+          <p:cNvPr id="3" name="TextBox 2"/>
+          <p:cNvSpPr txBox="1"/>
+          <p:nvPr/>
+        </p:nvSpPr>
+        <p:spPr>
+          <a:xfrm>
+            <a:off x="2703443" y="1828800"/>
+            <a:ext cx="7354956" cy="2862322"/>
+          </a:xfrm>
+          <a:prstGeom prst="rect">
+            <a:avLst/>
+          </a:prstGeom>
+          <a:noFill/>
+        </p:spPr>
+        <p:txBody>
+          <a:bodyPr wrap="square" rtlCol="0">
+            <a:spAutoFit/>
+          </a:bodyPr>
+          <a:lstStyle/>
+          <a:p>
+            <a:r>
+              <a:rPr lang="en-US" b="1" dirty="0"/>
+              <a:t>Pruning &amp; Model Understanding</a:t>
+            </a:r>
+          </a:p>
+          <a:p>
+            <a:r>
+              <a:rPr lang="en-US" b="1" dirty="0"/>
+              <a:t>Pruning Techniques</a:t>
+            </a:r>
+            <a:r>
+              <a:rPr lang="en-US" dirty="0"/>
+              <a:t> –</a:t>
+            </a:r>
+            <a:br>
+              <a:rPr lang="en-US" dirty="0"/>
+            </a:br>
+            <a:r>
+              <a:rPr lang="en-US" dirty="0"/>
+              <a:t>Used to simplify the tree by removing unnecessary branches, which reduces overfitting and improves performance. </a:t>
+            </a:r>
+          </a:p>
+          <a:p>
+            <a:r>
+              <a:rPr lang="en-US" b="1" dirty="0"/>
+              <a:t>Types of Pruning</a:t>
+            </a:r>
+            <a:r>
+              <a:rPr lang="en-US" dirty="0"/>
+              <a:t> – </a:t>
+            </a:r>
+          </a:p>
+          <a:p>
+            <a:pPr lvl="1"/>
+            <a:r>
+              <a:rPr lang="en-US" b="1" dirty="0"/>
+              <a:t>Pre-Pruning</a:t>
+            </a:r>
+            <a:r>
+              <a:rPr lang="en-US" dirty="0"/>
+              <a:t> – Stops tree growth early based on conditions. </a:t>
+            </a:r>
+          </a:p>
+          <a:p>
+            <a:pPr lvl="1"/>
+            <a:r>
+              <a:rPr lang="en-US" b="1" dirty="0"/>
+              <a:t>Post-Pruning</a:t>
+            </a:r>
+            <a:r>
+              <a:rPr lang="en-US" dirty="0"/>
+              <a:t> – Removes extra branches after full tree creation. </a:t>
+            </a:r>
+          </a:p>
+          <a:p>
+            <a:r>
+              <a:rPr lang="en-US" b="1" dirty="0"/>
+              <a:t>Decision Tree Revision</a:t>
+            </a:r>
+            <a:r>
+              <a:rPr lang="en-US" dirty="0"/>
+              <a:t> –</a:t>
+            </a:r>
+            <a:br>
+              <a:rPr lang="en-US" dirty="0"/>
+            </a:br>
+            <a:r>
+              <a:rPr lang="en-US" dirty="0"/>
+              <a:t>Reviewed all concepts to strengthen understanding and improve overall clarity</a:t>
+            </a:r>
+          </a:p>
+        </p:txBody>
+      </p:sp>
+    </p:spTree>
+    <p:extLst>
+      <p:ext uri="{BB962C8B-B14F-4D97-AF65-F5344CB8AC3E}">
+        <p14:creationId xmlns:p14="http://schemas.microsoft.com/office/powerpoint/2010/main" val="2133620581"/>
+      </p:ext>
+    </p:extLst>
+  </p:cSld>
+  <p:clrMapOvr>
+    <a:masterClrMapping/>
+  </p:clrMapOvr>
+</p:sld>
+</file>
+
+<file path=ppt/slides/slide27.xml><?xml version="1.0" encoding="utf-8"?>
+<p:sld xmlns:a="http://schemas.openxmlformats.org/drawingml/2006/main" xmlns:r="http://schemas.openxmlformats.org/officeDocument/2006/relationships" xmlns:p="http://schemas.openxmlformats.org/presentationml/2006/main">
+  <p:cSld>
+    <p:spTree>
+      <p:nvGrpSpPr>
+        <p:cNvPr id="1" name=""/>
+        <p:cNvGrpSpPr/>
+        <p:nvPr/>
+      </p:nvGrpSpPr>
+      <p:grpSpPr>
+        <a:xfrm>
+          <a:off x="0" y="0"/>
+          <a:ext cx="0" cy="0"/>
+          <a:chOff x="0" y="0"/>
+          <a:chExt cx="0" cy="0"/>
+        </a:xfrm>
+      </p:grpSpPr>
+      <p:sp>
+        <p:nvSpPr>
+          <p:cNvPr id="2" name="TextBox 1"/>
+          <p:cNvSpPr txBox="1"/>
+          <p:nvPr/>
+        </p:nvSpPr>
+        <p:spPr>
+          <a:xfrm>
+            <a:off x="2902226" y="1895061"/>
+            <a:ext cx="7023652" cy="3416320"/>
+          </a:xfrm>
+          <a:prstGeom prst="rect">
+            <a:avLst/>
+          </a:prstGeom>
+          <a:noFill/>
+        </p:spPr>
+        <p:txBody>
+          <a:bodyPr wrap="square" rtlCol="0">
+            <a:spAutoFit/>
+          </a:bodyPr>
+          <a:lstStyle/>
+          <a:p>
+            <a:r>
+              <a:rPr lang="en-US" b="1" dirty="0" smtClean="0"/>
+              <a:t>KNN </a:t>
+            </a:r>
+            <a:r>
+              <a:rPr lang="en-US" b="1" dirty="0"/>
+              <a:t>(K-Nearest Neighbors</a:t>
+            </a:r>
+            <a:r>
+              <a:rPr lang="en-US" b="1" dirty="0" smtClean="0"/>
+              <a:t>)</a:t>
+            </a:r>
+          </a:p>
+          <a:p>
+            <a:endParaRPr lang="en-US" b="1" dirty="0"/>
+          </a:p>
+          <a:p>
+            <a:r>
+              <a:rPr lang="en-US" b="1" dirty="0"/>
+              <a:t>K-Nearest Neighbors (KNN)</a:t>
+            </a:r>
+            <a:r>
+              <a:rPr lang="en-US" dirty="0"/>
+              <a:t> –</a:t>
+            </a:r>
+            <a:br>
+              <a:rPr lang="en-US" dirty="0"/>
+            </a:br>
+            <a:r>
+              <a:rPr lang="en-US" dirty="0"/>
+              <a:t>A distance-based algorithm used for classification, where a data point is classified based on the majority class of its nearest neighbors. </a:t>
+            </a:r>
+          </a:p>
+          <a:p>
+            <a:r>
+              <a:rPr lang="en-US" b="1" dirty="0"/>
+              <a:t>Distance Calculation Techniques</a:t>
+            </a:r>
+            <a:r>
+              <a:rPr lang="en-US" dirty="0"/>
+              <a:t> –</a:t>
+            </a:r>
+            <a:br>
+              <a:rPr lang="en-US" dirty="0"/>
+            </a:br>
+            <a:r>
+              <a:rPr lang="en-US" dirty="0"/>
+              <a:t>KNN uses distance measures like </a:t>
+            </a:r>
+            <a:r>
+              <a:rPr lang="en-US" b="1" dirty="0"/>
+              <a:t>Euclidean Distance</a:t>
+            </a:r>
+            <a:r>
+              <a:rPr lang="en-US" dirty="0"/>
+              <a:t> and </a:t>
+            </a:r>
+            <a:r>
+              <a:rPr lang="en-US" b="1" dirty="0"/>
+              <a:t>Manhattan Distance</a:t>
+            </a:r>
+            <a:r>
+              <a:rPr lang="en-US" dirty="0"/>
+              <a:t> to find the closest data points. </a:t>
+            </a:r>
+          </a:p>
+          <a:p>
+            <a:r>
+              <a:rPr lang="en-US" b="1" dirty="0"/>
+              <a:t>Choosing K Value</a:t>
+            </a:r>
+            <a:r>
+              <a:rPr lang="en-US" dirty="0"/>
+              <a:t> –</a:t>
+            </a:r>
+            <a:br>
+              <a:rPr lang="en-US" dirty="0"/>
+            </a:br>
+            <a:r>
+              <a:rPr lang="en-US" dirty="0"/>
+              <a:t>The value of </a:t>
+            </a:r>
+            <a:r>
+              <a:rPr lang="en-US" i="1" dirty="0"/>
+              <a:t>K</a:t>
+            </a:r>
+            <a:r>
+              <a:rPr lang="en-US" dirty="0"/>
+              <a:t> (number of neighbors) is important, as a small K can cause overfitting and a large K can reduce accuracy.</a:t>
+            </a:r>
+          </a:p>
+          <a:p>
+            <a:endParaRPr lang="en-IN" dirty="0"/>
+          </a:p>
+        </p:txBody>
+      </p:sp>
+      <p:sp>
+        <p:nvSpPr>
+          <p:cNvPr id="4" name="TextBox 3"/>
+          <p:cNvSpPr txBox="1"/>
+          <p:nvPr/>
+        </p:nvSpPr>
+        <p:spPr>
+          <a:xfrm>
+            <a:off x="2902226" y="993913"/>
+            <a:ext cx="4174435" cy="369332"/>
+          </a:xfrm>
+          <a:prstGeom prst="rect">
+            <a:avLst/>
+          </a:prstGeom>
+          <a:noFill/>
+        </p:spPr>
+        <p:txBody>
+          <a:bodyPr wrap="square" rtlCol="0">
+            <a:spAutoFit/>
+          </a:bodyPr>
+          <a:lstStyle/>
+          <a:p>
+            <a:r>
+              <a:rPr lang="en-US" b="1" dirty="0" smtClean="0">
+                <a:latin typeface="Times New Roman" panose="02020603050405020304" pitchFamily="18" charset="0"/>
+                <a:cs typeface="Times New Roman" panose="02020603050405020304" pitchFamily="18" charset="0"/>
+              </a:rPr>
+              <a:t>Week 12 </a:t>
+            </a:r>
+            <a:endParaRPr lang="en-IN" b="1" dirty="0">
+              <a:latin typeface="Times New Roman" panose="02020603050405020304" pitchFamily="18" charset="0"/>
+              <a:cs typeface="Times New Roman" panose="02020603050405020304" pitchFamily="18" charset="0"/>
+            </a:endParaRPr>
+          </a:p>
+        </p:txBody>
+      </p:sp>
+    </p:spTree>
+    <p:extLst>
+      <p:ext uri="{BB962C8B-B14F-4D97-AF65-F5344CB8AC3E}">
+        <p14:creationId xmlns:p14="http://schemas.microsoft.com/office/powerpoint/2010/main" val="528498145"/>
+      </p:ext>
+    </p:extLst>
+  </p:cSld>
+  <p:clrMapOvr>
+    <a:masterClrMapping/>
+  </p:clrMapOvr>
+</p:sld>
+</file>
+
+<file path=ppt/slides/slide28.xml><?xml version="1.0" encoding="utf-8"?>
+<p:sld xmlns:a="http://schemas.openxmlformats.org/drawingml/2006/main" xmlns:r="http://schemas.openxmlformats.org/officeDocument/2006/relationships" xmlns:p="http://schemas.openxmlformats.org/presentationml/2006/main">
+  <p:cSld>
+    <p:spTree>
+      <p:nvGrpSpPr>
+        <p:cNvPr id="1" name=""/>
+        <p:cNvGrpSpPr/>
+        <p:nvPr/>
+      </p:nvGrpSpPr>
+      <p:grpSpPr>
+        <a:xfrm>
+          <a:off x="0" y="0"/>
+          <a:ext cx="0" cy="0"/>
+          <a:chOff x="0" y="0"/>
+          <a:chExt cx="0" cy="0"/>
+        </a:xfrm>
+      </p:grpSpPr>
+      <p:sp>
+        <p:nvSpPr>
+          <p:cNvPr id="2" name="TextBox 1"/>
+          <p:cNvSpPr txBox="1"/>
+          <p:nvPr/>
+        </p:nvSpPr>
+        <p:spPr>
+          <a:xfrm>
+            <a:off x="2703444" y="1298713"/>
+            <a:ext cx="6851373" cy="3970318"/>
+          </a:xfrm>
+          <a:prstGeom prst="rect">
+            <a:avLst/>
+          </a:prstGeom>
+          <a:noFill/>
+        </p:spPr>
+        <p:txBody>
+          <a:bodyPr wrap="square" rtlCol="0">
+            <a:spAutoFit/>
+          </a:bodyPr>
+          <a:lstStyle/>
+          <a:p>
+            <a:r>
+              <a:rPr lang="en-IN" b="1" dirty="0"/>
+              <a:t>SVM (Support Vector Machine</a:t>
+            </a:r>
+            <a:r>
+              <a:rPr lang="en-IN" b="1" dirty="0" smtClean="0"/>
+              <a:t>)</a:t>
+            </a:r>
+          </a:p>
+          <a:p>
+            <a:endParaRPr lang="en-IN" b="1" dirty="0"/>
+          </a:p>
+          <a:p>
+            <a:r>
+              <a:rPr lang="en-IN" b="1" dirty="0"/>
+              <a:t>Support Vector Machine (SVM)</a:t>
+            </a:r>
+            <a:r>
+              <a:rPr lang="en-IN" dirty="0"/>
+              <a:t> –</a:t>
+            </a:r>
+            <a:br>
+              <a:rPr lang="en-IN" dirty="0"/>
+            </a:br>
+            <a:r>
+              <a:rPr lang="en-IN" dirty="0"/>
+              <a:t>A powerful classification algorithm that finds the best boundary (hyperplane) to separate different classes. </a:t>
+            </a:r>
+          </a:p>
+          <a:p>
+            <a:r>
+              <a:rPr lang="en-IN" b="1" dirty="0"/>
+              <a:t>Kernel Techniques</a:t>
+            </a:r>
+            <a:r>
+              <a:rPr lang="en-IN" dirty="0"/>
+              <a:t> –</a:t>
+            </a:r>
+            <a:br>
+              <a:rPr lang="en-IN" dirty="0"/>
+            </a:br>
+            <a:r>
+              <a:rPr lang="en-IN" dirty="0"/>
+              <a:t>Kernels help to handle complex data by transforming it into higher dimensions. Common types include: </a:t>
+            </a:r>
+          </a:p>
+          <a:p>
+            <a:pPr lvl="1"/>
+            <a:r>
+              <a:rPr lang="en-IN" b="1" dirty="0"/>
+              <a:t>Linear Kernel</a:t>
+            </a:r>
+            <a:r>
+              <a:rPr lang="en-IN" dirty="0"/>
+              <a:t> </a:t>
+            </a:r>
+          </a:p>
+          <a:p>
+            <a:pPr lvl="1"/>
+            <a:r>
+              <a:rPr lang="en-IN" b="1" dirty="0"/>
+              <a:t>Polynomial Kernel</a:t>
+            </a:r>
+            <a:r>
+              <a:rPr lang="en-IN" dirty="0"/>
+              <a:t> </a:t>
+            </a:r>
+          </a:p>
+          <a:p>
+            <a:pPr lvl="1"/>
+            <a:r>
+              <a:rPr lang="en-IN" b="1" dirty="0"/>
+              <a:t>RBF (Radial Basis Function) Kernel</a:t>
+            </a:r>
+            <a:r>
+              <a:rPr lang="en-IN" dirty="0"/>
+              <a:t> </a:t>
+            </a:r>
+          </a:p>
+          <a:p>
+            <a:r>
+              <a:rPr lang="en-IN" b="1" dirty="0"/>
+              <a:t>Model Improvement (SVM)</a:t>
+            </a:r>
+            <a:r>
+              <a:rPr lang="en-IN" dirty="0"/>
+              <a:t> –</a:t>
+            </a:r>
+            <a:br>
+              <a:rPr lang="en-IN" dirty="0"/>
+            </a:br>
+            <a:r>
+              <a:rPr lang="en-IN" dirty="0"/>
+              <a:t>Proper kernel selection and parameter tuning help improve model performance and accuracy</a:t>
+            </a:r>
+            <a:r>
+              <a:rPr lang="en-IN" dirty="0" smtClean="0"/>
+              <a:t>.</a:t>
+            </a:r>
+            <a:endParaRPr lang="en-IN" dirty="0"/>
+          </a:p>
+        </p:txBody>
+      </p:sp>
+    </p:spTree>
+    <p:extLst>
+      <p:ext uri="{BB962C8B-B14F-4D97-AF65-F5344CB8AC3E}">
+        <p14:creationId xmlns:p14="http://schemas.microsoft.com/office/powerpoint/2010/main" val="1748552659"/>
+      </p:ext>
+    </p:extLst>
+  </p:cSld>
+  <p:clrMapOvr>
+    <a:masterClrMapping/>
+  </p:clrMapOvr>
+</p:sld>
+</file>
+
+<file path=ppt/slides/slide29.xml><?xml version="1.0" encoding="utf-8"?>
+<p:sld xmlns:a="http://schemas.openxmlformats.org/drawingml/2006/main" xmlns:r="http://schemas.openxmlformats.org/officeDocument/2006/relationships" xmlns:p="http://schemas.openxmlformats.org/presentationml/2006/main">
+  <p:cSld>
+    <p:spTree>
+      <p:nvGrpSpPr>
+        <p:cNvPr id="1" name=""/>
+        <p:cNvGrpSpPr/>
+        <p:nvPr/>
+      </p:nvGrpSpPr>
+      <p:grpSpPr>
+        <a:xfrm>
+          <a:off x="0" y="0"/>
+          <a:ext cx="0" cy="0"/>
+          <a:chOff x="0" y="0"/>
+          <a:chExt cx="0" cy="0"/>
+        </a:xfrm>
+      </p:grpSpPr>
+      <p:sp>
+        <p:nvSpPr>
+          <p:cNvPr id="2" name="TextBox 1"/>
+          <p:cNvSpPr txBox="1"/>
+          <p:nvPr/>
+        </p:nvSpPr>
+        <p:spPr>
+          <a:xfrm>
+            <a:off x="2915479" y="2425147"/>
+            <a:ext cx="6294782" cy="2308324"/>
+          </a:xfrm>
+          <a:prstGeom prst="rect">
+            <a:avLst/>
+          </a:prstGeom>
+          <a:noFill/>
+        </p:spPr>
+        <p:txBody>
+          <a:bodyPr wrap="square" rtlCol="0">
+            <a:spAutoFit/>
+          </a:bodyPr>
+          <a:lstStyle/>
+          <a:p>
+            <a:r>
+              <a:rPr lang="en-IN" b="1" dirty="0"/>
+              <a:t>Revision: Decision Tree, KNN &amp; SVM</a:t>
+            </a:r>
+          </a:p>
+          <a:p>
+            <a:r>
+              <a:rPr lang="en-IN" b="1" dirty="0"/>
+              <a:t>Decision Tree:</a:t>
+            </a:r>
+            <a:r>
+              <a:rPr lang="en-IN" dirty="0"/>
+              <a:t> Data conditions </a:t>
+            </a:r>
+            <a:r>
+              <a:rPr lang="en-IN" dirty="0" err="1"/>
+              <a:t>var</a:t>
+            </a:r>
+            <a:r>
+              <a:rPr lang="en-IN" dirty="0"/>
+              <a:t> split </a:t>
+            </a:r>
+            <a:r>
+              <a:rPr lang="en-IN" dirty="0" err="1"/>
+              <a:t>hote</a:t>
+            </a:r>
+            <a:r>
+              <a:rPr lang="en-IN" dirty="0"/>
+              <a:t> using entropy &amp; information gain, easy decision making </a:t>
+            </a:r>
+            <a:r>
+              <a:rPr lang="en-IN" dirty="0" err="1"/>
+              <a:t>sathi</a:t>
+            </a:r>
+            <a:r>
+              <a:rPr lang="en-IN" dirty="0"/>
+              <a:t> useful. </a:t>
+            </a:r>
+          </a:p>
+          <a:p>
+            <a:r>
+              <a:rPr lang="en-IN" b="1" dirty="0"/>
+              <a:t>KNN:</a:t>
+            </a:r>
+            <a:r>
+              <a:rPr lang="en-IN" dirty="0"/>
+              <a:t> Nearest </a:t>
+            </a:r>
+            <a:r>
+              <a:rPr lang="en-IN" dirty="0" err="1"/>
+              <a:t>neighbors</a:t>
+            </a:r>
+            <a:r>
+              <a:rPr lang="en-IN" dirty="0"/>
+              <a:t> </a:t>
+            </a:r>
+            <a:r>
+              <a:rPr lang="en-IN" dirty="0" err="1"/>
+              <a:t>chya</a:t>
+            </a:r>
+            <a:r>
+              <a:rPr lang="en-IN" dirty="0"/>
+              <a:t> base </a:t>
+            </a:r>
+            <a:r>
+              <a:rPr lang="en-IN" dirty="0" err="1"/>
+              <a:t>var</a:t>
+            </a:r>
+            <a:r>
+              <a:rPr lang="en-IN" dirty="0"/>
+              <a:t> classification </a:t>
+            </a:r>
+            <a:r>
+              <a:rPr lang="en-IN" dirty="0" err="1"/>
+              <a:t>karto</a:t>
+            </a:r>
+            <a:r>
+              <a:rPr lang="en-IN" dirty="0"/>
+              <a:t> using distance measures. </a:t>
+            </a:r>
+          </a:p>
+          <a:p>
+            <a:r>
+              <a:rPr lang="en-IN" b="1" dirty="0"/>
+              <a:t>SVM:</a:t>
+            </a:r>
+            <a:r>
+              <a:rPr lang="en-IN" dirty="0"/>
+              <a:t> Data la best boundary (hyperplane) ne separate </a:t>
+            </a:r>
+            <a:r>
+              <a:rPr lang="en-IN" dirty="0" err="1"/>
+              <a:t>karto</a:t>
+            </a:r>
+            <a:r>
+              <a:rPr lang="en-IN" dirty="0"/>
+              <a:t> for accurate classification.</a:t>
+            </a:r>
+          </a:p>
+          <a:p>
+            <a:endParaRPr lang="en-IN" dirty="0"/>
+          </a:p>
+        </p:txBody>
+      </p:sp>
+    </p:spTree>
+    <p:extLst>
+      <p:ext uri="{BB962C8B-B14F-4D97-AF65-F5344CB8AC3E}">
+        <p14:creationId xmlns:p14="http://schemas.microsoft.com/office/powerpoint/2010/main" val="2062994845"/>
       </p:ext>
     </p:extLst>
   </p:cSld>
@@ -9551,14 +11296,14 @@
       </p:grpSpPr>
       <p:sp>
         <p:nvSpPr>
-          <p:cNvPr id="2" name="TextBox 1"/>
+          <p:cNvPr id="3" name="TextBox 2"/>
           <p:cNvSpPr txBox="1"/>
           <p:nvPr/>
         </p:nvSpPr>
         <p:spPr>
           <a:xfrm>
-            <a:off x="2729948" y="2623929"/>
-            <a:ext cx="7381461" cy="3046988"/>
+            <a:off x="5402535" y="1483453"/>
+            <a:ext cx="1817131" cy="523220"/>
           </a:xfrm>
           <a:prstGeom prst="rect">
             <a:avLst/>
@@ -9571,57 +11316,14 @@
           </a:bodyPr>
           <a:lstStyle/>
           <a:p>
-            <a:pPr marL="342900" indent="-342900" algn="just">
-              <a:buFont typeface="Arial" panose="020B0604020202020204" pitchFamily="34" charset="0"/>
-              <a:buChar char="•"/>
-            </a:pPr>
-            <a:r>
-              <a:rPr lang="en-US" sz="2400" dirty="0" smtClean="0">
-                <a:latin typeface="Times New Roman" panose="02020603050405020304" pitchFamily="18" charset="0"/>
-                <a:cs typeface="Times New Roman" panose="02020603050405020304" pitchFamily="18" charset="0"/>
-              </a:rPr>
-              <a:t>Continuous practice played a key role in strengthening my programming skills.</a:t>
-            </a:r>
-          </a:p>
-          <a:p>
-            <a:pPr marL="342900" indent="-342900" algn="just">
-              <a:buFont typeface="Arial" panose="020B0604020202020204" pitchFamily="34" charset="0"/>
-              <a:buChar char="•"/>
-            </a:pPr>
-            <a:r>
-              <a:rPr lang="en-US" sz="2400" dirty="0" smtClean="0">
-                <a:latin typeface="Times New Roman" panose="02020603050405020304" pitchFamily="18" charset="0"/>
-                <a:cs typeface="Times New Roman" panose="02020603050405020304" pitchFamily="18" charset="0"/>
-              </a:rPr>
-              <a:t>I worked on multiple problem-solving exercises to improve logical thinking.</a:t>
-            </a:r>
-          </a:p>
-          <a:p>
-            <a:pPr marL="342900" indent="-342900" algn="just">
-              <a:buFont typeface="Arial" panose="020B0604020202020204" pitchFamily="34" charset="0"/>
-              <a:buChar char="•"/>
-            </a:pPr>
-            <a:r>
-              <a:rPr lang="en-US" sz="2400" dirty="0" smtClean="0">
-                <a:latin typeface="Times New Roman" panose="02020603050405020304" pitchFamily="18" charset="0"/>
-                <a:cs typeface="Times New Roman" panose="02020603050405020304" pitchFamily="18" charset="0"/>
-              </a:rPr>
-              <a:t>I also learned debugging techniques to identify and fix errors in code.</a:t>
-            </a:r>
-          </a:p>
-          <a:p>
-            <a:pPr marL="342900" indent="-342900" algn="just">
-              <a:buFont typeface="Arial" panose="020B0604020202020204" pitchFamily="34" charset="0"/>
-              <a:buChar char="•"/>
-            </a:pPr>
-            <a:r>
-              <a:rPr lang="en-US" sz="2400" dirty="0" smtClean="0">
-                <a:latin typeface="Times New Roman" panose="02020603050405020304" pitchFamily="18" charset="0"/>
-                <a:cs typeface="Times New Roman" panose="02020603050405020304" pitchFamily="18" charset="0"/>
-              </a:rPr>
-              <a:t>This week helped me gain confidence and build a strong base for advanced topics.</a:t>
-            </a:r>
-            <a:endParaRPr lang="en-US" sz="2400" dirty="0">
+            <a:r>
+              <a:rPr lang="en-US" sz="2800" b="1" dirty="0" smtClean="0">
+                <a:latin typeface="Times New Roman" panose="02020603050405020304" pitchFamily="18" charset="0"/>
+                <a:cs typeface="Times New Roman" panose="02020603050405020304" pitchFamily="18" charset="0"/>
+              </a:rPr>
+              <a:t>Functions</a:t>
+            </a:r>
+            <a:endParaRPr lang="en-US" sz="2800" b="1" dirty="0">
               <a:latin typeface="Times New Roman" panose="02020603050405020304" pitchFamily="18" charset="0"/>
               <a:cs typeface="Times New Roman" panose="02020603050405020304" pitchFamily="18" charset="0"/>
             </a:endParaRPr>
@@ -9630,14 +11332,14 @@
       </p:sp>
       <p:sp>
         <p:nvSpPr>
-          <p:cNvPr id="3" name="TextBox 2"/>
+          <p:cNvPr id="4" name="TextBox 3"/>
           <p:cNvSpPr txBox="1"/>
           <p:nvPr/>
         </p:nvSpPr>
         <p:spPr>
           <a:xfrm>
-            <a:off x="3299791" y="1325217"/>
-            <a:ext cx="6811618" cy="954107"/>
+            <a:off x="2623929" y="437322"/>
+            <a:ext cx="2199861" cy="400110"/>
           </a:xfrm>
           <a:prstGeom prst="rect">
             <a:avLst/>
@@ -9651,25 +11353,753 @@
           <a:lstStyle/>
           <a:p>
             <a:r>
-              <a:rPr lang="en-US" sz="2800" b="1" dirty="0">
-                <a:latin typeface="Times New Roman" panose="02020603050405020304" pitchFamily="18" charset="0"/>
-                <a:cs typeface="Times New Roman" panose="02020603050405020304" pitchFamily="18" charset="0"/>
-              </a:rPr>
-              <a:t>Practice, Debugging &amp; Logical Thinking</a:t>
-            </a:r>
-          </a:p>
-          <a:p>
-            <a:endParaRPr lang="en-IN" sz="2800" dirty="0">
+              <a:rPr lang="en-IN" sz="2000" b="1" dirty="0" smtClean="0">
+                <a:latin typeface="Arial" panose="020B0604020202020204" pitchFamily="34" charset="0"/>
+                <a:cs typeface="Arial" panose="020B0604020202020204" pitchFamily="34" charset="0"/>
+              </a:rPr>
+              <a:t>Week 2</a:t>
+            </a:r>
+            <a:endParaRPr lang="en-IN" sz="2000" b="1" dirty="0">
+              <a:latin typeface="Arial" panose="020B0604020202020204" pitchFamily="34" charset="0"/>
+              <a:cs typeface="Arial" panose="020B0604020202020204" pitchFamily="34" charset="0"/>
+            </a:endParaRPr>
+          </a:p>
+        </p:txBody>
+      </p:sp>
+      <p:sp>
+        <p:nvSpPr>
+          <p:cNvPr id="6" name="Rectangle 2"/>
+          <p:cNvSpPr>
+            <a:spLocks noChangeArrowheads="1"/>
+          </p:cNvSpPr>
+          <p:nvPr/>
+        </p:nvSpPr>
+        <p:spPr bwMode="auto">
+          <a:xfrm>
+            <a:off x="2883382" y="2241267"/>
+            <a:ext cx="7980236" cy="3323987"/>
+          </a:xfrm>
+          <a:prstGeom prst="rect">
+            <a:avLst/>
+          </a:prstGeom>
+          <a:noFill/>
+          <a:ln>
+            <a:noFill/>
+          </a:ln>
+          <a:effectLst/>
+          <a:extLst>
+            <a:ext uri="{909E8E84-426E-40DD-AFC4-6F175D3DCCD1}">
+              <a14:hiddenFill xmlns:a14="http://schemas.microsoft.com/office/drawing/2010/main">
+                <a:solidFill>
+                  <a:schemeClr val="accent1"/>
+                </a:solidFill>
+              </a14:hiddenFill>
+            </a:ext>
+            <a:ext uri="{91240B29-F687-4F45-9708-019B960494DF}">
+              <a14:hiddenLine xmlns:a14="http://schemas.microsoft.com/office/drawing/2010/main" w="9525">
+                <a:solidFill>
+                  <a:schemeClr val="tx1"/>
+                </a:solidFill>
+                <a:miter lim="800000"/>
+                <a:headEnd/>
+                <a:tailEnd/>
+              </a14:hiddenLine>
+            </a:ext>
+            <a:ext uri="{AF507438-7753-43E0-B8FC-AC1667EBCBE1}">
+              <a14:hiddenEffects xmlns:a14="http://schemas.microsoft.com/office/drawing/2010/main">
+                <a:effectLst>
+                  <a:outerShdw dist="35921" dir="2700000" algn="ctr" rotWithShape="0">
+                    <a:schemeClr val="bg2"/>
+                  </a:outerShdw>
+                </a:effectLst>
+              </a14:hiddenEffects>
+            </a:ext>
+          </a:extLst>
+        </p:spPr>
+        <p:txBody>
+          <a:bodyPr vert="horz" wrap="square" lIns="91440" tIns="45720" rIns="91440" bIns="45720" numCol="1" anchor="ctr" anchorCtr="0" compatLnSpc="1">
+            <a:prstTxWarp prst="textNoShape">
+              <a:avLst/>
+            </a:prstTxWarp>
+            <a:spAutoFit/>
+          </a:bodyPr>
+          <a:lstStyle/>
+          <a:p>
+            <a:pPr marL="0" marR="0" lvl="0" indent="0" algn="l" defTabSz="914400" rtl="0" eaLnBrk="0" fontAlgn="base" latinLnBrk="0" hangingPunct="0">
+              <a:lnSpc>
+                <a:spcPct val="150000"/>
+              </a:lnSpc>
+              <a:spcBef>
+                <a:spcPct val="0"/>
+              </a:spcBef>
+              <a:spcAft>
+                <a:spcPct val="0"/>
+              </a:spcAft>
+              <a:buClrTx/>
+              <a:buSzTx/>
+              <a:tabLst/>
+            </a:pPr>
+            <a:r>
+              <a:rPr kumimoji="0" lang="en-US" altLang="en-US" sz="2000" b="0" i="0" u="none" strike="noStrike" cap="none" normalizeH="0" baseline="0" dirty="0" smtClean="0">
+                <a:ln>
+                  <a:noFill/>
+                </a:ln>
+                <a:solidFill>
+                  <a:schemeClr val="tx1"/>
+                </a:solidFill>
+                <a:effectLst/>
+                <a:latin typeface="Times New Roman" panose="02020603050405020304" pitchFamily="18" charset="0"/>
+                <a:cs typeface="Times New Roman" panose="02020603050405020304" pitchFamily="18" charset="0"/>
+              </a:rPr>
+              <a:t>Functions are </a:t>
+            </a:r>
+            <a:r>
+              <a:rPr kumimoji="0" lang="en-US" altLang="en-US" sz="2000" b="1" i="0" u="none" strike="noStrike" cap="none" normalizeH="0" baseline="0" dirty="0" smtClean="0">
+                <a:ln>
+                  <a:noFill/>
+                </a:ln>
+                <a:solidFill>
+                  <a:schemeClr val="tx1"/>
+                </a:solidFill>
+                <a:effectLst/>
+                <a:latin typeface="Times New Roman" panose="02020603050405020304" pitchFamily="18" charset="0"/>
+                <a:cs typeface="Times New Roman" panose="02020603050405020304" pitchFamily="18" charset="0"/>
+              </a:rPr>
+              <a:t>reusable blocks of code</a:t>
+            </a:r>
+            <a:r>
+              <a:rPr kumimoji="0" lang="en-US" altLang="en-US" sz="2000" b="0" i="0" u="none" strike="noStrike" cap="none" normalizeH="0" baseline="0" dirty="0" smtClean="0">
+                <a:ln>
+                  <a:noFill/>
+                </a:ln>
+                <a:solidFill>
+                  <a:schemeClr val="tx1"/>
+                </a:solidFill>
+                <a:effectLst/>
+                <a:latin typeface="Times New Roman" panose="02020603050405020304" pitchFamily="18" charset="0"/>
+                <a:cs typeface="Times New Roman" panose="02020603050405020304" pitchFamily="18" charset="0"/>
+              </a:rPr>
+              <a:t> used to perform specific tasks. </a:t>
+            </a:r>
+          </a:p>
+          <a:p>
+            <a:pPr marL="0" marR="0" lvl="0" indent="0" algn="l" defTabSz="914400" rtl="0" eaLnBrk="0" fontAlgn="base" latinLnBrk="0" hangingPunct="0">
+              <a:lnSpc>
+                <a:spcPct val="150000"/>
+              </a:lnSpc>
+              <a:spcBef>
+                <a:spcPct val="0"/>
+              </a:spcBef>
+              <a:spcAft>
+                <a:spcPct val="0"/>
+              </a:spcAft>
+              <a:buClrTx/>
+              <a:buSzTx/>
+              <a:buFontTx/>
+              <a:buChar char="•"/>
+              <a:tabLst/>
+            </a:pPr>
+            <a:r>
+              <a:rPr kumimoji="0" lang="en-US" altLang="en-US" sz="2000" b="0" i="0" u="none" strike="noStrike" cap="none" normalizeH="0" baseline="0" dirty="0" smtClean="0">
+                <a:ln>
+                  <a:noFill/>
+                </a:ln>
+                <a:solidFill>
+                  <a:schemeClr val="tx1"/>
+                </a:solidFill>
+                <a:effectLst/>
+                <a:latin typeface="Times New Roman" panose="02020603050405020304" pitchFamily="18" charset="0"/>
+                <a:cs typeface="Times New Roman" panose="02020603050405020304" pitchFamily="18" charset="0"/>
+              </a:rPr>
+              <a:t> Defined using </a:t>
+            </a:r>
+            <a:r>
+              <a:rPr kumimoji="0" lang="en-US" altLang="en-US" sz="2000" b="0" i="0" u="none" strike="noStrike" cap="none" normalizeH="0" baseline="0" dirty="0" err="1" smtClean="0">
+                <a:ln>
+                  <a:noFill/>
+                </a:ln>
+                <a:solidFill>
+                  <a:schemeClr val="tx1"/>
+                </a:solidFill>
+                <a:effectLst/>
+                <a:latin typeface="Times New Roman" panose="02020603050405020304" pitchFamily="18" charset="0"/>
+                <a:cs typeface="Times New Roman" panose="02020603050405020304" pitchFamily="18" charset="0"/>
+              </a:rPr>
+              <a:t>def</a:t>
+            </a:r>
+            <a:r>
+              <a:rPr kumimoji="0" lang="en-US" altLang="en-US" sz="2000" b="0" i="0" u="none" strike="noStrike" cap="none" normalizeH="0" baseline="0" dirty="0" smtClean="0">
+                <a:ln>
+                  <a:noFill/>
+                </a:ln>
+                <a:solidFill>
+                  <a:schemeClr val="tx1"/>
+                </a:solidFill>
+                <a:effectLst/>
+                <a:latin typeface="Times New Roman" panose="02020603050405020304" pitchFamily="18" charset="0"/>
+                <a:cs typeface="Times New Roman" panose="02020603050405020304" pitchFamily="18" charset="0"/>
+              </a:rPr>
+              <a:t> keyword → helps in </a:t>
+            </a:r>
+            <a:r>
+              <a:rPr kumimoji="0" lang="en-US" altLang="en-US" sz="2000" b="1" i="0" u="none" strike="noStrike" cap="none" normalizeH="0" baseline="0" dirty="0" smtClean="0">
+                <a:ln>
+                  <a:noFill/>
+                </a:ln>
+                <a:solidFill>
+                  <a:schemeClr val="tx1"/>
+                </a:solidFill>
+                <a:effectLst/>
+                <a:latin typeface="Times New Roman" panose="02020603050405020304" pitchFamily="18" charset="0"/>
+                <a:cs typeface="Times New Roman" panose="02020603050405020304" pitchFamily="18" charset="0"/>
+              </a:rPr>
+              <a:t>organizing code properly</a:t>
+            </a:r>
+            <a:r>
+              <a:rPr kumimoji="0" lang="en-US" altLang="en-US" sz="2000" b="0" i="0" u="none" strike="noStrike" cap="none" normalizeH="0" baseline="0" dirty="0" smtClean="0">
+                <a:ln>
+                  <a:noFill/>
+                </a:ln>
+                <a:solidFill>
+                  <a:schemeClr val="tx1"/>
+                </a:solidFill>
+                <a:effectLst/>
+                <a:latin typeface="Times New Roman" panose="02020603050405020304" pitchFamily="18" charset="0"/>
+                <a:cs typeface="Times New Roman" panose="02020603050405020304" pitchFamily="18" charset="0"/>
+              </a:rPr>
+              <a:t>. </a:t>
+            </a:r>
+          </a:p>
+          <a:p>
+            <a:pPr marL="0" marR="0" lvl="0" indent="0" algn="l" defTabSz="914400" rtl="0" eaLnBrk="0" fontAlgn="base" latinLnBrk="0" hangingPunct="0">
+              <a:lnSpc>
+                <a:spcPct val="150000"/>
+              </a:lnSpc>
+              <a:spcBef>
+                <a:spcPct val="0"/>
+              </a:spcBef>
+              <a:spcAft>
+                <a:spcPct val="0"/>
+              </a:spcAft>
+              <a:buClrTx/>
+              <a:buSzTx/>
+              <a:buFontTx/>
+              <a:buChar char="•"/>
+              <a:tabLst/>
+            </a:pPr>
+            <a:r>
+              <a:rPr kumimoji="0" lang="en-US" altLang="en-US" sz="2000" b="0" i="0" u="none" strike="noStrike" cap="none" normalizeH="0" baseline="0" dirty="0" smtClean="0">
+                <a:ln>
+                  <a:noFill/>
+                </a:ln>
+                <a:solidFill>
+                  <a:schemeClr val="tx1"/>
+                </a:solidFill>
+                <a:effectLst/>
+                <a:latin typeface="Times New Roman" panose="02020603050405020304" pitchFamily="18" charset="0"/>
+                <a:cs typeface="Times New Roman" panose="02020603050405020304" pitchFamily="18" charset="0"/>
+              </a:rPr>
+              <a:t>Function calls help in </a:t>
+            </a:r>
+            <a:r>
+              <a:rPr kumimoji="0" lang="en-US" altLang="en-US" sz="2000" b="1" i="0" u="none" strike="noStrike" cap="none" normalizeH="0" baseline="0" dirty="0" smtClean="0">
+                <a:ln>
+                  <a:noFill/>
+                </a:ln>
+                <a:solidFill>
+                  <a:schemeClr val="tx1"/>
+                </a:solidFill>
+                <a:effectLst/>
+                <a:latin typeface="Times New Roman" panose="02020603050405020304" pitchFamily="18" charset="0"/>
+                <a:cs typeface="Times New Roman" panose="02020603050405020304" pitchFamily="18" charset="0"/>
+              </a:rPr>
+              <a:t>executing code multiple times without rewriting</a:t>
+            </a:r>
+            <a:r>
+              <a:rPr kumimoji="0" lang="en-US" altLang="en-US" sz="2000" b="0" i="0" u="none" strike="noStrike" cap="none" normalizeH="0" baseline="0" dirty="0" smtClean="0">
+                <a:ln>
+                  <a:noFill/>
+                </a:ln>
+                <a:solidFill>
+                  <a:schemeClr val="tx1"/>
+                </a:solidFill>
+                <a:effectLst/>
+                <a:latin typeface="Times New Roman" panose="02020603050405020304" pitchFamily="18" charset="0"/>
+                <a:cs typeface="Times New Roman" panose="02020603050405020304" pitchFamily="18" charset="0"/>
+              </a:rPr>
+              <a:t>. </a:t>
+            </a:r>
+          </a:p>
+          <a:p>
+            <a:pPr marL="0" marR="0" lvl="0" indent="0" algn="l" defTabSz="914400" rtl="0" eaLnBrk="0" fontAlgn="base" latinLnBrk="0" hangingPunct="0">
+              <a:lnSpc>
+                <a:spcPct val="150000"/>
+              </a:lnSpc>
+              <a:spcBef>
+                <a:spcPct val="0"/>
+              </a:spcBef>
+              <a:spcAft>
+                <a:spcPct val="0"/>
+              </a:spcAft>
+              <a:buClrTx/>
+              <a:buSzTx/>
+              <a:buFontTx/>
+              <a:buChar char="•"/>
+              <a:tabLst/>
+            </a:pPr>
+            <a:r>
+              <a:rPr kumimoji="0" lang="en-US" altLang="en-US" sz="2000" b="0" i="0" u="none" strike="noStrike" cap="none" normalizeH="0" baseline="0" dirty="0" smtClean="0">
+                <a:ln>
+                  <a:noFill/>
+                </a:ln>
+                <a:solidFill>
+                  <a:schemeClr val="tx1"/>
+                </a:solidFill>
+                <a:effectLst/>
+                <a:latin typeface="Times New Roman" panose="02020603050405020304" pitchFamily="18" charset="0"/>
+                <a:cs typeface="Times New Roman" panose="02020603050405020304" pitchFamily="18" charset="0"/>
+              </a:rPr>
+              <a:t> Reduces </a:t>
+            </a:r>
+            <a:r>
+              <a:rPr kumimoji="0" lang="en-US" altLang="en-US" sz="2000" b="1" i="0" u="none" strike="noStrike" cap="none" normalizeH="0" baseline="0" dirty="0" smtClean="0">
+                <a:ln>
+                  <a:noFill/>
+                </a:ln>
+                <a:solidFill>
+                  <a:schemeClr val="tx1"/>
+                </a:solidFill>
+                <a:effectLst/>
+                <a:latin typeface="Times New Roman" panose="02020603050405020304" pitchFamily="18" charset="0"/>
+                <a:cs typeface="Times New Roman" panose="02020603050405020304" pitchFamily="18" charset="0"/>
+              </a:rPr>
+              <a:t>code repetition</a:t>
+            </a:r>
+            <a:r>
+              <a:rPr kumimoji="0" lang="en-US" altLang="en-US" sz="2000" b="0" i="0" u="none" strike="noStrike" cap="none" normalizeH="0" baseline="0" dirty="0" smtClean="0">
+                <a:ln>
+                  <a:noFill/>
+                </a:ln>
+                <a:solidFill>
+                  <a:schemeClr val="tx1"/>
+                </a:solidFill>
+                <a:effectLst/>
+                <a:latin typeface="Times New Roman" panose="02020603050405020304" pitchFamily="18" charset="0"/>
+                <a:cs typeface="Times New Roman" panose="02020603050405020304" pitchFamily="18" charset="0"/>
+              </a:rPr>
+              <a:t> and improves </a:t>
+            </a:r>
+            <a:r>
+              <a:rPr kumimoji="0" lang="en-US" altLang="en-US" sz="2000" b="1" i="0" u="none" strike="noStrike" cap="none" normalizeH="0" baseline="0" dirty="0" smtClean="0">
+                <a:ln>
+                  <a:noFill/>
+                </a:ln>
+                <a:solidFill>
+                  <a:schemeClr val="tx1"/>
+                </a:solidFill>
+                <a:effectLst/>
+                <a:latin typeface="Times New Roman" panose="02020603050405020304" pitchFamily="18" charset="0"/>
+                <a:cs typeface="Times New Roman" panose="02020603050405020304" pitchFamily="18" charset="0"/>
+              </a:rPr>
+              <a:t>readability &amp; modularity</a:t>
+            </a:r>
+            <a:r>
+              <a:rPr kumimoji="0" lang="en-US" altLang="en-US" sz="2000" b="0" i="0" u="none" strike="noStrike" cap="none" normalizeH="0" baseline="0" dirty="0" smtClean="0">
+                <a:ln>
+                  <a:noFill/>
+                </a:ln>
+                <a:solidFill>
+                  <a:schemeClr val="tx1"/>
+                </a:solidFill>
+                <a:effectLst/>
+                <a:latin typeface="Times New Roman" panose="02020603050405020304" pitchFamily="18" charset="0"/>
+                <a:cs typeface="Times New Roman" panose="02020603050405020304" pitchFamily="18" charset="0"/>
+              </a:rPr>
+              <a:t>. </a:t>
+            </a:r>
+            <a:endParaRPr lang="en-US" altLang="en-US" sz="2000" dirty="0">
               <a:latin typeface="Times New Roman" panose="02020603050405020304" pitchFamily="18" charset="0"/>
               <a:cs typeface="Times New Roman" panose="02020603050405020304" pitchFamily="18" charset="0"/>
             </a:endParaRPr>
           </a:p>
+          <a:p>
+            <a:pPr eaLnBrk="0" fontAlgn="base" hangingPunct="0">
+              <a:lnSpc>
+                <a:spcPct val="150000"/>
+              </a:lnSpc>
+              <a:spcBef>
+                <a:spcPct val="0"/>
+              </a:spcBef>
+              <a:spcAft>
+                <a:spcPct val="0"/>
+              </a:spcAft>
+            </a:pPr>
+            <a:r>
+              <a:rPr lang="en-US" sz="2000" b="1" dirty="0" smtClean="0">
+                <a:latin typeface="Times New Roman" panose="02020603050405020304" pitchFamily="18" charset="0"/>
+                <a:cs typeface="Times New Roman" panose="02020603050405020304" pitchFamily="18" charset="0"/>
+              </a:rPr>
+              <a:t>Recursion</a:t>
+            </a:r>
+            <a:r>
+              <a:rPr lang="en-US" sz="2000" dirty="0">
+                <a:latin typeface="Times New Roman" panose="02020603050405020304" pitchFamily="18" charset="0"/>
+                <a:cs typeface="Times New Roman" panose="02020603050405020304" pitchFamily="18" charset="0"/>
+              </a:rPr>
+              <a:t> </a:t>
+            </a:r>
+            <a:r>
+              <a:rPr lang="en-US" altLang="en-US" sz="2000" dirty="0">
+                <a:latin typeface="Times New Roman" panose="02020603050405020304" pitchFamily="18" charset="0"/>
+                <a:cs typeface="Times New Roman" panose="02020603050405020304" pitchFamily="18" charset="0"/>
+              </a:rPr>
+              <a:t>→ </a:t>
+            </a:r>
+            <a:r>
+              <a:rPr lang="en-US" sz="2000" dirty="0" smtClean="0">
+                <a:latin typeface="Times New Roman" panose="02020603050405020304" pitchFamily="18" charset="0"/>
+                <a:cs typeface="Times New Roman" panose="02020603050405020304" pitchFamily="18" charset="0"/>
+              </a:rPr>
+              <a:t>where </a:t>
+            </a:r>
+            <a:r>
+              <a:rPr lang="en-US" sz="2000" dirty="0">
+                <a:latin typeface="Times New Roman" panose="02020603050405020304" pitchFamily="18" charset="0"/>
+                <a:cs typeface="Times New Roman" panose="02020603050405020304" pitchFamily="18" charset="0"/>
+              </a:rPr>
+              <a:t>a function calls itself to solve smaller </a:t>
+            </a:r>
+            <a:r>
+              <a:rPr lang="en-US" sz="2000" dirty="0" err="1">
+                <a:latin typeface="Times New Roman" panose="02020603050405020304" pitchFamily="18" charset="0"/>
+                <a:cs typeface="Times New Roman" panose="02020603050405020304" pitchFamily="18" charset="0"/>
+              </a:rPr>
+              <a:t>subproblems</a:t>
+            </a:r>
+            <a:r>
+              <a:rPr lang="en-US" sz="2000" dirty="0">
+                <a:latin typeface="Times New Roman" panose="02020603050405020304" pitchFamily="18" charset="0"/>
+                <a:cs typeface="Times New Roman" panose="02020603050405020304" pitchFamily="18" charset="0"/>
+              </a:rPr>
+              <a:t>.</a:t>
+            </a:r>
+          </a:p>
+          <a:p>
+            <a:pPr eaLnBrk="0" fontAlgn="base" hangingPunct="0">
+              <a:lnSpc>
+                <a:spcPct val="150000"/>
+              </a:lnSpc>
+              <a:spcBef>
+                <a:spcPct val="0"/>
+              </a:spcBef>
+              <a:spcAft>
+                <a:spcPct val="0"/>
+              </a:spcAft>
+            </a:pPr>
+            <a:r>
+              <a:rPr lang="en-US" altLang="en-US" sz="2000" b="1" dirty="0" smtClean="0">
+                <a:latin typeface="Times New Roman" panose="02020603050405020304" pitchFamily="18" charset="0"/>
+                <a:cs typeface="Times New Roman" panose="02020603050405020304" pitchFamily="18" charset="0"/>
+              </a:rPr>
+              <a:t>Lambda </a:t>
+            </a:r>
+            <a:r>
+              <a:rPr lang="en-US" altLang="en-US" sz="2000" b="1" dirty="0">
+                <a:latin typeface="Times New Roman" panose="02020603050405020304" pitchFamily="18" charset="0"/>
+                <a:cs typeface="Times New Roman" panose="02020603050405020304" pitchFamily="18" charset="0"/>
+              </a:rPr>
+              <a:t>function</a:t>
+            </a:r>
+            <a:r>
+              <a:rPr lang="en-US" altLang="en-US" sz="2000" dirty="0">
+                <a:latin typeface="Times New Roman" panose="02020603050405020304" pitchFamily="18" charset="0"/>
+                <a:cs typeface="Times New Roman" panose="02020603050405020304" pitchFamily="18" charset="0"/>
+              </a:rPr>
+              <a:t> </a:t>
+            </a:r>
+            <a:r>
+              <a:rPr lang="en-US" altLang="en-US" sz="2000" dirty="0" smtClean="0">
+                <a:latin typeface="Times New Roman" panose="02020603050405020304" pitchFamily="18" charset="0"/>
+                <a:cs typeface="Times New Roman" panose="02020603050405020304" pitchFamily="18" charset="0"/>
+              </a:rPr>
+              <a:t>→ A </a:t>
+            </a:r>
+            <a:r>
+              <a:rPr lang="en-US" altLang="en-US" sz="2000" b="1" dirty="0">
+                <a:latin typeface="Times New Roman" panose="02020603050405020304" pitchFamily="18" charset="0"/>
+                <a:cs typeface="Times New Roman" panose="02020603050405020304" pitchFamily="18" charset="0"/>
+              </a:rPr>
+              <a:t>small anonymous one-line function</a:t>
+            </a:r>
+            <a:r>
+              <a:rPr lang="en-US" altLang="en-US" sz="2000" dirty="0">
+                <a:latin typeface="Times New Roman" panose="02020603050405020304" pitchFamily="18" charset="0"/>
+                <a:cs typeface="Times New Roman" panose="02020603050405020304" pitchFamily="18" charset="0"/>
+              </a:rPr>
+              <a:t> used for simple operations without using def. </a:t>
+            </a:r>
+          </a:p>
         </p:txBody>
       </p:sp>
     </p:spTree>
     <p:extLst>
       <p:ext uri="{BB962C8B-B14F-4D97-AF65-F5344CB8AC3E}">
-        <p14:creationId xmlns:p14="http://schemas.microsoft.com/office/powerpoint/2010/main" val="1133960368"/>
+        <p14:creationId xmlns:p14="http://schemas.microsoft.com/office/powerpoint/2010/main" val="3016526175"/>
+      </p:ext>
+    </p:extLst>
+  </p:cSld>
+  <p:clrMapOvr>
+    <a:masterClrMapping/>
+  </p:clrMapOvr>
+  <p:timing>
+    <p:tnLst>
+      <p:par>
+        <p:cTn id="1" dur="indefinite" restart="never" nodeType="tmRoot"/>
+      </p:par>
+    </p:tnLst>
+  </p:timing>
+</p:sld>
+</file>
+
+<file path=ppt/slides/slide30.xml><?xml version="1.0" encoding="utf-8"?>
+<p:sld xmlns:a="http://schemas.openxmlformats.org/drawingml/2006/main" xmlns:r="http://schemas.openxmlformats.org/officeDocument/2006/relationships" xmlns:p="http://schemas.openxmlformats.org/presentationml/2006/main">
+  <p:cSld>
+    <p:spTree>
+      <p:nvGrpSpPr>
+        <p:cNvPr id="1" name=""/>
+        <p:cNvGrpSpPr/>
+        <p:nvPr/>
+      </p:nvGrpSpPr>
+      <p:grpSpPr>
+        <a:xfrm>
+          <a:off x="0" y="0"/>
+          <a:ext cx="0" cy="0"/>
+          <a:chOff x="0" y="0"/>
+          <a:chExt cx="0" cy="0"/>
+        </a:xfrm>
+      </p:grpSpPr>
+      <p:sp>
+        <p:nvSpPr>
+          <p:cNvPr id="2" name="TextBox 1"/>
+          <p:cNvSpPr txBox="1"/>
+          <p:nvPr/>
+        </p:nvSpPr>
+        <p:spPr>
+          <a:xfrm>
+            <a:off x="3273287" y="1630017"/>
+            <a:ext cx="6042991" cy="2031325"/>
+          </a:xfrm>
+          <a:prstGeom prst="rect">
+            <a:avLst/>
+          </a:prstGeom>
+          <a:noFill/>
+        </p:spPr>
+        <p:txBody>
+          <a:bodyPr wrap="square" rtlCol="0">
+            <a:spAutoFit/>
+          </a:bodyPr>
+          <a:lstStyle/>
+          <a:p>
+            <a:r>
+              <a:rPr lang="en-US" b="1" dirty="0"/>
+              <a:t>Introduction to Probability</a:t>
+            </a:r>
+          </a:p>
+          <a:p>
+            <a:r>
+              <a:rPr lang="en-US" dirty="0"/>
+              <a:t>Probability is used to </a:t>
+            </a:r>
+            <a:r>
+              <a:rPr lang="en-US" b="1" dirty="0"/>
+              <a:t>handle uncertainty</a:t>
+            </a:r>
+            <a:r>
+              <a:rPr lang="en-US" dirty="0"/>
+              <a:t> in data. </a:t>
+            </a:r>
+          </a:p>
+          <a:p>
+            <a:r>
+              <a:rPr lang="en-US" dirty="0"/>
+              <a:t>It tells the </a:t>
+            </a:r>
+            <a:r>
+              <a:rPr lang="en-US" b="1" dirty="0"/>
+              <a:t>chance of an event occurring (0 to 1)</a:t>
+            </a:r>
+            <a:r>
+              <a:rPr lang="en-US" dirty="0"/>
+              <a:t>. </a:t>
+            </a:r>
+          </a:p>
+          <a:p>
+            <a:r>
+              <a:rPr lang="en-US" dirty="0"/>
+              <a:t>0 = impossible event, 1 = certain event. </a:t>
+            </a:r>
+          </a:p>
+          <a:p>
+            <a:r>
+              <a:rPr lang="en-US" dirty="0"/>
+              <a:t>In Machine Learning, it helps in </a:t>
+            </a:r>
+            <a:r>
+              <a:rPr lang="en-US" b="1" dirty="0"/>
+              <a:t>making predictions</a:t>
+            </a:r>
+            <a:r>
+              <a:rPr lang="en-US" dirty="0"/>
+              <a:t>. </a:t>
+            </a:r>
+          </a:p>
+          <a:p>
+            <a:r>
+              <a:rPr lang="en-US" dirty="0"/>
+              <a:t>Used to take </a:t>
+            </a:r>
+            <a:r>
+              <a:rPr lang="en-US" b="1" dirty="0"/>
+              <a:t>better decisions based on data</a:t>
+            </a:r>
+            <a:r>
+              <a:rPr lang="en-US" dirty="0"/>
+              <a:t>.</a:t>
+            </a:r>
+          </a:p>
+          <a:p>
+            <a:endParaRPr lang="en-IN" dirty="0"/>
+          </a:p>
+        </p:txBody>
+      </p:sp>
+    </p:spTree>
+    <p:extLst>
+      <p:ext uri="{BB962C8B-B14F-4D97-AF65-F5344CB8AC3E}">
+        <p14:creationId xmlns:p14="http://schemas.microsoft.com/office/powerpoint/2010/main" val="771756329"/>
+      </p:ext>
+    </p:extLst>
+  </p:cSld>
+  <p:clrMapOvr>
+    <a:masterClrMapping/>
+  </p:clrMapOvr>
+</p:sld>
+</file>
+
+<file path=ppt/slides/slide31.xml><?xml version="1.0" encoding="utf-8"?>
+<p:sld xmlns:a="http://schemas.openxmlformats.org/drawingml/2006/main" xmlns:r="http://schemas.openxmlformats.org/officeDocument/2006/relationships" xmlns:p="http://schemas.openxmlformats.org/presentationml/2006/main">
+  <p:cSld>
+    <p:spTree>
+      <p:nvGrpSpPr>
+        <p:cNvPr id="1" name=""/>
+        <p:cNvGrpSpPr/>
+        <p:nvPr/>
+      </p:nvGrpSpPr>
+      <p:grpSpPr>
+        <a:xfrm>
+          <a:off x="0" y="0"/>
+          <a:ext cx="0" cy="0"/>
+          <a:chOff x="0" y="0"/>
+          <a:chExt cx="0" cy="0"/>
+        </a:xfrm>
+      </p:grpSpPr>
+      <p:sp>
+        <p:nvSpPr>
+          <p:cNvPr id="2" name="TextBox 1"/>
+          <p:cNvSpPr txBox="1"/>
+          <p:nvPr/>
+        </p:nvSpPr>
+        <p:spPr>
+          <a:xfrm>
+            <a:off x="3379304" y="2001078"/>
+            <a:ext cx="5791200" cy="2308324"/>
+          </a:xfrm>
+          <a:prstGeom prst="rect">
+            <a:avLst/>
+          </a:prstGeom>
+          <a:noFill/>
+        </p:spPr>
+        <p:txBody>
+          <a:bodyPr wrap="square" rtlCol="0">
+            <a:spAutoFit/>
+          </a:bodyPr>
+          <a:lstStyle/>
+          <a:p>
+            <a:r>
+              <a:rPr lang="en-US" b="1" dirty="0"/>
+              <a:t>Example of Probability</a:t>
+            </a:r>
+          </a:p>
+          <a:p>
+            <a:r>
+              <a:rPr lang="en-US" dirty="0"/>
+              <a:t>Example: Tossing a coin 🎲 </a:t>
+            </a:r>
+          </a:p>
+          <a:p>
+            <a:r>
+              <a:rPr lang="en-US" dirty="0"/>
+              <a:t>There are </a:t>
+            </a:r>
+            <a:r>
+              <a:rPr lang="en-US" b="1" dirty="0"/>
+              <a:t>2 possible outcomes</a:t>
+            </a:r>
+            <a:r>
+              <a:rPr lang="en-US" dirty="0"/>
+              <a:t> → Head or Tail </a:t>
+            </a:r>
+          </a:p>
+          <a:p>
+            <a:r>
+              <a:rPr lang="en-US" dirty="0"/>
+              <a:t>Probability of Head = </a:t>
+            </a:r>
+            <a:r>
+              <a:rPr lang="en-US" b="1" dirty="0"/>
+              <a:t>1/2 = 0.5</a:t>
+            </a:r>
+            <a:r>
+              <a:rPr lang="en-US" dirty="0"/>
+              <a:t> </a:t>
+            </a:r>
+          </a:p>
+          <a:p>
+            <a:r>
+              <a:rPr lang="en-US" dirty="0"/>
+              <a:t>Probability of Tail = </a:t>
+            </a:r>
+            <a:r>
+              <a:rPr lang="en-US" b="1" dirty="0"/>
+              <a:t>1/2 = 0.5</a:t>
+            </a:r>
+            <a:r>
+              <a:rPr lang="en-US" dirty="0"/>
+              <a:t> </a:t>
+            </a:r>
+          </a:p>
+          <a:p>
+            <a:r>
+              <a:rPr lang="en-US" dirty="0"/>
+              <a:t>ML uses such probabilities to </a:t>
+            </a:r>
+            <a:r>
+              <a:rPr lang="en-US" b="1" dirty="0"/>
+              <a:t>predict outcomes in real problems</a:t>
+            </a:r>
+            <a:r>
+              <a:rPr lang="en-US" dirty="0"/>
+              <a:t> </a:t>
+            </a:r>
+          </a:p>
+          <a:p>
+            <a:endParaRPr lang="en-IN" dirty="0"/>
+          </a:p>
+        </p:txBody>
+      </p:sp>
+    </p:spTree>
+    <p:extLst>
+      <p:ext uri="{BB962C8B-B14F-4D97-AF65-F5344CB8AC3E}">
+        <p14:creationId xmlns:p14="http://schemas.microsoft.com/office/powerpoint/2010/main" val="1233116815"/>
       </p:ext>
     </p:extLst>
   </p:cSld>
@@ -9698,14 +12128,14 @@
       </p:grpSpPr>
       <p:sp>
         <p:nvSpPr>
-          <p:cNvPr id="2" name="TextBox 1"/>
+          <p:cNvPr id="6" name="TextBox 5"/>
           <p:cNvSpPr txBox="1"/>
           <p:nvPr/>
         </p:nvSpPr>
         <p:spPr>
           <a:xfrm>
-            <a:off x="2716695" y="2650436"/>
-            <a:ext cx="7739270" cy="3416320"/>
+            <a:off x="2641655" y="2599414"/>
+            <a:ext cx="7178371" cy="1569660"/>
           </a:xfrm>
           <a:prstGeom prst="rect">
             <a:avLst/>
@@ -9718,57 +12148,96 @@
           </a:bodyPr>
           <a:lstStyle/>
           <a:p>
-            <a:pPr marL="342900" indent="-342900" algn="just">
+            <a:pPr marL="342900" lvl="0" indent="-342900" algn="just" eaLnBrk="0" fontAlgn="base" hangingPunct="0">
+              <a:spcBef>
+                <a:spcPct val="0"/>
+              </a:spcBef>
+              <a:spcAft>
+                <a:spcPct val="0"/>
+              </a:spcAft>
               <a:buFont typeface="Arial" panose="020B0604020202020204" pitchFamily="34" charset="0"/>
               <a:buChar char="•"/>
             </a:pPr>
             <a:r>
-              <a:rPr lang="en-US" sz="2400" dirty="0" smtClean="0">
-                <a:latin typeface="Times New Roman" panose="02020603050405020304" pitchFamily="18" charset="0"/>
-                <a:cs typeface="Times New Roman" panose="02020603050405020304" pitchFamily="18" charset="0"/>
-              </a:rPr>
-              <a:t>Functions are reusable blocks of code designed to perform specific tasks.</a:t>
-            </a:r>
-          </a:p>
-          <a:p>
-            <a:pPr marL="342900" indent="-342900" algn="just">
+              <a:rPr kumimoji="0" lang="en-US" altLang="en-US" sz="2400" b="0" i="0" u="none" strike="noStrike" cap="none" normalizeH="0" baseline="0" dirty="0" smtClean="0">
+                <a:ln>
+                  <a:noFill/>
+                </a:ln>
+                <a:solidFill>
+                  <a:schemeClr val="tx1"/>
+                </a:solidFill>
+                <a:effectLst/>
+                <a:latin typeface="Times New Roman" panose="02020603050405020304" pitchFamily="18" charset="0"/>
+                <a:cs typeface="Times New Roman" panose="02020603050405020304" pitchFamily="18" charset="0"/>
+              </a:rPr>
+              <a:t>Modules help organize Python code into separate files for better structure and maintainability</a:t>
+            </a:r>
+            <a:r>
+              <a:rPr kumimoji="0" lang="en-US" altLang="en-US" sz="2400" b="0" i="0" u="none" strike="noStrike" cap="none" normalizeH="0" baseline="0" dirty="0" smtClean="0">
+                <a:ln>
+                  <a:noFill/>
+                </a:ln>
+                <a:solidFill>
+                  <a:schemeClr val="tx1"/>
+                </a:solidFill>
+                <a:effectLst/>
+                <a:latin typeface="Times New Roman" panose="02020603050405020304" pitchFamily="18" charset="0"/>
+                <a:cs typeface="Times New Roman" panose="02020603050405020304" pitchFamily="18" charset="0"/>
+              </a:rPr>
+              <a:t>.</a:t>
+            </a:r>
+            <a:endParaRPr lang="en-US" altLang="en-US" sz="2400" dirty="0">
+              <a:latin typeface="Times New Roman" panose="02020603050405020304" pitchFamily="18" charset="0"/>
+              <a:cs typeface="Times New Roman" panose="02020603050405020304" pitchFamily="18" charset="0"/>
+            </a:endParaRPr>
+          </a:p>
+          <a:p>
+            <a:pPr marL="342900" lvl="0" indent="-342900" algn="just" eaLnBrk="0" fontAlgn="base" hangingPunct="0">
+              <a:spcBef>
+                <a:spcPct val="0"/>
+              </a:spcBef>
+              <a:spcAft>
+                <a:spcPct val="0"/>
+              </a:spcAft>
               <a:buFont typeface="Arial" panose="020B0604020202020204" pitchFamily="34" charset="0"/>
               <a:buChar char="•"/>
             </a:pPr>
             <a:r>
-              <a:rPr lang="en-US" sz="2400" dirty="0" smtClean="0">
-                <a:latin typeface="Times New Roman" panose="02020603050405020304" pitchFamily="18" charset="0"/>
-                <a:cs typeface="Times New Roman" panose="02020603050405020304" pitchFamily="18" charset="0"/>
-              </a:rPr>
-              <a:t>I learned how to define functions, use parameters, and return values effectively.</a:t>
-            </a:r>
-          </a:p>
-          <a:p>
-            <a:pPr marL="342900" indent="-342900" algn="just">
-              <a:buFont typeface="Arial" panose="020B0604020202020204" pitchFamily="34" charset="0"/>
-              <a:buChar char="•"/>
-            </a:pPr>
-            <a:r>
-              <a:rPr lang="en-US" sz="2400" dirty="0" smtClean="0">
-                <a:latin typeface="Times New Roman" panose="02020603050405020304" pitchFamily="18" charset="0"/>
-                <a:cs typeface="Times New Roman" panose="02020603050405020304" pitchFamily="18" charset="0"/>
-              </a:rPr>
-              <a:t>Understanding default arguments and function calls improved my ability to write modular and organized programs.</a:t>
-            </a:r>
-          </a:p>
-          <a:p>
-            <a:pPr marL="342900" indent="-342900" algn="just">
-              <a:buFont typeface="Arial" panose="020B0604020202020204" pitchFamily="34" charset="0"/>
-              <a:buChar char="•"/>
-            </a:pPr>
-            <a:r>
-              <a:rPr lang="en-US" sz="2400" dirty="0" smtClean="0">
-                <a:latin typeface="Times New Roman" panose="02020603050405020304" pitchFamily="18" charset="0"/>
-                <a:cs typeface="Times New Roman" panose="02020603050405020304" pitchFamily="18" charset="0"/>
-              </a:rPr>
-              <a:t>This concept significantly reduced code repetition and improved readability.</a:t>
-            </a:r>
-            <a:endParaRPr lang="en-US" sz="2400" dirty="0">
+              <a:rPr lang="en-US" altLang="en-US" sz="2400" dirty="0">
+                <a:latin typeface="Times New Roman" panose="02020603050405020304" pitchFamily="18" charset="0"/>
+                <a:cs typeface="Times New Roman" panose="02020603050405020304" pitchFamily="18" charset="0"/>
+              </a:rPr>
+              <a:t>I learned how packages group multiple modules together and how the </a:t>
+            </a:r>
+            <a:r>
+              <a:rPr kumimoji="0" lang="en-US" altLang="en-US" sz="2400" b="0" i="0" u="none" strike="noStrike" cap="none" normalizeH="0" baseline="0" dirty="0" smtClean="0">
+                <a:ln>
+                  <a:noFill/>
+                </a:ln>
+                <a:solidFill>
+                  <a:schemeClr val="tx1"/>
+                </a:solidFill>
+                <a:effectLst/>
+                <a:latin typeface="Times New Roman" panose="02020603050405020304" pitchFamily="18" charset="0"/>
+                <a:cs typeface="Times New Roman" panose="02020603050405020304" pitchFamily="18" charset="0"/>
+              </a:rPr>
+              <a:t>__init__.py file defines </a:t>
+            </a:r>
+            <a:r>
+              <a:rPr kumimoji="0" lang="en-US" altLang="en-US" sz="2400" b="0" i="0" u="none" strike="noStrike" cap="none" normalizeH="0" baseline="0" dirty="0" smtClean="0">
+                <a:ln>
+                  <a:noFill/>
+                </a:ln>
+                <a:solidFill>
+                  <a:schemeClr val="tx1"/>
+                </a:solidFill>
+                <a:effectLst/>
+                <a:latin typeface="Times New Roman" panose="02020603050405020304" pitchFamily="18" charset="0"/>
+                <a:cs typeface="Times New Roman" panose="02020603050405020304" pitchFamily="18" charset="0"/>
+              </a:rPr>
+              <a:t>a</a:t>
+            </a:r>
+            <a:endParaRPr lang="en-IN" sz="2400" dirty="0">
               <a:latin typeface="Times New Roman" panose="02020603050405020304" pitchFamily="18" charset="0"/>
               <a:cs typeface="Times New Roman" panose="02020603050405020304" pitchFamily="18" charset="0"/>
             </a:endParaRPr>
@@ -9777,14 +12246,14 @@
       </p:sp>
       <p:sp>
         <p:nvSpPr>
-          <p:cNvPr id="3" name="TextBox 2"/>
+          <p:cNvPr id="2" name="TextBox 1"/>
           <p:cNvSpPr txBox="1"/>
           <p:nvPr/>
         </p:nvSpPr>
         <p:spPr>
           <a:xfrm>
-            <a:off x="3723860" y="1510748"/>
-            <a:ext cx="5724940" cy="954107"/>
+            <a:off x="4103867" y="940904"/>
+            <a:ext cx="4253948" cy="800219"/>
           </a:xfrm>
           <a:prstGeom prst="rect">
             <a:avLst/>
@@ -9797,68 +12266,37 @@
           </a:bodyPr>
           <a:lstStyle/>
           <a:p>
-            <a:r>
-              <a:rPr lang="en-US" sz="2800" b="1" dirty="0">
-                <a:latin typeface="Times New Roman" panose="02020603050405020304" pitchFamily="18" charset="0"/>
-                <a:cs typeface="Times New Roman" panose="02020603050405020304" pitchFamily="18" charset="0"/>
-              </a:rPr>
-              <a:t>Functions &amp; Code Reusability</a:t>
-            </a:r>
-          </a:p>
-          <a:p>
-            <a:endParaRPr lang="en-IN" sz="2800" dirty="0">
-              <a:latin typeface="Times New Roman" panose="02020603050405020304" pitchFamily="18" charset="0"/>
-              <a:cs typeface="Times New Roman" panose="02020603050405020304" pitchFamily="18" charset="0"/>
-            </a:endParaRPr>
-          </a:p>
-        </p:txBody>
-      </p:sp>
-      <p:sp>
-        <p:nvSpPr>
-          <p:cNvPr id="4" name="TextBox 3"/>
-          <p:cNvSpPr txBox="1"/>
-          <p:nvPr/>
-        </p:nvSpPr>
-        <p:spPr>
-          <a:xfrm>
-            <a:off x="2623929" y="437322"/>
-            <a:ext cx="2199861" cy="400110"/>
-          </a:xfrm>
-          <a:prstGeom prst="rect">
-            <a:avLst/>
-          </a:prstGeom>
-          <a:noFill/>
-        </p:spPr>
-        <p:txBody>
-          <a:bodyPr wrap="square" rtlCol="0">
-            <a:spAutoFit/>
-          </a:bodyPr>
-          <a:lstStyle/>
-          <a:p>
-            <a:r>
-              <a:rPr lang="en-IN" sz="2000" b="1" dirty="0" smtClean="0">
-                <a:latin typeface="Times New Roman" panose="02020603050405020304" pitchFamily="18" charset="0"/>
-                <a:cs typeface="Times New Roman" panose="02020603050405020304" pitchFamily="18" charset="0"/>
-              </a:rPr>
-              <a:t>Week 2</a:t>
-            </a:r>
-            <a:endParaRPr lang="en-IN" sz="2000" b="1" dirty="0">
-              <a:latin typeface="Times New Roman" panose="02020603050405020304" pitchFamily="18" charset="0"/>
-              <a:cs typeface="Times New Roman" panose="02020603050405020304" pitchFamily="18" charset="0"/>
-            </a:endParaRPr>
+            <a:pPr lvl="0"/>
+            <a:r>
+              <a:rPr lang="en-US" altLang="en-US" sz="2800" b="1" dirty="0">
+                <a:latin typeface="Times New Roman" panose="02020603050405020304" pitchFamily="18" charset="0"/>
+                <a:cs typeface="Times New Roman" panose="02020603050405020304" pitchFamily="18" charset="0"/>
+              </a:rPr>
+              <a:t>Modules &amp; Packages</a:t>
+            </a:r>
+          </a:p>
+          <a:p>
+            <a:endParaRPr lang="en-IN" dirty="0"/>
           </a:p>
         </p:txBody>
       </p:sp>
     </p:spTree>
     <p:extLst>
       <p:ext uri="{BB962C8B-B14F-4D97-AF65-F5344CB8AC3E}">
-        <p14:creationId xmlns:p14="http://schemas.microsoft.com/office/powerpoint/2010/main" val="3016526175"/>
+        <p14:creationId xmlns:p14="http://schemas.microsoft.com/office/powerpoint/2010/main" val="2742636538"/>
       </p:ext>
     </p:extLst>
   </p:cSld>
   <p:clrMapOvr>
     <a:masterClrMapping/>
   </p:clrMapOvr>
+  <p:timing>
+    <p:tnLst>
+      <p:par>
+        <p:cTn id="1" dur="indefinite" restart="never" nodeType="tmRoot"/>
+      </p:par>
+    </p:tnLst>
+  </p:timing>
 </p:sld>
 </file>
 
@@ -9887,8 +12325,8 @@
         </p:nvSpPr>
         <p:spPr>
           <a:xfrm>
-            <a:off x="2928730" y="2332382"/>
-            <a:ext cx="7474226" cy="3785652"/>
+            <a:off x="2716696" y="1749287"/>
+            <a:ext cx="8256104" cy="4893647"/>
           </a:xfrm>
           <a:prstGeom prst="rect">
             <a:avLst/>
@@ -9910,21 +12348,7 @@
                 <a:latin typeface="Times New Roman" panose="02020603050405020304" pitchFamily="18" charset="0"/>
                 <a:cs typeface="Times New Roman" panose="02020603050405020304" pitchFamily="18" charset="0"/>
               </a:rPr>
-              <a:t>I explored advanced programming concepts such as </a:t>
-            </a:r>
-            <a:r>
-              <a:rPr lang="en-US" sz="2400" b="1" dirty="0" smtClean="0">
-                <a:latin typeface="Times New Roman" panose="02020603050405020304" pitchFamily="18" charset="0"/>
-                <a:cs typeface="Times New Roman" panose="02020603050405020304" pitchFamily="18" charset="0"/>
-              </a:rPr>
-              <a:t>lambda functions</a:t>
-            </a:r>
-            <a:r>
-              <a:rPr lang="en-US" sz="2400" dirty="0" smtClean="0">
-                <a:latin typeface="Times New Roman" panose="02020603050405020304" pitchFamily="18" charset="0"/>
-                <a:cs typeface="Times New Roman" panose="02020603050405020304" pitchFamily="18" charset="0"/>
-              </a:rPr>
-              <a:t>, which are anonymous and concise functions.</a:t>
+              <a:t>Object-Oriented Programming (OOP) is a programming approach where programs are designed using classes and objects.</a:t>
             </a:r>
           </a:p>
           <a:p>
@@ -9937,35 +12361,35 @@
                 <a:latin typeface="Times New Roman" panose="02020603050405020304" pitchFamily="18" charset="0"/>
                 <a:cs typeface="Times New Roman" panose="02020603050405020304" pitchFamily="18" charset="0"/>
               </a:rPr>
-              <a:t>I studied </a:t>
+              <a:t>A </a:t>
             </a:r>
             <a:r>
               <a:rPr lang="en-US" sz="2400" b="1" dirty="0" smtClean="0">
                 <a:latin typeface="Times New Roman" panose="02020603050405020304" pitchFamily="18" charset="0"/>
                 <a:cs typeface="Times New Roman" panose="02020603050405020304" pitchFamily="18" charset="0"/>
               </a:rPr>
-              <a:t>recursion</a:t>
+              <a:t>class</a:t>
             </a:r>
             <a:r>
               <a:rPr lang="en-US" sz="2400" dirty="0" smtClean="0">
                 <a:latin typeface="Times New Roman" panose="02020603050405020304" pitchFamily="18" charset="0"/>
                 <a:cs typeface="Times New Roman" panose="02020603050405020304" pitchFamily="18" charset="0"/>
               </a:rPr>
-              <a:t>, where a function calls itself to solve smaller </a:t>
-            </a:r>
-            <a:r>
-              <a:rPr lang="en-US" sz="2400" dirty="0" err="1" smtClean="0">
-                <a:latin typeface="Times New Roman" panose="02020603050405020304" pitchFamily="18" charset="0"/>
-                <a:cs typeface="Times New Roman" panose="02020603050405020304" pitchFamily="18" charset="0"/>
-              </a:rPr>
-              <a:t>subproblems</a:t>
+              <a:t> is like a blueprint or template, and an </a:t>
+            </a:r>
+            <a:r>
+              <a:rPr lang="en-US" sz="2400" b="1" dirty="0" smtClean="0">
+                <a:latin typeface="Times New Roman" panose="02020603050405020304" pitchFamily="18" charset="0"/>
+                <a:cs typeface="Times New Roman" panose="02020603050405020304" pitchFamily="18" charset="0"/>
+              </a:rPr>
+              <a:t>object</a:t>
             </a:r>
             <a:r>
               <a:rPr lang="en-US" sz="2400" dirty="0" smtClean="0">
                 <a:latin typeface="Times New Roman" panose="02020603050405020304" pitchFamily="18" charset="0"/>
                 <a:cs typeface="Times New Roman" panose="02020603050405020304" pitchFamily="18" charset="0"/>
               </a:rPr>
-              <a:t>.</a:t>
+              <a:t> is a real example created from that class.</a:t>
             </a:r>
           </a:p>
           <a:p>
@@ -9978,21 +12402,7 @@
                 <a:latin typeface="Times New Roman" panose="02020603050405020304" pitchFamily="18" charset="0"/>
                 <a:cs typeface="Times New Roman" panose="02020603050405020304" pitchFamily="18" charset="0"/>
               </a:rPr>
-              <a:t>I also learned about </a:t>
-            </a:r>
-            <a:r>
-              <a:rPr lang="en-US" sz="2400" b="1" dirty="0" smtClean="0">
-                <a:latin typeface="Times New Roman" panose="02020603050405020304" pitchFamily="18" charset="0"/>
-                <a:cs typeface="Times New Roman" panose="02020603050405020304" pitchFamily="18" charset="0"/>
-              </a:rPr>
-              <a:t>decorators</a:t>
-            </a:r>
-            <a:r>
-              <a:rPr lang="en-US" sz="2400" dirty="0" smtClean="0">
-                <a:latin typeface="Times New Roman" panose="02020603050405020304" pitchFamily="18" charset="0"/>
-                <a:cs typeface="Times New Roman" panose="02020603050405020304" pitchFamily="18" charset="0"/>
-              </a:rPr>
-              <a:t>, which allow modification of function behavior without changing its core structure.</a:t>
+              <a:t>Objects contain data (attributes) and functions (methods).</a:t>
             </a:r>
           </a:p>
           <a:p>
@@ -10005,7 +12415,60 @@
                 <a:latin typeface="Times New Roman" panose="02020603050405020304" pitchFamily="18" charset="0"/>
                 <a:cs typeface="Times New Roman" panose="02020603050405020304" pitchFamily="18" charset="0"/>
               </a:rPr>
-              <a:t>These concepts enhanced my understanding of functional programming.</a:t>
+              <a:t>I learned important OOP concepts such as:</a:t>
+            </a:r>
+          </a:p>
+          <a:p>
+            <a:pPr marL="342900" indent="-342900" algn="just">
+              <a:buFont typeface="Arial" panose="020B0604020202020204" pitchFamily="34" charset="0"/>
+              <a:buChar char="•"/>
+            </a:pPr>
+            <a:r>
+              <a:rPr lang="en-US" sz="2400" b="1" dirty="0" smtClean="0">
+                <a:latin typeface="Times New Roman" panose="02020603050405020304" pitchFamily="18" charset="0"/>
+                <a:cs typeface="Times New Roman" panose="02020603050405020304" pitchFamily="18" charset="0"/>
+              </a:rPr>
+              <a:t>Inheritance</a:t>
+            </a:r>
+            <a:r>
+              <a:rPr lang="en-US" sz="2400" dirty="0" smtClean="0">
+                <a:latin typeface="Times New Roman" panose="02020603050405020304" pitchFamily="18" charset="0"/>
+                <a:cs typeface="Times New Roman" panose="02020603050405020304" pitchFamily="18" charset="0"/>
+              </a:rPr>
+              <a:t> – one class can use the properties and methods of another class.</a:t>
+            </a:r>
+          </a:p>
+          <a:p>
+            <a:pPr marL="342900" indent="-342900" algn="just">
+              <a:buFont typeface="Arial" panose="020B0604020202020204" pitchFamily="34" charset="0"/>
+              <a:buChar char="•"/>
+            </a:pPr>
+            <a:r>
+              <a:rPr lang="en-US" sz="2400" b="1" dirty="0" smtClean="0">
+                <a:latin typeface="Times New Roman" panose="02020603050405020304" pitchFamily="18" charset="0"/>
+                <a:cs typeface="Times New Roman" panose="02020603050405020304" pitchFamily="18" charset="0"/>
+              </a:rPr>
+              <a:t>Polymorphism</a:t>
+            </a:r>
+            <a:r>
+              <a:rPr lang="en-US" sz="2400" dirty="0" smtClean="0">
+                <a:latin typeface="Times New Roman" panose="02020603050405020304" pitchFamily="18" charset="0"/>
+                <a:cs typeface="Times New Roman" panose="02020603050405020304" pitchFamily="18" charset="0"/>
+              </a:rPr>
+              <a:t> – the same method can perform different actions in different situations.</a:t>
+            </a:r>
+          </a:p>
+          <a:p>
+            <a:pPr marL="342900" indent="-342900" algn="just">
+              <a:buFont typeface="Arial" panose="020B0604020202020204" pitchFamily="34" charset="0"/>
+              <a:buChar char="•"/>
+            </a:pPr>
+            <a:r>
+              <a:rPr lang="en-US" sz="2400" dirty="0" smtClean="0">
+                <a:latin typeface="Times New Roman" panose="02020603050405020304" pitchFamily="18" charset="0"/>
+                <a:cs typeface="Times New Roman" panose="02020603050405020304" pitchFamily="18" charset="0"/>
+              </a:rPr>
+              <a:t>OOP helps in writing organized, reusable, and easy-to-manage code.</a:t>
             </a:r>
             <a:endParaRPr lang="en-US" sz="2400" dirty="0">
               <a:latin typeface="Times New Roman" panose="02020603050405020304" pitchFamily="18" charset="0"/>
@@ -10022,8 +12485,8 @@
         </p:nvSpPr>
         <p:spPr>
           <a:xfrm>
-            <a:off x="3829878" y="1179443"/>
-            <a:ext cx="4863548" cy="954107"/>
+            <a:off x="2716696" y="954157"/>
+            <a:ext cx="8534400" cy="954107"/>
           </a:xfrm>
           <a:prstGeom prst="rect">
             <a:avLst/>
@@ -10041,7 +12504,7 @@
                 <a:latin typeface="Times New Roman" panose="02020603050405020304" pitchFamily="18" charset="0"/>
                 <a:cs typeface="Times New Roman" panose="02020603050405020304" pitchFamily="18" charset="0"/>
               </a:rPr>
-              <a:t>Advanced Function Concepts</a:t>
+              <a:t>Introduction to Object-Oriented Programming (OOP)</a:t>
             </a:r>
           </a:p>
           <a:p>
@@ -10052,16 +12515,59 @@
           </a:p>
         </p:txBody>
       </p:sp>
+      <p:sp>
+        <p:nvSpPr>
+          <p:cNvPr id="4" name="TextBox 3"/>
+          <p:cNvSpPr txBox="1"/>
+          <p:nvPr/>
+        </p:nvSpPr>
+        <p:spPr>
+          <a:xfrm>
+            <a:off x="2517913" y="356537"/>
+            <a:ext cx="2597426" cy="400110"/>
+          </a:xfrm>
+          <a:prstGeom prst="rect">
+            <a:avLst/>
+          </a:prstGeom>
+          <a:noFill/>
+        </p:spPr>
+        <p:txBody>
+          <a:bodyPr wrap="square" rtlCol="0">
+            <a:spAutoFit/>
+          </a:bodyPr>
+          <a:lstStyle/>
+          <a:p>
+            <a:r>
+              <a:rPr lang="en-IN" sz="2000" b="1" dirty="0" smtClean="0">
+                <a:latin typeface="Times New Roman" panose="02020603050405020304" pitchFamily="18" charset="0"/>
+                <a:cs typeface="Times New Roman" panose="02020603050405020304" pitchFamily="18" charset="0"/>
+              </a:rPr>
+              <a:t>Week 3</a:t>
+            </a:r>
+            <a:endParaRPr lang="en-IN" sz="2000" b="1" dirty="0">
+              <a:latin typeface="Times New Roman" panose="02020603050405020304" pitchFamily="18" charset="0"/>
+              <a:cs typeface="Times New Roman" panose="02020603050405020304" pitchFamily="18" charset="0"/>
+            </a:endParaRPr>
+          </a:p>
+        </p:txBody>
+      </p:sp>
     </p:spTree>
     <p:extLst>
       <p:ext uri="{BB962C8B-B14F-4D97-AF65-F5344CB8AC3E}">
-        <p14:creationId xmlns:p14="http://schemas.microsoft.com/office/powerpoint/2010/main" val="3526715074"/>
+        <p14:creationId xmlns:p14="http://schemas.microsoft.com/office/powerpoint/2010/main" val="3026075768"/>
       </p:ext>
     </p:extLst>
   </p:cSld>
   <p:clrMapOvr>
     <a:masterClrMapping/>
   </p:clrMapOvr>
+  <p:timing>
+    <p:tnLst>
+      <p:par>
+        <p:cTn id="1" dur="indefinite" restart="never" nodeType="tmRoot"/>
+      </p:par>
+    </p:tnLst>
+  </p:timing>
 </p:sld>
 </file>
 
@@ -10084,14 +12590,14 @@
       </p:grpSpPr>
       <p:sp>
         <p:nvSpPr>
-          <p:cNvPr id="6" name="TextBox 5"/>
+          <p:cNvPr id="2" name="TextBox 1"/>
           <p:cNvSpPr txBox="1"/>
           <p:nvPr/>
         </p:nvSpPr>
         <p:spPr>
           <a:xfrm>
-            <a:off x="2641655" y="2599414"/>
-            <a:ext cx="7178371" cy="3785652"/>
+            <a:off x="2690192" y="1987826"/>
+            <a:ext cx="7686261" cy="4154984"/>
           </a:xfrm>
           <a:prstGeom prst="rect">
             <a:avLst/>
@@ -10104,147 +12610,100 @@
           </a:bodyPr>
           <a:lstStyle/>
           <a:p>
-            <a:pPr marL="342900" lvl="0" indent="-342900" algn="just" eaLnBrk="0" fontAlgn="base" hangingPunct="0">
-              <a:spcBef>
-                <a:spcPct val="0"/>
-              </a:spcBef>
-              <a:spcAft>
-                <a:spcPct val="0"/>
-              </a:spcAft>
+            <a:pPr marL="342900" indent="-342900" algn="just">
               <a:buFont typeface="Arial" panose="020B0604020202020204" pitchFamily="34" charset="0"/>
               <a:buChar char="•"/>
             </a:pPr>
             <a:r>
-              <a:rPr kumimoji="0" lang="en-US" altLang="en-US" sz="2400" b="0" i="0" u="none" strike="noStrike" cap="none" normalizeH="0" baseline="0" dirty="0" smtClean="0">
-                <a:ln>
-                  <a:noFill/>
-                </a:ln>
-                <a:solidFill>
-                  <a:schemeClr val="tx1"/>
-                </a:solidFill>
-                <a:effectLst/>
-                <a:latin typeface="Times New Roman" panose="02020603050405020304" pitchFamily="18" charset="0"/>
-                <a:cs typeface="Times New Roman" panose="02020603050405020304" pitchFamily="18" charset="0"/>
-              </a:rPr>
-              <a:t>Modules help organize Python code into separate files for better structure and maintainability.</a:t>
-            </a:r>
-            <a:endParaRPr lang="en-US" altLang="en-US" sz="2400" dirty="0">
+              <a:rPr lang="en-US" sz="2400" dirty="0" smtClean="0">
+                <a:latin typeface="Times New Roman" panose="02020603050405020304" pitchFamily="18" charset="0"/>
+                <a:cs typeface="Times New Roman" panose="02020603050405020304" pitchFamily="18" charset="0"/>
+              </a:rPr>
+              <a:t>GUI stands for Graphical User Interface. It allows users to interact with applications using buttons, text boxes, and labels instead of typing commands.</a:t>
+            </a:r>
+          </a:p>
+          <a:p>
+            <a:pPr marL="342900" indent="-342900" algn="just">
+              <a:buFont typeface="Arial" panose="020B0604020202020204" pitchFamily="34" charset="0"/>
+              <a:buChar char="•"/>
+            </a:pPr>
+            <a:r>
+              <a:rPr lang="en-US" sz="2400" dirty="0" smtClean="0">
+                <a:latin typeface="Times New Roman" panose="02020603050405020304" pitchFamily="18" charset="0"/>
+                <a:cs typeface="Times New Roman" panose="02020603050405020304" pitchFamily="18" charset="0"/>
+              </a:rPr>
+              <a:t>I learned GUI development using the </a:t>
+            </a:r>
+            <a:r>
+              <a:rPr lang="en-US" sz="2400" b="1" dirty="0" err="1" smtClean="0">
+                <a:latin typeface="Times New Roman" panose="02020603050405020304" pitchFamily="18" charset="0"/>
+                <a:cs typeface="Times New Roman" panose="02020603050405020304" pitchFamily="18" charset="0"/>
+              </a:rPr>
+              <a:t>Tkinter</a:t>
+            </a:r>
+            <a:r>
+              <a:rPr lang="en-US" sz="2400" dirty="0" smtClean="0">
+                <a:latin typeface="Times New Roman" panose="02020603050405020304" pitchFamily="18" charset="0"/>
+                <a:cs typeface="Times New Roman" panose="02020603050405020304" pitchFamily="18" charset="0"/>
+              </a:rPr>
+              <a:t> library in Python.</a:t>
+            </a:r>
+          </a:p>
+          <a:p>
+            <a:pPr marL="342900" indent="-342900" algn="just">
+              <a:buFont typeface="Arial" panose="020B0604020202020204" pitchFamily="34" charset="0"/>
+              <a:buChar char="•"/>
+            </a:pPr>
+            <a:r>
+              <a:rPr lang="en-US" sz="2400" dirty="0" smtClean="0">
+                <a:latin typeface="Times New Roman" panose="02020603050405020304" pitchFamily="18" charset="0"/>
+                <a:cs typeface="Times New Roman" panose="02020603050405020304" pitchFamily="18" charset="0"/>
+              </a:rPr>
+              <a:t>I practiced using widgets like labels, buttons, and entry fields.</a:t>
+            </a:r>
+          </a:p>
+          <a:p>
+            <a:pPr marL="342900" indent="-342900" algn="just">
+              <a:buFont typeface="Arial" panose="020B0604020202020204" pitchFamily="34" charset="0"/>
+              <a:buChar char="•"/>
+            </a:pPr>
+            <a:r>
+              <a:rPr lang="en-US" sz="2400" dirty="0" smtClean="0">
+                <a:latin typeface="Times New Roman" panose="02020603050405020304" pitchFamily="18" charset="0"/>
+                <a:cs typeface="Times New Roman" panose="02020603050405020304" pitchFamily="18" charset="0"/>
+              </a:rPr>
+              <a:t>I also understood event handling, where clicking a button triggers a specific function.</a:t>
+            </a:r>
+          </a:p>
+          <a:p>
+            <a:pPr marL="342900" indent="-342900" algn="just">
+              <a:buFont typeface="Arial" panose="020B0604020202020204" pitchFamily="34" charset="0"/>
+              <a:buChar char="•"/>
+            </a:pPr>
+            <a:r>
+              <a:rPr lang="en-US" sz="2400" dirty="0" smtClean="0">
+                <a:latin typeface="Times New Roman" panose="02020603050405020304" pitchFamily="18" charset="0"/>
+                <a:cs typeface="Times New Roman" panose="02020603050405020304" pitchFamily="18" charset="0"/>
+              </a:rPr>
+              <a:t>This helped me move from basic console programs to interactive graphical applications.</a:t>
+            </a:r>
+            <a:endParaRPr lang="en-US" sz="2400" dirty="0">
               <a:latin typeface="Times New Roman" panose="02020603050405020304" pitchFamily="18" charset="0"/>
               <a:cs typeface="Times New Roman" panose="02020603050405020304" pitchFamily="18" charset="0"/>
             </a:endParaRPr>
           </a:p>
-          <a:p>
-            <a:pPr marL="342900" lvl="0" indent="-342900" algn="just" eaLnBrk="0" fontAlgn="base" hangingPunct="0">
-              <a:spcBef>
-                <a:spcPct val="0"/>
-              </a:spcBef>
-              <a:spcAft>
-                <a:spcPct val="0"/>
-              </a:spcAft>
-              <a:buFont typeface="Arial" panose="020B0604020202020204" pitchFamily="34" charset="0"/>
-              <a:buChar char="•"/>
-            </a:pPr>
-            <a:r>
-              <a:rPr lang="en-US" altLang="en-US" sz="2400" dirty="0">
-                <a:latin typeface="Times New Roman" panose="02020603050405020304" pitchFamily="18" charset="0"/>
-                <a:cs typeface="Times New Roman" panose="02020603050405020304" pitchFamily="18" charset="0"/>
-              </a:rPr>
-              <a:t>I practiced different import techniques such as </a:t>
-            </a:r>
-            <a:r>
-              <a:rPr kumimoji="0" lang="en-US" altLang="en-US" sz="2400" b="0" i="0" u="none" strike="noStrike" cap="none" normalizeH="0" baseline="0" dirty="0" smtClean="0">
-                <a:ln>
-                  <a:noFill/>
-                </a:ln>
-                <a:solidFill>
-                  <a:schemeClr val="tx1"/>
-                </a:solidFill>
-                <a:effectLst/>
-                <a:latin typeface="Times New Roman" panose="02020603050405020304" pitchFamily="18" charset="0"/>
-                <a:cs typeface="Times New Roman" panose="02020603050405020304" pitchFamily="18" charset="0"/>
-              </a:rPr>
-              <a:t>import, from, and aliasing.</a:t>
-            </a:r>
-            <a:endParaRPr lang="en-US" altLang="en-US" sz="2400" dirty="0">
-              <a:latin typeface="Times New Roman" panose="02020603050405020304" pitchFamily="18" charset="0"/>
-              <a:cs typeface="Times New Roman" panose="02020603050405020304" pitchFamily="18" charset="0"/>
-            </a:endParaRPr>
-          </a:p>
-          <a:p>
-            <a:pPr marL="342900" lvl="0" indent="-342900" algn="just" eaLnBrk="0" fontAlgn="base" hangingPunct="0">
-              <a:spcBef>
-                <a:spcPct val="0"/>
-              </a:spcBef>
-              <a:spcAft>
-                <a:spcPct val="0"/>
-              </a:spcAft>
-              <a:buFont typeface="Arial" panose="020B0604020202020204" pitchFamily="34" charset="0"/>
-              <a:buChar char="•"/>
-            </a:pPr>
-            <a:r>
-              <a:rPr lang="en-US" altLang="en-US" sz="2400" dirty="0">
-                <a:latin typeface="Times New Roman" panose="02020603050405020304" pitchFamily="18" charset="0"/>
-                <a:cs typeface="Times New Roman" panose="02020603050405020304" pitchFamily="18" charset="0"/>
-              </a:rPr>
-              <a:t>I learned how packages group multiple modules together and how the </a:t>
-            </a:r>
-            <a:r>
-              <a:rPr kumimoji="0" lang="en-US" altLang="en-US" sz="2400" b="0" i="0" u="none" strike="noStrike" cap="none" normalizeH="0" baseline="0" dirty="0" smtClean="0">
-                <a:ln>
-                  <a:noFill/>
-                </a:ln>
-                <a:solidFill>
-                  <a:schemeClr val="tx1"/>
-                </a:solidFill>
-                <a:effectLst/>
-                <a:latin typeface="Times New Roman" panose="02020603050405020304" pitchFamily="18" charset="0"/>
-                <a:cs typeface="Times New Roman" panose="02020603050405020304" pitchFamily="18" charset="0"/>
-              </a:rPr>
-              <a:t>__init__.py file defines a package.</a:t>
-            </a:r>
-            <a:endParaRPr lang="en-US" altLang="en-US" sz="2400" dirty="0">
-              <a:latin typeface="Times New Roman" panose="02020603050405020304" pitchFamily="18" charset="0"/>
-              <a:cs typeface="Times New Roman" panose="02020603050405020304" pitchFamily="18" charset="0"/>
-            </a:endParaRPr>
-          </a:p>
-          <a:p>
-            <a:pPr marL="342900" lvl="0" indent="-342900" algn="just" eaLnBrk="0" fontAlgn="base" hangingPunct="0">
-              <a:spcBef>
-                <a:spcPct val="0"/>
-              </a:spcBef>
-              <a:spcAft>
-                <a:spcPct val="0"/>
-              </a:spcAft>
-              <a:buFont typeface="Arial" panose="020B0604020202020204" pitchFamily="34" charset="0"/>
-              <a:buChar char="•"/>
-            </a:pPr>
-            <a:r>
-              <a:rPr lang="en-US" altLang="en-US" sz="2400" dirty="0">
-                <a:latin typeface="Times New Roman" panose="02020603050405020304" pitchFamily="18" charset="0"/>
-                <a:cs typeface="Times New Roman" panose="02020603050405020304" pitchFamily="18" charset="0"/>
-              </a:rPr>
-              <a:t>This improved my understanding of large-scale project organization.</a:t>
-            </a:r>
-          </a:p>
-          <a:p>
-            <a:pPr algn="just"/>
-            <a:endParaRPr lang="en-IN" sz="2400" dirty="0">
-              <a:latin typeface="Times New Roman" panose="02020603050405020304" pitchFamily="18" charset="0"/>
-              <a:cs typeface="Times New Roman" panose="02020603050405020304" pitchFamily="18" charset="0"/>
-            </a:endParaRPr>
-          </a:p>
-        </p:txBody>
-      </p:sp>
-      <p:sp>
-        <p:nvSpPr>
-          <p:cNvPr id="2" name="TextBox 1"/>
+        </p:txBody>
+      </p:sp>
+      <p:sp>
+        <p:nvSpPr>
+          <p:cNvPr id="3" name="TextBox 2"/>
           <p:cNvSpPr txBox="1"/>
           <p:nvPr/>
         </p:nvSpPr>
         <p:spPr>
           <a:xfrm>
-            <a:off x="4103867" y="940904"/>
-            <a:ext cx="4253948" cy="800219"/>
+            <a:off x="2577548" y="808383"/>
+            <a:ext cx="7911548" cy="523220"/>
           </a:xfrm>
           <a:prstGeom prst="rect">
             <a:avLst/>
@@ -10257,24 +12716,31 @@
           </a:bodyPr>
           <a:lstStyle/>
           <a:p>
-            <a:pPr lvl="0"/>
-            <a:r>
-              <a:rPr lang="en-US" altLang="en-US" sz="2800" b="1" dirty="0">
-                <a:latin typeface="Times New Roman" panose="02020603050405020304" pitchFamily="18" charset="0"/>
-                <a:cs typeface="Times New Roman" panose="02020603050405020304" pitchFamily="18" charset="0"/>
-              </a:rPr>
-              <a:t>Modules &amp; Packages</a:t>
-            </a:r>
-          </a:p>
-          <a:p>
-            <a:endParaRPr lang="en-IN" dirty="0"/>
+            <a:r>
+              <a:rPr lang="en-US" sz="2800" b="1" dirty="0">
+                <a:latin typeface="Times New Roman" panose="02020603050405020304" pitchFamily="18" charset="0"/>
+                <a:cs typeface="Times New Roman" panose="02020603050405020304" pitchFamily="18" charset="0"/>
+              </a:rPr>
+              <a:t>Introduction to GUI Development using </a:t>
+            </a:r>
+            <a:r>
+              <a:rPr lang="en-US" sz="2800" b="1" dirty="0" err="1" smtClean="0">
+                <a:latin typeface="Times New Roman" panose="02020603050405020304" pitchFamily="18" charset="0"/>
+                <a:cs typeface="Times New Roman" panose="02020603050405020304" pitchFamily="18" charset="0"/>
+              </a:rPr>
+              <a:t>Tkinter</a:t>
+            </a:r>
+            <a:endParaRPr lang="en-US" sz="2800" b="1" dirty="0">
+              <a:latin typeface="Times New Roman" panose="02020603050405020304" pitchFamily="18" charset="0"/>
+              <a:cs typeface="Times New Roman" panose="02020603050405020304" pitchFamily="18" charset="0"/>
+            </a:endParaRPr>
           </a:p>
         </p:txBody>
       </p:sp>
     </p:spTree>
     <p:extLst>
       <p:ext uri="{BB962C8B-B14F-4D97-AF65-F5344CB8AC3E}">
-        <p14:creationId xmlns:p14="http://schemas.microsoft.com/office/powerpoint/2010/main" val="2742636538"/>
+        <p14:creationId xmlns:p14="http://schemas.microsoft.com/office/powerpoint/2010/main" val="2298733250"/>
       </p:ext>
     </p:extLst>
   </p:cSld>
@@ -10309,8 +12775,8 @@
         </p:nvSpPr>
         <p:spPr>
           <a:xfrm>
-            <a:off x="2716696" y="1749287"/>
-            <a:ext cx="8256104" cy="4893647"/>
+            <a:off x="2782957" y="2252869"/>
+            <a:ext cx="7606747" cy="3416320"/>
           </a:xfrm>
           <a:prstGeom prst="rect">
             <a:avLst/>
@@ -10332,7 +12798,21 @@
                 <a:latin typeface="Times New Roman" panose="02020603050405020304" pitchFamily="18" charset="0"/>
                 <a:cs typeface="Times New Roman" panose="02020603050405020304" pitchFamily="18" charset="0"/>
               </a:rPr>
-              <a:t>Object-Oriented Programming (OOP) is a programming approach where programs are designed using classes and objects.</a:t>
+              <a:t>During this week, I started working on the “</a:t>
+            </a:r>
+            <a:r>
+              <a:rPr lang="en-US" sz="2400" dirty="0" err="1" smtClean="0">
+                <a:latin typeface="Times New Roman" panose="02020603050405020304" pitchFamily="18" charset="0"/>
+                <a:cs typeface="Times New Roman" panose="02020603050405020304" pitchFamily="18" charset="0"/>
+              </a:rPr>
+              <a:t>EduTrack</a:t>
+            </a:r>
+            <a:r>
+              <a:rPr lang="en-US" sz="2400" dirty="0" smtClean="0">
+                <a:latin typeface="Times New Roman" panose="02020603050405020304" pitchFamily="18" charset="0"/>
+                <a:cs typeface="Times New Roman" panose="02020603050405020304" pitchFamily="18" charset="0"/>
+              </a:rPr>
+              <a:t>” project.</a:t>
             </a:r>
           </a:p>
           <a:p>
@@ -10345,35 +12825,7 @@
                 <a:latin typeface="Times New Roman" panose="02020603050405020304" pitchFamily="18" charset="0"/>
                 <a:cs typeface="Times New Roman" panose="02020603050405020304" pitchFamily="18" charset="0"/>
               </a:rPr>
-              <a:t>A </a:t>
-            </a:r>
-            <a:r>
-              <a:rPr lang="en-US" sz="2400" b="1" dirty="0" smtClean="0">
-                <a:latin typeface="Times New Roman" panose="02020603050405020304" pitchFamily="18" charset="0"/>
-                <a:cs typeface="Times New Roman" panose="02020603050405020304" pitchFamily="18" charset="0"/>
-              </a:rPr>
-              <a:t>class</a:t>
-            </a:r>
-            <a:r>
-              <a:rPr lang="en-US" sz="2400" dirty="0" smtClean="0">
-                <a:latin typeface="Times New Roman" panose="02020603050405020304" pitchFamily="18" charset="0"/>
-                <a:cs typeface="Times New Roman" panose="02020603050405020304" pitchFamily="18" charset="0"/>
-              </a:rPr>
-              <a:t> is like a blueprint or template, and an </a:t>
-            </a:r>
-            <a:r>
-              <a:rPr lang="en-US" sz="2400" b="1" dirty="0" smtClean="0">
-                <a:latin typeface="Times New Roman" panose="02020603050405020304" pitchFamily="18" charset="0"/>
-                <a:cs typeface="Times New Roman" panose="02020603050405020304" pitchFamily="18" charset="0"/>
-              </a:rPr>
-              <a:t>object</a:t>
-            </a:r>
-            <a:r>
-              <a:rPr lang="en-US" sz="2400" dirty="0" smtClean="0">
-                <a:latin typeface="Times New Roman" panose="02020603050405020304" pitchFamily="18" charset="0"/>
-                <a:cs typeface="Times New Roman" panose="02020603050405020304" pitchFamily="18" charset="0"/>
-              </a:rPr>
-              <a:t> is a real example created from that class.</a:t>
+              <a:t>I applied programming concepts to design and implement the project logic.</a:t>
             </a:r>
           </a:p>
           <a:p>
@@ -10386,7 +12838,7 @@
                 <a:latin typeface="Times New Roman" panose="02020603050405020304" pitchFamily="18" charset="0"/>
                 <a:cs typeface="Times New Roman" panose="02020603050405020304" pitchFamily="18" charset="0"/>
               </a:rPr>
-              <a:t>Objects contain data (attributes) and functions (methods).</a:t>
+              <a:t>I tested the program step by step and fixed errors through debugging.</a:t>
             </a:r>
           </a:p>
           <a:p>
@@ -10399,60 +12851,7 @@
                 <a:latin typeface="Times New Roman" panose="02020603050405020304" pitchFamily="18" charset="0"/>
                 <a:cs typeface="Times New Roman" panose="02020603050405020304" pitchFamily="18" charset="0"/>
               </a:rPr>
-              <a:t>I learned important OOP concepts such as:</a:t>
-            </a:r>
-          </a:p>
-          <a:p>
-            <a:pPr marL="342900" indent="-342900" algn="just">
-              <a:buFont typeface="Arial" panose="020B0604020202020204" pitchFamily="34" charset="0"/>
-              <a:buChar char="•"/>
-            </a:pPr>
-            <a:r>
-              <a:rPr lang="en-US" sz="2400" b="1" dirty="0" smtClean="0">
-                <a:latin typeface="Times New Roman" panose="02020603050405020304" pitchFamily="18" charset="0"/>
-                <a:cs typeface="Times New Roman" panose="02020603050405020304" pitchFamily="18" charset="0"/>
-              </a:rPr>
-              <a:t>Inheritance</a:t>
-            </a:r>
-            <a:r>
-              <a:rPr lang="en-US" sz="2400" dirty="0" smtClean="0">
-                <a:latin typeface="Times New Roman" panose="02020603050405020304" pitchFamily="18" charset="0"/>
-                <a:cs typeface="Times New Roman" panose="02020603050405020304" pitchFamily="18" charset="0"/>
-              </a:rPr>
-              <a:t> – one class can use the properties and methods of another class.</a:t>
-            </a:r>
-          </a:p>
-          <a:p>
-            <a:pPr marL="342900" indent="-342900" algn="just">
-              <a:buFont typeface="Arial" panose="020B0604020202020204" pitchFamily="34" charset="0"/>
-              <a:buChar char="•"/>
-            </a:pPr>
-            <a:r>
-              <a:rPr lang="en-US" sz="2400" b="1" dirty="0" smtClean="0">
-                <a:latin typeface="Times New Roman" panose="02020603050405020304" pitchFamily="18" charset="0"/>
-                <a:cs typeface="Times New Roman" panose="02020603050405020304" pitchFamily="18" charset="0"/>
-              </a:rPr>
-              <a:t>Polymorphism</a:t>
-            </a:r>
-            <a:r>
-              <a:rPr lang="en-US" sz="2400" dirty="0" smtClean="0">
-                <a:latin typeface="Times New Roman" panose="02020603050405020304" pitchFamily="18" charset="0"/>
-                <a:cs typeface="Times New Roman" panose="02020603050405020304" pitchFamily="18" charset="0"/>
-              </a:rPr>
-              <a:t> – the same method can perform different actions in different situations.</a:t>
-            </a:r>
-          </a:p>
-          <a:p>
-            <a:pPr marL="342900" indent="-342900" algn="just">
-              <a:buFont typeface="Arial" panose="020B0604020202020204" pitchFamily="34" charset="0"/>
-              <a:buChar char="•"/>
-            </a:pPr>
-            <a:r>
-              <a:rPr lang="en-US" sz="2400" dirty="0" smtClean="0">
-                <a:latin typeface="Times New Roman" panose="02020603050405020304" pitchFamily="18" charset="0"/>
-                <a:cs typeface="Times New Roman" panose="02020603050405020304" pitchFamily="18" charset="0"/>
-              </a:rPr>
-              <a:t>OOP helps in writing organized, reusable, and easy-to-manage code.</a:t>
+              <a:t>This practical experience helped me understand real-world project development and improved my problem-solving skills.</a:t>
             </a:r>
             <a:endParaRPr lang="en-US" sz="2400" dirty="0">
               <a:latin typeface="Times New Roman" panose="02020603050405020304" pitchFamily="18" charset="0"/>
@@ -10469,8 +12868,8 @@
         </p:nvSpPr>
         <p:spPr>
           <a:xfrm>
-            <a:off x="2716696" y="954157"/>
-            <a:ext cx="8534400" cy="954107"/>
+            <a:off x="3478695" y="887944"/>
+            <a:ext cx="6215270" cy="954107"/>
           </a:xfrm>
           <a:prstGeom prst="rect">
             <a:avLst/>
@@ -10488,8 +12887,19 @@
                 <a:latin typeface="Times New Roman" panose="02020603050405020304" pitchFamily="18" charset="0"/>
                 <a:cs typeface="Times New Roman" panose="02020603050405020304" pitchFamily="18" charset="0"/>
               </a:rPr>
-              <a:t>Introduction to Object-Oriented Programming (OOP)</a:t>
-            </a:r>
+              <a:t>Project Implementation – </a:t>
+            </a:r>
+            <a:r>
+              <a:rPr lang="en-US" sz="2800" b="1" dirty="0" err="1">
+                <a:latin typeface="Times New Roman" panose="02020603050405020304" pitchFamily="18" charset="0"/>
+                <a:cs typeface="Times New Roman" panose="02020603050405020304" pitchFamily="18" charset="0"/>
+              </a:rPr>
+              <a:t>EduTrack</a:t>
+            </a:r>
+            <a:endParaRPr lang="en-US" sz="2800" b="1" dirty="0">
+              <a:latin typeface="Times New Roman" panose="02020603050405020304" pitchFamily="18" charset="0"/>
+              <a:cs typeface="Times New Roman" panose="02020603050405020304" pitchFamily="18" charset="0"/>
+            </a:endParaRPr>
           </a:p>
           <a:p>
             <a:endParaRPr lang="en-IN" sz="2800" dirty="0">
@@ -10499,46 +12909,10 @@
           </a:p>
         </p:txBody>
       </p:sp>
-      <p:sp>
-        <p:nvSpPr>
-          <p:cNvPr id="4" name="TextBox 3"/>
-          <p:cNvSpPr txBox="1"/>
-          <p:nvPr/>
-        </p:nvSpPr>
-        <p:spPr>
-          <a:xfrm>
-            <a:off x="2517913" y="356537"/>
-            <a:ext cx="2597426" cy="400110"/>
-          </a:xfrm>
-          <a:prstGeom prst="rect">
-            <a:avLst/>
-          </a:prstGeom>
-          <a:noFill/>
-        </p:spPr>
-        <p:txBody>
-          <a:bodyPr wrap="square" rtlCol="0">
-            <a:spAutoFit/>
-          </a:bodyPr>
-          <a:lstStyle/>
-          <a:p>
-            <a:r>
-              <a:rPr lang="en-IN" sz="2000" b="1" dirty="0" smtClean="0">
-                <a:latin typeface="Times New Roman" panose="02020603050405020304" pitchFamily="18" charset="0"/>
-                <a:cs typeface="Times New Roman" panose="02020603050405020304" pitchFamily="18" charset="0"/>
-              </a:rPr>
-              <a:t>Week 3</a:t>
-            </a:r>
-            <a:endParaRPr lang="en-IN" sz="2000" b="1" dirty="0">
-              <a:latin typeface="Times New Roman" panose="02020603050405020304" pitchFamily="18" charset="0"/>
-              <a:cs typeface="Times New Roman" panose="02020603050405020304" pitchFamily="18" charset="0"/>
-            </a:endParaRPr>
-          </a:p>
-        </p:txBody>
-      </p:sp>
     </p:spTree>
     <p:extLst>
       <p:ext uri="{BB962C8B-B14F-4D97-AF65-F5344CB8AC3E}">
-        <p14:creationId xmlns:p14="http://schemas.microsoft.com/office/powerpoint/2010/main" val="3026075768"/>
+        <p14:creationId xmlns:p14="http://schemas.microsoft.com/office/powerpoint/2010/main" val="420147724"/>
       </p:ext>
     </p:extLst>
   </p:cSld>
@@ -10573,8 +12947,8 @@
         </p:nvSpPr>
         <p:spPr>
           <a:xfrm>
-            <a:off x="2690192" y="1987826"/>
-            <a:ext cx="7686261" cy="4154984"/>
+            <a:off x="2822714" y="2319130"/>
+            <a:ext cx="8097078" cy="3785652"/>
           </a:xfrm>
           <a:prstGeom prst="rect">
             <a:avLst/>
@@ -10596,7 +12970,7 @@
                 <a:latin typeface="Times New Roman" panose="02020603050405020304" pitchFamily="18" charset="0"/>
                 <a:cs typeface="Times New Roman" panose="02020603050405020304" pitchFamily="18" charset="0"/>
               </a:rPr>
-              <a:t>GUI stands for Graphical User Interface. It allows users to interact with applications using buttons, text boxes, and labels instead of typing commands.</a:t>
+              <a:t>In Week 4, I started learning about Python libraries used for data analysis.</a:t>
             </a:r>
           </a:p>
           <a:p>
@@ -10605,25 +12979,18 @@
               <a:buChar char="•"/>
             </a:pPr>
             <a:r>
+              <a:rPr lang="en-US" sz="2400" dirty="0" err="1" smtClean="0">
+                <a:latin typeface="Times New Roman" panose="02020603050405020304" pitchFamily="18" charset="0"/>
+                <a:cs typeface="Times New Roman" panose="02020603050405020304" pitchFamily="18" charset="0"/>
+              </a:rPr>
+              <a:t>NumPy</a:t>
+            </a:r>
+            <a:r>
               <a:rPr lang="en-US" sz="2400" dirty="0" smtClean="0">
                 <a:latin typeface="Times New Roman" panose="02020603050405020304" pitchFamily="18" charset="0"/>
                 <a:cs typeface="Times New Roman" panose="02020603050405020304" pitchFamily="18" charset="0"/>
               </a:rPr>
-              <a:t>I learned GUI development using the </a:t>
-            </a:r>
-            <a:r>
-              <a:rPr lang="en-US" sz="2400" b="1" dirty="0" err="1" smtClean="0">
-                <a:latin typeface="Times New Roman" panose="02020603050405020304" pitchFamily="18" charset="0"/>
-                <a:cs typeface="Times New Roman" panose="02020603050405020304" pitchFamily="18" charset="0"/>
-              </a:rPr>
-              <a:t>Tkinter</a:t>
-            </a:r>
-            <a:r>
-              <a:rPr lang="en-US" sz="2400" dirty="0" smtClean="0">
-                <a:latin typeface="Times New Roman" panose="02020603050405020304" pitchFamily="18" charset="0"/>
-                <a:cs typeface="Times New Roman" panose="02020603050405020304" pitchFamily="18" charset="0"/>
-              </a:rPr>
-              <a:t> library in Python.</a:t>
+              <a:t> is a library used for numerical computing. It works with arrays, which are faster and more efficient than normal Python lists.</a:t>
             </a:r>
           </a:p>
           <a:p>
@@ -10636,7 +13003,21 @@
                 <a:latin typeface="Times New Roman" panose="02020603050405020304" pitchFamily="18" charset="0"/>
                 <a:cs typeface="Times New Roman" panose="02020603050405020304" pitchFamily="18" charset="0"/>
               </a:rPr>
-              <a:t>I practiced using widgets like labels, buttons, and entry fields.</a:t>
+              <a:t>I learned how to create </a:t>
+            </a:r>
+            <a:r>
+              <a:rPr lang="en-US" sz="2400" dirty="0" err="1" smtClean="0">
+                <a:latin typeface="Times New Roman" panose="02020603050405020304" pitchFamily="18" charset="0"/>
+                <a:cs typeface="Times New Roman" panose="02020603050405020304" pitchFamily="18" charset="0"/>
+              </a:rPr>
+              <a:t>NumPy</a:t>
+            </a:r>
+            <a:r>
+              <a:rPr lang="en-US" sz="2400" dirty="0" smtClean="0">
+                <a:latin typeface="Times New Roman" panose="02020603050405020304" pitchFamily="18" charset="0"/>
+                <a:cs typeface="Times New Roman" panose="02020603050405020304" pitchFamily="18" charset="0"/>
+              </a:rPr>
+              <a:t> arrays and perform operations like indexing and slicing.</a:t>
             </a:r>
           </a:p>
           <a:p>
@@ -10649,7 +13030,7 @@
                 <a:latin typeface="Times New Roman" panose="02020603050405020304" pitchFamily="18" charset="0"/>
                 <a:cs typeface="Times New Roman" panose="02020603050405020304" pitchFamily="18" charset="0"/>
               </a:rPr>
-              <a:t>I also understood event handling, where clicking a button triggers a specific function.</a:t>
+              <a:t>I also practiced basic mathematical operations on arrays.</a:t>
             </a:r>
           </a:p>
           <a:p>
@@ -10658,11 +13039,18 @@
               <a:buChar char="•"/>
             </a:pPr>
             <a:r>
+              <a:rPr lang="en-US" sz="2400" dirty="0" err="1" smtClean="0">
+                <a:latin typeface="Times New Roman" panose="02020603050405020304" pitchFamily="18" charset="0"/>
+                <a:cs typeface="Times New Roman" panose="02020603050405020304" pitchFamily="18" charset="0"/>
+              </a:rPr>
+              <a:t>NumPy</a:t>
+            </a:r>
+            <a:r>
               <a:rPr lang="en-US" sz="2400" dirty="0" smtClean="0">
                 <a:latin typeface="Times New Roman" panose="02020603050405020304" pitchFamily="18" charset="0"/>
                 <a:cs typeface="Times New Roman" panose="02020603050405020304" pitchFamily="18" charset="0"/>
               </a:rPr>
-              <a:t>This helped me move from basic console programs to interactive graphical applications.</a:t>
+              <a:t> helps in handling large amounts of numerical data efficiently.</a:t>
             </a:r>
             <a:endParaRPr lang="en-US" sz="2400" dirty="0">
               <a:latin typeface="Times New Roman" panose="02020603050405020304" pitchFamily="18" charset="0"/>
@@ -10679,8 +13067,8 @@
         </p:nvSpPr>
         <p:spPr>
           <a:xfrm>
-            <a:off x="2577548" y="808383"/>
-            <a:ext cx="7911548" cy="523220"/>
+            <a:off x="4876800" y="954156"/>
+            <a:ext cx="4704522" cy="523220"/>
           </a:xfrm>
           <a:prstGeom prst="rect">
             <a:avLst/>
@@ -10698,14 +13086,14 @@
                 <a:latin typeface="Times New Roman" panose="02020603050405020304" pitchFamily="18" charset="0"/>
                 <a:cs typeface="Times New Roman" panose="02020603050405020304" pitchFamily="18" charset="0"/>
               </a:rPr>
-              <a:t>Introduction to GUI Development using </a:t>
+              <a:t>Introduction to </a:t>
             </a:r>
             <a:r>
               <a:rPr lang="en-US" sz="2800" b="1" dirty="0" err="1" smtClean="0">
                 <a:latin typeface="Times New Roman" panose="02020603050405020304" pitchFamily="18" charset="0"/>
                 <a:cs typeface="Times New Roman" panose="02020603050405020304" pitchFamily="18" charset="0"/>
               </a:rPr>
-              <a:t>Tkinter</a:t>
+              <a:t>NumPy</a:t>
             </a:r>
             <a:endParaRPr lang="en-US" sz="2800" b="1" dirty="0">
               <a:latin typeface="Times New Roman" panose="02020603050405020304" pitchFamily="18" charset="0"/>
@@ -10714,10 +13102,46 @@
           </a:p>
         </p:txBody>
       </p:sp>
+      <p:sp>
+        <p:nvSpPr>
+          <p:cNvPr id="4" name="TextBox 3"/>
+          <p:cNvSpPr txBox="1"/>
+          <p:nvPr/>
+        </p:nvSpPr>
+        <p:spPr>
+          <a:xfrm>
+            <a:off x="2570922" y="331304"/>
+            <a:ext cx="2305878" cy="400110"/>
+          </a:xfrm>
+          <a:prstGeom prst="rect">
+            <a:avLst/>
+          </a:prstGeom>
+          <a:noFill/>
+        </p:spPr>
+        <p:txBody>
+          <a:bodyPr wrap="square" rtlCol="0">
+            <a:spAutoFit/>
+          </a:bodyPr>
+          <a:lstStyle/>
+          <a:p>
+            <a:r>
+              <a:rPr lang="en-IN" sz="2000" b="1" dirty="0" smtClean="0">
+                <a:latin typeface="Times New Roman" panose="02020603050405020304" pitchFamily="18" charset="0"/>
+                <a:cs typeface="Times New Roman" panose="02020603050405020304" pitchFamily="18" charset="0"/>
+              </a:rPr>
+              <a:t>Week 4</a:t>
+            </a:r>
+            <a:endParaRPr lang="en-IN" sz="2000" b="1" dirty="0">
+              <a:latin typeface="Times New Roman" panose="02020603050405020304" pitchFamily="18" charset="0"/>
+              <a:cs typeface="Times New Roman" panose="02020603050405020304" pitchFamily="18" charset="0"/>
+            </a:endParaRPr>
+          </a:p>
+        </p:txBody>
+      </p:sp>
     </p:spTree>
     <p:extLst>
       <p:ext uri="{BB962C8B-B14F-4D97-AF65-F5344CB8AC3E}">
-        <p14:creationId xmlns:p14="http://schemas.microsoft.com/office/powerpoint/2010/main" val="2298733250"/>
+        <p14:creationId xmlns:p14="http://schemas.microsoft.com/office/powerpoint/2010/main" val="402732994"/>
       </p:ext>
     </p:extLst>
   </p:cSld>
@@ -10752,8 +13176,8 @@
         </p:nvSpPr>
         <p:spPr>
           <a:xfrm>
-            <a:off x="2782957" y="2252869"/>
-            <a:ext cx="7606747" cy="3416320"/>
+            <a:off x="2782958" y="2623930"/>
+            <a:ext cx="7924800" cy="3046988"/>
           </a:xfrm>
           <a:prstGeom prst="rect">
             <a:avLst/>
@@ -10775,21 +13199,7 @@
                 <a:latin typeface="Times New Roman" panose="02020603050405020304" pitchFamily="18" charset="0"/>
                 <a:cs typeface="Times New Roman" panose="02020603050405020304" pitchFamily="18" charset="0"/>
               </a:rPr>
-              <a:t>During this week, I started working on the “</a:t>
-            </a:r>
-            <a:r>
-              <a:rPr lang="en-US" sz="2400" dirty="0" err="1" smtClean="0">
-                <a:latin typeface="Times New Roman" panose="02020603050405020304" pitchFamily="18" charset="0"/>
-                <a:cs typeface="Times New Roman" panose="02020603050405020304" pitchFamily="18" charset="0"/>
-              </a:rPr>
-              <a:t>EduTrack</a:t>
-            </a:r>
-            <a:r>
-              <a:rPr lang="en-US" sz="2400" dirty="0" smtClean="0">
-                <a:latin typeface="Times New Roman" panose="02020603050405020304" pitchFamily="18" charset="0"/>
-                <a:cs typeface="Times New Roman" panose="02020603050405020304" pitchFamily="18" charset="0"/>
-              </a:rPr>
-              <a:t>” project.</a:t>
+              <a:t>I learned about Pandas, a powerful library used for data analysis and data manipulation.</a:t>
             </a:r>
           </a:p>
           <a:p>
@@ -10802,7 +13212,21 @@
                 <a:latin typeface="Times New Roman" panose="02020603050405020304" pitchFamily="18" charset="0"/>
                 <a:cs typeface="Times New Roman" panose="02020603050405020304" pitchFamily="18" charset="0"/>
               </a:rPr>
-              <a:t>I applied programming concepts to design and implement the project logic.</a:t>
+              <a:t>Pandas provides a structure called </a:t>
+            </a:r>
+            <a:r>
+              <a:rPr lang="en-US" sz="2400" b="1" dirty="0" err="1" smtClean="0">
+                <a:latin typeface="Times New Roman" panose="02020603050405020304" pitchFamily="18" charset="0"/>
+                <a:cs typeface="Times New Roman" panose="02020603050405020304" pitchFamily="18" charset="0"/>
+              </a:rPr>
+              <a:t>DataFrame</a:t>
+            </a:r>
+            <a:r>
+              <a:rPr lang="en-US" sz="2400" dirty="0" smtClean="0">
+                <a:latin typeface="Times New Roman" panose="02020603050405020304" pitchFamily="18" charset="0"/>
+                <a:cs typeface="Times New Roman" panose="02020603050405020304" pitchFamily="18" charset="0"/>
+              </a:rPr>
+              <a:t>, which looks like a table with rows and columns.</a:t>
             </a:r>
           </a:p>
           <a:p>
@@ -10815,7 +13239,7 @@
                 <a:latin typeface="Times New Roman" panose="02020603050405020304" pitchFamily="18" charset="0"/>
                 <a:cs typeface="Times New Roman" panose="02020603050405020304" pitchFamily="18" charset="0"/>
               </a:rPr>
-              <a:t>I tested the program step by step and fixed errors through debugging.</a:t>
+              <a:t>I practiced loading datasets, checking missing values, cleaning data, and organizing information.</a:t>
             </a:r>
           </a:p>
           <a:p>
@@ -10828,7 +13252,7 @@
                 <a:latin typeface="Times New Roman" panose="02020603050405020304" pitchFamily="18" charset="0"/>
                 <a:cs typeface="Times New Roman" panose="02020603050405020304" pitchFamily="18" charset="0"/>
               </a:rPr>
-              <a:t>This practical experience helped me understand real-world project development and improved my problem-solving skills.</a:t>
+              <a:t>This helped me understand how real-world data is prepared before analysis.</a:t>
             </a:r>
             <a:endParaRPr lang="en-US" sz="2400" dirty="0">
               <a:latin typeface="Times New Roman" panose="02020603050405020304" pitchFamily="18" charset="0"/>
@@ -10845,8 +13269,8 @@
         </p:nvSpPr>
         <p:spPr>
           <a:xfrm>
-            <a:off x="3478695" y="887944"/>
-            <a:ext cx="6215270" cy="954107"/>
+            <a:off x="3187149" y="1245704"/>
+            <a:ext cx="7116418" cy="523220"/>
           </a:xfrm>
           <a:prstGeom prst="rect">
             <a:avLst/>
@@ -10864,32 +13288,26 @@
                 <a:latin typeface="Times New Roman" panose="02020603050405020304" pitchFamily="18" charset="0"/>
                 <a:cs typeface="Times New Roman" panose="02020603050405020304" pitchFamily="18" charset="0"/>
               </a:rPr>
-              <a:t>Project Implementation – </a:t>
-            </a:r>
-            <a:r>
-              <a:rPr lang="en-US" sz="2800" b="1" dirty="0" err="1">
-                <a:latin typeface="Times New Roman" panose="02020603050405020304" pitchFamily="18" charset="0"/>
-                <a:cs typeface="Times New Roman" panose="02020603050405020304" pitchFamily="18" charset="0"/>
-              </a:rPr>
-              <a:t>EduTrack</a:t>
+              <a:t>Introduction to Pandas &amp; Data </a:t>
+            </a:r>
+            <a:r>
+              <a:rPr lang="en-US" sz="2800" b="1" dirty="0" smtClean="0">
+                <a:latin typeface="Times New Roman" panose="02020603050405020304" pitchFamily="18" charset="0"/>
+                <a:cs typeface="Times New Roman" panose="02020603050405020304" pitchFamily="18" charset="0"/>
+              </a:rPr>
+              <a:t>Processing</a:t>
             </a:r>
             <a:endParaRPr lang="en-US" sz="2800" b="1" dirty="0">
               <a:latin typeface="Times New Roman" panose="02020603050405020304" pitchFamily="18" charset="0"/>
               <a:cs typeface="Times New Roman" panose="02020603050405020304" pitchFamily="18" charset="0"/>
             </a:endParaRPr>
           </a:p>
-          <a:p>
-            <a:endParaRPr lang="en-IN" sz="2800" dirty="0">
-              <a:latin typeface="Times New Roman" panose="02020603050405020304" pitchFamily="18" charset="0"/>
-              <a:cs typeface="Times New Roman" panose="02020603050405020304" pitchFamily="18" charset="0"/>
-            </a:endParaRPr>
-          </a:p>
         </p:txBody>
       </p:sp>
     </p:spTree>
     <p:extLst>
       <p:ext uri="{BB962C8B-B14F-4D97-AF65-F5344CB8AC3E}">
-        <p14:creationId xmlns:p14="http://schemas.microsoft.com/office/powerpoint/2010/main" val="420147724"/>
+        <p14:creationId xmlns:p14="http://schemas.microsoft.com/office/powerpoint/2010/main" val="4117302404"/>
       </p:ext>
     </p:extLst>
   </p:cSld>
